--- a/decks/03_4限_巡回.pptx
+++ b/decks/03_4限_巡回.pptx
@@ -1569,7 +1569,7 @@
     <p:bg>
       <p:bgPr>
         <a:solidFill>
-          <a:srgbClr val="0F2D52"/>
+          <a:srgbClr val="093259"/>
         </a:solidFill>
       </p:bgPr>
     </p:bg>
@@ -1609,9 +1609,33 @@
           <a:ln/>
         </p:spPr>
       </p:sp>
-      <p:sp>
-        <p:nvSpPr>
-          <p:cNvPr id="3" name="Text 1"/>
+      <p:pic>
+        <p:nvPicPr>
+          <p:cNvPr id="3" name="Image 0" descr="/home/user/Training-/assets/logo.png">    </p:cNvPr>
+          <p:cNvPicPr>
+            <a:picLocks noChangeAspect="1"/>
+          </p:cNvPicPr>
+          <p:nvPr/>
+        </p:nvPicPr>
+        <p:blipFill>
+          <a:blip r:embed="rId1"/>
+          <a:stretch>
+            <a:fillRect/>
+          </a:stretch>
+        </p:blipFill>
+        <p:spPr>
+          <a:xfrm>
+            <a:off x="10765231" y="332912"/>
+            <a:ext cx="786384" cy="742353"/>
+          </a:xfrm>
+          <a:prstGeom prst="rect">
+            <a:avLst/>
+          </a:prstGeom>
+        </p:spPr>
+      </p:pic>
+      <p:sp>
+        <p:nvSpPr>
+          <p:cNvPr id="4" name="Text 1"/>
           <p:cNvSpPr/>
           <p:nvPr/>
         </p:nvSpPr>
@@ -1636,7 +1660,7 @@
             <a:r>
               <a:rPr lang="en-US" sz="1300" b="1" dirty="0">
                 <a:solidFill>
-                  <a:srgbClr val="17AF98"/>
+                  <a:srgbClr val="12B198"/>
                 </a:solidFill>
                 <a:latin typeface="Yu Gothic" pitchFamily="34" charset="0"/>
                 <a:ea typeface="Yu Gothic" pitchFamily="34" charset="-122"/>
@@ -1667,7 +1691,7 @@
       </p:sp>
       <p:sp>
         <p:nvSpPr>
-          <p:cNvPr id="4" name="Text 2"/>
+          <p:cNvPr id="5" name="Text 2"/>
           <p:cNvSpPr/>
           <p:nvPr/>
         </p:nvSpPr>
@@ -1709,7 +1733,7 @@
       </p:sp>
       <p:sp>
         <p:nvSpPr>
-          <p:cNvPr id="5" name="Text 3"/>
+          <p:cNvPr id="6" name="Text 3"/>
           <p:cNvSpPr/>
           <p:nvPr/>
         </p:nvSpPr>
@@ -1748,7 +1772,7 @@
       </p:sp>
       <p:sp>
         <p:nvSpPr>
-          <p:cNvPr id="6" name="Shape 4"/>
+          <p:cNvPr id="7" name="Shape 4"/>
           <p:cNvSpPr/>
           <p:nvPr/>
         </p:nvSpPr>
@@ -1761,14 +1785,14 @@
             <a:avLst/>
           </a:prstGeom>
           <a:solidFill>
-            <a:srgbClr val="17AF98"/>
+            <a:srgbClr val="12B198"/>
           </a:solidFill>
           <a:ln/>
         </p:spPr>
       </p:sp>
       <p:sp>
         <p:nvSpPr>
-          <p:cNvPr id="7" name="Text 5"/>
+          <p:cNvPr id="8" name="Text 5"/>
           <p:cNvSpPr/>
           <p:nvPr/>
         </p:nvSpPr>
@@ -1854,9 +1878,33 @@
           <a:chExt cx="0" cy="0"/>
         </a:xfrm>
       </p:grpSpPr>
-      <p:sp>
-        <p:nvSpPr>
-          <p:cNvPr id="2" name="Text 0"/>
+      <p:pic>
+        <p:nvPicPr>
+          <p:cNvPr id="2" name="Image 0" descr="/home/user/Training-/assets/logo.png">    </p:cNvPr>
+          <p:cNvPicPr>
+            <a:picLocks noChangeAspect="1"/>
+          </p:cNvPicPr>
+          <p:nvPr/>
+        </p:nvPicPr>
+        <p:blipFill>
+          <a:blip r:embed="rId1"/>
+          <a:stretch>
+            <a:fillRect/>
+          </a:stretch>
+        </p:blipFill>
+        <p:spPr>
+          <a:xfrm>
+            <a:off x="10765231" y="332912"/>
+            <a:ext cx="786384" cy="742353"/>
+          </a:xfrm>
+          <a:prstGeom prst="rect">
+            <a:avLst/>
+          </a:prstGeom>
+        </p:spPr>
+      </p:pic>
+      <p:sp>
+        <p:nvSpPr>
+          <p:cNvPr id="3" name="Text 0"/>
           <p:cNvSpPr/>
           <p:nvPr/>
         </p:nvSpPr>
@@ -1884,13 +1932,13 @@
             <a:r>
               <a:rPr lang="en-US" sz="2700" b="1" dirty="0">
                 <a:solidFill>
-                  <a:srgbClr val="0F2D52"/>
+                  <a:srgbClr val="093259"/>
                 </a:solidFill>
                 <a:latin typeface="Yu Gothic" pitchFamily="34" charset="0"/>
                 <a:ea typeface="Yu Gothic" pitchFamily="34" charset="-122"/>
                 <a:cs typeface="Yu Gothic" pitchFamily="34" charset="-120"/>
               </a:rPr>
-              <a:t>巡回の目的は3つ</a:t>
+              <a:t>巡回の目的</a:t>
             </a:r>
             <a:endParaRPr lang="en-US" sz="2700" dirty="0"/>
           </a:p>
@@ -1904,13 +1952,13 @@
             <a:r>
               <a:rPr lang="en-US" sz="1250" i="1" dirty="0">
                 <a:solidFill>
-                  <a:srgbClr val="17AF98"/>
-                </a:solidFill>
-                <a:latin typeface="Calibri" pitchFamily="34" charset="0"/>
-                <a:ea typeface="Calibri" pitchFamily="34" charset="-122"/>
-                <a:cs typeface="Calibri" pitchFamily="34" charset="-120"/>
-              </a:rPr>
-              <a:t>Patrol Has Three Purposes</a:t>
+                  <a:srgbClr val="12B198"/>
+                </a:solidFill>
+                <a:latin typeface="Calibri" pitchFamily="34" charset="0"/>
+                <a:ea typeface="Calibri" pitchFamily="34" charset="-122"/>
+                <a:cs typeface="Calibri" pitchFamily="34" charset="-120"/>
+              </a:rPr>
+              <a:t>The Purpose of Patrol</a:t>
             </a:r>
             <a:endParaRPr lang="en-US" sz="2700" dirty="0"/>
           </a:p>
@@ -1918,7 +1966,7 @@
       </p:sp>
       <p:sp>
         <p:nvSpPr>
-          <p:cNvPr id="3" name="Shape 1"/>
+          <p:cNvPr id="4" name="Shape 1"/>
           <p:cNvSpPr/>
           <p:nvPr/>
         </p:nvSpPr>
@@ -1940,7 +1988,7 @@
       </p:sp>
       <p:sp>
         <p:nvSpPr>
-          <p:cNvPr id="4" name="Shape 2"/>
+          <p:cNvPr id="5" name="Shape 2"/>
           <p:cNvSpPr/>
           <p:nvPr/>
         </p:nvSpPr>
@@ -1953,14 +2001,14 @@
             <a:avLst/>
           </a:prstGeom>
           <a:solidFill>
-            <a:srgbClr val="0F2D52"/>
+            <a:srgbClr val="093259"/>
           </a:solidFill>
           <a:ln/>
         </p:spPr>
       </p:sp>
       <p:sp>
         <p:nvSpPr>
-          <p:cNvPr id="5" name="Text 3"/>
+          <p:cNvPr id="6" name="Text 3"/>
           <p:cNvSpPr/>
           <p:nvPr/>
         </p:nvSpPr>
@@ -1999,7 +2047,7 @@
       </p:sp>
       <p:sp>
         <p:nvSpPr>
-          <p:cNvPr id="6" name="Text 4"/>
+          <p:cNvPr id="7" name="Text 4"/>
           <p:cNvSpPr/>
           <p:nvPr/>
         </p:nvSpPr>
@@ -2027,7 +2075,7 @@
             <a:r>
               <a:rPr lang="en-US" sz="1600" b="1" dirty="0">
                 <a:solidFill>
-                  <a:srgbClr val="0F2D52"/>
+                  <a:srgbClr val="093259"/>
                 </a:solidFill>
                 <a:latin typeface="Yu Gothic" pitchFamily="34" charset="0"/>
                 <a:ea typeface="Yu Gothic" pitchFamily="34" charset="-122"/>
@@ -2047,7 +2095,7 @@
             <a:r>
               <a:rPr lang="en-US" sz="1000" i="1" dirty="0">
                 <a:solidFill>
-                  <a:srgbClr val="17AF98"/>
+                  <a:srgbClr val="12B198"/>
                 </a:solidFill>
                 <a:latin typeface="Calibri" pitchFamily="34" charset="0"/>
                 <a:ea typeface="Calibri" pitchFamily="34" charset="-122"/>
@@ -2061,7 +2109,7 @@
       </p:sp>
       <p:sp>
         <p:nvSpPr>
-          <p:cNvPr id="7" name="Text 5"/>
+          <p:cNvPr id="8" name="Text 5"/>
           <p:cNvSpPr/>
           <p:nvPr/>
         </p:nvSpPr>
@@ -2095,7 +2143,7 @@
                 <a:ea typeface="Yu Gothic" pitchFamily="34" charset="-122"/>
                 <a:cs typeface="Yu Gothic" pitchFamily="34" charset="-120"/>
               </a:rPr>
-              <a:t>異常を、被害になる前に見つける。見つけられる場所に、見つけられる時間に行く。</a:t>
+              <a:t>異常を、被害が生じる前に確認します。確認できる場所と時間に行きます。</a:t>
             </a:r>
             <a:endParaRPr lang="en-US" sz="1250" dirty="0"/>
           </a:p>
@@ -2115,7 +2163,7 @@
                 <a:ea typeface="Calibri" pitchFamily="34" charset="-122"/>
                 <a:cs typeface="Calibri" pitchFamily="34" charset="-120"/>
               </a:rPr>
-              <a:t>Find the anomaly before it becomes a loss — by being in the right place at the right time.</a:t>
+              <a:t>Find a problem before it becomes a loss. Go where and when you can see it.</a:t>
             </a:r>
             <a:endParaRPr lang="en-US" sz="1250" dirty="0"/>
           </a:p>
@@ -2123,7 +2171,7 @@
       </p:sp>
       <p:sp>
         <p:nvSpPr>
-          <p:cNvPr id="8" name="Shape 6"/>
+          <p:cNvPr id="9" name="Shape 6"/>
           <p:cNvSpPr/>
           <p:nvPr/>
         </p:nvSpPr>
@@ -2145,7 +2193,7 @@
       </p:sp>
       <p:sp>
         <p:nvSpPr>
-          <p:cNvPr id="9" name="Shape 7"/>
+          <p:cNvPr id="10" name="Shape 7"/>
           <p:cNvSpPr/>
           <p:nvPr/>
         </p:nvSpPr>
@@ -2158,14 +2206,14 @@
             <a:avLst/>
           </a:prstGeom>
           <a:solidFill>
-            <a:srgbClr val="17AF98"/>
+            <a:srgbClr val="12B198"/>
           </a:solidFill>
           <a:ln/>
         </p:spPr>
       </p:sp>
       <p:sp>
         <p:nvSpPr>
-          <p:cNvPr id="10" name="Text 8"/>
+          <p:cNvPr id="11" name="Text 8"/>
           <p:cNvSpPr/>
           <p:nvPr/>
         </p:nvSpPr>
@@ -2204,7 +2252,7 @@
       </p:sp>
       <p:sp>
         <p:nvSpPr>
-          <p:cNvPr id="11" name="Text 9"/>
+          <p:cNvPr id="12" name="Text 9"/>
           <p:cNvSpPr/>
           <p:nvPr/>
         </p:nvSpPr>
@@ -2232,7 +2280,7 @@
             <a:r>
               <a:rPr lang="en-US" sz="1600" b="1" dirty="0">
                 <a:solidFill>
-                  <a:srgbClr val="0F2D52"/>
+                  <a:srgbClr val="093259"/>
                 </a:solidFill>
                 <a:latin typeface="Yu Gothic" pitchFamily="34" charset="0"/>
                 <a:ea typeface="Yu Gothic" pitchFamily="34" charset="-122"/>
@@ -2252,7 +2300,7 @@
             <a:r>
               <a:rPr lang="en-US" sz="1000" i="1" dirty="0">
                 <a:solidFill>
-                  <a:srgbClr val="17AF98"/>
+                  <a:srgbClr val="12B198"/>
                 </a:solidFill>
                 <a:latin typeface="Calibri" pitchFamily="34" charset="0"/>
                 <a:ea typeface="Calibri" pitchFamily="34" charset="-122"/>
@@ -2266,7 +2314,7 @@
       </p:sp>
       <p:sp>
         <p:nvSpPr>
-          <p:cNvPr id="12" name="Text 10"/>
+          <p:cNvPr id="13" name="Text 10"/>
           <p:cNvSpPr/>
           <p:nvPr/>
         </p:nvSpPr>
@@ -2300,7 +2348,7 @@
                 <a:ea typeface="Yu Gothic" pitchFamily="34" charset="-122"/>
                 <a:cs typeface="Yu Gothic" pitchFamily="34" charset="-120"/>
               </a:rPr>
-              <a:t>「見られている」と思わせる。制服と存在そのものが機能する。</a:t>
+              <a:t>警備員が巡回していることを外部に示します。</a:t>
             </a:r>
             <a:endParaRPr lang="en-US" sz="1250" dirty="0"/>
           </a:p>
@@ -2320,7 +2368,7 @@
                 <a:ea typeface="Calibri" pitchFamily="34" charset="-122"/>
                 <a:cs typeface="Calibri" pitchFamily="34" charset="-120"/>
               </a:rPr>
-              <a:t>Create the sense of being watched. The uniform and your presence do this work.</a:t>
+              <a:t>Show that guards are patrolling.</a:t>
             </a:r>
             <a:endParaRPr lang="en-US" sz="1250" dirty="0"/>
           </a:p>
@@ -2328,7 +2376,7 @@
       </p:sp>
       <p:sp>
         <p:nvSpPr>
-          <p:cNvPr id="13" name="Shape 11"/>
+          <p:cNvPr id="14" name="Shape 11"/>
           <p:cNvSpPr/>
           <p:nvPr/>
         </p:nvSpPr>
@@ -2350,7 +2398,7 @@
       </p:sp>
       <p:sp>
         <p:nvSpPr>
-          <p:cNvPr id="14" name="Shape 12"/>
+          <p:cNvPr id="15" name="Shape 12"/>
           <p:cNvSpPr/>
           <p:nvPr/>
         </p:nvSpPr>
@@ -2363,14 +2411,14 @@
             <a:avLst/>
           </a:prstGeom>
           <a:solidFill>
-            <a:srgbClr val="0F2D52"/>
+            <a:srgbClr val="093259"/>
           </a:solidFill>
           <a:ln/>
         </p:spPr>
       </p:sp>
       <p:sp>
         <p:nvSpPr>
-          <p:cNvPr id="15" name="Text 13"/>
+          <p:cNvPr id="16" name="Text 13"/>
           <p:cNvSpPr/>
           <p:nvPr/>
         </p:nvSpPr>
@@ -2409,7 +2457,7 @@
       </p:sp>
       <p:sp>
         <p:nvSpPr>
-          <p:cNvPr id="16" name="Text 14"/>
+          <p:cNvPr id="17" name="Text 14"/>
           <p:cNvSpPr/>
           <p:nvPr/>
         </p:nvSpPr>
@@ -2437,7 +2485,7 @@
             <a:r>
               <a:rPr lang="en-US" sz="1600" b="1" dirty="0">
                 <a:solidFill>
-                  <a:srgbClr val="0F2D52"/>
+                  <a:srgbClr val="093259"/>
                 </a:solidFill>
                 <a:latin typeface="Yu Gothic" pitchFamily="34" charset="0"/>
                 <a:ea typeface="Yu Gothic" pitchFamily="34" charset="-122"/>
@@ -2457,7 +2505,7 @@
             <a:r>
               <a:rPr lang="en-US" sz="1000" i="1" dirty="0">
                 <a:solidFill>
-                  <a:srgbClr val="17AF98"/>
+                  <a:srgbClr val="12B198"/>
                 </a:solidFill>
                 <a:latin typeface="Calibri" pitchFamily="34" charset="0"/>
                 <a:ea typeface="Calibri" pitchFamily="34" charset="-122"/>
@@ -2471,7 +2519,7 @@
       </p:sp>
       <p:sp>
         <p:nvSpPr>
-          <p:cNvPr id="17" name="Text 15"/>
+          <p:cNvPr id="18" name="Text 15"/>
           <p:cNvSpPr/>
           <p:nvPr/>
         </p:nvSpPr>
@@ -2505,7 +2553,7 @@
                 <a:ea typeface="Yu Gothic" pitchFamily="34" charset="-122"/>
                 <a:cs typeface="Yu Gothic" pitchFamily="34" charset="-120"/>
               </a:rPr>
-              <a:t>実施した事実を残す。後から証明できなければ、していないのと同じ。</a:t>
+              <a:t>実施した事実を残します。記録がなければ、実施を証明できません。</a:t>
             </a:r>
             <a:endParaRPr lang="en-US" sz="1250" dirty="0"/>
           </a:p>
@@ -2525,7 +2573,7 @@
                 <a:ea typeface="Calibri" pitchFamily="34" charset="-122"/>
                 <a:cs typeface="Calibri" pitchFamily="34" charset="-120"/>
               </a:rPr>
-              <a:t>Leave evidence that it happened. What cannot be shown later may as well not have occurred.</a:t>
+              <a:t>Leave a record. Without it you cannot show the patrol took place.</a:t>
             </a:r>
             <a:endParaRPr lang="en-US" sz="1250" dirty="0"/>
           </a:p>
@@ -2533,7 +2581,7 @@
       </p:sp>
       <p:sp>
         <p:nvSpPr>
-          <p:cNvPr id="18" name="Text 16"/>
+          <p:cNvPr id="19" name="Text 16"/>
           <p:cNvSpPr/>
           <p:nvPr/>
         </p:nvSpPr>
@@ -2586,7 +2634,7 @@
       </p:sp>
       <p:sp>
         <p:nvSpPr>
-          <p:cNvPr id="19" name="Text 17"/>
+          <p:cNvPr id="20" name="Text 17"/>
           <p:cNvSpPr/>
           <p:nvPr/>
         </p:nvSpPr>
@@ -2655,9 +2703,33 @@
           <a:chExt cx="0" cy="0"/>
         </a:xfrm>
       </p:grpSpPr>
-      <p:sp>
-        <p:nvSpPr>
-          <p:cNvPr id="2" name="Text 0"/>
+      <p:pic>
+        <p:nvPicPr>
+          <p:cNvPr id="2" name="Image 0" descr="/home/user/Training-/assets/logo.png">    </p:cNvPr>
+          <p:cNvPicPr>
+            <a:picLocks noChangeAspect="1"/>
+          </p:cNvPicPr>
+          <p:nvPr/>
+        </p:nvPicPr>
+        <p:blipFill>
+          <a:blip r:embed="rId1"/>
+          <a:stretch>
+            <a:fillRect/>
+          </a:stretch>
+        </p:blipFill>
+        <p:spPr>
+          <a:xfrm>
+            <a:off x="10765231" y="332912"/>
+            <a:ext cx="786384" cy="742353"/>
+          </a:xfrm>
+          <a:prstGeom prst="rect">
+            <a:avLst/>
+          </a:prstGeom>
+        </p:spPr>
+      </p:pic>
+      <p:sp>
+        <p:nvSpPr>
+          <p:cNvPr id="3" name="Text 0"/>
           <p:cNvSpPr/>
           <p:nvPr/>
         </p:nvSpPr>
@@ -2685,7 +2757,7 @@
             <a:r>
               <a:rPr lang="en-US" sz="2700" b="1" dirty="0">
                 <a:solidFill>
-                  <a:srgbClr val="0F2D52"/>
+                  <a:srgbClr val="093259"/>
                 </a:solidFill>
                 <a:latin typeface="Yu Gothic" pitchFamily="34" charset="0"/>
                 <a:ea typeface="Yu Gothic" pitchFamily="34" charset="-122"/>
@@ -2705,7 +2777,7 @@
             <a:r>
               <a:rPr lang="en-US" sz="1250" i="1" dirty="0">
                 <a:solidFill>
-                  <a:srgbClr val="17AF98"/>
+                  <a:srgbClr val="12B198"/>
                 </a:solidFill>
                 <a:latin typeface="Calibri" pitchFamily="34" charset="0"/>
                 <a:ea typeface="Calibri" pitchFamily="34" charset="-122"/>
@@ -2719,7 +2791,7 @@
       </p:sp>
       <p:sp>
         <p:nvSpPr>
-          <p:cNvPr id="3" name="Shape 1"/>
+          <p:cNvPr id="4" name="Shape 1"/>
           <p:cNvSpPr/>
           <p:nvPr/>
         </p:nvSpPr>
@@ -2741,7 +2813,7 @@
       </p:sp>
       <p:sp>
         <p:nvSpPr>
-          <p:cNvPr id="4" name="Text 2"/>
+          <p:cNvPr id="5" name="Text 2"/>
           <p:cNvSpPr/>
           <p:nvPr/>
         </p:nvSpPr>
@@ -2769,7 +2841,7 @@
             <a:r>
               <a:rPr lang="en-US" sz="1600" b="1" dirty="0">
                 <a:solidFill>
-                  <a:srgbClr val="0F2D52"/>
+                  <a:srgbClr val="093259"/>
                 </a:solidFill>
                 <a:latin typeface="Yu Gothic" pitchFamily="34" charset="0"/>
                 <a:ea typeface="Yu Gothic" pitchFamily="34" charset="-122"/>
@@ -2803,7 +2875,7 @@
       </p:sp>
       <p:sp>
         <p:nvSpPr>
-          <p:cNvPr id="5" name="Text 3"/>
+          <p:cNvPr id="6" name="Text 3"/>
           <p:cNvSpPr/>
           <p:nvPr/>
         </p:nvSpPr>
@@ -2840,7 +2912,7 @@
                 <a:ea typeface="Yu Gothic" pitchFamily="34" charset="-122"/>
                 <a:cs typeface="Yu Gothic" pitchFamily="34" charset="-120"/>
               </a:rPr>
-              <a:t>・時刻を定めて実施する</a:t>
+              <a:t>・時刻を定めて実施します</a:t>
             </a:r>
             <a:endParaRPr lang="en-US" sz="1250" dirty="0"/>
           </a:p>
@@ -2886,7 +2958,7 @@
                 <a:ea typeface="Yu Gothic" pitchFamily="34" charset="-122"/>
                 <a:cs typeface="Yu Gothic" pitchFamily="34" charset="-120"/>
               </a:rPr>
-              <a:t>・確実で、記録も揃いやすい</a:t>
+              <a:t>・実施が確実で、記録も揃います</a:t>
             </a:r>
             <a:endParaRPr lang="en-US" sz="1250" dirty="0"/>
           </a:p>
@@ -2909,7 +2981,7 @@
                 <a:ea typeface="Calibri" pitchFamily="34" charset="-122"/>
                 <a:cs typeface="Calibri" pitchFamily="34" charset="-120"/>
               </a:rPr>
-              <a:t>　 Reliable, and easy to evidence</a:t>
+              <a:t>　 Reliable, and easy to record</a:t>
             </a:r>
             <a:endParaRPr lang="en-US" sz="1250" dirty="0"/>
           </a:p>
@@ -2932,7 +3004,7 @@
                 <a:ea typeface="Yu Gothic" pitchFamily="34" charset="-122"/>
                 <a:cs typeface="Yu Gothic" pitchFamily="34" charset="-120"/>
               </a:rPr>
-              <a:t>・弱点：時刻を読まれる</a:t>
+              <a:t>・弱点：時刻を外部から把握されます</a:t>
             </a:r>
             <a:endParaRPr lang="en-US" sz="1250" dirty="0"/>
           </a:p>
@@ -2955,7 +3027,7 @@
                 <a:ea typeface="Calibri" pitchFamily="34" charset="-122"/>
                 <a:cs typeface="Calibri" pitchFamily="34" charset="-120"/>
               </a:rPr>
-              <a:t>　 Weakness: the timing can be learned</a:t>
+              <a:t>　 Weakness: the timing can be learned from outside</a:t>
             </a:r>
             <a:endParaRPr lang="en-US" sz="1250" dirty="0"/>
           </a:p>
@@ -2963,7 +3035,7 @@
       </p:sp>
       <p:sp>
         <p:nvSpPr>
-          <p:cNvPr id="6" name="Shape 4"/>
+          <p:cNvPr id="7" name="Shape 4"/>
           <p:cNvSpPr/>
           <p:nvPr/>
         </p:nvSpPr>
@@ -2985,7 +3057,7 @@
       </p:sp>
       <p:sp>
         <p:nvSpPr>
-          <p:cNvPr id="7" name="Text 5"/>
+          <p:cNvPr id="8" name="Text 5"/>
           <p:cNvSpPr/>
           <p:nvPr/>
         </p:nvSpPr>
@@ -3013,7 +3085,7 @@
             <a:r>
               <a:rPr lang="en-US" sz="1600" b="1" dirty="0">
                 <a:solidFill>
-                  <a:srgbClr val="0E8C79"/>
+                  <a:srgbClr val="0D8A76"/>
                 </a:solidFill>
                 <a:latin typeface="Yu Gothic" pitchFamily="34" charset="0"/>
                 <a:ea typeface="Yu Gothic" pitchFamily="34" charset="-122"/>
@@ -3047,7 +3119,7 @@
       </p:sp>
       <p:sp>
         <p:nvSpPr>
-          <p:cNvPr id="8" name="Text 6"/>
+          <p:cNvPr id="9" name="Text 6"/>
           <p:cNvSpPr/>
           <p:nvPr/>
         </p:nvSpPr>
@@ -3084,7 +3156,7 @@
                 <a:ea typeface="Yu Gothic" pitchFamily="34" charset="-122"/>
                 <a:cs typeface="Yu Gothic" pitchFamily="34" charset="-120"/>
               </a:rPr>
-              <a:t>・時刻・順路をずらして実施する</a:t>
+              <a:t>・時刻と順路を変えて実施します</a:t>
             </a:r>
             <a:endParaRPr lang="en-US" sz="1250" dirty="0"/>
           </a:p>
@@ -3130,7 +3202,7 @@
                 <a:ea typeface="Yu Gothic" pitchFamily="34" charset="-122"/>
                 <a:cs typeface="Yu Gothic" pitchFamily="34" charset="-120"/>
               </a:rPr>
-              <a:t>・読まれにくく、抑止力が高い</a:t>
+              <a:t>・把握されにくく、抑止の効果が高い</a:t>
             </a:r>
             <a:endParaRPr lang="en-US" sz="1250" dirty="0"/>
           </a:p>
@@ -3153,7 +3225,7 @@
                 <a:ea typeface="Calibri" pitchFamily="34" charset="-122"/>
                 <a:cs typeface="Calibri" pitchFamily="34" charset="-120"/>
               </a:rPr>
-              <a:t>　 Harder to predict; stronger deterrence</a:t>
+              <a:t>　 Harder to predict. Stronger deterrent effect</a:t>
             </a:r>
             <a:endParaRPr lang="en-US" sz="1250" dirty="0"/>
           </a:p>
@@ -3176,7 +3248,7 @@
                 <a:ea typeface="Yu Gothic" pitchFamily="34" charset="-122"/>
                 <a:cs typeface="Yu Gothic" pitchFamily="34" charset="-120"/>
               </a:rPr>
-              <a:t>・弱点：抜けが出やすい。設計が要る</a:t>
+              <a:t>・弱点：確認の抜けが出ます。設計が必要です</a:t>
             </a:r>
             <a:endParaRPr lang="en-US" sz="1250" dirty="0"/>
           </a:p>
@@ -3199,7 +3271,7 @@
                 <a:ea typeface="Calibri" pitchFamily="34" charset="-122"/>
                 <a:cs typeface="Calibri" pitchFamily="34" charset="-120"/>
               </a:rPr>
-              <a:t>　 Weakness: gaps appear without deliberate design</a:t>
+              <a:t>　 Weakness: gaps appear. It needs to be designed</a:t>
             </a:r>
             <a:endParaRPr lang="en-US" sz="1250" dirty="0"/>
           </a:p>
@@ -3207,7 +3279,7 @@
       </p:sp>
       <p:sp>
         <p:nvSpPr>
-          <p:cNvPr id="9" name="Text 7"/>
+          <p:cNvPr id="10" name="Text 7"/>
           <p:cNvSpPr/>
           <p:nvPr/>
         </p:nvSpPr>
@@ -3235,13 +3307,13 @@
             <a:r>
               <a:rPr lang="en-US" sz="1300" b="1" dirty="0">
                 <a:solidFill>
-                  <a:srgbClr val="0E8C79"/>
+                  <a:srgbClr val="0D8A76"/>
                 </a:solidFill>
                 <a:latin typeface="Yu Gothic" pitchFamily="34" charset="0"/>
                 <a:ea typeface="Yu Gothic" pitchFamily="34" charset="-122"/>
                 <a:cs typeface="Yu Gothic" pitchFamily="34" charset="-120"/>
               </a:rPr>
-              <a:t>失敗例 ― 毎日同じ時刻、同じ順路。これは「警備員が来ない時間帯」を自分で作っていることになります。</a:t>
+              <a:t>毎日同じ時刻、同じ順路で実施すると、巡回のない時間帯が固定され、外部から予測されます。</a:t>
             </a:r>
             <a:endParaRPr lang="en-US" sz="1300" dirty="0"/>
           </a:p>
@@ -3261,7 +3333,7 @@
                 <a:ea typeface="Calibri" pitchFamily="34" charset="-122"/>
                 <a:cs typeface="Calibri" pitchFamily="34" charset="-120"/>
               </a:rPr>
-              <a:t>The classic failure: same time, same route, every day. You are advertising exactly when nobody will come.</a:t>
+              <a:t>Same time and same route every day means the gaps become fixed, and can be predicted from outside.</a:t>
             </a:r>
             <a:endParaRPr lang="en-US" sz="1300" dirty="0"/>
           </a:p>
@@ -3269,7 +3341,7 @@
       </p:sp>
       <p:sp>
         <p:nvSpPr>
-          <p:cNvPr id="10" name="Text 8"/>
+          <p:cNvPr id="11" name="Text 8"/>
           <p:cNvSpPr/>
           <p:nvPr/>
         </p:nvSpPr>
@@ -3322,7 +3394,7 @@
       </p:sp>
       <p:sp>
         <p:nvSpPr>
-          <p:cNvPr id="11" name="Text 9"/>
+          <p:cNvPr id="12" name="Text 9"/>
           <p:cNvSpPr/>
           <p:nvPr/>
         </p:nvSpPr>
@@ -3391,9 +3463,33 @@
           <a:chExt cx="0" cy="0"/>
         </a:xfrm>
       </p:grpSpPr>
-      <p:sp>
-        <p:nvSpPr>
-          <p:cNvPr id="2" name="Text 0"/>
+      <p:pic>
+        <p:nvPicPr>
+          <p:cNvPr id="2" name="Image 0" descr="/home/user/Training-/assets/logo.png">    </p:cNvPr>
+          <p:cNvPicPr>
+            <a:picLocks noChangeAspect="1"/>
+          </p:cNvPicPr>
+          <p:nvPr/>
+        </p:nvPicPr>
+        <p:blipFill>
+          <a:blip r:embed="rId1"/>
+          <a:stretch>
+            <a:fillRect/>
+          </a:stretch>
+        </p:blipFill>
+        <p:spPr>
+          <a:xfrm>
+            <a:off x="10765231" y="332912"/>
+            <a:ext cx="786384" cy="742353"/>
+          </a:xfrm>
+          <a:prstGeom prst="rect">
+            <a:avLst/>
+          </a:prstGeom>
+        </p:spPr>
+      </p:pic>
+      <p:sp>
+        <p:nvSpPr>
+          <p:cNvPr id="3" name="Text 0"/>
           <p:cNvSpPr/>
           <p:nvPr/>
         </p:nvSpPr>
@@ -3421,7 +3517,7 @@
             <a:r>
               <a:rPr lang="en-US" sz="2700" b="1" dirty="0">
                 <a:solidFill>
-                  <a:srgbClr val="0F2D52"/>
+                  <a:srgbClr val="093259"/>
                 </a:solidFill>
                 <a:latin typeface="Yu Gothic" pitchFamily="34" charset="0"/>
                 <a:ea typeface="Yu Gothic" pitchFamily="34" charset="-122"/>
@@ -3441,7 +3537,7 @@
             <a:r>
               <a:rPr lang="en-US" sz="1250" i="1" dirty="0">
                 <a:solidFill>
-                  <a:srgbClr val="17AF98"/>
+                  <a:srgbClr val="12B198"/>
                 </a:solidFill>
                 <a:latin typeface="Calibri" pitchFamily="34" charset="0"/>
                 <a:ea typeface="Calibri" pitchFamily="34" charset="-122"/>
@@ -3455,7 +3551,7 @@
       </p:sp>
       <p:sp>
         <p:nvSpPr>
-          <p:cNvPr id="3" name="Text 1"/>
+          <p:cNvPr id="4" name="Text 1"/>
           <p:cNvSpPr/>
           <p:nvPr/>
         </p:nvSpPr>
@@ -3483,13 +3579,13 @@
             <a:r>
               <a:rPr lang="en-US" sz="1300" dirty="0">
                 <a:solidFill>
-                  <a:srgbClr val="0F2D52"/>
+                  <a:srgbClr val="093259"/>
                 </a:solidFill>
                 <a:latin typeface="Yu Gothic" pitchFamily="34" charset="0"/>
                 <a:ea typeface="Yu Gothic" pitchFamily="34" charset="-122"/>
                 <a:cs typeface="Yu Gothic" pitchFamily="34" charset="-120"/>
               </a:rPr>
-              <a:t>巡回設計とは、要するに「死角をどう潰すか」の設計です。</a:t>
+              <a:t>巡回の設計では、死角の位置と、死角が生じる時間帯を確認します。</a:t>
             </a:r>
             <a:endParaRPr lang="en-US" sz="1300" dirty="0"/>
           </a:p>
@@ -3509,7 +3605,7 @@
                 <a:ea typeface="Calibri" pitchFamily="34" charset="-122"/>
                 <a:cs typeface="Calibri" pitchFamily="34" charset="-120"/>
               </a:rPr>
-              <a:t>Designing a patrol is, in essence, designing how blind spots get eliminated.</a:t>
+              <a:t>When designing a patrol, check where the blind spots are and when they occur.</a:t>
             </a:r>
             <a:endParaRPr lang="en-US" sz="1300" dirty="0"/>
           </a:p>
@@ -3517,7 +3613,7 @@
       </p:sp>
       <p:sp>
         <p:nvSpPr>
-          <p:cNvPr id="4" name="Shape 2"/>
+          <p:cNvPr id="5" name="Shape 2"/>
           <p:cNvSpPr/>
           <p:nvPr/>
         </p:nvSpPr>
@@ -3539,7 +3635,7 @@
       </p:sp>
       <p:sp>
         <p:nvSpPr>
-          <p:cNvPr id="5" name="Shape 3"/>
+          <p:cNvPr id="6" name="Shape 3"/>
           <p:cNvSpPr/>
           <p:nvPr/>
         </p:nvSpPr>
@@ -3552,14 +3648,14 @@
             <a:avLst/>
           </a:prstGeom>
           <a:solidFill>
-            <a:srgbClr val="17AF98"/>
+            <a:srgbClr val="12B198"/>
           </a:solidFill>
           <a:ln/>
         </p:spPr>
       </p:sp>
       <p:sp>
         <p:nvSpPr>
-          <p:cNvPr id="6" name="Text 4"/>
+          <p:cNvPr id="7" name="Text 4"/>
           <p:cNvSpPr/>
           <p:nvPr/>
         </p:nvSpPr>
@@ -3598,7 +3694,7 @@
       </p:sp>
       <p:sp>
         <p:nvSpPr>
-          <p:cNvPr id="7" name="Text 5"/>
+          <p:cNvPr id="8" name="Text 5"/>
           <p:cNvSpPr/>
           <p:nvPr/>
         </p:nvSpPr>
@@ -3632,7 +3728,7 @@
                 <a:ea typeface="Yu Gothic" pitchFamily="34" charset="-122"/>
                 <a:cs typeface="Yu Gothic" pitchFamily="34" charset="-120"/>
               </a:rPr>
-              <a:t>経路 ― 巡回する順路。逆順・分割で変化をつける。</a:t>
+              <a:t>経路 ― 巡回する順路。逆順や分割で変化をつけます。</a:t>
             </a:r>
             <a:endParaRPr lang="en-US" sz="1450" dirty="0"/>
           </a:p>
@@ -3652,7 +3748,7 @@
                 <a:ea typeface="Calibri" pitchFamily="34" charset="-122"/>
                 <a:cs typeface="Calibri" pitchFamily="34" charset="-120"/>
               </a:rPr>
-              <a:t>Route — the order you walk it. Reverse it, split it, vary it.</a:t>
+              <a:t>Route: the order you walk. Reverse it or split it to vary the pattern.</a:t>
             </a:r>
             <a:endParaRPr lang="en-US" sz="1450" dirty="0"/>
           </a:p>
@@ -3660,7 +3756,7 @@
       </p:sp>
       <p:sp>
         <p:nvSpPr>
-          <p:cNvPr id="8" name="Shape 6"/>
+          <p:cNvPr id="9" name="Shape 6"/>
           <p:cNvSpPr/>
           <p:nvPr/>
         </p:nvSpPr>
@@ -3682,7 +3778,7 @@
       </p:sp>
       <p:sp>
         <p:nvSpPr>
-          <p:cNvPr id="9" name="Shape 7"/>
+          <p:cNvPr id="10" name="Shape 7"/>
           <p:cNvSpPr/>
           <p:nvPr/>
         </p:nvSpPr>
@@ -3695,14 +3791,14 @@
             <a:avLst/>
           </a:prstGeom>
           <a:solidFill>
-            <a:srgbClr val="17AF98"/>
+            <a:srgbClr val="12B198"/>
           </a:solidFill>
           <a:ln/>
         </p:spPr>
       </p:sp>
       <p:sp>
         <p:nvSpPr>
-          <p:cNvPr id="10" name="Text 8"/>
+          <p:cNvPr id="11" name="Text 8"/>
           <p:cNvSpPr/>
           <p:nvPr/>
         </p:nvSpPr>
@@ -3741,7 +3837,7 @@
       </p:sp>
       <p:sp>
         <p:nvSpPr>
-          <p:cNvPr id="11" name="Text 9"/>
+          <p:cNvPr id="12" name="Text 9"/>
           <p:cNvSpPr/>
           <p:nvPr/>
         </p:nvSpPr>
@@ -3775,7 +3871,7 @@
                 <a:ea typeface="Yu Gothic" pitchFamily="34" charset="-122"/>
                 <a:cs typeface="Yu Gothic" pitchFamily="34" charset="-120"/>
               </a:rPr>
-              <a:t>立寄点 ― 必ず立ち寄り、確認したことを残せる地点。</a:t>
+              <a:t>立寄点 ― 必ず立ち寄り、確認した記録を残せる地点。</a:t>
             </a:r>
             <a:endParaRPr lang="en-US" sz="1450" dirty="0"/>
           </a:p>
@@ -3795,7 +3891,7 @@
                 <a:ea typeface="Calibri" pitchFamily="34" charset="-122"/>
                 <a:cs typeface="Calibri" pitchFamily="34" charset="-120"/>
               </a:rPr>
-              <a:t>Checkpoint — a point you must visit, and where the visit can be evidenced.</a:t>
+              <a:t>Checkpoint: a point you must visit, where the visit can be recorded.</a:t>
             </a:r>
             <a:endParaRPr lang="en-US" sz="1450" dirty="0"/>
           </a:p>
@@ -3803,7 +3899,7 @@
       </p:sp>
       <p:sp>
         <p:nvSpPr>
-          <p:cNvPr id="12" name="Shape 10"/>
+          <p:cNvPr id="13" name="Shape 10"/>
           <p:cNvSpPr/>
           <p:nvPr/>
         </p:nvSpPr>
@@ -3825,7 +3921,7 @@
       </p:sp>
       <p:sp>
         <p:nvSpPr>
-          <p:cNvPr id="13" name="Shape 11"/>
+          <p:cNvPr id="14" name="Shape 11"/>
           <p:cNvSpPr/>
           <p:nvPr/>
         </p:nvSpPr>
@@ -3838,14 +3934,14 @@
             <a:avLst/>
           </a:prstGeom>
           <a:solidFill>
-            <a:srgbClr val="17AF98"/>
+            <a:srgbClr val="12B198"/>
           </a:solidFill>
           <a:ln/>
         </p:spPr>
       </p:sp>
       <p:sp>
         <p:nvSpPr>
-          <p:cNvPr id="14" name="Text 12"/>
+          <p:cNvPr id="15" name="Text 12"/>
           <p:cNvSpPr/>
           <p:nvPr/>
         </p:nvSpPr>
@@ -3884,7 +3980,7 @@
       </p:sp>
       <p:sp>
         <p:nvSpPr>
-          <p:cNvPr id="15" name="Text 13"/>
+          <p:cNvPr id="16" name="Text 13"/>
           <p:cNvSpPr/>
           <p:nvPr/>
         </p:nvSpPr>
@@ -3918,7 +4014,7 @@
                 <a:ea typeface="Yu Gothic" pitchFamily="34" charset="-122"/>
                 <a:cs typeface="Yu Gothic" pitchFamily="34" charset="-120"/>
               </a:rPr>
-              <a:t>警戒点 ― 事故が起きやすい、または被害が大きい重要箇所。</a:t>
+              <a:t>警戒点 ― 事故が生じやすい、または被害が大きい箇所。</a:t>
             </a:r>
             <a:endParaRPr lang="en-US" sz="1450" dirty="0"/>
           </a:p>
@@ -3938,7 +4034,7 @@
                 <a:ea typeface="Calibri" pitchFamily="34" charset="-122"/>
                 <a:cs typeface="Calibri" pitchFamily="34" charset="-120"/>
               </a:rPr>
-              <a:t>Critical point — where incidents are likely, or where the loss would be greatest.</a:t>
+              <a:t>Critical point: where incidents are likely, or where loss would be large.</a:t>
             </a:r>
             <a:endParaRPr lang="en-US" sz="1450" dirty="0"/>
           </a:p>
@@ -3946,7 +4042,7 @@
       </p:sp>
       <p:sp>
         <p:nvSpPr>
-          <p:cNvPr id="16" name="Shape 14"/>
+          <p:cNvPr id="17" name="Shape 14"/>
           <p:cNvSpPr/>
           <p:nvPr/>
         </p:nvSpPr>
@@ -3968,7 +4064,7 @@
       </p:sp>
       <p:sp>
         <p:nvSpPr>
-          <p:cNvPr id="17" name="Shape 15"/>
+          <p:cNvPr id="18" name="Shape 15"/>
           <p:cNvSpPr/>
           <p:nvPr/>
         </p:nvSpPr>
@@ -3981,14 +4077,14 @@
             <a:avLst/>
           </a:prstGeom>
           <a:solidFill>
-            <a:srgbClr val="17AF98"/>
+            <a:srgbClr val="12B198"/>
           </a:solidFill>
           <a:ln/>
         </p:spPr>
       </p:sp>
       <p:sp>
         <p:nvSpPr>
-          <p:cNvPr id="18" name="Text 16"/>
+          <p:cNvPr id="19" name="Text 16"/>
           <p:cNvSpPr/>
           <p:nvPr/>
         </p:nvSpPr>
@@ -4027,7 +4123,7 @@
       </p:sp>
       <p:sp>
         <p:nvSpPr>
-          <p:cNvPr id="19" name="Text 17"/>
+          <p:cNvPr id="20" name="Text 17"/>
           <p:cNvSpPr/>
           <p:nvPr/>
         </p:nvSpPr>
@@ -4061,7 +4157,7 @@
                 <a:ea typeface="Yu Gothic" pitchFamily="34" charset="-122"/>
                 <a:cs typeface="Yu Gothic" pitchFamily="34" charset="-120"/>
               </a:rPr>
-              <a:t>死角 ― 目視できない範囲。時間帯によって増減する。</a:t>
+              <a:t>死角 ― 目視できない範囲。時間帯によって変わります。</a:t>
             </a:r>
             <a:endParaRPr lang="en-US" sz="1450" dirty="0"/>
           </a:p>
@@ -4081,7 +4177,7 @@
                 <a:ea typeface="Calibri" pitchFamily="34" charset="-122"/>
                 <a:cs typeface="Calibri" pitchFamily="34" charset="-120"/>
               </a:rPr>
-              <a:t>Blind spot — what you cannot see. It grows and shrinks with the time of day.</a:t>
+              <a:t>Blind spot: what you cannot see. It changes with the time of day.</a:t>
             </a:r>
             <a:endParaRPr lang="en-US" sz="1450" dirty="0"/>
           </a:p>
@@ -4089,7 +4185,7 @@
       </p:sp>
       <p:sp>
         <p:nvSpPr>
-          <p:cNvPr id="20" name="Text 18"/>
+          <p:cNvPr id="21" name="Text 18"/>
           <p:cNvSpPr/>
           <p:nvPr/>
         </p:nvSpPr>
@@ -4142,7 +4238,7 @@
       </p:sp>
       <p:sp>
         <p:nvSpPr>
-          <p:cNvPr id="21" name="Text 19"/>
+          <p:cNvPr id="22" name="Text 19"/>
           <p:cNvSpPr/>
           <p:nvPr/>
         </p:nvSpPr>
@@ -4211,9 +4307,33 @@
           <a:chExt cx="0" cy="0"/>
         </a:xfrm>
       </p:grpSpPr>
-      <p:sp>
-        <p:nvSpPr>
-          <p:cNvPr id="2" name="Text 0"/>
+      <p:pic>
+        <p:nvPicPr>
+          <p:cNvPr id="2" name="Image 0" descr="/home/user/Training-/assets/logo.png">    </p:cNvPr>
+          <p:cNvPicPr>
+            <a:picLocks noChangeAspect="1"/>
+          </p:cNvPicPr>
+          <p:nvPr/>
+        </p:nvPicPr>
+        <p:blipFill>
+          <a:blip r:embed="rId1"/>
+          <a:stretch>
+            <a:fillRect/>
+          </a:stretch>
+        </p:blipFill>
+        <p:spPr>
+          <a:xfrm>
+            <a:off x="10765231" y="332912"/>
+            <a:ext cx="786384" cy="742353"/>
+          </a:xfrm>
+          <a:prstGeom prst="rect">
+            <a:avLst/>
+          </a:prstGeom>
+        </p:spPr>
+      </p:pic>
+      <p:sp>
+        <p:nvSpPr>
+          <p:cNvPr id="3" name="Text 0"/>
           <p:cNvSpPr/>
           <p:nvPr/>
         </p:nvSpPr>
@@ -4241,13 +4361,13 @@
             <a:r>
               <a:rPr lang="en-US" sz="2700" b="1" dirty="0">
                 <a:solidFill>
-                  <a:srgbClr val="0F2D52"/>
+                  <a:srgbClr val="093259"/>
                 </a:solidFill>
                 <a:latin typeface="Yu Gothic" pitchFamily="34" charset="0"/>
                 <a:ea typeface="Yu Gothic" pitchFamily="34" charset="-122"/>
                 <a:cs typeface="Yu Gothic" pitchFamily="34" charset="-120"/>
               </a:rPr>
-              <a:t>巡回で「情報資産」も見る</a:t>
+              <a:t>巡回で確認する情報資産</a:t>
             </a:r>
             <a:endParaRPr lang="en-US" sz="2700" dirty="0"/>
           </a:p>
@@ -4261,13 +4381,13 @@
             <a:r>
               <a:rPr lang="en-US" sz="1250" i="1" dirty="0">
                 <a:solidFill>
-                  <a:srgbClr val="17AF98"/>
-                </a:solidFill>
-                <a:latin typeface="Calibri" pitchFamily="34" charset="0"/>
-                <a:ea typeface="Calibri" pitchFamily="34" charset="-122"/>
-                <a:cs typeface="Calibri" pitchFamily="34" charset="-120"/>
-              </a:rPr>
-              <a:t>Patrol Sees Information Assets Too</a:t>
+                  <a:srgbClr val="12B198"/>
+                </a:solidFill>
+                <a:latin typeface="Calibri" pitchFamily="34" charset="0"/>
+                <a:ea typeface="Calibri" pitchFamily="34" charset="-122"/>
+                <a:cs typeface="Calibri" pitchFamily="34" charset="-120"/>
+              </a:rPr>
+              <a:t>Information Assets to Check on Patrol</a:t>
             </a:r>
             <a:endParaRPr lang="en-US" sz="2700" dirty="0"/>
           </a:p>
@@ -4275,7 +4395,7 @@
       </p:sp>
       <p:sp>
         <p:nvSpPr>
-          <p:cNvPr id="3" name="Text 1"/>
+          <p:cNvPr id="4" name="Text 1"/>
           <p:cNvSpPr/>
           <p:nvPr/>
         </p:nvSpPr>
@@ -4303,13 +4423,13 @@
             <a:r>
               <a:rPr lang="en-US" sz="1300" dirty="0">
                 <a:solidFill>
-                  <a:srgbClr val="0F2D52"/>
+                  <a:srgbClr val="093259"/>
                 </a:solidFill>
                 <a:latin typeface="Yu Gothic" pitchFamily="34" charset="0"/>
                 <a:ea typeface="Yu Gothic" pitchFamily="34" charset="-122"/>
                 <a:cs typeface="Yu Gothic" pitchFamily="34" charset="-120"/>
               </a:rPr>
-              <a:t>物と人だけを見て歩くと、Asset の半分を見落とします。</a:t>
+              <a:t>人と物だけでなく、情報資産も確認の対象です。</a:t>
             </a:r>
             <a:endParaRPr lang="en-US" sz="1300" dirty="0"/>
           </a:p>
@@ -4329,7 +4449,7 @@
                 <a:ea typeface="Calibri" pitchFamily="34" charset="-122"/>
                 <a:cs typeface="Calibri" pitchFamily="34" charset="-120"/>
               </a:rPr>
-              <a:t>Walk looking only for people and property and you miss half of Asset.</a:t>
+              <a:t>Check information assets as well as people and property.</a:t>
             </a:r>
             <a:endParaRPr lang="en-US" sz="1300" dirty="0"/>
           </a:p>
@@ -4337,7 +4457,7 @@
       </p:sp>
       <p:sp>
         <p:nvSpPr>
-          <p:cNvPr id="4" name="Shape 2"/>
+          <p:cNvPr id="5" name="Shape 2"/>
           <p:cNvSpPr/>
           <p:nvPr/>
         </p:nvSpPr>
@@ -4359,7 +4479,7 @@
       </p:sp>
       <p:sp>
         <p:nvSpPr>
-          <p:cNvPr id="5" name="Shape 3"/>
+          <p:cNvPr id="6" name="Shape 3"/>
           <p:cNvSpPr/>
           <p:nvPr/>
         </p:nvSpPr>
@@ -4372,14 +4492,14 @@
             <a:avLst/>
           </a:prstGeom>
           <a:solidFill>
-            <a:srgbClr val="0F2D52"/>
+            <a:srgbClr val="093259"/>
           </a:solidFill>
           <a:ln/>
         </p:spPr>
       </p:sp>
       <p:sp>
         <p:nvSpPr>
-          <p:cNvPr id="6" name="Text 4"/>
+          <p:cNvPr id="7" name="Text 4"/>
           <p:cNvSpPr/>
           <p:nvPr/>
         </p:nvSpPr>
@@ -4418,7 +4538,7 @@
       </p:sp>
       <p:sp>
         <p:nvSpPr>
-          <p:cNvPr id="7" name="Text 5"/>
+          <p:cNvPr id="8" name="Text 5"/>
           <p:cNvSpPr/>
           <p:nvPr/>
         </p:nvSpPr>
@@ -4452,7 +4572,7 @@
                 <a:ea typeface="Yu Gothic" pitchFamily="34" charset="-122"/>
                 <a:cs typeface="Yu Gothic" pitchFamily="34" charset="-120"/>
               </a:rPr>
-              <a:t>無人の席に置かれたIDカード・鍵</a:t>
+              <a:t>無人の席に置かれたIDカード、鍵</a:t>
             </a:r>
             <a:endParaRPr lang="en-US" sz="1150" dirty="0"/>
           </a:p>
@@ -4480,7 +4600,7 @@
       </p:sp>
       <p:sp>
         <p:nvSpPr>
-          <p:cNvPr id="8" name="Shape 6"/>
+          <p:cNvPr id="9" name="Shape 6"/>
           <p:cNvSpPr/>
           <p:nvPr/>
         </p:nvSpPr>
@@ -4502,7 +4622,7 @@
       </p:sp>
       <p:sp>
         <p:nvSpPr>
-          <p:cNvPr id="9" name="Shape 7"/>
+          <p:cNvPr id="10" name="Shape 7"/>
           <p:cNvSpPr/>
           <p:nvPr/>
         </p:nvSpPr>
@@ -4515,14 +4635,14 @@
             <a:avLst/>
           </a:prstGeom>
           <a:solidFill>
-            <a:srgbClr val="0F2D52"/>
+            <a:srgbClr val="093259"/>
           </a:solidFill>
           <a:ln/>
         </p:spPr>
       </p:sp>
       <p:sp>
         <p:nvSpPr>
-          <p:cNvPr id="10" name="Text 8"/>
+          <p:cNvPr id="11" name="Text 8"/>
           <p:cNvSpPr/>
           <p:nvPr/>
         </p:nvSpPr>
@@ -4561,7 +4681,7 @@
       </p:sp>
       <p:sp>
         <p:nvSpPr>
-          <p:cNvPr id="11" name="Text 9"/>
+          <p:cNvPr id="12" name="Text 9"/>
           <p:cNvSpPr/>
           <p:nvPr/>
         </p:nvSpPr>
@@ -4595,7 +4715,7 @@
                 <a:ea typeface="Yu Gothic" pitchFamily="34" charset="-122"/>
                 <a:cs typeface="Yu Gothic" pitchFamily="34" charset="-120"/>
               </a:rPr>
-              <a:t>ホワイトボードに残った案件名・金額</a:t>
+              <a:t>ホワイトボードに残った案件名、金額</a:t>
             </a:r>
             <a:endParaRPr lang="en-US" sz="1150" dirty="0"/>
           </a:p>
@@ -4623,7 +4743,7 @@
       </p:sp>
       <p:sp>
         <p:nvSpPr>
-          <p:cNvPr id="12" name="Shape 10"/>
+          <p:cNvPr id="13" name="Shape 10"/>
           <p:cNvSpPr/>
           <p:nvPr/>
         </p:nvSpPr>
@@ -4645,7 +4765,7 @@
       </p:sp>
       <p:sp>
         <p:nvSpPr>
-          <p:cNvPr id="13" name="Shape 11"/>
+          <p:cNvPr id="14" name="Shape 11"/>
           <p:cNvSpPr/>
           <p:nvPr/>
         </p:nvSpPr>
@@ -4658,14 +4778,14 @@
             <a:avLst/>
           </a:prstGeom>
           <a:solidFill>
-            <a:srgbClr val="0F2D52"/>
+            <a:srgbClr val="093259"/>
           </a:solidFill>
           <a:ln/>
         </p:spPr>
       </p:sp>
       <p:sp>
         <p:nvSpPr>
-          <p:cNvPr id="14" name="Text 12"/>
+          <p:cNvPr id="15" name="Text 12"/>
           <p:cNvSpPr/>
           <p:nvPr/>
         </p:nvSpPr>
@@ -4704,7 +4824,7 @@
       </p:sp>
       <p:sp>
         <p:nvSpPr>
-          <p:cNvPr id="15" name="Text 13"/>
+          <p:cNvPr id="16" name="Text 13"/>
           <p:cNvSpPr/>
           <p:nvPr/>
         </p:nvSpPr>
@@ -4766,7 +4886,7 @@
       </p:sp>
       <p:sp>
         <p:nvSpPr>
-          <p:cNvPr id="16" name="Shape 14"/>
+          <p:cNvPr id="17" name="Shape 14"/>
           <p:cNvSpPr/>
           <p:nvPr/>
         </p:nvSpPr>
@@ -4788,7 +4908,7 @@
       </p:sp>
       <p:sp>
         <p:nvSpPr>
-          <p:cNvPr id="17" name="Shape 15"/>
+          <p:cNvPr id="18" name="Shape 15"/>
           <p:cNvSpPr/>
           <p:nvPr/>
         </p:nvSpPr>
@@ -4801,14 +4921,14 @@
             <a:avLst/>
           </a:prstGeom>
           <a:solidFill>
-            <a:srgbClr val="0F2D52"/>
+            <a:srgbClr val="093259"/>
           </a:solidFill>
           <a:ln/>
         </p:spPr>
       </p:sp>
       <p:sp>
         <p:nvSpPr>
-          <p:cNvPr id="18" name="Text 16"/>
+          <p:cNvPr id="19" name="Text 16"/>
           <p:cNvSpPr/>
           <p:nvPr/>
         </p:nvSpPr>
@@ -4847,7 +4967,7 @@
       </p:sp>
       <p:sp>
         <p:nvSpPr>
-          <p:cNvPr id="19" name="Text 17"/>
+          <p:cNvPr id="20" name="Text 17"/>
           <p:cNvSpPr/>
           <p:nvPr/>
         </p:nvSpPr>
@@ -4901,7 +5021,7 @@
                 <a:ea typeface="Calibri" pitchFamily="34" charset="-122"/>
                 <a:cs typeface="Calibri" pitchFamily="34" charset="-120"/>
               </a:rPr>
-              <a:t>Handouts left behind in a meeting room</a:t>
+              <a:t>Handouts left in a meeting room</a:t>
             </a:r>
             <a:endParaRPr lang="en-US" sz="1150" dirty="0"/>
           </a:p>
@@ -4909,7 +5029,7 @@
       </p:sp>
       <p:sp>
         <p:nvSpPr>
-          <p:cNvPr id="20" name="Shape 18"/>
+          <p:cNvPr id="21" name="Shape 18"/>
           <p:cNvSpPr/>
           <p:nvPr/>
         </p:nvSpPr>
@@ -4931,7 +5051,7 @@
       </p:sp>
       <p:sp>
         <p:nvSpPr>
-          <p:cNvPr id="21" name="Shape 19"/>
+          <p:cNvPr id="22" name="Shape 19"/>
           <p:cNvSpPr/>
           <p:nvPr/>
         </p:nvSpPr>
@@ -4944,14 +5064,14 @@
             <a:avLst/>
           </a:prstGeom>
           <a:solidFill>
-            <a:srgbClr val="0F2D52"/>
+            <a:srgbClr val="093259"/>
           </a:solidFill>
           <a:ln/>
         </p:spPr>
       </p:sp>
       <p:sp>
         <p:nvSpPr>
-          <p:cNvPr id="22" name="Text 20"/>
+          <p:cNvPr id="23" name="Text 20"/>
           <p:cNvSpPr/>
           <p:nvPr/>
         </p:nvSpPr>
@@ -4990,7 +5110,7 @@
       </p:sp>
       <p:sp>
         <p:nvSpPr>
-          <p:cNvPr id="23" name="Text 21"/>
+          <p:cNvPr id="24" name="Text 21"/>
           <p:cNvSpPr/>
           <p:nvPr/>
         </p:nvSpPr>
@@ -5024,7 +5144,7 @@
                 <a:ea typeface="Yu Gothic" pitchFamily="34" charset="-122"/>
                 <a:cs typeface="Yu Gothic" pitchFamily="34" charset="-120"/>
               </a:rPr>
-              <a:t>サーバ室・書庫の施錠状態</a:t>
+              <a:t>サーバ室、書庫の施錠状態</a:t>
             </a:r>
             <a:endParaRPr lang="en-US" sz="1150" dirty="0"/>
           </a:p>
@@ -5052,7 +5172,7 @@
       </p:sp>
       <p:sp>
         <p:nvSpPr>
-          <p:cNvPr id="24" name="Shape 22"/>
+          <p:cNvPr id="25" name="Shape 22"/>
           <p:cNvSpPr/>
           <p:nvPr/>
         </p:nvSpPr>
@@ -5074,7 +5194,7 @@
       </p:sp>
       <p:sp>
         <p:nvSpPr>
-          <p:cNvPr id="25" name="Shape 23"/>
+          <p:cNvPr id="26" name="Shape 23"/>
           <p:cNvSpPr/>
           <p:nvPr/>
         </p:nvSpPr>
@@ -5087,14 +5207,14 @@
             <a:avLst/>
           </a:prstGeom>
           <a:solidFill>
-            <a:srgbClr val="0F2D52"/>
+            <a:srgbClr val="093259"/>
           </a:solidFill>
           <a:ln/>
         </p:spPr>
       </p:sp>
       <p:sp>
         <p:nvSpPr>
-          <p:cNvPr id="26" name="Text 24"/>
+          <p:cNvPr id="27" name="Text 24"/>
           <p:cNvSpPr/>
           <p:nvPr/>
         </p:nvSpPr>
@@ -5133,7 +5253,7 @@
       </p:sp>
       <p:sp>
         <p:nvSpPr>
-          <p:cNvPr id="27" name="Text 25"/>
+          <p:cNvPr id="28" name="Text 25"/>
           <p:cNvSpPr/>
           <p:nvPr/>
         </p:nvSpPr>
@@ -5187,7 +5307,7 @@
                 <a:ea typeface="Calibri" pitchFamily="34" charset="-122"/>
                 <a:cs typeface="Calibri" pitchFamily="34" charset="-120"/>
               </a:rPr>
-              <a:t>Signs of tailgating; doors propped open</a:t>
+              <a:t>Signs of tailgating. Doors left open</a:t>
             </a:r>
             <a:endParaRPr lang="en-US" sz="1150" dirty="0"/>
           </a:p>
@@ -5195,7 +5315,7 @@
       </p:sp>
       <p:sp>
         <p:nvSpPr>
-          <p:cNvPr id="28" name="Text 26"/>
+          <p:cNvPr id="29" name="Text 26"/>
           <p:cNvSpPr/>
           <p:nvPr/>
         </p:nvSpPr>
@@ -5248,7 +5368,7 @@
       </p:sp>
       <p:sp>
         <p:nvSpPr>
-          <p:cNvPr id="29" name="Text 27"/>
+          <p:cNvPr id="30" name="Text 27"/>
           <p:cNvSpPr/>
           <p:nvPr/>
         </p:nvSpPr>
@@ -5317,9 +5437,33 @@
           <a:chExt cx="0" cy="0"/>
         </a:xfrm>
       </p:grpSpPr>
-      <p:sp>
-        <p:nvSpPr>
-          <p:cNvPr id="2" name="Text 0"/>
+      <p:pic>
+        <p:nvPicPr>
+          <p:cNvPr id="2" name="Image 0" descr="/home/user/Training-/assets/logo.png">    </p:cNvPr>
+          <p:cNvPicPr>
+            <a:picLocks noChangeAspect="1"/>
+          </p:cNvPicPr>
+          <p:nvPr/>
+        </p:nvPicPr>
+        <p:blipFill>
+          <a:blip r:embed="rId1"/>
+          <a:stretch>
+            <a:fillRect/>
+          </a:stretch>
+        </p:blipFill>
+        <p:spPr>
+          <a:xfrm>
+            <a:off x="10765231" y="332912"/>
+            <a:ext cx="786384" cy="742353"/>
+          </a:xfrm>
+          <a:prstGeom prst="rect">
+            <a:avLst/>
+          </a:prstGeom>
+        </p:spPr>
+      </p:pic>
+      <p:sp>
+        <p:nvSpPr>
+          <p:cNvPr id="3" name="Text 0"/>
           <p:cNvSpPr/>
           <p:nvPr/>
         </p:nvSpPr>
@@ -5347,7 +5491,7 @@
             <a:r>
               <a:rPr lang="en-US" sz="2700" b="1" dirty="0">
                 <a:solidFill>
-                  <a:srgbClr val="0F2D52"/>
+                  <a:srgbClr val="093259"/>
                 </a:solidFill>
                 <a:latin typeface="Yu Gothic" pitchFamily="34" charset="0"/>
                 <a:ea typeface="Yu Gothic" pitchFamily="34" charset="-122"/>
@@ -5367,13 +5511,13 @@
             <a:r>
               <a:rPr lang="en-US" sz="1250" i="1" dirty="0">
                 <a:solidFill>
-                  <a:srgbClr val="17AF98"/>
-                </a:solidFill>
-                <a:latin typeface="Calibri" pitchFamily="34" charset="0"/>
-                <a:ea typeface="Calibri" pitchFamily="34" charset="-122"/>
-                <a:cs typeface="Calibri" pitchFamily="34" charset="-120"/>
-              </a:rPr>
-              <a:t>Patrol Records — general principles</a:t>
+                  <a:srgbClr val="12B198"/>
+                </a:solidFill>
+                <a:latin typeface="Calibri" pitchFamily="34" charset="0"/>
+                <a:ea typeface="Calibri" pitchFamily="34" charset="-122"/>
+                <a:cs typeface="Calibri" pitchFamily="34" charset="-120"/>
+              </a:rPr>
+              <a:t>Patrol Records — General Principles</a:t>
             </a:r>
             <a:endParaRPr lang="en-US" sz="2700" dirty="0"/>
           </a:p>
@@ -5381,7 +5525,7 @@
       </p:sp>
       <p:sp>
         <p:nvSpPr>
-          <p:cNvPr id="3" name="Shape 1"/>
+          <p:cNvPr id="4" name="Shape 1"/>
           <p:cNvSpPr/>
           <p:nvPr/>
         </p:nvSpPr>
@@ -5396,14 +5540,14 @@
             </a:avLst>
           </a:prstGeom>
           <a:solidFill>
-            <a:srgbClr val="0F2D52"/>
+            <a:srgbClr val="093259"/>
           </a:solidFill>
           <a:ln/>
         </p:spPr>
       </p:sp>
       <p:sp>
         <p:nvSpPr>
-          <p:cNvPr id="4" name="Text 2"/>
+          <p:cNvPr id="5" name="Text 2"/>
           <p:cNvSpPr/>
           <p:nvPr/>
         </p:nvSpPr>
@@ -5429,7 +5573,7 @@
               <a:buNone/>
             </a:pPr>
             <a:r>
-              <a:rPr lang="en-US" sz="1900" b="1" dirty="0">
+              <a:rPr lang="en-US" sz="1700" b="1" dirty="0">
                 <a:solidFill>
                   <a:srgbClr val="FFFFFF"/>
                 </a:solidFill>
@@ -5437,9 +5581,9 @@
                 <a:ea typeface="Yu Gothic" pitchFamily="34" charset="-122"/>
                 <a:cs typeface="Yu Gothic" pitchFamily="34" charset="-120"/>
               </a:rPr>
-              <a:t>記録のない巡回は、していないのと同じ。</a:t>
-            </a:r>
-            <a:endParaRPr lang="en-US" sz="1900" dirty="0"/>
+              <a:t>記録は実施の証跡です。記録がなければ、実施を証明できません。</a:t>
+            </a:r>
+            <a:endParaRPr lang="en-US" sz="1700" dirty="0"/>
           </a:p>
           <a:p>
             <a:pPr indent="0" marL="0">
@@ -5449,7 +5593,7 @@
               <a:buNone/>
             </a:pPr>
             <a:r>
-              <a:rPr lang="en-US" sz="1900" b="1" dirty="0">
+              <a:rPr lang="en-US" sz="1700" b="1" dirty="0">
                 <a:solidFill>
                   <a:srgbClr val="FFFFFF"/>
                 </a:solidFill>
@@ -5459,13 +5603,13 @@
               </a:rPr>
               <a:t>「異常なし」も、記録すべき結果です。</a:t>
             </a:r>
-            <a:endParaRPr lang="en-US" sz="1900" dirty="0"/>
-          </a:p>
-        </p:txBody>
-      </p:sp>
-      <p:sp>
-        <p:nvSpPr>
-          <p:cNvPr id="5" name="Text 3"/>
+            <a:endParaRPr lang="en-US" sz="1700" dirty="0"/>
+          </a:p>
+        </p:txBody>
+      </p:sp>
+      <p:sp>
+        <p:nvSpPr>
+          <p:cNvPr id="6" name="Text 3"/>
           <p:cNvSpPr/>
           <p:nvPr/>
         </p:nvSpPr>
@@ -5491,7 +5635,7 @@
               <a:buNone/>
             </a:pPr>
             <a:r>
-              <a:rPr lang="en-US" sz="1250" i="1" dirty="0">
+              <a:rPr lang="en-US" sz="1150" i="1" dirty="0">
                 <a:solidFill>
                   <a:srgbClr val="9FD8CD"/>
                 </a:solidFill>
@@ -5499,9 +5643,9 @@
                 <a:ea typeface="Calibri" pitchFamily="34" charset="-122"/>
                 <a:cs typeface="Calibri" pitchFamily="34" charset="-120"/>
               </a:rPr>
-              <a:t>A patrol without a record is a patrol that did not happen.</a:t>
-            </a:r>
-            <a:endParaRPr lang="en-US" sz="1250" dirty="0"/>
+              <a:t>A record is the evidence that the patrol took place.</a:t>
+            </a:r>
+            <a:endParaRPr lang="en-US" sz="1150" dirty="0"/>
           </a:p>
           <a:p>
             <a:pPr indent="0" marL="0">
@@ -5511,7 +5655,7 @@
               <a:buNone/>
             </a:pPr>
             <a:r>
-              <a:rPr lang="en-US" sz="1250" i="1" dirty="0">
+              <a:rPr lang="en-US" sz="1150" i="1" dirty="0">
                 <a:solidFill>
                   <a:srgbClr val="9FD8CD"/>
                 </a:solidFill>
@@ -5519,15 +5663,15 @@
                 <a:ea typeface="Calibri" pitchFamily="34" charset="-122"/>
                 <a:cs typeface="Calibri" pitchFamily="34" charset="-120"/>
               </a:rPr>
-              <a:t>"Nothing to report" is itself a result worth recording.</a:t>
-            </a:r>
-            <a:endParaRPr lang="en-US" sz="1250" dirty="0"/>
-          </a:p>
-        </p:txBody>
-      </p:sp>
-      <p:sp>
-        <p:nvSpPr>
-          <p:cNvPr id="6" name="Shape 4"/>
+              <a:t>"Nothing to report" is also a result, and must be recorded.</a:t>
+            </a:r>
+            <a:endParaRPr lang="en-US" sz="1150" dirty="0"/>
+          </a:p>
+        </p:txBody>
+      </p:sp>
+      <p:sp>
+        <p:nvSpPr>
+          <p:cNvPr id="7" name="Shape 4"/>
           <p:cNvSpPr/>
           <p:nvPr/>
         </p:nvSpPr>
@@ -5549,7 +5693,7 @@
       </p:sp>
       <p:sp>
         <p:nvSpPr>
-          <p:cNvPr id="7" name="Shape 5"/>
+          <p:cNvPr id="8" name="Shape 5"/>
           <p:cNvSpPr/>
           <p:nvPr/>
         </p:nvSpPr>
@@ -5562,14 +5706,14 @@
             <a:avLst/>
           </a:prstGeom>
           <a:solidFill>
-            <a:srgbClr val="17AF98"/>
+            <a:srgbClr val="12B198"/>
           </a:solidFill>
           <a:ln/>
         </p:spPr>
       </p:sp>
       <p:sp>
         <p:nvSpPr>
-          <p:cNvPr id="8" name="Text 6"/>
+          <p:cNvPr id="9" name="Text 6"/>
           <p:cNvSpPr/>
           <p:nvPr/>
         </p:nvSpPr>
@@ -5608,7 +5752,7 @@
       </p:sp>
       <p:sp>
         <p:nvSpPr>
-          <p:cNvPr id="9" name="Text 7"/>
+          <p:cNvPr id="10" name="Text 7"/>
           <p:cNvSpPr/>
           <p:nvPr/>
         </p:nvSpPr>
@@ -5636,13 +5780,13 @@
             <a:r>
               <a:rPr lang="en-US" sz="1450" b="1" dirty="0">
                 <a:solidFill>
-                  <a:srgbClr val="0F2D52"/>
+                  <a:srgbClr val="093259"/>
                 </a:solidFill>
                 <a:latin typeface="Yu Gothic" pitchFamily="34" charset="0"/>
                 <a:ea typeface="Yu Gothic" pitchFamily="34" charset="-122"/>
                 <a:cs typeface="Yu Gothic" pitchFamily="34" charset="-120"/>
               </a:rPr>
-              <a:t>様式・頻度・立寄点の数・記録の保存方法は、サイトごとに異なります。必ず各現場の警備指令書によってください。</a:t>
+              <a:t>様式、頻度、立寄点の数、保存方法は、サイトごとに異なります。各現場の警備指令書によってください。</a:t>
             </a:r>
             <a:endParaRPr lang="en-US" sz="1450" dirty="0"/>
           </a:p>
@@ -5656,13 +5800,13 @@
             <a:r>
               <a:rPr lang="en-US" sz="1000" i="1" dirty="0">
                 <a:solidFill>
-                  <a:srgbClr val="0E8C79"/>
-                </a:solidFill>
-                <a:latin typeface="Calibri" pitchFamily="34" charset="0"/>
-                <a:ea typeface="Calibri" pitchFamily="34" charset="-122"/>
-                <a:cs typeface="Calibri" pitchFamily="34" charset="-120"/>
-              </a:rPr>
-              <a:t>Formats, frequency, number of checkpoints and retention all differ by site. Always follow the post orders for your own site.</a:t>
+                  <a:srgbClr val="0D8A76"/>
+                </a:solidFill>
+                <a:latin typeface="Calibri" pitchFamily="34" charset="0"/>
+                <a:ea typeface="Calibri" pitchFamily="34" charset="-122"/>
+                <a:cs typeface="Calibri" pitchFamily="34" charset="-120"/>
+              </a:rPr>
+              <a:t>Forms, frequency, number of checkpoints and retention differ by site. Follow the post orders for your own site.</a:t>
             </a:r>
             <a:endParaRPr lang="en-US" sz="1450" dirty="0"/>
           </a:p>
@@ -5670,7 +5814,7 @@
       </p:sp>
       <p:sp>
         <p:nvSpPr>
-          <p:cNvPr id="10" name="Text 8"/>
+          <p:cNvPr id="11" name="Text 8"/>
           <p:cNvSpPr/>
           <p:nvPr/>
         </p:nvSpPr>
@@ -5723,7 +5867,7 @@
       </p:sp>
       <p:sp>
         <p:nvSpPr>
-          <p:cNvPr id="11" name="Text 9"/>
+          <p:cNvPr id="12" name="Text 9"/>
           <p:cNvSpPr/>
           <p:nvPr/>
         </p:nvSpPr>
@@ -5792,9 +5936,33 @@
           <a:chExt cx="0" cy="0"/>
         </a:xfrm>
       </p:grpSpPr>
-      <p:sp>
-        <p:nvSpPr>
-          <p:cNvPr id="2" name="Text 0"/>
+      <p:pic>
+        <p:nvPicPr>
+          <p:cNvPr id="2" name="Image 0" descr="/home/user/Training-/assets/logo.png">    </p:cNvPr>
+          <p:cNvPicPr>
+            <a:picLocks noChangeAspect="1"/>
+          </p:cNvPicPr>
+          <p:nvPr/>
+        </p:nvPicPr>
+        <p:blipFill>
+          <a:blip r:embed="rId1"/>
+          <a:stretch>
+            <a:fillRect/>
+          </a:stretch>
+        </p:blipFill>
+        <p:spPr>
+          <a:xfrm>
+            <a:off x="10765231" y="332912"/>
+            <a:ext cx="786384" cy="742353"/>
+          </a:xfrm>
+          <a:prstGeom prst="rect">
+            <a:avLst/>
+          </a:prstGeom>
+        </p:spPr>
+      </p:pic>
+      <p:sp>
+        <p:nvSpPr>
+          <p:cNvPr id="3" name="Text 0"/>
           <p:cNvSpPr/>
           <p:nvPr/>
         </p:nvSpPr>
@@ -5822,7 +5990,7 @@
             <a:r>
               <a:rPr lang="en-US" sz="2700" b="1" dirty="0">
                 <a:solidFill>
-                  <a:srgbClr val="0F2D52"/>
+                  <a:srgbClr val="093259"/>
                 </a:solidFill>
                 <a:latin typeface="Yu Gothic" pitchFamily="34" charset="0"/>
                 <a:ea typeface="Yu Gothic" pitchFamily="34" charset="-122"/>
@@ -5842,7 +6010,7 @@
             <a:r>
               <a:rPr lang="en-US" sz="1250" i="1" dirty="0">
                 <a:solidFill>
-                  <a:srgbClr val="17AF98"/>
+                  <a:srgbClr val="12B198"/>
                 </a:solidFill>
                 <a:latin typeface="Calibri" pitchFamily="34" charset="0"/>
                 <a:ea typeface="Calibri" pitchFamily="34" charset="-122"/>
@@ -5856,7 +6024,7 @@
       </p:sp>
       <p:sp>
         <p:nvSpPr>
-          <p:cNvPr id="3" name="Text 1"/>
+          <p:cNvPr id="4" name="Text 1"/>
           <p:cNvSpPr/>
           <p:nvPr/>
         </p:nvSpPr>
@@ -5884,13 +6052,13 @@
             <a:r>
               <a:rPr lang="en-US" sz="1300" dirty="0">
                 <a:solidFill>
-                  <a:srgbClr val="0F2D52"/>
+                  <a:srgbClr val="093259"/>
                 </a:solidFill>
                 <a:latin typeface="Yu Gothic" pitchFamily="34" charset="0"/>
                 <a:ea typeface="Yu Gothic" pitchFamily="34" charset="-122"/>
                 <a:cs typeface="Yu Gothic" pitchFamily="34" charset="-120"/>
               </a:rPr>
-              <a:t>班で3つ選んでください。次のスライドの4つの問いに答えます。</a:t>
+              <a:t>班で3つ選んでください。次のスライドの4つの問いに答えます。情報は不足しています。</a:t>
             </a:r>
             <a:endParaRPr lang="en-US" sz="1300" dirty="0"/>
           </a:p>
@@ -5910,7 +6078,7 @@
                 <a:ea typeface="Calibri" pitchFamily="34" charset="-122"/>
                 <a:cs typeface="Calibri" pitchFamily="34" charset="-120"/>
               </a:rPr>
-              <a:t>Pick three as a group. You will answer the four questions on the next slide.</a:t>
+              <a:t>Pick three as a group, then answer the four questions on the next slide. Information is incomplete.</a:t>
             </a:r>
             <a:endParaRPr lang="en-US" sz="1300" dirty="0"/>
           </a:p>
@@ -5918,7 +6086,7 @@
       </p:sp>
       <p:sp>
         <p:nvSpPr>
-          <p:cNvPr id="4" name="Shape 2"/>
+          <p:cNvPr id="5" name="Shape 2"/>
           <p:cNvSpPr/>
           <p:nvPr/>
         </p:nvSpPr>
@@ -5940,7 +6108,7 @@
       </p:sp>
       <p:sp>
         <p:nvSpPr>
-          <p:cNvPr id="5" name="Shape 3"/>
+          <p:cNvPr id="6" name="Shape 3"/>
           <p:cNvSpPr/>
           <p:nvPr/>
         </p:nvSpPr>
@@ -5953,14 +6121,14 @@
             <a:avLst/>
           </a:prstGeom>
           <a:solidFill>
-            <a:srgbClr val="0F2D52"/>
+            <a:srgbClr val="093259"/>
           </a:solidFill>
           <a:ln/>
         </p:spPr>
       </p:sp>
       <p:sp>
         <p:nvSpPr>
-          <p:cNvPr id="6" name="Text 4"/>
+          <p:cNvPr id="7" name="Text 4"/>
           <p:cNvSpPr/>
           <p:nvPr/>
         </p:nvSpPr>
@@ -5999,7 +6167,7 @@
       </p:sp>
       <p:sp>
         <p:nvSpPr>
-          <p:cNvPr id="7" name="Text 5"/>
+          <p:cNvPr id="8" name="Text 5"/>
           <p:cNvSpPr/>
           <p:nvPr/>
         </p:nvSpPr>
@@ -6033,7 +6201,7 @@
                 <a:ea typeface="Yu Gothic" pitchFamily="34" charset="-122"/>
                 <a:cs typeface="Yu Gothic" pitchFamily="34" charset="-120"/>
               </a:rPr>
-              <a:t>無人の席にIDカードが置かれている。</a:t>
+              <a:t>無人の席にIDカードがある。離席中かどうかは分からない。</a:t>
             </a:r>
             <a:endParaRPr lang="en-US" sz="1150" dirty="0"/>
           </a:p>
@@ -6053,7 +6221,7 @@
                 <a:ea typeface="Calibri" pitchFamily="34" charset="-122"/>
                 <a:cs typeface="Calibri" pitchFamily="34" charset="-120"/>
               </a:rPr>
-              <a:t>An ID card is lying on an unattended desk.</a:t>
+              <a:t>An ID card is on an empty desk. You cannot tell if the person stepped away.</a:t>
             </a:r>
             <a:endParaRPr lang="en-US" sz="1150" dirty="0"/>
           </a:p>
@@ -6061,7 +6229,7 @@
       </p:sp>
       <p:sp>
         <p:nvSpPr>
-          <p:cNvPr id="8" name="Shape 6"/>
+          <p:cNvPr id="9" name="Shape 6"/>
           <p:cNvSpPr/>
           <p:nvPr/>
         </p:nvSpPr>
@@ -6083,7 +6251,7 @@
       </p:sp>
       <p:sp>
         <p:nvSpPr>
-          <p:cNvPr id="9" name="Shape 7"/>
+          <p:cNvPr id="10" name="Shape 7"/>
           <p:cNvSpPr/>
           <p:nvPr/>
         </p:nvSpPr>
@@ -6096,14 +6264,14 @@
             <a:avLst/>
           </a:prstGeom>
           <a:solidFill>
-            <a:srgbClr val="0F2D52"/>
+            <a:srgbClr val="093259"/>
           </a:solidFill>
           <a:ln/>
         </p:spPr>
       </p:sp>
       <p:sp>
         <p:nvSpPr>
-          <p:cNvPr id="10" name="Text 8"/>
+          <p:cNvPr id="11" name="Text 8"/>
           <p:cNvSpPr/>
           <p:nvPr/>
         </p:nvSpPr>
@@ -6142,7 +6310,7 @@
       </p:sp>
       <p:sp>
         <p:nvSpPr>
-          <p:cNvPr id="11" name="Text 9"/>
+          <p:cNvPr id="12" name="Text 9"/>
           <p:cNvSpPr/>
           <p:nvPr/>
         </p:nvSpPr>
@@ -6176,7 +6344,7 @@
                 <a:ea typeface="Yu Gothic" pitchFamily="34" charset="-122"/>
                 <a:cs typeface="Yu Gothic" pitchFamily="34" charset="-120"/>
               </a:rPr>
-              <a:t>会議室のホワイトボードに、案件名と金額が消されずに残っている。</a:t>
+              <a:t>ホワイトボードに案件名と金額が残っている。会議は終了している。</a:t>
             </a:r>
             <a:endParaRPr lang="en-US" sz="1150" dirty="0"/>
           </a:p>
@@ -6196,7 +6364,7 @@
                 <a:ea typeface="Calibri" pitchFamily="34" charset="-122"/>
                 <a:cs typeface="Calibri" pitchFamily="34" charset="-120"/>
               </a:rPr>
-              <a:t>A whiteboard still shows a project name and a figure.</a:t>
+              <a:t>A whiteboard shows a project name and a figure. The meeting has ended.</a:t>
             </a:r>
             <a:endParaRPr lang="en-US" sz="1150" dirty="0"/>
           </a:p>
@@ -6204,7 +6372,7 @@
       </p:sp>
       <p:sp>
         <p:nvSpPr>
-          <p:cNvPr id="12" name="Shape 10"/>
+          <p:cNvPr id="13" name="Shape 10"/>
           <p:cNvSpPr/>
           <p:nvPr/>
         </p:nvSpPr>
@@ -6226,7 +6394,7 @@
       </p:sp>
       <p:sp>
         <p:nvSpPr>
-          <p:cNvPr id="13" name="Shape 11"/>
+          <p:cNvPr id="14" name="Shape 11"/>
           <p:cNvSpPr/>
           <p:nvPr/>
         </p:nvSpPr>
@@ -6239,14 +6407,14 @@
             <a:avLst/>
           </a:prstGeom>
           <a:solidFill>
-            <a:srgbClr val="0F2D52"/>
+            <a:srgbClr val="093259"/>
           </a:solidFill>
           <a:ln/>
         </p:spPr>
       </p:sp>
       <p:sp>
         <p:nvSpPr>
-          <p:cNvPr id="14" name="Text 12"/>
+          <p:cNvPr id="15" name="Text 12"/>
           <p:cNvSpPr/>
           <p:nvPr/>
         </p:nvSpPr>
@@ -6285,7 +6453,7 @@
       </p:sp>
       <p:sp>
         <p:nvSpPr>
-          <p:cNvPr id="15" name="Text 13"/>
+          <p:cNvPr id="16" name="Text 13"/>
           <p:cNvSpPr/>
           <p:nvPr/>
         </p:nvSpPr>
@@ -6319,7 +6487,7 @@
                 <a:ea typeface="Yu Gothic" pitchFamily="34" charset="-122"/>
                 <a:cs typeface="Yu Gothic" pitchFamily="34" charset="-120"/>
               </a:rPr>
-              <a:t>非常口の前に段ボールが3箱積まれている。</a:t>
+              <a:t>非常口の前に段ボールが3箱。搬入作業は続いている様子。</a:t>
             </a:r>
             <a:endParaRPr lang="en-US" sz="1150" dirty="0"/>
           </a:p>
@@ -6339,7 +6507,7 @@
                 <a:ea typeface="Calibri" pitchFamily="34" charset="-122"/>
                 <a:cs typeface="Calibri" pitchFamily="34" charset="-120"/>
               </a:rPr>
-              <a:t>Three boxes are stacked in front of an emergency exit.</a:t>
+              <a:t>Three boxes block an emergency exit. A delivery appears to be in progress.</a:t>
             </a:r>
             <a:endParaRPr lang="en-US" sz="1150" dirty="0"/>
           </a:p>
@@ -6347,7 +6515,7 @@
       </p:sp>
       <p:sp>
         <p:nvSpPr>
-          <p:cNvPr id="16" name="Shape 14"/>
+          <p:cNvPr id="17" name="Shape 14"/>
           <p:cNvSpPr/>
           <p:nvPr/>
         </p:nvSpPr>
@@ -6369,7 +6537,7 @@
       </p:sp>
       <p:sp>
         <p:nvSpPr>
-          <p:cNvPr id="17" name="Shape 15"/>
+          <p:cNvPr id="18" name="Shape 15"/>
           <p:cNvSpPr/>
           <p:nvPr/>
         </p:nvSpPr>
@@ -6382,14 +6550,14 @@
             <a:avLst/>
           </a:prstGeom>
           <a:solidFill>
-            <a:srgbClr val="0F2D52"/>
+            <a:srgbClr val="093259"/>
           </a:solidFill>
           <a:ln/>
         </p:spPr>
       </p:sp>
       <p:sp>
         <p:nvSpPr>
-          <p:cNvPr id="18" name="Text 16"/>
+          <p:cNvPr id="19" name="Text 16"/>
           <p:cNvSpPr/>
           <p:nvPr/>
         </p:nvSpPr>
@@ -6428,7 +6596,7 @@
       </p:sp>
       <p:sp>
         <p:nvSpPr>
-          <p:cNvPr id="19" name="Text 17"/>
+          <p:cNvPr id="20" name="Text 17"/>
           <p:cNvSpPr/>
           <p:nvPr/>
         </p:nvSpPr>
@@ -6462,7 +6630,7 @@
                 <a:ea typeface="Yu Gothic" pitchFamily="34" charset="-122"/>
                 <a:cs typeface="Yu Gothic" pitchFamily="34" charset="-120"/>
               </a:rPr>
-              <a:t>サーバ室の扉が半開きになっている。</a:t>
+              <a:t>サーバ室の扉が半開き。中に人がいるかどうかは見えない。</a:t>
             </a:r>
             <a:endParaRPr lang="en-US" sz="1150" dirty="0"/>
           </a:p>
@@ -6482,7 +6650,7 @@
                 <a:ea typeface="Calibri" pitchFamily="34" charset="-122"/>
                 <a:cs typeface="Calibri" pitchFamily="34" charset="-120"/>
               </a:rPr>
-              <a:t>The server room door is standing half open.</a:t>
+              <a:t>The server room door is half open. You cannot see if anyone is inside.</a:t>
             </a:r>
             <a:endParaRPr lang="en-US" sz="1150" dirty="0"/>
           </a:p>
@@ -6490,7 +6658,7 @@
       </p:sp>
       <p:sp>
         <p:nvSpPr>
-          <p:cNvPr id="20" name="Shape 18"/>
+          <p:cNvPr id="21" name="Shape 18"/>
           <p:cNvSpPr/>
           <p:nvPr/>
         </p:nvSpPr>
@@ -6512,7 +6680,7 @@
       </p:sp>
       <p:sp>
         <p:nvSpPr>
-          <p:cNvPr id="21" name="Shape 19"/>
+          <p:cNvPr id="22" name="Shape 19"/>
           <p:cNvSpPr/>
           <p:nvPr/>
         </p:nvSpPr>
@@ -6525,14 +6693,14 @@
             <a:avLst/>
           </a:prstGeom>
           <a:solidFill>
-            <a:srgbClr val="0F2D52"/>
+            <a:srgbClr val="093259"/>
           </a:solidFill>
           <a:ln/>
         </p:spPr>
       </p:sp>
       <p:sp>
         <p:nvSpPr>
-          <p:cNvPr id="22" name="Text 20"/>
+          <p:cNvPr id="23" name="Text 20"/>
           <p:cNvSpPr/>
           <p:nvPr/>
         </p:nvSpPr>
@@ -6571,7 +6739,7 @@
       </p:sp>
       <p:sp>
         <p:nvSpPr>
-          <p:cNvPr id="23" name="Text 21"/>
+          <p:cNvPr id="24" name="Text 21"/>
           <p:cNvSpPr/>
           <p:nvPr/>
         </p:nvSpPr>
@@ -6605,7 +6773,7 @@
                 <a:ea typeface="Yu Gothic" pitchFamily="34" charset="-122"/>
                 <a:cs typeface="Yu Gothic" pitchFamily="34" charset="-120"/>
               </a:rPr>
-              <a:t>来訪者バッジをつけていない人物が執務フロアを歩いている。</a:t>
+              <a:t>バッジ未着用の人物が執務フロアにいる。「役員だ」と名乗る。</a:t>
             </a:r>
             <a:endParaRPr lang="en-US" sz="1150" dirty="0"/>
           </a:p>
@@ -6625,7 +6793,7 @@
                 <a:ea typeface="Calibri" pitchFamily="34" charset="-122"/>
                 <a:cs typeface="Calibri" pitchFamily="34" charset="-120"/>
               </a:rPr>
-              <a:t>Someone without a visitor badge is walking the office floor.</a:t>
+              <a:t>A person without a badge is on the office floor. They say they are an executive.</a:t>
             </a:r>
             <a:endParaRPr lang="en-US" sz="1150" dirty="0"/>
           </a:p>
@@ -6633,7 +6801,7 @@
       </p:sp>
       <p:sp>
         <p:nvSpPr>
-          <p:cNvPr id="24" name="Shape 22"/>
+          <p:cNvPr id="25" name="Shape 22"/>
           <p:cNvSpPr/>
           <p:nvPr/>
         </p:nvSpPr>
@@ -6655,7 +6823,7 @@
       </p:sp>
       <p:sp>
         <p:nvSpPr>
-          <p:cNvPr id="25" name="Shape 23"/>
+          <p:cNvPr id="26" name="Shape 23"/>
           <p:cNvSpPr/>
           <p:nvPr/>
         </p:nvSpPr>
@@ -6668,14 +6836,14 @@
             <a:avLst/>
           </a:prstGeom>
           <a:solidFill>
-            <a:srgbClr val="0F2D52"/>
+            <a:srgbClr val="093259"/>
           </a:solidFill>
           <a:ln/>
         </p:spPr>
       </p:sp>
       <p:sp>
         <p:nvSpPr>
-          <p:cNvPr id="26" name="Text 24"/>
+          <p:cNvPr id="27" name="Text 24"/>
           <p:cNvSpPr/>
           <p:nvPr/>
         </p:nvSpPr>
@@ -6714,7 +6882,7 @@
       </p:sp>
       <p:sp>
         <p:nvSpPr>
-          <p:cNvPr id="27" name="Text 25"/>
+          <p:cNvPr id="28" name="Text 25"/>
           <p:cNvSpPr/>
           <p:nvPr/>
         </p:nvSpPr>
@@ -6748,7 +6916,7 @@
                 <a:ea typeface="Yu Gothic" pitchFamily="34" charset="-122"/>
                 <a:cs typeface="Yu Gothic" pitchFamily="34" charset="-120"/>
               </a:rPr>
-              <a:t>外周フェンスの一部が破損している。</a:t>
+              <a:t>外周フェンスが破損。前回の巡回時にあったか記憶が定かでない。</a:t>
             </a:r>
             <a:endParaRPr lang="en-US" sz="1150" dirty="0"/>
           </a:p>
@@ -6768,7 +6936,7 @@
                 <a:ea typeface="Calibri" pitchFamily="34" charset="-122"/>
                 <a:cs typeface="Calibri" pitchFamily="34" charset="-120"/>
               </a:rPr>
-              <a:t>A section of the perimeter fence is damaged.</a:t>
+              <a:t>The perimeter fence is damaged. You cannot recall if it was there last round.</a:t>
             </a:r>
             <a:endParaRPr lang="en-US" sz="1150" dirty="0"/>
           </a:p>
@@ -6776,7 +6944,7 @@
       </p:sp>
       <p:sp>
         <p:nvSpPr>
-          <p:cNvPr id="28" name="Text 26"/>
+          <p:cNvPr id="29" name="Text 26"/>
           <p:cNvSpPr/>
           <p:nvPr/>
         </p:nvSpPr>
@@ -6829,7 +6997,7 @@
       </p:sp>
       <p:sp>
         <p:nvSpPr>
-          <p:cNvPr id="29" name="Text 27"/>
+          <p:cNvPr id="30" name="Text 27"/>
           <p:cNvSpPr/>
           <p:nvPr/>
         </p:nvSpPr>
@@ -6898,9 +7066,33 @@
           <a:chExt cx="0" cy="0"/>
         </a:xfrm>
       </p:grpSpPr>
-      <p:sp>
-        <p:nvSpPr>
-          <p:cNvPr id="2" name="Text 0"/>
+      <p:pic>
+        <p:nvPicPr>
+          <p:cNvPr id="2" name="Image 0" descr="/home/user/Training-/assets/logo.png">    </p:cNvPr>
+          <p:cNvPicPr>
+            <a:picLocks noChangeAspect="1"/>
+          </p:cNvPicPr>
+          <p:nvPr/>
+        </p:nvPicPr>
+        <p:blipFill>
+          <a:blip r:embed="rId1"/>
+          <a:stretch>
+            <a:fillRect/>
+          </a:stretch>
+        </p:blipFill>
+        <p:spPr>
+          <a:xfrm>
+            <a:off x="10765231" y="332912"/>
+            <a:ext cx="786384" cy="742353"/>
+          </a:xfrm>
+          <a:prstGeom prst="rect">
+            <a:avLst/>
+          </a:prstGeom>
+        </p:spPr>
+      </p:pic>
+      <p:sp>
+        <p:nvSpPr>
+          <p:cNvPr id="3" name="Text 0"/>
           <p:cNvSpPr/>
           <p:nvPr/>
         </p:nvSpPr>
@@ -6928,7 +7120,7 @@
             <a:r>
               <a:rPr lang="en-US" sz="2700" b="1" dirty="0">
                 <a:solidFill>
-                  <a:srgbClr val="0F2D52"/>
+                  <a:srgbClr val="093259"/>
                 </a:solidFill>
                 <a:latin typeface="Yu Gothic" pitchFamily="34" charset="0"/>
                 <a:ea typeface="Yu Gothic" pitchFamily="34" charset="-122"/>
@@ -6948,7 +7140,7 @@
             <a:r>
               <a:rPr lang="en-US" sz="1250" i="1" dirty="0">
                 <a:solidFill>
-                  <a:srgbClr val="17AF98"/>
+                  <a:srgbClr val="12B198"/>
                 </a:solidFill>
                 <a:latin typeface="Calibri" pitchFamily="34" charset="0"/>
                 <a:ea typeface="Calibri" pitchFamily="34" charset="-122"/>
@@ -6962,7 +7154,7 @@
       </p:sp>
       <p:sp>
         <p:nvSpPr>
-          <p:cNvPr id="3" name="Text 1"/>
+          <p:cNvPr id="4" name="Text 1"/>
           <p:cNvSpPr/>
           <p:nvPr/>
         </p:nvSpPr>
@@ -6990,13 +7182,13 @@
             <a:r>
               <a:rPr lang="en-US" sz="1300" dirty="0">
                 <a:solidFill>
-                  <a:srgbClr val="0F2D52"/>
+                  <a:srgbClr val="093259"/>
                 </a:solidFill>
                 <a:latin typeface="Yu Gothic" pitchFamily="34" charset="0"/>
                 <a:ea typeface="Yu Gothic" pitchFamily="34" charset="-122"/>
                 <a:cs typeface="Yu Gothic" pitchFamily="34" charset="-120"/>
               </a:rPr>
-              <a:t>進め方：班で3場面 → 4問に回答（20分） → 班発表（15分）</a:t>
+              <a:t>進め方：班で3場面を選ぶ → 4問に回答（20分） → 班発表（15分）</a:t>
             </a:r>
             <a:endParaRPr lang="en-US" sz="1300" dirty="0"/>
           </a:p>
@@ -7016,7 +7208,7 @@
                 <a:ea typeface="Calibri" pitchFamily="34" charset="-122"/>
                 <a:cs typeface="Calibri" pitchFamily="34" charset="-120"/>
               </a:rPr>
-              <a:t>Format: three scenes per group → answer all four questions (20 min) → present (15 min).</a:t>
+              <a:t>Format: pick three scenes, answer all four questions (20 min), then present (15 min).</a:t>
             </a:r>
             <a:endParaRPr lang="en-US" sz="1300" dirty="0"/>
           </a:p>
@@ -7024,7 +7216,7 @@
       </p:sp>
       <p:sp>
         <p:nvSpPr>
-          <p:cNvPr id="4" name="Shape 2"/>
+          <p:cNvPr id="5" name="Shape 2"/>
           <p:cNvSpPr/>
           <p:nvPr/>
         </p:nvSpPr>
@@ -7046,7 +7238,7 @@
       </p:sp>
       <p:sp>
         <p:nvSpPr>
-          <p:cNvPr id="5" name="Shape 3"/>
+          <p:cNvPr id="6" name="Shape 3"/>
           <p:cNvSpPr/>
           <p:nvPr/>
         </p:nvSpPr>
@@ -7059,14 +7251,14 @@
             <a:avLst/>
           </a:prstGeom>
           <a:solidFill>
-            <a:srgbClr val="17AF98"/>
+            <a:srgbClr val="12B198"/>
           </a:solidFill>
           <a:ln/>
         </p:spPr>
       </p:sp>
       <p:sp>
         <p:nvSpPr>
-          <p:cNvPr id="6" name="Text 4"/>
+          <p:cNvPr id="7" name="Text 4"/>
           <p:cNvSpPr/>
           <p:nvPr/>
         </p:nvSpPr>
@@ -7105,7 +7297,7 @@
       </p:sp>
       <p:sp>
         <p:nvSpPr>
-          <p:cNvPr id="7" name="Text 5"/>
+          <p:cNvPr id="8" name="Text 5"/>
           <p:cNvSpPr/>
           <p:nvPr/>
         </p:nvSpPr>
@@ -7139,7 +7331,7 @@
                 <a:ea typeface="Yu Gothic" pitchFamily="34" charset="-122"/>
                 <a:cs typeface="Yu Gothic" pitchFamily="34" charset="-120"/>
               </a:rPr>
-              <a:t>何に注意するか ― これは People / Asset / Reputation のどのリスクか。</a:t>
+              <a:t>何に注意するか ― People / Asset / Reputation のどのリスクか。</a:t>
             </a:r>
             <a:endParaRPr lang="en-US" sz="1450" dirty="0"/>
           </a:p>
@@ -7159,7 +7351,7 @@
                 <a:ea typeface="Calibri" pitchFamily="34" charset="-122"/>
                 <a:cs typeface="Calibri" pitchFamily="34" charset="-120"/>
               </a:rPr>
-              <a:t>What is at stake — is this a People, Asset, or Reputation risk?</a:t>
+              <a:t>What is at stake? Is it a People, Asset, or Reputation risk?</a:t>
             </a:r>
             <a:endParaRPr lang="en-US" sz="1450" dirty="0"/>
           </a:p>
@@ -7167,7 +7359,7 @@
       </p:sp>
       <p:sp>
         <p:nvSpPr>
-          <p:cNvPr id="8" name="Shape 6"/>
+          <p:cNvPr id="9" name="Shape 6"/>
           <p:cNvSpPr/>
           <p:nvPr/>
         </p:nvSpPr>
@@ -7189,7 +7381,7 @@
       </p:sp>
       <p:sp>
         <p:nvSpPr>
-          <p:cNvPr id="9" name="Shape 7"/>
+          <p:cNvPr id="10" name="Shape 7"/>
           <p:cNvSpPr/>
           <p:nvPr/>
         </p:nvSpPr>
@@ -7202,14 +7394,14 @@
             <a:avLst/>
           </a:prstGeom>
           <a:solidFill>
-            <a:srgbClr val="17AF98"/>
+            <a:srgbClr val="12B198"/>
           </a:solidFill>
           <a:ln/>
         </p:spPr>
       </p:sp>
       <p:sp>
         <p:nvSpPr>
-          <p:cNvPr id="10" name="Text 8"/>
+          <p:cNvPr id="11" name="Text 8"/>
           <p:cNvSpPr/>
           <p:nvPr/>
         </p:nvSpPr>
@@ -7248,7 +7440,7 @@
       </p:sp>
       <p:sp>
         <p:nvSpPr>
-          <p:cNvPr id="11" name="Text 9"/>
+          <p:cNvPr id="12" name="Text 9"/>
           <p:cNvSpPr/>
           <p:nvPr/>
         </p:nvSpPr>
@@ -7282,7 +7474,7 @@
                 <a:ea typeface="Yu Gothic" pitchFamily="34" charset="-122"/>
                 <a:cs typeface="Yu Gothic" pitchFamily="34" charset="-120"/>
               </a:rPr>
-              <a:t>どこを見るか ― この場面で、ほかに確認すべき点はどこか。</a:t>
+              <a:t>どこを見るか ― ほかに確認すべき点はどこか。</a:t>
             </a:r>
             <a:endParaRPr lang="en-US" sz="1450" dirty="0"/>
           </a:p>
@@ -7302,7 +7494,7 @@
                 <a:ea typeface="Calibri" pitchFamily="34" charset="-122"/>
                 <a:cs typeface="Calibri" pitchFamily="34" charset="-120"/>
               </a:rPr>
-              <a:t>Where do you look — what else should you check in this scene?</a:t>
+              <a:t>Where do you look? What else should you check?</a:t>
             </a:r>
             <a:endParaRPr lang="en-US" sz="1450" dirty="0"/>
           </a:p>
@@ -7310,7 +7502,7 @@
       </p:sp>
       <p:sp>
         <p:nvSpPr>
-          <p:cNvPr id="12" name="Shape 10"/>
+          <p:cNvPr id="13" name="Shape 10"/>
           <p:cNvSpPr/>
           <p:nvPr/>
         </p:nvSpPr>
@@ -7332,7 +7524,7 @@
       </p:sp>
       <p:sp>
         <p:nvSpPr>
-          <p:cNvPr id="13" name="Shape 11"/>
+          <p:cNvPr id="14" name="Shape 11"/>
           <p:cNvSpPr/>
           <p:nvPr/>
         </p:nvSpPr>
@@ -7345,14 +7537,14 @@
             <a:avLst/>
           </a:prstGeom>
           <a:solidFill>
-            <a:srgbClr val="17AF98"/>
+            <a:srgbClr val="12B198"/>
           </a:solidFill>
           <a:ln/>
         </p:spPr>
       </p:sp>
       <p:sp>
         <p:nvSpPr>
-          <p:cNvPr id="14" name="Text 12"/>
+          <p:cNvPr id="15" name="Text 12"/>
           <p:cNvSpPr/>
           <p:nvPr/>
         </p:nvSpPr>
@@ -7391,7 +7583,7 @@
       </p:sp>
       <p:sp>
         <p:nvSpPr>
-          <p:cNvPr id="15" name="Text 13"/>
+          <p:cNvPr id="16" name="Text 13"/>
           <p:cNvSpPr/>
           <p:nvPr/>
         </p:nvSpPr>
@@ -7425,7 +7617,7 @@
                 <a:ea typeface="Yu Gothic" pitchFamily="34" charset="-122"/>
                 <a:cs typeface="Yu Gothic" pitchFamily="34" charset="-120"/>
               </a:rPr>
-              <a:t>どう巡回するか ― 次の巡回で、何を変えるか。</a:t>
+              <a:t>どう巡回するか ― 次の巡回で何を変えるか。</a:t>
             </a:r>
             <a:endParaRPr lang="en-US" sz="1450" dirty="0"/>
           </a:p>
@@ -7445,7 +7637,7 @@
                 <a:ea typeface="Calibri" pitchFamily="34" charset="-122"/>
                 <a:cs typeface="Calibri" pitchFamily="34" charset="-120"/>
               </a:rPr>
-              <a:t>How do you patrol — what changes on your next round?</a:t>
+              <a:t>How do you patrol? What changes on your next round?</a:t>
             </a:r>
             <a:endParaRPr lang="en-US" sz="1450" dirty="0"/>
           </a:p>
@@ -7453,7 +7645,7 @@
       </p:sp>
       <p:sp>
         <p:nvSpPr>
-          <p:cNvPr id="16" name="Shape 14"/>
+          <p:cNvPr id="17" name="Shape 14"/>
           <p:cNvSpPr/>
           <p:nvPr/>
         </p:nvSpPr>
@@ -7475,7 +7667,7 @@
       </p:sp>
       <p:sp>
         <p:nvSpPr>
-          <p:cNvPr id="17" name="Shape 15"/>
+          <p:cNvPr id="18" name="Shape 15"/>
           <p:cNvSpPr/>
           <p:nvPr/>
         </p:nvSpPr>
@@ -7488,14 +7680,14 @@
             <a:avLst/>
           </a:prstGeom>
           <a:solidFill>
-            <a:srgbClr val="17AF98"/>
+            <a:srgbClr val="12B198"/>
           </a:solidFill>
           <a:ln/>
         </p:spPr>
       </p:sp>
       <p:sp>
         <p:nvSpPr>
-          <p:cNvPr id="18" name="Text 16"/>
+          <p:cNvPr id="19" name="Text 16"/>
           <p:cNvSpPr/>
           <p:nvPr/>
         </p:nvSpPr>
@@ -7534,7 +7726,7 @@
       </p:sp>
       <p:sp>
         <p:nvSpPr>
-          <p:cNvPr id="19" name="Text 17"/>
+          <p:cNvPr id="20" name="Text 17"/>
           <p:cNvSpPr/>
           <p:nvPr/>
         </p:nvSpPr>
@@ -7588,7 +7780,7 @@
                 <a:ea typeface="Calibri" pitchFamily="34" charset="-122"/>
                 <a:cs typeface="Calibri" pitchFamily="34" charset="-120"/>
               </a:rPr>
-              <a:t>How do you report — whether, to whom, and what. Separate fact from assessment.</a:t>
+              <a:t>How do you report? Whether, to whom, and what. Keep fact and assessment separate.</a:t>
             </a:r>
             <a:endParaRPr lang="en-US" sz="1450" dirty="0"/>
           </a:p>
@@ -7596,7 +7788,7 @@
       </p:sp>
       <p:sp>
         <p:nvSpPr>
-          <p:cNvPr id="20" name="Text 18"/>
+          <p:cNvPr id="21" name="Text 18"/>
           <p:cNvSpPr/>
           <p:nvPr/>
         </p:nvSpPr>
@@ -7649,7 +7841,7 @@
       </p:sp>
       <p:sp>
         <p:nvSpPr>
-          <p:cNvPr id="21" name="Text 19"/>
+          <p:cNvPr id="22" name="Text 19"/>
           <p:cNvSpPr/>
           <p:nvPr/>
         </p:nvSpPr>
@@ -7700,7 +7892,7 @@
     <p:bg>
       <p:bgPr>
         <a:solidFill>
-          <a:srgbClr val="0F2D52"/>
+          <a:srgbClr val="093259"/>
         </a:solidFill>
       </p:bgPr>
     </p:bg>
@@ -7740,9 +7932,33 @@
           <a:ln/>
         </p:spPr>
       </p:sp>
-      <p:sp>
-        <p:nvSpPr>
-          <p:cNvPr id="3" name="Text 1"/>
+      <p:pic>
+        <p:nvPicPr>
+          <p:cNvPr id="3" name="Image 0" descr="/home/user/Training-/assets/logo.png">    </p:cNvPr>
+          <p:cNvPicPr>
+            <a:picLocks noChangeAspect="1"/>
+          </p:cNvPicPr>
+          <p:nvPr/>
+        </p:nvPicPr>
+        <p:blipFill>
+          <a:blip r:embed="rId1"/>
+          <a:stretch>
+            <a:fillRect/>
+          </a:stretch>
+        </p:blipFill>
+        <p:spPr>
+          <a:xfrm>
+            <a:off x="10765231" y="332912"/>
+            <a:ext cx="786384" cy="742353"/>
+          </a:xfrm>
+          <a:prstGeom prst="rect">
+            <a:avLst/>
+          </a:prstGeom>
+        </p:spPr>
+      </p:pic>
+      <p:sp>
+        <p:nvSpPr>
+          <p:cNvPr id="4" name="Text 1"/>
           <p:cNvSpPr/>
           <p:nvPr/>
         </p:nvSpPr>
@@ -7796,7 +8012,7 @@
                 <a:ea typeface="Calibri" pitchFamily="34" charset="-122"/>
                 <a:cs typeface="Calibri" pitchFamily="34" charset="-120"/>
               </a:rPr>
-              <a:t>TTX ② — What We Are Looking For</a:t>
+              <a:t>TTX ② — Assessment Points</a:t>
             </a:r>
             <a:endParaRPr lang="en-US" sz="3000" dirty="0"/>
           </a:p>
@@ -7804,7 +8020,7 @@
       </p:sp>
       <p:sp>
         <p:nvSpPr>
-          <p:cNvPr id="4" name="Shape 2"/>
+          <p:cNvPr id="5" name="Shape 2"/>
           <p:cNvSpPr/>
           <p:nvPr/>
         </p:nvSpPr>
@@ -7819,14 +8035,14 @@
             </a:avLst>
           </a:prstGeom>
           <a:solidFill>
-            <a:srgbClr val="0A2039"/>
+            <a:srgbClr val="06223D"/>
           </a:solidFill>
           <a:ln/>
         </p:spPr>
       </p:sp>
       <p:sp>
         <p:nvSpPr>
-          <p:cNvPr id="5" name="Shape 3"/>
+          <p:cNvPr id="6" name="Shape 3"/>
           <p:cNvSpPr/>
           <p:nvPr/>
         </p:nvSpPr>
@@ -7839,14 +8055,14 @@
             <a:avLst/>
           </a:prstGeom>
           <a:solidFill>
-            <a:srgbClr val="17AF98"/>
+            <a:srgbClr val="12B198"/>
           </a:solidFill>
           <a:ln/>
         </p:spPr>
       </p:sp>
       <p:sp>
         <p:nvSpPr>
-          <p:cNvPr id="6" name="Text 4"/>
+          <p:cNvPr id="7" name="Text 4"/>
           <p:cNvSpPr/>
           <p:nvPr/>
         </p:nvSpPr>
@@ -7885,7 +8101,7 @@
       </p:sp>
       <p:sp>
         <p:nvSpPr>
-          <p:cNvPr id="7" name="Text 5"/>
+          <p:cNvPr id="8" name="Text 5"/>
           <p:cNvSpPr/>
           <p:nvPr/>
         </p:nvSpPr>
@@ -7919,7 +8135,7 @@
                 <a:ea typeface="Yu Gothic" pitchFamily="34" charset="-122"/>
                 <a:cs typeface="Yu Gothic" pitchFamily="34" charset="-120"/>
               </a:rPr>
-              <a:t>リスクを People / Asset / Reputation で言い分けられたか。</a:t>
+              <a:t>リスクを People / Asset / Reputation で区別できたか。</a:t>
             </a:r>
             <a:endParaRPr lang="en-US" sz="1500" dirty="0"/>
           </a:p>
@@ -7939,7 +8155,7 @@
                 <a:ea typeface="Calibri" pitchFamily="34" charset="-122"/>
                 <a:cs typeface="Calibri" pitchFamily="34" charset="-120"/>
               </a:rPr>
-              <a:t>Could you name the risk as People, Asset, or Reputation?</a:t>
+              <a:t>Could you classify the risk as People, Asset, or Reputation?</a:t>
             </a:r>
             <a:endParaRPr lang="en-US" sz="1500" dirty="0"/>
           </a:p>
@@ -7947,7 +8163,7 @@
       </p:sp>
       <p:sp>
         <p:nvSpPr>
-          <p:cNvPr id="8" name="Shape 6"/>
+          <p:cNvPr id="9" name="Shape 6"/>
           <p:cNvSpPr/>
           <p:nvPr/>
         </p:nvSpPr>
@@ -7962,14 +8178,14 @@
             </a:avLst>
           </a:prstGeom>
           <a:solidFill>
-            <a:srgbClr val="0A2039"/>
+            <a:srgbClr val="06223D"/>
           </a:solidFill>
           <a:ln/>
         </p:spPr>
       </p:sp>
       <p:sp>
         <p:nvSpPr>
-          <p:cNvPr id="9" name="Shape 7"/>
+          <p:cNvPr id="10" name="Shape 7"/>
           <p:cNvSpPr/>
           <p:nvPr/>
         </p:nvSpPr>
@@ -7982,14 +8198,14 @@
             <a:avLst/>
           </a:prstGeom>
           <a:solidFill>
-            <a:srgbClr val="17AF98"/>
+            <a:srgbClr val="12B198"/>
           </a:solidFill>
           <a:ln/>
         </p:spPr>
       </p:sp>
       <p:sp>
         <p:nvSpPr>
-          <p:cNvPr id="10" name="Text 8"/>
+          <p:cNvPr id="11" name="Text 8"/>
           <p:cNvSpPr/>
           <p:nvPr/>
         </p:nvSpPr>
@@ -8028,7 +8244,7 @@
       </p:sp>
       <p:sp>
         <p:nvSpPr>
-          <p:cNvPr id="11" name="Text 9"/>
+          <p:cNvPr id="12" name="Text 9"/>
           <p:cNvSpPr/>
           <p:nvPr/>
         </p:nvSpPr>
@@ -8062,7 +8278,7 @@
                 <a:ea typeface="Yu Gothic" pitchFamily="34" charset="-122"/>
                 <a:cs typeface="Yu Gothic" pitchFamily="34" charset="-120"/>
               </a:rPr>
-              <a:t>「その場の処置」と「報告」を分けて考えられたか。</a:t>
+              <a:t>「その場の処置」と「報告」を分けて考えたか。</a:t>
             </a:r>
             <a:endParaRPr lang="en-US" sz="1500" dirty="0"/>
           </a:p>
@@ -8082,7 +8298,7 @@
                 <a:ea typeface="Calibri" pitchFamily="34" charset="-122"/>
                 <a:cs typeface="Calibri" pitchFamily="34" charset="-120"/>
               </a:rPr>
-              <a:t>Did you separate what you do on the spot from what you report?</a:t>
+              <a:t>Did you separate action on the spot from reporting?</a:t>
             </a:r>
             <a:endParaRPr lang="en-US" sz="1500" dirty="0"/>
           </a:p>
@@ -8090,7 +8306,7 @@
       </p:sp>
       <p:sp>
         <p:nvSpPr>
-          <p:cNvPr id="12" name="Shape 10"/>
+          <p:cNvPr id="13" name="Shape 10"/>
           <p:cNvSpPr/>
           <p:nvPr/>
         </p:nvSpPr>
@@ -8105,14 +8321,14 @@
             </a:avLst>
           </a:prstGeom>
           <a:solidFill>
-            <a:srgbClr val="0A2039"/>
+            <a:srgbClr val="06223D"/>
           </a:solidFill>
           <a:ln/>
         </p:spPr>
       </p:sp>
       <p:sp>
         <p:nvSpPr>
-          <p:cNvPr id="13" name="Shape 11"/>
+          <p:cNvPr id="14" name="Shape 11"/>
           <p:cNvSpPr/>
           <p:nvPr/>
         </p:nvSpPr>
@@ -8125,14 +8341,14 @@
             <a:avLst/>
           </a:prstGeom>
           <a:solidFill>
-            <a:srgbClr val="17AF98"/>
+            <a:srgbClr val="12B198"/>
           </a:solidFill>
           <a:ln/>
         </p:spPr>
       </p:sp>
       <p:sp>
         <p:nvSpPr>
-          <p:cNvPr id="14" name="Text 12"/>
+          <p:cNvPr id="15" name="Text 12"/>
           <p:cNvSpPr/>
           <p:nvPr/>
         </p:nvSpPr>
@@ -8171,7 +8387,7 @@
       </p:sp>
       <p:sp>
         <p:nvSpPr>
-          <p:cNvPr id="15" name="Text 13"/>
+          <p:cNvPr id="16" name="Text 13"/>
           <p:cNvSpPr/>
           <p:nvPr/>
         </p:nvSpPr>
@@ -8205,7 +8421,7 @@
                 <a:ea typeface="Yu Gothic" pitchFamily="34" charset="-122"/>
                 <a:cs typeface="Yu Gothic" pitchFamily="34" charset="-120"/>
               </a:rPr>
-              <a:t>次の巡回への反映 ― 設計変更まで踏み込めたか。</a:t>
+              <a:t>情報が不足していることを、報告に書いたか。</a:t>
             </a:r>
             <a:endParaRPr lang="en-US" sz="1500" dirty="0"/>
           </a:p>
@@ -8225,7 +8441,7 @@
                 <a:ea typeface="Calibri" pitchFamily="34" charset="-122"/>
                 <a:cs typeface="Calibri" pitchFamily="34" charset="-120"/>
               </a:rPr>
-              <a:t>Did you go as far as changing the design of the next patrol?</a:t>
+              <a:t>Did your report state that information was incomplete?</a:t>
             </a:r>
             <a:endParaRPr lang="en-US" sz="1500" dirty="0"/>
           </a:p>
@@ -8233,7 +8449,7 @@
       </p:sp>
       <p:sp>
         <p:nvSpPr>
-          <p:cNvPr id="16" name="Shape 14"/>
+          <p:cNvPr id="17" name="Shape 14"/>
           <p:cNvSpPr/>
           <p:nvPr/>
         </p:nvSpPr>
@@ -8248,14 +8464,14 @@
             </a:avLst>
           </a:prstGeom>
           <a:solidFill>
-            <a:srgbClr val="0A2039"/>
+            <a:srgbClr val="06223D"/>
           </a:solidFill>
           <a:ln/>
         </p:spPr>
       </p:sp>
       <p:sp>
         <p:nvSpPr>
-          <p:cNvPr id="17" name="Shape 15"/>
+          <p:cNvPr id="18" name="Shape 15"/>
           <p:cNvSpPr/>
           <p:nvPr/>
         </p:nvSpPr>
@@ -8268,14 +8484,14 @@
             <a:avLst/>
           </a:prstGeom>
           <a:solidFill>
-            <a:srgbClr val="17AF98"/>
+            <a:srgbClr val="12B198"/>
           </a:solidFill>
           <a:ln/>
         </p:spPr>
       </p:sp>
       <p:sp>
         <p:nvSpPr>
-          <p:cNvPr id="18" name="Text 16"/>
+          <p:cNvPr id="19" name="Text 16"/>
           <p:cNvSpPr/>
           <p:nvPr/>
         </p:nvSpPr>
@@ -8314,7 +8530,7 @@
       </p:sp>
       <p:sp>
         <p:nvSpPr>
-          <p:cNvPr id="19" name="Text 17"/>
+          <p:cNvPr id="20" name="Text 17"/>
           <p:cNvSpPr/>
           <p:nvPr/>
         </p:nvSpPr>
@@ -8348,7 +8564,7 @@
                 <a:ea typeface="Yu Gothic" pitchFamily="34" charset="-122"/>
                 <a:cs typeface="Yu Gothic" pitchFamily="34" charset="-120"/>
               </a:rPr>
-              <a:t>報告の文面で、事実と評価が混ざっていなかったか。</a:t>
+              <a:t>次の巡回で何を変えるかまで検討したか。</a:t>
             </a:r>
             <a:endParaRPr lang="en-US" sz="1500" dirty="0"/>
           </a:p>
@@ -8368,7 +8584,7 @@
                 <a:ea typeface="Calibri" pitchFamily="34" charset="-122"/>
                 <a:cs typeface="Calibri" pitchFamily="34" charset="-120"/>
               </a:rPr>
-              <a:t>In your report wording, did fact and assessment stay separate?</a:t>
+              <a:t>Did you decide what to change on the next round?</a:t>
             </a:r>
             <a:endParaRPr lang="en-US" sz="1500" dirty="0"/>
           </a:p>
@@ -8376,7 +8592,7 @@
       </p:sp>
       <p:sp>
         <p:nvSpPr>
-          <p:cNvPr id="20" name="Text 18"/>
+          <p:cNvPr id="21" name="Text 18"/>
           <p:cNvSpPr/>
           <p:nvPr/>
         </p:nvSpPr>
@@ -8401,13 +8617,13 @@
             <a:r>
               <a:rPr lang="en-US" sz="1200" b="1" dirty="0">
                 <a:solidFill>
-                  <a:srgbClr val="17AF98"/>
+                  <a:srgbClr val="12B198"/>
                 </a:solidFill>
                 <a:latin typeface="Yu Gothic" pitchFamily="34" charset="0"/>
                 <a:ea typeface="Yu Gothic" pitchFamily="34" charset="-122"/>
                 <a:cs typeface="Yu Gothic" pitchFamily="34" charset="-120"/>
               </a:rPr>
-              <a:t>次は第5時限 ― 相手が人であるときの技術、De-escalation。</a:t>
+              <a:t>第5時限 ― 相手が人である場合の対応、De-escalation。</a:t>
             </a:r>
             <a:endParaRPr lang="en-US" sz="1200" dirty="0"/>
           </a:p>
@@ -8424,7 +8640,7 @@
                 <a:ea typeface="Calibri" pitchFamily="34" charset="-122"/>
                 <a:cs typeface="Calibri" pitchFamily="34" charset="-120"/>
               </a:rPr>
-              <a:t>Next, Period 5 — the skill for when the risk is a person: de-escalation.</a:t>
+              <a:t>Period 5 — responding when the risk is a person: de-escalation.</a:t>
             </a:r>
             <a:endParaRPr lang="en-US" sz="1200" dirty="0"/>
           </a:p>

--- a/decks/03_4限_巡回.pptx
+++ b/decks/03_4限_巡回.pptx
@@ -13,9 +13,11 @@
     <p:sldId id="261" r:id="rId7"/>
     <p:sldId id="262" r:id="rId8"/>
     <p:sldId id="263" r:id="rId9"/>
+    <p:sldId id="264" r:id="rId10"/>
+    <p:sldId id="265" r:id="rId11"/>
   </p:sldIdLst>
   <p:notesMasterIdLst>
-    <p:notesMasterId r:id="rId10"/>
+    <p:notesMasterId r:id="rId12"/>
   </p:notesMasterIdLst>
   <p:sldSz cx="12192000" cy="6858000"/>
   <p:notesSz cx="6858000" cy="12192000"/>
@@ -551,6 +553,94 @@
 </p:notes>
 </file>
 
+<file path=ppt/notesSlides/notesSlide10.xml><?xml version="1.0" encoding="utf-8"?>
+<p:notes xmlns:a="http://schemas.openxmlformats.org/drawingml/2006/main" xmlns:r="http://schemas.openxmlformats.org/officeDocument/2006/relationships" xmlns:p="http://schemas.openxmlformats.org/presentationml/2006/main">
+  <p:cSld>
+    <p:spTree>
+      <p:nvGrpSpPr>
+        <p:cNvPr id="1" name=""/>
+        <p:cNvGrpSpPr/>
+        <p:nvPr/>
+      </p:nvGrpSpPr>
+      <p:grpSpPr>
+        <a:xfrm>
+          <a:off x="0" y="0"/>
+          <a:ext cx="0" cy="0"/>
+          <a:chOff x="0" y="0"/>
+          <a:chExt cx="0" cy="0"/>
+        </a:xfrm>
+      </p:grpSpPr>
+      <p:sp>
+        <p:nvSpPr>
+          <p:cNvPr id="2" name="Slide Image Placeholder 1"/>
+          <p:cNvSpPr>
+            <a:spLocks noGrp="1" noRot="1" noChangeAspect="1"/>
+          </p:cNvSpPr>
+          <p:nvPr>
+            <p:ph type="sldImg"/>
+          </p:nvPr>
+        </p:nvSpPr>
+        <p:spPr/>
+      </p:sp>
+      <p:sp>
+        <p:nvSpPr>
+          <p:cNvPr id="3" name="Notes Placeholder 2"/>
+          <p:cNvSpPr>
+            <a:spLocks noGrp="1"/>
+          </p:cNvSpPr>
+          <p:nvPr>
+            <p:ph type="body" idx="1"/>
+          </p:nvPr>
+        </p:nvSpPr>
+        <p:spPr/>
+        <p:txBody>
+          <a:bodyPr/>
+          <a:lstStyle/>
+          <a:p>
+            <a:r>
+              <a:rPr lang="en-US" dirty="0"/>
+              <a:t/>
+            </a:r>
+            <a:endParaRPr lang="en-US" dirty="0"/>
+          </a:p>
+        </p:txBody>
+      </p:sp>
+      <p:sp>
+        <p:nvSpPr>
+          <p:cNvPr id="4" name="Slide Number Placeholder 3"/>
+          <p:cNvSpPr>
+            <a:spLocks noGrp="1"/>
+          </p:cNvSpPr>
+          <p:nvPr>
+            <p:ph type="sldNum" sz="quarter" idx="10"/>
+          </p:nvPr>
+        </p:nvSpPr>
+        <p:spPr/>
+        <p:txBody>
+          <a:bodyPr/>
+          <a:lstStyle/>
+          <a:p>
+            <a:fld id="{F7021451-1387-4CA6-816F-3879F97B5CBC}" type="slidenum">
+              <a:rPr lang="en-US"/>
+              <a:t>10</a:t>
+            </a:fld>
+            <a:endParaRPr lang="en-US"/>
+          </a:p>
+        </p:txBody>
+      </p:sp>
+    </p:spTree>
+    <p:extLst>
+      <p:ext uri="{BB962C8B-B14F-4D97-AF65-F5344CB8AC3E}">
+        <p14:creationId xmlns:p14="http://schemas.microsoft.com/office/powerpoint/2010/main" val="1024086991"/>
+      </p:ext>
+    </p:extLst>
+  </p:cSld>
+  <p:clrMapOvr>
+    <a:masterClrMapping/>
+  </p:clrMapOvr>
+</p:notes>
+</file>
+
 <file path=ppt/notesSlides/notesSlide2.xml><?xml version="1.0" encoding="utf-8"?>
 <p:notes xmlns:a="http://schemas.openxmlformats.org/drawingml/2006/main" xmlns:r="http://schemas.openxmlformats.org/officeDocument/2006/relationships" xmlns:p="http://schemas.openxmlformats.org/presentationml/2006/main">
   <p:cSld>
@@ -1149,6 +1239,94 @@
             <a:fld id="{F7021451-1387-4CA6-816F-3879F97B5CBC}" type="slidenum">
               <a:rPr lang="en-US"/>
               <a:t>8</a:t>
+            </a:fld>
+            <a:endParaRPr lang="en-US"/>
+          </a:p>
+        </p:txBody>
+      </p:sp>
+    </p:spTree>
+    <p:extLst>
+      <p:ext uri="{BB962C8B-B14F-4D97-AF65-F5344CB8AC3E}">
+        <p14:creationId xmlns:p14="http://schemas.microsoft.com/office/powerpoint/2010/main" val="1024086991"/>
+      </p:ext>
+    </p:extLst>
+  </p:cSld>
+  <p:clrMapOvr>
+    <a:masterClrMapping/>
+  </p:clrMapOvr>
+</p:notes>
+</file>
+
+<file path=ppt/notesSlides/notesSlide9.xml><?xml version="1.0" encoding="utf-8"?>
+<p:notes xmlns:a="http://schemas.openxmlformats.org/drawingml/2006/main" xmlns:r="http://schemas.openxmlformats.org/officeDocument/2006/relationships" xmlns:p="http://schemas.openxmlformats.org/presentationml/2006/main">
+  <p:cSld>
+    <p:spTree>
+      <p:nvGrpSpPr>
+        <p:cNvPr id="1" name=""/>
+        <p:cNvGrpSpPr/>
+        <p:nvPr/>
+      </p:nvGrpSpPr>
+      <p:grpSpPr>
+        <a:xfrm>
+          <a:off x="0" y="0"/>
+          <a:ext cx="0" cy="0"/>
+          <a:chOff x="0" y="0"/>
+          <a:chExt cx="0" cy="0"/>
+        </a:xfrm>
+      </p:grpSpPr>
+      <p:sp>
+        <p:nvSpPr>
+          <p:cNvPr id="2" name="Slide Image Placeholder 1"/>
+          <p:cNvSpPr>
+            <a:spLocks noGrp="1" noRot="1" noChangeAspect="1"/>
+          </p:cNvSpPr>
+          <p:nvPr>
+            <p:ph type="sldImg"/>
+          </p:nvPr>
+        </p:nvSpPr>
+        <p:spPr/>
+      </p:sp>
+      <p:sp>
+        <p:nvSpPr>
+          <p:cNvPr id="3" name="Notes Placeholder 2"/>
+          <p:cNvSpPr>
+            <a:spLocks noGrp="1"/>
+          </p:cNvSpPr>
+          <p:nvPr>
+            <p:ph type="body" idx="1"/>
+          </p:nvPr>
+        </p:nvSpPr>
+        <p:spPr/>
+        <p:txBody>
+          <a:bodyPr/>
+          <a:lstStyle/>
+          <a:p>
+            <a:r>
+              <a:rPr lang="en-US" dirty="0"/>
+              <a:t/>
+            </a:r>
+            <a:endParaRPr lang="en-US" dirty="0"/>
+          </a:p>
+        </p:txBody>
+      </p:sp>
+      <p:sp>
+        <p:nvSpPr>
+          <p:cNvPr id="4" name="Slide Number Placeholder 3"/>
+          <p:cNvSpPr>
+            <a:spLocks noGrp="1"/>
+          </p:cNvSpPr>
+          <p:nvPr>
+            <p:ph type="sldNum" sz="quarter" idx="10"/>
+          </p:nvPr>
+        </p:nvSpPr>
+        <p:spPr/>
+        <p:txBody>
+          <a:bodyPr/>
+          <a:lstStyle/>
+          <a:p>
+            <a:fld id="{F7021451-1387-4CA6-816F-3879F97B5CBC}" type="slidenum">
+              <a:rPr lang="en-US"/>
+              <a:t>9</a:t>
             </a:fld>
             <a:endParaRPr lang="en-US"/>
           </a:p>
@@ -1765,6 +1943,1112 @@
 </p:sld>
 </file>
 
+<file path=ppt/slides/slide10.xml><?xml version="1.0" encoding="utf-8"?>
+<p:sld xmlns:a="http://schemas.openxmlformats.org/drawingml/2006/main" xmlns:r="http://schemas.openxmlformats.org/officeDocument/2006/relationships" xmlns:p="http://schemas.openxmlformats.org/presentationml/2006/main">
+  <p:cSld name="Slide 10">
+    <p:bg>
+      <p:bgPr>
+        <a:solidFill>
+          <a:srgbClr val="FFFFFF"/>
+        </a:solidFill>
+      </p:bgPr>
+    </p:bg>
+    <p:spTree>
+      <p:nvGrpSpPr>
+        <p:cNvPr id="1" name=""/>
+        <p:cNvGrpSpPr/>
+        <p:nvPr/>
+      </p:nvGrpSpPr>
+      <p:grpSpPr>
+        <a:xfrm>
+          <a:off x="0" y="0"/>
+          <a:ext cx="0" cy="0"/>
+          <a:chOff x="0" y="0"/>
+          <a:chExt cx="0" cy="0"/>
+        </a:xfrm>
+      </p:grpSpPr>
+      <p:pic>
+        <p:nvPicPr>
+          <p:cNvPr id="2" name="Image 0" descr="/home/user/Training-/assets/logo.png">    </p:cNvPr>
+          <p:cNvPicPr>
+            <a:picLocks noChangeAspect="1"/>
+          </p:cNvPicPr>
+          <p:nvPr/>
+        </p:nvPicPr>
+        <p:blipFill>
+          <a:blip r:embed="rId1"/>
+          <a:stretch>
+            <a:fillRect/>
+          </a:stretch>
+        </p:blipFill>
+        <p:spPr>
+          <a:xfrm>
+            <a:off x="10765231" y="332912"/>
+            <a:ext cx="786384" cy="742353"/>
+          </a:xfrm>
+          <a:prstGeom prst="rect">
+            <a:avLst/>
+          </a:prstGeom>
+        </p:spPr>
+      </p:pic>
+      <p:sp>
+        <p:nvSpPr>
+          <p:cNvPr id="3" name="Text 0"/>
+          <p:cNvSpPr/>
+          <p:nvPr/>
+        </p:nvSpPr>
+        <p:spPr>
+          <a:xfrm>
+            <a:off x="640080" y="384048"/>
+            <a:ext cx="8982151" cy="768096"/>
+          </a:xfrm>
+          <a:prstGeom prst="rect">
+            <a:avLst/>
+          </a:prstGeom>
+          <a:noFill/>
+          <a:ln/>
+        </p:spPr>
+        <p:txBody>
+          <a:bodyPr wrap="square" lIns="0" tIns="0" rIns="0" bIns="0" rtlCol="0" anchor="t"/>
+          <a:lstStyle/>
+          <a:p>
+            <a:pPr indent="0" marL="0">
+              <a:lnSpc>
+                <a:spcPct val="94000"/>
+              </a:lnSpc>
+              <a:buNone/>
+            </a:pPr>
+            <a:r>
+              <a:rPr lang="en-US" sz="2300" b="1" dirty="0">
+                <a:solidFill>
+                  <a:srgbClr val="093259"/>
+                </a:solidFill>
+                <a:latin typeface="Yu Gothic" pitchFamily="34" charset="0"/>
+                <a:ea typeface="Yu Gothic" pitchFamily="34" charset="-122"/>
+                <a:cs typeface="Yu Gothic" pitchFamily="34" charset="-120"/>
+              </a:rPr>
+              <a:t>TTX 4-B 講評 ― 模範解答</a:t>
+            </a:r>
+            <a:endParaRPr lang="en-US" sz="2300" dirty="0"/>
+          </a:p>
+          <a:p>
+            <a:pPr indent="0" marL="0">
+              <a:lnSpc>
+                <a:spcPct val="94000"/>
+              </a:lnSpc>
+              <a:buNone/>
+            </a:pPr>
+            <a:r>
+              <a:rPr lang="en-US" sz="1100" i="1" dirty="0">
+                <a:solidFill>
+                  <a:srgbClr val="12B198"/>
+                </a:solidFill>
+                <a:latin typeface="Calibri" pitchFamily="34" charset="0"/>
+                <a:ea typeface="Calibri" pitchFamily="34" charset="-122"/>
+                <a:cs typeface="Calibri" pitchFamily="34" charset="-120"/>
+              </a:rPr>
+              <a:t>TTX 4-B Debrief — Model Answer</a:t>
+            </a:r>
+            <a:endParaRPr lang="en-US" sz="2300" dirty="0"/>
+          </a:p>
+        </p:txBody>
+      </p:sp>
+      <p:sp>
+        <p:nvSpPr>
+          <p:cNvPr id="4" name="Shape 1"/>
+          <p:cNvSpPr/>
+          <p:nvPr/>
+        </p:nvSpPr>
+        <p:spPr>
+          <a:xfrm>
+            <a:off x="9686239" y="438912"/>
+            <a:ext cx="932688" cy="310896"/>
+          </a:xfrm>
+          <a:prstGeom prst="roundRect">
+            <a:avLst>
+              <a:gd name="adj" fmla="val 14706"/>
+            </a:avLst>
+          </a:prstGeom>
+          <a:solidFill>
+            <a:srgbClr val="093259"/>
+          </a:solidFill>
+          <a:ln/>
+        </p:spPr>
+      </p:sp>
+      <p:sp>
+        <p:nvSpPr>
+          <p:cNvPr id="5" name="Text 2"/>
+          <p:cNvSpPr/>
+          <p:nvPr/>
+        </p:nvSpPr>
+        <p:spPr>
+          <a:xfrm>
+            <a:off x="9686239" y="438912"/>
+            <a:ext cx="932688" cy="310896"/>
+          </a:xfrm>
+          <a:prstGeom prst="rect">
+            <a:avLst/>
+          </a:prstGeom>
+          <a:noFill/>
+          <a:ln/>
+        </p:spPr>
+        <p:txBody>
+          <a:bodyPr wrap="square" lIns="0" tIns="0" rIns="0" bIns="0" rtlCol="0" anchor="ctr"/>
+          <a:lstStyle/>
+          <a:p>
+            <a:pPr algn="ctr" indent="0" marL="0">
+              <a:buNone/>
+            </a:pPr>
+            <a:r>
+              <a:rPr lang="en-US" sz="1100" b="1" dirty="0">
+                <a:solidFill>
+                  <a:srgbClr val="FFFFFF"/>
+                </a:solidFill>
+                <a:latin typeface="Calibri" pitchFamily="34" charset="0"/>
+                <a:ea typeface="Calibri" pitchFamily="34" charset="-122"/>
+                <a:cs typeface="Calibri" pitchFamily="34" charset="-120"/>
+              </a:rPr>
+              <a:t>DEBRIEF</a:t>
+            </a:r>
+            <a:endParaRPr lang="en-US" sz="1100" dirty="0"/>
+          </a:p>
+        </p:txBody>
+      </p:sp>
+      <p:sp>
+        <p:nvSpPr>
+          <p:cNvPr id="6" name="Text 3"/>
+          <p:cNvSpPr/>
+          <p:nvPr/>
+        </p:nvSpPr>
+        <p:spPr>
+          <a:xfrm>
+            <a:off x="640080" y="1188720"/>
+            <a:ext cx="10911535" cy="530352"/>
+          </a:xfrm>
+          <a:prstGeom prst="rect">
+            <a:avLst/>
+          </a:prstGeom>
+          <a:noFill/>
+          <a:ln/>
+        </p:spPr>
+        <p:txBody>
+          <a:bodyPr wrap="square" lIns="0" tIns="0" rIns="0" bIns="0" rtlCol="0" anchor="t"/>
+          <a:lstStyle/>
+          <a:p>
+            <a:pPr indent="0" marL="0">
+              <a:lnSpc>
+                <a:spcPct val="90000"/>
+              </a:lnSpc>
+              <a:buNone/>
+            </a:pPr>
+            <a:r>
+              <a:rPr lang="en-US" sz="1000" b="1" dirty="0">
+                <a:solidFill>
+                  <a:srgbClr val="0D8A76"/>
+                </a:solidFill>
+                <a:latin typeface="Yu Gothic" pitchFamily="34" charset="0"/>
+                <a:ea typeface="Yu Gothic" pitchFamily="34" charset="-122"/>
+                <a:cs typeface="Yu Gothic" pitchFamily="34" charset="-120"/>
+              </a:rPr>
+              <a:t>狙い　</a:t>
+            </a:r>
+            <a:pPr indent="0" marL="0">
+              <a:lnSpc>
+                <a:spcPct val="90000"/>
+              </a:lnSpc>
+              <a:buNone/>
+            </a:pPr>
+            <a:r>
+              <a:rPr lang="en-US" sz="1150" b="1" dirty="0">
+                <a:solidFill>
+                  <a:srgbClr val="093259"/>
+                </a:solidFill>
+                <a:latin typeface="Yu Gothic" pitchFamily="34" charset="0"/>
+                <a:ea typeface="Yu Gothic" pitchFamily="34" charset="-122"/>
+                <a:cs typeface="Yu Gothic" pitchFamily="34" charset="-120"/>
+              </a:rPr>
+              <a:t>安全（People）と保全（Asset）が衝突する。順序を言えるかを見る。</a:t>
+            </a:r>
+            <a:endParaRPr lang="en-US" sz="1000" dirty="0"/>
+          </a:p>
+          <a:p>
+            <a:pPr indent="0" marL="0">
+              <a:lnSpc>
+                <a:spcPct val="90000"/>
+              </a:lnSpc>
+              <a:buNone/>
+            </a:pPr>
+            <a:r>
+              <a:rPr lang="en-US" sz="850" i="1" dirty="0">
+                <a:solidFill>
+                  <a:srgbClr val="5F7183"/>
+                </a:solidFill>
+                <a:latin typeface="Calibri" pitchFamily="34" charset="0"/>
+                <a:ea typeface="Calibri" pitchFamily="34" charset="-122"/>
+                <a:cs typeface="Calibri" pitchFamily="34" charset="-120"/>
+              </a:rPr>
+              <a:t>Safety and preservation collide. Can you state the order?</a:t>
+            </a:r>
+            <a:endParaRPr lang="en-US" sz="1000" dirty="0"/>
+          </a:p>
+        </p:txBody>
+      </p:sp>
+      <p:sp>
+        <p:nvSpPr>
+          <p:cNvPr id="7" name="Shape 4"/>
+          <p:cNvSpPr/>
+          <p:nvPr/>
+        </p:nvSpPr>
+        <p:spPr>
+          <a:xfrm>
+            <a:off x="640080" y="1773936"/>
+            <a:ext cx="5327752" cy="1274064"/>
+          </a:xfrm>
+          <a:prstGeom prst="roundRect">
+            <a:avLst>
+              <a:gd name="adj" fmla="val 2871"/>
+            </a:avLst>
+          </a:prstGeom>
+          <a:solidFill>
+            <a:srgbClr val="E4F4F0"/>
+          </a:solidFill>
+          <a:ln/>
+        </p:spPr>
+      </p:sp>
+      <p:sp>
+        <p:nvSpPr>
+          <p:cNvPr id="8" name="Text 5"/>
+          <p:cNvSpPr/>
+          <p:nvPr/>
+        </p:nvSpPr>
+        <p:spPr>
+          <a:xfrm>
+            <a:off x="877824" y="1865376"/>
+            <a:ext cx="4852264" cy="1091184"/>
+          </a:xfrm>
+          <a:prstGeom prst="rect">
+            <a:avLst/>
+          </a:prstGeom>
+          <a:noFill/>
+          <a:ln/>
+        </p:spPr>
+        <p:txBody>
+          <a:bodyPr wrap="square" lIns="0" tIns="0" rIns="0" bIns="0" rtlCol="0" anchor="t"/>
+          <a:lstStyle/>
+          <a:p>
+            <a:pPr indent="0" marL="0">
+              <a:lnSpc>
+                <a:spcPct val="90000"/>
+              </a:lnSpc>
+              <a:buNone/>
+            </a:pPr>
+            <a:r>
+              <a:rPr lang="en-US" sz="1050" b="1" dirty="0">
+                <a:solidFill>
+                  <a:srgbClr val="0D8A76"/>
+                </a:solidFill>
+                <a:latin typeface="Yu Gothic" pitchFamily="34" charset="0"/>
+                <a:ea typeface="Yu Gothic" pitchFamily="34" charset="-122"/>
+                <a:cs typeface="Yu Gothic" pitchFamily="34" charset="-120"/>
+              </a:rPr>
+              <a:t>扉を閉めるか</a:t>
+            </a:r>
+            <a:endParaRPr lang="en-US" sz="1050" dirty="0"/>
+          </a:p>
+          <a:p>
+            <a:pPr indent="0" marL="0">
+              <a:lnSpc>
+                <a:spcPct val="90000"/>
+              </a:lnSpc>
+              <a:buNone/>
+            </a:pPr>
+            <a:r>
+              <a:rPr lang="en-US" sz="1050" b="1" dirty="0">
+                <a:solidFill>
+                  <a:srgbClr val="1B2733"/>
+                </a:solidFill>
+                <a:latin typeface="Yu Gothic" pitchFamily="34" charset="0"/>
+                <a:ea typeface="Yu Gothic" pitchFamily="34" charset="-122"/>
+                <a:cs typeface="Yu Gothic" pitchFamily="34" charset="-120"/>
+              </a:rPr>
+              <a:t>すぐには閉めない。中に人がいる場合、退路を塞ぐことになる。</a:t>
+            </a:r>
+            <a:endParaRPr lang="en-US" sz="1050" dirty="0"/>
+          </a:p>
+          <a:p>
+            <a:pPr indent="0" marL="0">
+              <a:lnSpc>
+                <a:spcPct val="90000"/>
+              </a:lnSpc>
+              <a:buNone/>
+            </a:pPr>
+            <a:r>
+              <a:rPr lang="en-US" sz="800" i="1" dirty="0">
+                <a:solidFill>
+                  <a:srgbClr val="5F7183"/>
+                </a:solidFill>
+                <a:latin typeface="Calibri" pitchFamily="34" charset="0"/>
+                <a:ea typeface="Calibri" pitchFamily="34" charset="-122"/>
+                <a:cs typeface="Calibri" pitchFamily="34" charset="-120"/>
+              </a:rPr>
+              <a:t>Not immediately. If someone is inside, you would be cutting off their exit.</a:t>
+            </a:r>
+            <a:endParaRPr lang="en-US" sz="1050" dirty="0"/>
+          </a:p>
+        </p:txBody>
+      </p:sp>
+      <p:sp>
+        <p:nvSpPr>
+          <p:cNvPr id="9" name="Shape 6"/>
+          <p:cNvSpPr/>
+          <p:nvPr/>
+        </p:nvSpPr>
+        <p:spPr>
+          <a:xfrm>
+            <a:off x="6223864" y="1773936"/>
+            <a:ext cx="5327752" cy="1274064"/>
+          </a:xfrm>
+          <a:prstGeom prst="roundRect">
+            <a:avLst>
+              <a:gd name="adj" fmla="val 2871"/>
+            </a:avLst>
+          </a:prstGeom>
+          <a:solidFill>
+            <a:srgbClr val="EFF4F8"/>
+          </a:solidFill>
+          <a:ln/>
+        </p:spPr>
+      </p:sp>
+      <p:sp>
+        <p:nvSpPr>
+          <p:cNvPr id="10" name="Text 7"/>
+          <p:cNvSpPr/>
+          <p:nvPr/>
+        </p:nvSpPr>
+        <p:spPr>
+          <a:xfrm>
+            <a:off x="6461608" y="1865376"/>
+            <a:ext cx="4852264" cy="1091184"/>
+          </a:xfrm>
+          <a:prstGeom prst="rect">
+            <a:avLst/>
+          </a:prstGeom>
+          <a:noFill/>
+          <a:ln/>
+        </p:spPr>
+        <p:txBody>
+          <a:bodyPr wrap="square" lIns="0" tIns="0" rIns="0" bIns="0" rtlCol="0" anchor="t"/>
+          <a:lstStyle/>
+          <a:p>
+            <a:pPr indent="0" marL="0">
+              <a:lnSpc>
+                <a:spcPct val="90000"/>
+              </a:lnSpc>
+              <a:buNone/>
+            </a:pPr>
+            <a:r>
+              <a:rPr lang="en-US" sz="1050" b="1" dirty="0">
+                <a:solidFill>
+                  <a:srgbClr val="093259"/>
+                </a:solidFill>
+                <a:latin typeface="Yu Gothic" pitchFamily="34" charset="0"/>
+                <a:ea typeface="Yu Gothic" pitchFamily="34" charset="-122"/>
+                <a:cs typeface="Yu Gothic" pitchFamily="34" charset="-120"/>
+              </a:rPr>
+              <a:t>単独で外へ</a:t>
+            </a:r>
+            <a:endParaRPr lang="en-US" sz="1050" dirty="0"/>
+          </a:p>
+          <a:p>
+            <a:pPr indent="0" marL="0">
+              <a:lnSpc>
+                <a:spcPct val="90000"/>
+              </a:lnSpc>
+              <a:buNone/>
+            </a:pPr>
+            <a:r>
+              <a:rPr lang="en-US" sz="1050" b="1" dirty="0">
+                <a:solidFill>
+                  <a:srgbClr val="1B2733"/>
+                </a:solidFill>
+                <a:latin typeface="Yu Gothic" pitchFamily="34" charset="0"/>
+                <a:ea typeface="Yu Gothic" pitchFamily="34" charset="-122"/>
+                <a:cs typeface="Yu Gothic" pitchFamily="34" charset="-120"/>
+              </a:rPr>
+              <a:t>行かない。応援を待つ。行く場合は所在を伝えてから。</a:t>
+            </a:r>
+            <a:endParaRPr lang="en-US" sz="1050" dirty="0"/>
+          </a:p>
+          <a:p>
+            <a:pPr indent="0" marL="0">
+              <a:lnSpc>
+                <a:spcPct val="90000"/>
+              </a:lnSpc>
+              <a:buNone/>
+            </a:pPr>
+            <a:r>
+              <a:rPr lang="en-US" sz="800" i="1" dirty="0">
+                <a:solidFill>
+                  <a:srgbClr val="5F7183"/>
+                </a:solidFill>
+                <a:latin typeface="Calibri" pitchFamily="34" charset="0"/>
+                <a:ea typeface="Calibri" pitchFamily="34" charset="-122"/>
+                <a:cs typeface="Calibri" pitchFamily="34" charset="-120"/>
+              </a:rPr>
+              <a:t>Do not go. Wait for backup. If you must, tell someone where you are.</a:t>
+            </a:r>
+            <a:endParaRPr lang="en-US" sz="1050" dirty="0"/>
+          </a:p>
+        </p:txBody>
+      </p:sp>
+      <p:sp>
+        <p:nvSpPr>
+          <p:cNvPr id="11" name="Shape 8"/>
+          <p:cNvSpPr/>
+          <p:nvPr/>
+        </p:nvSpPr>
+        <p:spPr>
+          <a:xfrm>
+            <a:off x="640080" y="3176016"/>
+            <a:ext cx="5327752" cy="1274064"/>
+          </a:xfrm>
+          <a:prstGeom prst="roundRect">
+            <a:avLst>
+              <a:gd name="adj" fmla="val 2871"/>
+            </a:avLst>
+          </a:prstGeom>
+          <a:solidFill>
+            <a:srgbClr val="EFF4F8"/>
+          </a:solidFill>
+          <a:ln/>
+        </p:spPr>
+      </p:sp>
+      <p:sp>
+        <p:nvSpPr>
+          <p:cNvPr id="12" name="Text 9"/>
+          <p:cNvSpPr/>
+          <p:nvPr/>
+        </p:nvSpPr>
+        <p:spPr>
+          <a:xfrm>
+            <a:off x="877824" y="3267456"/>
+            <a:ext cx="4852264" cy="1091184"/>
+          </a:xfrm>
+          <a:prstGeom prst="rect">
+            <a:avLst/>
+          </a:prstGeom>
+          <a:noFill/>
+          <a:ln/>
+        </p:spPr>
+        <p:txBody>
+          <a:bodyPr wrap="square" lIns="0" tIns="0" rIns="0" bIns="0" rtlCol="0" anchor="t"/>
+          <a:lstStyle/>
+          <a:p>
+            <a:pPr indent="0" marL="0">
+              <a:lnSpc>
+                <a:spcPct val="90000"/>
+              </a:lnSpc>
+              <a:buNone/>
+            </a:pPr>
+            <a:r>
+              <a:rPr lang="en-US" sz="1050" b="1" dirty="0">
+                <a:solidFill>
+                  <a:srgbClr val="093259"/>
+                </a:solidFill>
+                <a:latin typeface="Yu Gothic" pitchFamily="34" charset="0"/>
+                <a:ea typeface="Yu Gothic" pitchFamily="34" charset="-122"/>
+                <a:cs typeface="Yu Gothic" pitchFamily="34" charset="-120"/>
+              </a:rPr>
+              <a:t>残業者の存在</a:t>
+            </a:r>
+            <a:endParaRPr lang="en-US" sz="1050" dirty="0"/>
+          </a:p>
+          <a:p>
+            <a:pPr indent="0" marL="0">
+              <a:lnSpc>
+                <a:spcPct val="90000"/>
+              </a:lnSpc>
+              <a:buNone/>
+            </a:pPr>
+            <a:r>
+              <a:rPr lang="en-US" sz="1050" b="1" dirty="0">
+                <a:solidFill>
+                  <a:srgbClr val="1B2733"/>
+                </a:solidFill>
+                <a:latin typeface="Yu Gothic" pitchFamily="34" charset="0"/>
+                <a:ea typeface="Yu Gothic" pitchFamily="34" charset="-122"/>
+                <a:cs typeface="Yu Gothic" pitchFamily="34" charset="-120"/>
+              </a:rPr>
+              <a:t>People が最優先。所在確認を先に行う。</a:t>
+            </a:r>
+            <a:endParaRPr lang="en-US" sz="1050" dirty="0"/>
+          </a:p>
+          <a:p>
+            <a:pPr indent="0" marL="0">
+              <a:lnSpc>
+                <a:spcPct val="90000"/>
+              </a:lnSpc>
+              <a:buNone/>
+            </a:pPr>
+            <a:r>
+              <a:rPr lang="en-US" sz="800" i="1" dirty="0">
+                <a:solidFill>
+                  <a:srgbClr val="5F7183"/>
+                </a:solidFill>
+                <a:latin typeface="Calibri" pitchFamily="34" charset="0"/>
+                <a:ea typeface="Calibri" pitchFamily="34" charset="-122"/>
+                <a:cs typeface="Calibri" pitchFamily="34" charset="-120"/>
+              </a:rPr>
+              <a:t>People come first. Confirm where they are before anything else.</a:t>
+            </a:r>
+            <a:endParaRPr lang="en-US" sz="1050" dirty="0"/>
+          </a:p>
+        </p:txBody>
+      </p:sp>
+      <p:sp>
+        <p:nvSpPr>
+          <p:cNvPr id="13" name="Shape 10"/>
+          <p:cNvSpPr/>
+          <p:nvPr/>
+        </p:nvSpPr>
+        <p:spPr>
+          <a:xfrm>
+            <a:off x="6223864" y="3176016"/>
+            <a:ext cx="5327752" cy="1274064"/>
+          </a:xfrm>
+          <a:prstGeom prst="roundRect">
+            <a:avLst>
+              <a:gd name="adj" fmla="val 2871"/>
+            </a:avLst>
+          </a:prstGeom>
+          <a:solidFill>
+            <a:srgbClr val="EFF4F8"/>
+          </a:solidFill>
+          <a:ln/>
+        </p:spPr>
+      </p:sp>
+      <p:sp>
+        <p:nvSpPr>
+          <p:cNvPr id="14" name="Text 11"/>
+          <p:cNvSpPr/>
+          <p:nvPr/>
+        </p:nvSpPr>
+        <p:spPr>
+          <a:xfrm>
+            <a:off x="6461608" y="3267456"/>
+            <a:ext cx="4852264" cy="1091184"/>
+          </a:xfrm>
+          <a:prstGeom prst="rect">
+            <a:avLst/>
+          </a:prstGeom>
+          <a:noFill/>
+          <a:ln/>
+        </p:spPr>
+        <p:txBody>
+          <a:bodyPr wrap="square" lIns="0" tIns="0" rIns="0" bIns="0" rtlCol="0" anchor="t"/>
+          <a:lstStyle/>
+          <a:p>
+            <a:pPr indent="0" marL="0">
+              <a:lnSpc>
+                <a:spcPct val="90000"/>
+              </a:lnSpc>
+              <a:buNone/>
+            </a:pPr>
+            <a:r>
+              <a:rPr lang="en-US" sz="1050" b="1" dirty="0">
+                <a:solidFill>
+                  <a:srgbClr val="093259"/>
+                </a:solidFill>
+                <a:latin typeface="Yu Gothic" pitchFamily="34" charset="0"/>
+                <a:ea typeface="Yu Gothic" pitchFamily="34" charset="-122"/>
+                <a:cs typeface="Yu Gothic" pitchFamily="34" charset="-120"/>
+              </a:rPr>
+              <a:t>足跡</a:t>
+            </a:r>
+            <a:endParaRPr lang="en-US" sz="1050" dirty="0"/>
+          </a:p>
+          <a:p>
+            <a:pPr indent="0" marL="0">
+              <a:lnSpc>
+                <a:spcPct val="90000"/>
+              </a:lnSpc>
+              <a:buNone/>
+            </a:pPr>
+            <a:r>
+              <a:rPr lang="en-US" sz="1050" b="1" dirty="0">
+                <a:solidFill>
+                  <a:srgbClr val="1B2733"/>
+                </a:solidFill>
+                <a:latin typeface="Yu Gothic" pitchFamily="34" charset="0"/>
+                <a:ea typeface="Yu Gothic" pitchFamily="34" charset="-122"/>
+                <a:cs typeface="Yu Gothic" pitchFamily="34" charset="-120"/>
+              </a:rPr>
+              <a:t>現場保存の対象。踏まない。写真と時刻を残す。</a:t>
+            </a:r>
+            <a:endParaRPr lang="en-US" sz="1050" dirty="0"/>
+          </a:p>
+          <a:p>
+            <a:pPr indent="0" marL="0">
+              <a:lnSpc>
+                <a:spcPct val="90000"/>
+              </a:lnSpc>
+              <a:buNone/>
+            </a:pPr>
+            <a:r>
+              <a:rPr lang="en-US" sz="800" i="1" dirty="0">
+                <a:solidFill>
+                  <a:srgbClr val="5F7183"/>
+                </a:solidFill>
+                <a:latin typeface="Calibri" pitchFamily="34" charset="0"/>
+                <a:ea typeface="Calibri" pitchFamily="34" charset="-122"/>
+                <a:cs typeface="Calibri" pitchFamily="34" charset="-120"/>
+              </a:rPr>
+              <a:t>It is evidence. Do not step on it. Photograph it with the time.</a:t>
+            </a:r>
+            <a:endParaRPr lang="en-US" sz="1050" dirty="0"/>
+          </a:p>
+        </p:txBody>
+      </p:sp>
+      <p:sp>
+        <p:nvSpPr>
+          <p:cNvPr id="15" name="Shape 12"/>
+          <p:cNvSpPr/>
+          <p:nvPr/>
+        </p:nvSpPr>
+        <p:spPr>
+          <a:xfrm>
+            <a:off x="640080" y="4578096"/>
+            <a:ext cx="5327752" cy="1274064"/>
+          </a:xfrm>
+          <a:prstGeom prst="roundRect">
+            <a:avLst>
+              <a:gd name="adj" fmla="val 2871"/>
+            </a:avLst>
+          </a:prstGeom>
+          <a:solidFill>
+            <a:srgbClr val="EFF4F8"/>
+          </a:solidFill>
+          <a:ln/>
+        </p:spPr>
+      </p:sp>
+      <p:sp>
+        <p:nvSpPr>
+          <p:cNvPr id="16" name="Text 13"/>
+          <p:cNvSpPr/>
+          <p:nvPr/>
+        </p:nvSpPr>
+        <p:spPr>
+          <a:xfrm>
+            <a:off x="877824" y="4669536"/>
+            <a:ext cx="4852264" cy="1091184"/>
+          </a:xfrm>
+          <a:prstGeom prst="rect">
+            <a:avLst/>
+          </a:prstGeom>
+          <a:noFill/>
+          <a:ln/>
+        </p:spPr>
+        <p:txBody>
+          <a:bodyPr wrap="square" lIns="0" tIns="0" rIns="0" bIns="0" rtlCol="0" anchor="t"/>
+          <a:lstStyle/>
+          <a:p>
+            <a:pPr indent="0" marL="0">
+              <a:lnSpc>
+                <a:spcPct val="90000"/>
+              </a:lnSpc>
+              <a:buNone/>
+            </a:pPr>
+            <a:r>
+              <a:rPr lang="en-US" sz="1050" b="1" dirty="0">
+                <a:solidFill>
+                  <a:srgbClr val="093259"/>
+                </a:solidFill>
+                <a:latin typeface="Yu Gothic" pitchFamily="34" charset="0"/>
+                <a:ea typeface="Yu Gothic" pitchFamily="34" charset="-122"/>
+                <a:cs typeface="Yu Gothic" pitchFamily="34" charset="-120"/>
+              </a:rPr>
+              <a:t>無線が通じない</a:t>
+            </a:r>
+            <a:endParaRPr lang="en-US" sz="1050" dirty="0"/>
+          </a:p>
+          <a:p>
+            <a:pPr indent="0" marL="0">
+              <a:lnSpc>
+                <a:spcPct val="90000"/>
+              </a:lnSpc>
+              <a:buNone/>
+            </a:pPr>
+            <a:r>
+              <a:rPr lang="en-US" sz="1050" b="1" dirty="0">
+                <a:solidFill>
+                  <a:srgbClr val="1B2733"/>
+                </a:solidFill>
+                <a:latin typeface="Yu Gothic" pitchFamily="34" charset="0"/>
+                <a:ea typeface="Yu Gothic" pitchFamily="34" charset="-122"/>
+                <a:cs typeface="Yu Gothic" pitchFamily="34" charset="-120"/>
+              </a:rPr>
+              <a:t>代替手段を決めていたか。戻って報告することも選択肢。</a:t>
+            </a:r>
+            <a:endParaRPr lang="en-US" sz="1050" dirty="0"/>
+          </a:p>
+          <a:p>
+            <a:pPr indent="0" marL="0">
+              <a:lnSpc>
+                <a:spcPct val="90000"/>
+              </a:lnSpc>
+              <a:buNone/>
+            </a:pPr>
+            <a:r>
+              <a:rPr lang="en-US" sz="800" i="1" dirty="0">
+                <a:solidFill>
+                  <a:srgbClr val="5F7183"/>
+                </a:solidFill>
+                <a:latin typeface="Calibri" pitchFamily="34" charset="0"/>
+                <a:ea typeface="Calibri" pitchFamily="34" charset="-122"/>
+                <a:cs typeface="Calibri" pitchFamily="34" charset="-120"/>
+              </a:rPr>
+              <a:t>Had you agreed a fallback? Returning to report in person is a valid option.</a:t>
+            </a:r>
+            <a:endParaRPr lang="en-US" sz="1050" dirty="0"/>
+          </a:p>
+        </p:txBody>
+      </p:sp>
+      <p:sp>
+        <p:nvSpPr>
+          <p:cNvPr id="17" name="Shape 14"/>
+          <p:cNvSpPr/>
+          <p:nvPr/>
+        </p:nvSpPr>
+        <p:spPr>
+          <a:xfrm>
+            <a:off x="6223864" y="4578096"/>
+            <a:ext cx="5327752" cy="1274064"/>
+          </a:xfrm>
+          <a:prstGeom prst="roundRect">
+            <a:avLst>
+              <a:gd name="adj" fmla="val 2871"/>
+            </a:avLst>
+          </a:prstGeom>
+          <a:solidFill>
+            <a:srgbClr val="EFF4F8"/>
+          </a:solidFill>
+          <a:ln/>
+        </p:spPr>
+      </p:sp>
+      <p:sp>
+        <p:nvSpPr>
+          <p:cNvPr id="18" name="Text 15"/>
+          <p:cNvSpPr/>
+          <p:nvPr/>
+        </p:nvSpPr>
+        <p:spPr>
+          <a:xfrm>
+            <a:off x="6461608" y="4669536"/>
+            <a:ext cx="4852264" cy="1091184"/>
+          </a:xfrm>
+          <a:prstGeom prst="rect">
+            <a:avLst/>
+          </a:prstGeom>
+          <a:noFill/>
+          <a:ln/>
+        </p:spPr>
+        <p:txBody>
+          <a:bodyPr wrap="square" lIns="0" tIns="0" rIns="0" bIns="0" rtlCol="0" anchor="t"/>
+          <a:lstStyle/>
+          <a:p>
+            <a:pPr indent="0" marL="0">
+              <a:lnSpc>
+                <a:spcPct val="90000"/>
+              </a:lnSpc>
+              <a:buNone/>
+            </a:pPr>
+            <a:r>
+              <a:rPr lang="en-US" sz="1050" b="1" dirty="0">
+                <a:solidFill>
+                  <a:srgbClr val="093259"/>
+                </a:solidFill>
+                <a:latin typeface="Yu Gothic" pitchFamily="34" charset="0"/>
+                <a:ea typeface="Yu Gothic" pitchFamily="34" charset="-122"/>
+                <a:cs typeface="Yu Gothic" pitchFamily="34" charset="-120"/>
+              </a:rPr>
+              <a:t>一次報告</a:t>
+            </a:r>
+            <a:endParaRPr lang="en-US" sz="1050" dirty="0"/>
+          </a:p>
+          <a:p>
+            <a:pPr indent="0" marL="0">
+              <a:lnSpc>
+                <a:spcPct val="90000"/>
+              </a:lnSpc>
+              <a:buNone/>
+            </a:pPr>
+            <a:r>
+              <a:rPr lang="en-US" sz="1050" b="1" dirty="0">
+                <a:solidFill>
+                  <a:srgbClr val="1B2733"/>
+                </a:solidFill>
+                <a:latin typeface="Yu Gothic" pitchFamily="34" charset="0"/>
+                <a:ea typeface="Yu Gothic" pitchFamily="34" charset="-122"/>
+                <a:cs typeface="Yu Gothic" pitchFamily="34" charset="-120"/>
+              </a:rPr>
+              <a:t>事実（開いていた、幅、時刻）と評価（侵入の可能性）を分ける。</a:t>
+            </a:r>
+            <a:endParaRPr lang="en-US" sz="1050" dirty="0"/>
+          </a:p>
+          <a:p>
+            <a:pPr indent="0" marL="0">
+              <a:lnSpc>
+                <a:spcPct val="90000"/>
+              </a:lnSpc>
+              <a:buNone/>
+            </a:pPr>
+            <a:r>
+              <a:rPr lang="en-US" sz="800" i="1" dirty="0">
+                <a:solidFill>
+                  <a:srgbClr val="5F7183"/>
+                </a:solidFill>
+                <a:latin typeface="Calibri" pitchFamily="34" charset="0"/>
+                <a:ea typeface="Calibri" pitchFamily="34" charset="-122"/>
+                <a:cs typeface="Calibri" pitchFamily="34" charset="-120"/>
+              </a:rPr>
+              <a:t>Separate fact (open, width, time) from assessment (possible intrusion).</a:t>
+            </a:r>
+            <a:endParaRPr lang="en-US" sz="1050" dirty="0"/>
+          </a:p>
+        </p:txBody>
+      </p:sp>
+      <p:sp>
+        <p:nvSpPr>
+          <p:cNvPr id="19" name="Text 16"/>
+          <p:cNvSpPr/>
+          <p:nvPr/>
+        </p:nvSpPr>
+        <p:spPr>
+          <a:xfrm>
+            <a:off x="640080" y="5907024"/>
+            <a:ext cx="10911535" cy="310896"/>
+          </a:xfrm>
+          <a:prstGeom prst="rect">
+            <a:avLst/>
+          </a:prstGeom>
+          <a:noFill/>
+          <a:ln/>
+        </p:spPr>
+        <p:txBody>
+          <a:bodyPr wrap="square" lIns="0" tIns="0" rIns="0" bIns="0" rtlCol="0" anchor="t"/>
+          <a:lstStyle/>
+          <a:p>
+            <a:pPr indent="0" marL="0">
+              <a:lnSpc>
+                <a:spcPct val="88000"/>
+              </a:lnSpc>
+              <a:buNone/>
+            </a:pPr>
+            <a:r>
+              <a:rPr lang="en-US" sz="900" b="1" dirty="0">
+                <a:solidFill>
+                  <a:srgbClr val="0D8A76"/>
+                </a:solidFill>
+                <a:latin typeface="Yu Gothic" pitchFamily="34" charset="0"/>
+                <a:ea typeface="Yu Gothic" pitchFamily="34" charset="-122"/>
+                <a:cs typeface="Yu Gothic" pitchFamily="34" charset="-120"/>
+              </a:rPr>
+              <a:t>Site SOP優先　</a:t>
+            </a:r>
+            <a:pPr indent="0" marL="0">
+              <a:lnSpc>
+                <a:spcPct val="88000"/>
+              </a:lnSpc>
+              <a:buNone/>
+            </a:pPr>
+            <a:r>
+              <a:rPr lang="en-US" sz="900" dirty="0">
+                <a:solidFill>
+                  <a:srgbClr val="1B2733"/>
+                </a:solidFill>
+                <a:latin typeface="Yu Gothic" pitchFamily="34" charset="0"/>
+                <a:ea typeface="Yu Gothic" pitchFamily="34" charset="-122"/>
+                <a:cs typeface="Yu Gothic" pitchFamily="34" charset="-120"/>
+              </a:rPr>
+              <a:t>単独行動の可否、応援要請の基準、通信不良時の代替手段は現場ごとに定められている。</a:t>
+            </a:r>
+            <a:endParaRPr lang="en-US" sz="900" dirty="0"/>
+          </a:p>
+          <a:p>
+            <a:pPr indent="0" marL="0">
+              <a:lnSpc>
+                <a:spcPct val="88000"/>
+              </a:lnSpc>
+              <a:buNone/>
+            </a:pPr>
+            <a:r>
+              <a:rPr lang="en-US" sz="750" i="1" dirty="0">
+                <a:solidFill>
+                  <a:srgbClr val="5F7183"/>
+                </a:solidFill>
+                <a:latin typeface="Calibri" pitchFamily="34" charset="0"/>
+                <a:ea typeface="Calibri" pitchFamily="34" charset="-122"/>
+                <a:cs typeface="Calibri" pitchFamily="34" charset="-120"/>
+              </a:rPr>
+              <a:t>Whether to act alone, when to call backup, and comms fallbacks are set per site.</a:t>
+            </a:r>
+            <a:endParaRPr lang="en-US" sz="900" dirty="0"/>
+          </a:p>
+        </p:txBody>
+      </p:sp>
+      <p:sp>
+        <p:nvSpPr>
+          <p:cNvPr id="20" name="Text 17"/>
+          <p:cNvSpPr/>
+          <p:nvPr/>
+        </p:nvSpPr>
+        <p:spPr>
+          <a:xfrm>
+            <a:off x="640080" y="6272784"/>
+            <a:ext cx="9905695" cy="237744"/>
+          </a:xfrm>
+          <a:prstGeom prst="rect">
+            <a:avLst/>
+          </a:prstGeom>
+          <a:noFill/>
+          <a:ln/>
+        </p:spPr>
+        <p:txBody>
+          <a:bodyPr wrap="square" lIns="0" tIns="0" rIns="0" bIns="0" rtlCol="0" anchor="t"/>
+          <a:lstStyle/>
+          <a:p>
+            <a:pPr indent="0" marL="0">
+              <a:buNone/>
+            </a:pPr>
+            <a:r>
+              <a:rPr lang="en-US" sz="750" b="1" dirty="0">
+                <a:solidFill>
+                  <a:srgbClr val="D6E0E9"/>
+                </a:solidFill>
+                <a:latin typeface="Yu Gothic" pitchFamily="34" charset="0"/>
+                <a:ea typeface="Yu Gothic" pitchFamily="34" charset="-122"/>
+                <a:cs typeface="Yu Gothic" pitchFamily="34" charset="-120"/>
+              </a:rPr>
+              <a:t>ソース　</a:t>
+            </a:r>
+            <a:pPr indent="0" marL="0">
+              <a:buNone/>
+            </a:pPr>
+            <a:r>
+              <a:rPr lang="en-US" sz="750" dirty="0">
+                <a:solidFill>
+                  <a:srgbClr val="5F7183"/>
+                </a:solidFill>
+                <a:latin typeface="Yu Gothic" pitchFamily="34" charset="0"/>
+                <a:ea typeface="Yu Gothic" pitchFamily="34" charset="-122"/>
+                <a:cs typeface="Yu Gothic" pitchFamily="34" charset="-120"/>
+              </a:rPr>
+              <a:t>警備業法、警察庁「警備員教育」</a:t>
+            </a:r>
+            <a:endParaRPr lang="en-US" sz="750" dirty="0"/>
+          </a:p>
+        </p:txBody>
+      </p:sp>
+      <p:sp>
+        <p:nvSpPr>
+          <p:cNvPr id="21" name="Text 18"/>
+          <p:cNvSpPr/>
+          <p:nvPr/>
+        </p:nvSpPr>
+        <p:spPr>
+          <a:xfrm>
+            <a:off x="640080" y="6382512"/>
+            <a:ext cx="8778240" cy="292608"/>
+          </a:xfrm>
+          <a:prstGeom prst="rect">
+            <a:avLst/>
+          </a:prstGeom>
+          <a:noFill/>
+          <a:ln/>
+        </p:spPr>
+        <p:txBody>
+          <a:bodyPr wrap="square" lIns="0" tIns="0" rIns="0" bIns="0" rtlCol="0" anchor="ctr"/>
+          <a:lstStyle/>
+          <a:p>
+            <a:pPr indent="0" marL="0">
+              <a:buNone/>
+            </a:pPr>
+            <a:r>
+              <a:rPr lang="en-US" sz="900" dirty="0">
+                <a:solidFill>
+                  <a:srgbClr val="5F7183"/>
+                </a:solidFill>
+                <a:latin typeface="Yu Gothic" pitchFamily="34" charset="0"/>
+                <a:ea typeface="Yu Gothic" pitchFamily="34" charset="-122"/>
+                <a:cs typeface="Yu Gothic" pitchFamily="34" charset="-120"/>
+              </a:rPr>
+              <a:t>第4時限｜業務別教育1 巡回の方法に関すること  </a:t>
+            </a:r>
+            <a:pPr indent="0" marL="0">
+              <a:buNone/>
+            </a:pPr>
+            <a:r>
+              <a:rPr lang="en-US" sz="850" i="1" dirty="0">
+                <a:solidFill>
+                  <a:srgbClr val="D6E0E9"/>
+                </a:solidFill>
+                <a:latin typeface="Calibri" pitchFamily="34" charset="0"/>
+                <a:ea typeface="Calibri" pitchFamily="34" charset="-122"/>
+                <a:cs typeface="Calibri" pitchFamily="34" charset="-120"/>
+              </a:rPr>
+              <a:t>Period 4 | Task-Specific Training 1 — Patrol Methods</a:t>
+            </a:r>
+            <a:endParaRPr lang="en-US" sz="900" dirty="0"/>
+          </a:p>
+        </p:txBody>
+      </p:sp>
+      <p:sp>
+        <p:nvSpPr>
+          <p:cNvPr id="22" name="Text 19"/>
+          <p:cNvSpPr/>
+          <p:nvPr/>
+        </p:nvSpPr>
+        <p:spPr>
+          <a:xfrm>
+            <a:off x="10637215" y="6382512"/>
+            <a:ext cx="914400" cy="292608"/>
+          </a:xfrm>
+          <a:prstGeom prst="rect">
+            <a:avLst/>
+          </a:prstGeom>
+          <a:noFill/>
+          <a:ln/>
+        </p:spPr>
+        <p:txBody>
+          <a:bodyPr wrap="square" lIns="0" tIns="0" rIns="0" bIns="0" rtlCol="0" anchor="ctr"/>
+          <a:lstStyle/>
+          <a:p>
+            <a:pPr algn="r" indent="0" marL="0">
+              <a:buNone/>
+            </a:pPr>
+            <a:r>
+              <a:rPr lang="en-US" sz="1000" dirty="0">
+                <a:solidFill>
+                  <a:srgbClr val="5F7183"/>
+                </a:solidFill>
+                <a:latin typeface="Calibri" pitchFamily="34" charset="0"/>
+                <a:ea typeface="Calibri" pitchFamily="34" charset="-122"/>
+                <a:cs typeface="Calibri" pitchFamily="34" charset="-120"/>
+              </a:rPr>
+              <a:t>10</a:t>
+            </a:r>
+            <a:endParaRPr lang="en-US" sz="1000" dirty="0"/>
+          </a:p>
+        </p:txBody>
+      </p:sp>
+    </p:spTree>
+  </p:cSld>
+  <p:clrMapOvr>
+    <a:masterClrMapping/>
+  </p:clrMapOvr>
+</p:sld>
+</file>
+
 <file path=ppt/slides/slide2.xml><?xml version="1.0" encoding="utf-8"?>
 <p:sld xmlns:a="http://schemas.openxmlformats.org/drawingml/2006/main" xmlns:r="http://schemas.openxmlformats.org/officeDocument/2006/relationships" xmlns:p="http://schemas.openxmlformats.org/presentationml/2006/main">
   <p:cSld name="Slide 2">
@@ -2259,7 +3543,7 @@
                 <a:ea typeface="Calibri" pitchFamily="34" charset="-122"/>
                 <a:cs typeface="Calibri" pitchFamily="34" charset="-120"/>
               </a:rPr>
-              <a:t>　Detect: find a problem before it becomes a loss</a:t>
+              <a:t>  Detect: find a problem before it becomes a loss</a:t>
             </a:r>
             <a:endParaRPr lang="en-US" sz="950" dirty="0"/>
           </a:p>
@@ -2305,7 +3589,7 @@
                 <a:ea typeface="Calibri" pitchFamily="34" charset="-122"/>
                 <a:cs typeface="Calibri" pitchFamily="34" charset="-120"/>
               </a:rPr>
-              <a:t>　Deter: show that guards are patrolling</a:t>
+              <a:t>  Deter: show that guards are patrolling</a:t>
             </a:r>
             <a:endParaRPr lang="en-US" sz="950" dirty="0"/>
           </a:p>
@@ -2351,7 +3635,7 @@
                 <a:ea typeface="Calibri" pitchFamily="34" charset="-122"/>
                 <a:cs typeface="Calibri" pitchFamily="34" charset="-120"/>
               </a:rPr>
-              <a:t>　Document: leave evidence of what was done, in a form that can be shown</a:t>
+              <a:t>  Document: leave evidence of what was done, in a form that can be shown</a:t>
             </a:r>
             <a:endParaRPr lang="en-US" sz="950" dirty="0"/>
           </a:p>
@@ -2397,7 +3681,7 @@
                 <a:ea typeface="Calibri" pitchFamily="34" charset="-122"/>
                 <a:cs typeface="Calibri" pitchFamily="34" charset="-120"/>
               </a:rPr>
-              <a:t>　Of the three, documentation is the one most often forgotten</a:t>
+              <a:t>  Of the three, documentation is the one most often forgotten</a:t>
             </a:r>
             <a:endParaRPr lang="en-US" sz="950" dirty="0"/>
           </a:p>
@@ -2608,7 +3892,7 @@
                 <a:ea typeface="Calibri" pitchFamily="34" charset="-122"/>
                 <a:cs typeface="Calibri" pitchFamily="34" charset="-120"/>
               </a:rPr>
-              <a:t>　Carried out at set times. Less likely to be skipped</a:t>
+              <a:t>  Carried out at set times. Less likely to be skipped</a:t>
             </a:r>
             <a:endParaRPr lang="en-US" sz="950" dirty="0"/>
           </a:p>
@@ -2654,7 +3938,7 @@
                 <a:ea typeface="Calibri" pitchFamily="34" charset="-122"/>
                 <a:cs typeface="Calibri" pitchFamily="34" charset="-120"/>
               </a:rPr>
-              <a:t>　Records are consistent, and easy to show as contract performance</a:t>
+              <a:t>  Records are consistent, and easy to show as contract performance</a:t>
             </a:r>
             <a:endParaRPr lang="en-US" sz="950" dirty="0"/>
           </a:p>
@@ -2700,7 +3984,7 @@
                 <a:ea typeface="Calibri" pitchFamily="34" charset="-122"/>
                 <a:cs typeface="Calibri" pitchFamily="34" charset="-120"/>
               </a:rPr>
-              <a:t>　Weakness: the timing can be learned from outside</a:t>
+              <a:t>  Weakness: the timing can be learned from outside</a:t>
             </a:r>
             <a:endParaRPr lang="en-US" sz="950" dirty="0"/>
           </a:p>
@@ -2746,7 +4030,7 @@
                 <a:ea typeface="Calibri" pitchFamily="34" charset="-122"/>
                 <a:cs typeface="Calibri" pitchFamily="34" charset="-120"/>
               </a:rPr>
-              <a:t>　Same time and route every day fixes the gaps in coverage</a:t>
+              <a:t>  Same time and route every day fixes the gaps in coverage</a:t>
             </a:r>
             <a:endParaRPr lang="en-US" sz="950" dirty="0"/>
           </a:p>
@@ -2957,7 +4241,7 @@
                 <a:ea typeface="Calibri" pitchFamily="34" charset="-122"/>
                 <a:cs typeface="Calibri" pitchFamily="34" charset="-120"/>
               </a:rPr>
-              <a:t>　Timing and route are varied</a:t>
+              <a:t>  Timing and route are varied</a:t>
             </a:r>
             <a:endParaRPr lang="en-US" sz="950" dirty="0"/>
           </a:p>
@@ -3003,7 +4287,7 @@
                 <a:ea typeface="Calibri" pitchFamily="34" charset="-122"/>
                 <a:cs typeface="Calibri" pitchFamily="34" charset="-120"/>
               </a:rPr>
-              <a:t>　Harder to predict, so the deterrent effect is stronger</a:t>
+              <a:t>  Harder to predict, so the deterrent effect is stronger</a:t>
             </a:r>
             <a:endParaRPr lang="en-US" sz="950" dirty="0"/>
           </a:p>
@@ -3049,7 +4333,7 @@
                 <a:ea typeface="Calibri" pitchFamily="34" charset="-122"/>
                 <a:cs typeface="Calibri" pitchFamily="34" charset="-120"/>
               </a:rPr>
-              <a:t>　Weakness: gaps in checking appear. It has to be designed</a:t>
+              <a:t>  Weakness: gaps in checking appear. It has to be designed</a:t>
             </a:r>
             <a:endParaRPr lang="en-US" sz="950" dirty="0"/>
           </a:p>
@@ -3095,7 +4379,7 @@
                 <a:ea typeface="Calibri" pitchFamily="34" charset="-122"/>
                 <a:cs typeface="Calibri" pitchFamily="34" charset="-120"/>
               </a:rPr>
-              <a:t>　It does not mean wandering. It means recombining a defined route</a:t>
+              <a:t>  It does not mean wandering. It means recombining a defined route</a:t>
             </a:r>
             <a:endParaRPr lang="en-US" sz="950" dirty="0"/>
           </a:p>
@@ -3306,7 +4590,7 @@
                 <a:ea typeface="Calibri" pitchFamily="34" charset="-122"/>
                 <a:cs typeface="Calibri" pitchFamily="34" charset="-120"/>
               </a:rPr>
-              <a:t>　During working hours people are present. Expect to be spoken to</a:t>
+              <a:t>  During working hours people are present. Expect to be spoken to</a:t>
             </a:r>
             <a:endParaRPr lang="en-US" sz="950" dirty="0"/>
           </a:p>
@@ -3352,7 +4636,7 @@
                 <a:ea typeface="Calibri" pitchFamily="34" charset="-122"/>
                 <a:cs typeface="Calibri" pitchFamily="34" charset="-120"/>
               </a:rPr>
-              <a:t>　At night the floor is empty. Detection depends on the patrol alone</a:t>
+              <a:t>  At night the floor is empty. Detection depends on the patrol alone</a:t>
             </a:r>
             <a:endParaRPr lang="en-US" sz="950" dirty="0"/>
           </a:p>
@@ -3398,7 +4682,7 @@
                 <a:ea typeface="Calibri" pitchFamily="34" charset="-122"/>
                 <a:cs typeface="Calibri" pitchFamily="34" charset="-120"/>
               </a:rPr>
-              <a:t>　If anyone remains in the building, know where they are</a:t>
+              <a:t>  If anyone remains in the building, know where they are</a:t>
             </a:r>
             <a:endParaRPr lang="en-US" sz="950" dirty="0"/>
           </a:p>
@@ -3444,7 +4728,7 @@
                 <a:ea typeface="Calibri" pitchFamily="34" charset="-122"/>
                 <a:cs typeface="Calibri" pitchFamily="34" charset="-120"/>
               </a:rPr>
-              <a:t>　Choose routes and times that do not disturb the client's work</a:t>
+              <a:t>  Choose routes and times that do not disturb the client's work</a:t>
             </a:r>
             <a:endParaRPr lang="en-US" sz="950" dirty="0"/>
           </a:p>
@@ -4176,7 +5460,7 @@
                 <a:ea typeface="Calibri" pitchFamily="34" charset="-122"/>
                 <a:cs typeface="Calibri" pitchFamily="34" charset="-120"/>
               </a:rPr>
-              <a:t>　The order you walk. Reverse it, split it, or change the start point</a:t>
+              <a:t>  The order you walk. Reverse it, split it, or change the start point</a:t>
             </a:r>
             <a:endParaRPr lang="en-US" sz="950" dirty="0"/>
           </a:p>
@@ -4222,7 +5506,7 @@
                 <a:ea typeface="Calibri" pitchFamily="34" charset="-122"/>
                 <a:cs typeface="Calibri" pitchFamily="34" charset="-120"/>
               </a:rPr>
-              <a:t>　Top-down or bottom-up. Do not always use the same direction</a:t>
+              <a:t>  Top-down or bottom-up. Do not always use the same direction</a:t>
             </a:r>
             <a:endParaRPr lang="en-US" sz="950" dirty="0"/>
           </a:p>
@@ -4268,7 +5552,7 @@
                 <a:ea typeface="Calibri" pitchFamily="34" charset="-122"/>
                 <a:cs typeface="Calibri" pitchFamily="34" charset="-120"/>
               </a:rPr>
-              <a:t>　Whether you use the lift or the stairs is also a variable</a:t>
+              <a:t>  Whether you use the lift or the stairs is also a variable</a:t>
             </a:r>
             <a:endParaRPr lang="en-US" sz="950" dirty="0"/>
           </a:p>
@@ -4314,7 +5598,7 @@
                 <a:ea typeface="Calibri" pitchFamily="34" charset="-122"/>
                 <a:cs typeface="Calibri" pitchFamily="34" charset="-120"/>
               </a:rPr>
-              <a:t>　However you vary it, every checkpoint must still be visited</a:t>
+              <a:t>  However you vary it, every checkpoint must still be visited</a:t>
             </a:r>
             <a:endParaRPr lang="en-US" sz="950" dirty="0"/>
           </a:p>
@@ -4525,7 +5809,7 @@
                 <a:ea typeface="Calibri" pitchFamily="34" charset="-122"/>
                 <a:cs typeface="Calibri" pitchFamily="34" charset="-120"/>
               </a:rPr>
-              <a:t>　Points you must visit, where the visit can be recorded</a:t>
+              <a:t>  Points you must visit, where the visit can be recorded</a:t>
             </a:r>
             <a:endParaRPr lang="en-US" sz="950" dirty="0"/>
           </a:p>
@@ -4571,7 +5855,7 @@
                 <a:ea typeface="Calibri" pitchFamily="34" charset="-122"/>
                 <a:cs typeface="Calibri" pitchFamily="34" charset="-120"/>
               </a:rPr>
-              <a:t>　Passing by is not visiting. You must actually check</a:t>
+              <a:t>  Passing by is not visiting. You must actually check</a:t>
             </a:r>
             <a:endParaRPr lang="en-US" sz="950" dirty="0"/>
           </a:p>
@@ -4617,7 +5901,7 @@
                 <a:ea typeface="Calibri" pitchFamily="34" charset="-122"/>
                 <a:cs typeface="Calibri" pitchFamily="34" charset="-120"/>
               </a:rPr>
-              <a:t>　The method varies by site. Reliability matters more than the method</a:t>
+              <a:t>  The method varies by site. Reliability matters more than the method</a:t>
             </a:r>
             <a:endParaRPr lang="en-US" sz="950" dirty="0"/>
           </a:p>
@@ -4663,7 +5947,7 @@
                 <a:ea typeface="Calibri" pitchFamily="34" charset="-122"/>
                 <a:cs typeface="Calibri" pitchFamily="34" charset="-120"/>
               </a:rPr>
-              <a:t>　If you skip one, record that you skipped it</a:t>
+              <a:t>  If you skip one, record that you skipped it</a:t>
             </a:r>
             <a:endParaRPr lang="en-US" sz="950" dirty="0"/>
           </a:p>
@@ -4874,7 +6158,7 @@
                 <a:ea typeface="Calibri" pitchFamily="34" charset="-122"/>
                 <a:cs typeface="Calibri" pitchFamily="34" charset="-120"/>
               </a:rPr>
-              <a:t>　Where incidents are likely, or where the loss would be large</a:t>
+              <a:t>  Where incidents are likely, or where the loss would be large</a:t>
             </a:r>
             <a:endParaRPr lang="en-US" sz="950" dirty="0"/>
           </a:p>
@@ -4920,7 +6204,7 @@
                 <a:ea typeface="Calibri" pitchFamily="34" charset="-122"/>
                 <a:cs typeface="Calibri" pitchFamily="34" charset="-120"/>
               </a:rPr>
-              <a:t>　Power rooms, server rooms, archives, safes, hazardous-material stores</a:t>
+              <a:t>  Power rooms, server rooms, archives, safes, hazardous-material stores</a:t>
             </a:r>
             <a:endParaRPr lang="en-US" sz="950" dirty="0"/>
           </a:p>
@@ -4966,7 +6250,7 @@
                 <a:ea typeface="Calibri" pitchFamily="34" charset="-122"/>
                 <a:cs typeface="Calibri" pitchFamily="34" charset="-120"/>
               </a:rPr>
-              <a:t>　Emergency exits, fire doors, firefighting equipment, escape routes</a:t>
+              <a:t>  Emergency exits, fire doors, firefighting equipment, escape routes</a:t>
             </a:r>
             <a:endParaRPr lang="en-US" sz="950" dirty="0"/>
           </a:p>
@@ -5012,7 +6296,7 @@
                 <a:ea typeface="Calibri" pitchFamily="34" charset="-122"/>
                 <a:cs typeface="Calibri" pitchFamily="34" charset="-120"/>
               </a:rPr>
-              <a:t>　Include the perimeter, loading bays, car parks and smoking areas</a:t>
+              <a:t>  Include the perimeter, loading bays, car parks and smoking areas</a:t>
             </a:r>
             <a:endParaRPr lang="en-US" sz="950" dirty="0"/>
           </a:p>
@@ -5223,7 +6507,7 @@
                 <a:ea typeface="Calibri" pitchFamily="34" charset="-122"/>
                 <a:cs typeface="Calibri" pitchFamily="34" charset="-120"/>
               </a:rPr>
-              <a:t>　What cannot be seen. Camera blind spots and patrol blind spots are different</a:t>
+              <a:t>  What cannot be seen. Camera blind spots and patrol blind spots are different</a:t>
             </a:r>
             <a:endParaRPr lang="en-US" sz="950" dirty="0"/>
           </a:p>
@@ -5269,7 +6553,7 @@
                 <a:ea typeface="Calibri" pitchFamily="34" charset="-122"/>
                 <a:cs typeface="Calibri" pitchFamily="34" charset="-120"/>
               </a:rPr>
-              <a:t>　They change with the time of day, and increase after lights-out</a:t>
+              <a:t>  They change with the time of day, and increase after lights-out</a:t>
             </a:r>
             <a:endParaRPr lang="en-US" sz="950" dirty="0"/>
           </a:p>
@@ -5315,7 +6599,7 @@
                 <a:ea typeface="Calibri" pitchFamily="34" charset="-122"/>
                 <a:cs typeface="Calibri" pitchFamily="34" charset="-120"/>
               </a:rPr>
-              <a:t>　New ones appear when equipment or furniture is moved</a:t>
+              <a:t>  New ones appear when equipment or furniture is moved</a:t>
             </a:r>
             <a:endParaRPr lang="en-US" sz="950" dirty="0"/>
           </a:p>
@@ -5361,7 +6645,7 @@
                 <a:ea typeface="Calibri" pitchFamily="34" charset="-122"/>
                 <a:cs typeface="Calibri" pitchFamily="34" charset="-120"/>
               </a:rPr>
-              <a:t>　Designing a patrol means deciding how far to reduce the blind spots</a:t>
+              <a:t>  Designing a patrol means deciding how far to reduce the blind spots</a:t>
             </a:r>
             <a:endParaRPr lang="en-US" sz="950" dirty="0"/>
           </a:p>
@@ -6093,7 +7377,7 @@
                 <a:ea typeface="Calibri" pitchFamily="34" charset="-122"/>
                 <a:cs typeface="Calibri" pitchFamily="34" charset="-120"/>
               </a:rPr>
-              <a:t>　ID cards, keys, and unlocked devices at empty desks</a:t>
+              <a:t>  ID cards, keys, and unlocked devices at empty desks</a:t>
             </a:r>
             <a:endParaRPr lang="en-US" sz="950" dirty="0"/>
           </a:p>
@@ -6139,7 +7423,7 @@
                 <a:ea typeface="Calibri" pitchFamily="34" charset="-122"/>
                 <a:cs typeface="Calibri" pitchFamily="34" charset="-120"/>
               </a:rPr>
-              <a:t>　Writing left on whiteboards, printouts left in the copier</a:t>
+              <a:t>  Writing left on whiteboards, printouts left in the copier</a:t>
             </a:r>
             <a:endParaRPr lang="en-US" sz="950" dirty="0"/>
           </a:p>
@@ -6185,7 +7469,7 @@
                 <a:ea typeface="Calibri" pitchFamily="34" charset="-122"/>
                 <a:cs typeface="Calibri" pitchFamily="34" charset="-120"/>
               </a:rPr>
-              <a:t>　Handouts left in meeting rooms, documents left on desks</a:t>
+              <a:t>  Handouts left in meeting rooms, documents left on desks</a:t>
             </a:r>
             <a:endParaRPr lang="en-US" sz="950" dirty="0"/>
           </a:p>
@@ -6231,7 +7515,7 @@
                 <a:ea typeface="Calibri" pitchFamily="34" charset="-122"/>
                 <a:cs typeface="Calibri" pitchFamily="34" charset="-120"/>
               </a:rPr>
-              <a:t>　Do not read them. Record only the classification and the location</a:t>
+              <a:t>  Do not read them. Record only the classification and the location</a:t>
             </a:r>
             <a:endParaRPr lang="en-US" sz="950" dirty="0"/>
           </a:p>
@@ -6442,7 +7726,7 @@
                 <a:ea typeface="Calibri" pitchFamily="34" charset="-122"/>
                 <a:cs typeface="Calibri" pitchFamily="34" charset="-120"/>
               </a:rPr>
-              <a:t>　Lock status of server rooms, archives and safes</a:t>
+              <a:t>  Lock status of server rooms, archives and safes</a:t>
             </a:r>
             <a:endParaRPr lang="en-US" sz="950" dirty="0"/>
           </a:p>
@@ -6488,7 +7772,7 @@
                 <a:ea typeface="Calibri" pitchFamily="34" charset="-122"/>
                 <a:cs typeface="Calibri" pitchFamily="34" charset="-120"/>
               </a:rPr>
-              <a:t>　Windows, perimeter doors and loading bays</a:t>
+              <a:t>  Windows, perimeter doors and loading bays</a:t>
             </a:r>
             <a:endParaRPr lang="en-US" sz="950" dirty="0"/>
           </a:p>
@@ -6534,7 +7818,7 @@
                 <a:ea typeface="Calibri" pitchFamily="34" charset="-122"/>
                 <a:cs typeface="Calibri" pitchFamily="34" charset="-120"/>
               </a:rPr>
-              <a:t>　Signs of tailgating, and doors propped open</a:t>
+              <a:t>  Signs of tailgating, and doors propped open</a:t>
             </a:r>
             <a:endParaRPr lang="en-US" sz="950" dirty="0"/>
           </a:p>
@@ -6580,7 +7864,7 @@
                 <a:ea typeface="Calibri" pitchFamily="34" charset="-122"/>
                 <a:cs typeface="Calibri" pitchFamily="34" charset="-120"/>
               </a:rPr>
-              <a:t>　Perimeter fence, vehicles, and unattended items</a:t>
+              <a:t>  Perimeter fence, vehicles, and unattended items</a:t>
             </a:r>
             <a:endParaRPr lang="en-US" sz="950" dirty="0"/>
           </a:p>
@@ -6791,7 +8075,7 @@
                 <a:ea typeface="Calibri" pitchFamily="34" charset="-122"/>
                 <a:cs typeface="Calibri" pitchFamily="34" charset="-120"/>
               </a:rPr>
-              <a:t>　Who remains in the building and where. Know who is working late</a:t>
+              <a:t>  Who remains in the building and where. Know who is working late</a:t>
             </a:r>
             <a:endParaRPr lang="en-US" sz="950" dirty="0"/>
           </a:p>
@@ -6837,7 +8121,7 @@
                 <a:ea typeface="Calibri" pitchFamily="34" charset="-122"/>
                 <a:cs typeface="Calibri" pitchFamily="34" charset="-120"/>
               </a:rPr>
-              <a:t>　People without badges. Do not conclude; return them to the process</a:t>
+              <a:t>  People without badges. Do not conclude; return them to the process</a:t>
             </a:r>
             <a:endParaRPr lang="en-US" sz="950" dirty="0"/>
           </a:p>
@@ -6883,7 +8167,7 @@
                 <a:ea typeface="Calibri" pitchFamily="34" charset="-122"/>
                 <a:cs typeface="Calibri" pitchFamily="34" charset="-120"/>
               </a:rPr>
-              <a:t>　Anyone unwell. Speak to them, and do not make them stand</a:t>
+              <a:t>  Anyone unwell. Speak to them, and do not make them stand</a:t>
             </a:r>
             <a:endParaRPr lang="en-US" sz="950" dirty="0"/>
           </a:p>
@@ -6929,7 +8213,7 @@
                 <a:ea typeface="Calibri" pitchFamily="34" charset="-122"/>
                 <a:cs typeface="Calibri" pitchFamily="34" charset="-120"/>
               </a:rPr>
-              <a:t>　Cleaners and contractors entering and leaving</a:t>
+              <a:t>  Cleaners and contractors entering and leaving</a:t>
             </a:r>
             <a:endParaRPr lang="en-US" sz="950" dirty="0"/>
           </a:p>
@@ -7140,7 +8424,7 @@
                 <a:ea typeface="Calibri" pitchFamily="34" charset="-122"/>
                 <a:cs typeface="Calibri" pitchFamily="34" charset="-120"/>
               </a:rPr>
-              <a:t>　Whether anything blocks an emergency exit</a:t>
+              <a:t>  Whether anything blocks an emergency exit</a:t>
             </a:r>
             <a:endParaRPr lang="en-US" sz="950" dirty="0"/>
           </a:p>
@@ -7186,7 +8470,7 @@
                 <a:ea typeface="Calibri" pitchFamily="34" charset="-122"/>
                 <a:cs typeface="Calibri" pitchFamily="34" charset="-120"/>
               </a:rPr>
-              <a:t>　Obstructions to fire doors, such as stoppers or boxes</a:t>
+              <a:t>  Obstructions to fire doors, such as stoppers or boxes</a:t>
             </a:r>
             <a:endParaRPr lang="en-US" sz="950" dirty="0"/>
           </a:p>
@@ -7232,7 +8516,7 @@
                 <a:ea typeface="Calibri" pitchFamily="34" charset="-122"/>
                 <a:cs typeface="Calibri" pitchFamily="34" charset="-120"/>
               </a:rPr>
-              <a:t>　Extinguishers, their inspection labels, and the area around hydrants</a:t>
+              <a:t>  Extinguishers, their inspection labels, and the area around hydrants</a:t>
             </a:r>
             <a:endParaRPr lang="en-US" sz="950" dirty="0"/>
           </a:p>
@@ -7278,7 +8562,7 @@
                 <a:ea typeface="Calibri" pitchFamily="34" charset="-122"/>
                 <a:cs typeface="Calibri" pitchFamily="34" charset="-120"/>
               </a:rPr>
-              <a:t>　Leaks, unusual smells, unusual sounds, unusual temperature</a:t>
+              <a:t>  Leaks, unusual smells, unusual sounds, unusual temperature</a:t>
             </a:r>
             <a:endParaRPr lang="en-US" sz="950" dirty="0"/>
           </a:p>
@@ -8010,7 +9294,7 @@
                 <a:ea typeface="Calibri" pitchFamily="34" charset="-122"/>
                 <a:cs typeface="Calibri" pitchFamily="34" charset="-120"/>
               </a:rPr>
-              <a:t>　Evidence of performance. Without it you cannot show the patrol happened</a:t>
+              <a:t>  Evidence of performance. Without it you cannot show the patrol happened</a:t>
             </a:r>
             <a:endParaRPr lang="en-US" sz="950" dirty="0"/>
           </a:p>
@@ -8056,7 +9340,7 @@
                 <a:ea typeface="Calibri" pitchFamily="34" charset="-122"/>
                 <a:cs typeface="Calibri" pitchFamily="34" charset="-120"/>
               </a:rPr>
-              <a:t>　"Nothing to report" is also a result, and must be recorded</a:t>
+              <a:t>  "Nothing to report" is also a result, and must be recorded</a:t>
             </a:r>
             <a:endParaRPr lang="en-US" sz="950" dirty="0"/>
           </a:p>
@@ -8102,7 +9386,7 @@
                 <a:ea typeface="Calibri" pitchFamily="34" charset="-122"/>
                 <a:cs typeface="Calibri" pitchFamily="34" charset="-120"/>
               </a:rPr>
-              <a:t>　It becomes the account of what was happening, for later investigation</a:t>
+              <a:t>  It becomes the account of what was happening, for later investigation</a:t>
             </a:r>
             <a:endParaRPr lang="en-US" sz="950" dirty="0"/>
           </a:p>
@@ -8148,7 +9432,7 @@
                 <a:ea typeface="Calibri" pitchFamily="34" charset="-122"/>
                 <a:cs typeface="Calibri" pitchFamily="34" charset="-120"/>
               </a:rPr>
-              <a:t>　It is what shows the client that the contract was performed</a:t>
+              <a:t>  It is what shows the client that the contract was performed</a:t>
             </a:r>
             <a:endParaRPr lang="en-US" sz="950" dirty="0"/>
           </a:p>
@@ -8359,7 +9643,7 @@
                 <a:ea typeface="Calibri" pitchFamily="34" charset="-122"/>
                 <a:cs typeface="Calibri" pitchFamily="34" charset="-120"/>
               </a:rPr>
-              <a:t>　Fact first, assessment second. Do not mix them</a:t>
+              <a:t>  Fact first, assessment second. Do not mix them</a:t>
             </a:r>
             <a:endParaRPr lang="en-US" sz="950" dirty="0"/>
           </a:p>
@@ -8405,7 +9689,7 @@
                 <a:ea typeface="Calibri" pitchFamily="34" charset="-122"/>
                 <a:cs typeface="Calibri" pitchFamily="34" charset="-120"/>
               </a:rPr>
-              <a:t>　Write the time, place, object and condition specifically</a:t>
+              <a:t>  Write the time, place, object and condition specifically</a:t>
             </a:r>
             <a:endParaRPr lang="en-US" sz="950" dirty="0"/>
           </a:p>
@@ -8451,7 +9735,7 @@
                 <a:ea typeface="Calibri" pitchFamily="34" charset="-122"/>
                 <a:cs typeface="Calibri" pitchFamily="34" charset="-120"/>
               </a:rPr>
-              <a:t>　Do not stop at "nothing to report". Record what you checked</a:t>
+              <a:t>  Do not stop at "nothing to report". Record what you checked</a:t>
             </a:r>
             <a:endParaRPr lang="en-US" sz="950" dirty="0"/>
           </a:p>
@@ -8497,7 +9781,7 @@
                 <a:ea typeface="Calibri" pitchFamily="34" charset="-122"/>
                 <a:cs typeface="Calibri" pitchFamily="34" charset="-120"/>
               </a:rPr>
-              <a:t>　Write "unknown" where you did not know. Do not fill gaps with guesses</a:t>
+              <a:t>  Write "unknown" where you did not know. Do not fill gaps with guesses</a:t>
             </a:r>
             <a:endParaRPr lang="en-US" sz="950" dirty="0"/>
           </a:p>
@@ -8708,7 +9992,7 @@
                 <a:ea typeface="Calibri" pitchFamily="34" charset="-122"/>
                 <a:cs typeface="Calibri" pitchFamily="34" charset="-120"/>
               </a:rPr>
-              <a:t>　Pass on what is unresolved, not what is finished</a:t>
+              <a:t>  Pass on what is unresolved, not what is finished</a:t>
             </a:r>
             <a:endParaRPr lang="en-US" sz="950" dirty="0"/>
           </a:p>
@@ -8754,7 +10038,7 @@
                 <a:ea typeface="Calibri" pitchFamily="34" charset="-122"/>
                 <a:cs typeface="Calibri" pitchFamily="34" charset="-120"/>
               </a:rPr>
-              <a:t>　Points needing continued watch, and why</a:t>
+              <a:t>  Points needing continued watch, and why</a:t>
             </a:r>
             <a:endParaRPr lang="en-US" sz="950" dirty="0"/>
           </a:p>
@@ -8800,7 +10084,7 @@
                 <a:ea typeface="Calibri" pitchFamily="34" charset="-122"/>
                 <a:cs typeface="Calibri" pitchFamily="34" charset="-120"/>
               </a:rPr>
-              <a:t>　Anyone still in the building, works in progress, expected visitors</a:t>
+              <a:t>  Anyone still in the building, works in progress, expected visitors</a:t>
             </a:r>
             <a:endParaRPr lang="en-US" sz="950" dirty="0"/>
           </a:p>
@@ -8846,7 +10130,7 @@
                 <a:ea typeface="Calibri" pitchFamily="34" charset="-122"/>
                 <a:cs typeface="Calibri" pitchFamily="34" charset="-120"/>
               </a:rPr>
-              <a:t>　Do not hand over verbally only. Put it in the record</a:t>
+              <a:t>  Do not hand over verbally only. Put it in the record</a:t>
             </a:r>
             <a:endParaRPr lang="en-US" sz="950" dirty="0"/>
           </a:p>
@@ -9057,7 +10341,7 @@
                 <a:ea typeface="Calibri" pitchFamily="34" charset="-122"/>
                 <a:cs typeface="Calibri" pitchFamily="34" charset="-120"/>
               </a:rPr>
-              <a:t>　Recording a patrol you did not carry out</a:t>
+              <a:t>  Recording a patrol you did not carry out</a:t>
             </a:r>
             <a:endParaRPr lang="en-US" sz="950" dirty="0"/>
           </a:p>
@@ -9103,7 +10387,7 @@
                 <a:ea typeface="Calibri" pitchFamily="34" charset="-122"/>
                 <a:cs typeface="Calibri" pitchFamily="34" charset="-120"/>
               </a:rPr>
-              <a:t>　Writing it all up later. Accuracy drops with time</a:t>
+              <a:t>  Writing it all up later. Accuracy drops with time</a:t>
             </a:r>
             <a:endParaRPr lang="en-US" sz="950" dirty="0"/>
           </a:p>
@@ -9149,7 +10433,7 @@
                 <a:ea typeface="Calibri" pitchFamily="34" charset="-122"/>
                 <a:cs typeface="Calibri" pitchFamily="34" charset="-120"/>
               </a:rPr>
-              <a:t>　Copying the contents of a document into your record</a:t>
+              <a:t>  Copying the contents of a document into your record</a:t>
             </a:r>
             <a:endParaRPr lang="en-US" sz="950" dirty="0"/>
           </a:p>
@@ -9195,7 +10479,7 @@
                 <a:ea typeface="Calibri" pitchFamily="34" charset="-122"/>
                 <a:cs typeface="Calibri" pitchFamily="34" charset="-120"/>
               </a:rPr>
-              <a:t>　Writing your opinion or guess as though it were fact</a:t>
+              <a:t>  Writing your opinion or guess as though it were fact</a:t>
             </a:r>
             <a:endParaRPr lang="en-US" sz="950" dirty="0"/>
           </a:p>
@@ -11491,7 +12775,7 @@
                 <a:ea typeface="Yu Gothic" pitchFamily="34" charset="-122"/>
                 <a:cs typeface="Yu Gothic" pitchFamily="34" charset="-120"/>
               </a:rPr>
-              <a:t>TTX 4-B　深夜、非常口が開放されている</a:t>
+              <a:t>TTX 4-A 講評 ― 模範解答</a:t>
             </a:r>
             <a:endParaRPr lang="en-US" sz="2300" dirty="0"/>
           </a:p>
@@ -11511,7 +12795,7 @@
                 <a:ea typeface="Calibri" pitchFamily="34" charset="-122"/>
                 <a:cs typeface="Calibri" pitchFamily="34" charset="-120"/>
               </a:rPr>
-              <a:t>TTX 4-B — An Emergency Door Standing Open at Night</a:t>
+              <a:t>TTX 4-A Debrief — Model Answer</a:t>
             </a:r>
             <a:endParaRPr lang="en-US" sz="2300" dirty="0"/>
           </a:p>
@@ -11572,6 +12856,1213 @@
                 <a:ea typeface="Calibri" pitchFamily="34" charset="-122"/>
                 <a:cs typeface="Calibri" pitchFamily="34" charset="-120"/>
               </a:rPr>
+              <a:t>DEBRIEF</a:t>
+            </a:r>
+            <a:endParaRPr lang="en-US" sz="1100" dirty="0"/>
+          </a:p>
+        </p:txBody>
+      </p:sp>
+      <p:sp>
+        <p:nvSpPr>
+          <p:cNvPr id="6" name="Text 3"/>
+          <p:cNvSpPr/>
+          <p:nvPr/>
+        </p:nvSpPr>
+        <p:spPr>
+          <a:xfrm>
+            <a:off x="640080" y="1188720"/>
+            <a:ext cx="10911535" cy="530352"/>
+          </a:xfrm>
+          <a:prstGeom prst="rect">
+            <a:avLst/>
+          </a:prstGeom>
+          <a:noFill/>
+          <a:ln/>
+        </p:spPr>
+        <p:txBody>
+          <a:bodyPr wrap="square" lIns="0" tIns="0" rIns="0" bIns="0" rtlCol="0" anchor="t"/>
+          <a:lstStyle/>
+          <a:p>
+            <a:pPr indent="0" marL="0">
+              <a:lnSpc>
+                <a:spcPct val="90000"/>
+              </a:lnSpc>
+              <a:buNone/>
+            </a:pPr>
+            <a:r>
+              <a:rPr lang="en-US" sz="1000" b="1" dirty="0">
+                <a:solidFill>
+                  <a:srgbClr val="0D8A76"/>
+                </a:solidFill>
+                <a:latin typeface="Yu Gothic" pitchFamily="34" charset="0"/>
+                <a:ea typeface="Yu Gothic" pitchFamily="34" charset="-122"/>
+                <a:cs typeface="Yu Gothic" pitchFamily="34" charset="-120"/>
+              </a:rPr>
+              <a:t>狙い　</a:t>
+            </a:r>
+            <a:pPr indent="0" marL="0">
+              <a:lnSpc>
+                <a:spcPct val="90000"/>
+              </a:lnSpc>
+              <a:buNone/>
+            </a:pPr>
+            <a:r>
+              <a:rPr lang="en-US" sz="1150" b="1" dirty="0">
+                <a:solidFill>
+                  <a:srgbClr val="093259"/>
+                </a:solidFill>
+                <a:latin typeface="Yu Gothic" pitchFamily="34" charset="0"/>
+                <a:ea typeface="Yu Gothic" pitchFamily="34" charset="-122"/>
+                <a:cs typeface="Yu Gothic" pitchFamily="34" charset="-120"/>
+              </a:rPr>
+              <a:t>6場面に共通するのは、情報が足りないこと。足りないと書けるかを見る。</a:t>
+            </a:r>
+            <a:endParaRPr lang="en-US" sz="1000" dirty="0"/>
+          </a:p>
+          <a:p>
+            <a:pPr indent="0" marL="0">
+              <a:lnSpc>
+                <a:spcPct val="90000"/>
+              </a:lnSpc>
+              <a:buNone/>
+            </a:pPr>
+            <a:r>
+              <a:rPr lang="en-US" sz="850" i="1" dirty="0">
+                <a:solidFill>
+                  <a:srgbClr val="5F7183"/>
+                </a:solidFill>
+                <a:latin typeface="Calibri" pitchFamily="34" charset="0"/>
+                <a:ea typeface="Calibri" pitchFamily="34" charset="-122"/>
+                <a:cs typeface="Calibri" pitchFamily="34" charset="-120"/>
+              </a:rPr>
+              <a:t>All six scenes share one thing: incomplete information. Can you write that it was incomplete?</a:t>
+            </a:r>
+            <a:endParaRPr lang="en-US" sz="1000" dirty="0"/>
+          </a:p>
+        </p:txBody>
+      </p:sp>
+      <p:sp>
+        <p:nvSpPr>
+          <p:cNvPr id="7" name="Shape 4"/>
+          <p:cNvSpPr/>
+          <p:nvPr/>
+        </p:nvSpPr>
+        <p:spPr>
+          <a:xfrm>
+            <a:off x="640080" y="1773936"/>
+            <a:ext cx="5327752" cy="1091184"/>
+          </a:xfrm>
+          <a:prstGeom prst="roundRect">
+            <a:avLst>
+              <a:gd name="adj" fmla="val 3352"/>
+            </a:avLst>
+          </a:prstGeom>
+          <a:solidFill>
+            <a:srgbClr val="EFF4F8"/>
+          </a:solidFill>
+          <a:ln/>
+        </p:spPr>
+      </p:sp>
+      <p:sp>
+        <p:nvSpPr>
+          <p:cNvPr id="8" name="Text 5"/>
+          <p:cNvSpPr/>
+          <p:nvPr/>
+        </p:nvSpPr>
+        <p:spPr>
+          <a:xfrm>
+            <a:off x="877824" y="1865376"/>
+            <a:ext cx="4852264" cy="908304"/>
+          </a:xfrm>
+          <a:prstGeom prst="rect">
+            <a:avLst/>
+          </a:prstGeom>
+          <a:noFill/>
+          <a:ln/>
+        </p:spPr>
+        <p:txBody>
+          <a:bodyPr wrap="square" lIns="0" tIns="0" rIns="0" bIns="0" rtlCol="0" anchor="t"/>
+          <a:lstStyle/>
+          <a:p>
+            <a:pPr indent="0" marL="0">
+              <a:lnSpc>
+                <a:spcPct val="90000"/>
+              </a:lnSpc>
+              <a:buNone/>
+            </a:pPr>
+            <a:r>
+              <a:rPr lang="en-US" sz="1050" b="1" dirty="0">
+                <a:solidFill>
+                  <a:srgbClr val="093259"/>
+                </a:solidFill>
+                <a:latin typeface="Yu Gothic" pitchFamily="34" charset="0"/>
+                <a:ea typeface="Yu Gothic" pitchFamily="34" charset="-122"/>
+                <a:cs typeface="Yu Gothic" pitchFamily="34" charset="-120"/>
+              </a:rPr>
+              <a:t>A ID カード</a:t>
+            </a:r>
+            <a:endParaRPr lang="en-US" sz="1050" dirty="0"/>
+          </a:p>
+          <a:p>
+            <a:pPr indent="0" marL="0">
+              <a:lnSpc>
+                <a:spcPct val="90000"/>
+              </a:lnSpc>
+              <a:buNone/>
+            </a:pPr>
+            <a:r>
+              <a:rPr lang="en-US" sz="1050" b="1" dirty="0">
+                <a:solidFill>
+                  <a:srgbClr val="1B2733"/>
+                </a:solidFill>
+                <a:latin typeface="Yu Gothic" pitchFamily="34" charset="0"/>
+                <a:ea typeface="Yu Gothic" pitchFamily="34" charset="-122"/>
+                <a:cs typeface="Yu Gothic" pitchFamily="34" charset="-120"/>
+              </a:rPr>
+              <a:t>預かるか、残して報告か。触れた場合は必ず記録する。</a:t>
+            </a:r>
+            <a:endParaRPr lang="en-US" sz="1050" dirty="0"/>
+          </a:p>
+          <a:p>
+            <a:pPr indent="0" marL="0">
+              <a:lnSpc>
+                <a:spcPct val="90000"/>
+              </a:lnSpc>
+              <a:buNone/>
+            </a:pPr>
+            <a:r>
+              <a:rPr lang="en-US" sz="800" i="1" dirty="0">
+                <a:solidFill>
+                  <a:srgbClr val="5F7183"/>
+                </a:solidFill>
+                <a:latin typeface="Calibri" pitchFamily="34" charset="0"/>
+                <a:ea typeface="Calibri" pitchFamily="34" charset="-122"/>
+                <a:cs typeface="Calibri" pitchFamily="34" charset="-120"/>
+              </a:rPr>
+              <a:t>Secure it or leave and report. If you touched it, record that you did.</a:t>
+            </a:r>
+            <a:endParaRPr lang="en-US" sz="1050" dirty="0"/>
+          </a:p>
+        </p:txBody>
+      </p:sp>
+      <p:sp>
+        <p:nvSpPr>
+          <p:cNvPr id="9" name="Shape 6"/>
+          <p:cNvSpPr/>
+          <p:nvPr/>
+        </p:nvSpPr>
+        <p:spPr>
+          <a:xfrm>
+            <a:off x="6223864" y="1773936"/>
+            <a:ext cx="5327752" cy="1091184"/>
+          </a:xfrm>
+          <a:prstGeom prst="roundRect">
+            <a:avLst>
+              <a:gd name="adj" fmla="val 3352"/>
+            </a:avLst>
+          </a:prstGeom>
+          <a:solidFill>
+            <a:srgbClr val="EFF4F8"/>
+          </a:solidFill>
+          <a:ln/>
+        </p:spPr>
+      </p:sp>
+      <p:sp>
+        <p:nvSpPr>
+          <p:cNvPr id="10" name="Text 7"/>
+          <p:cNvSpPr/>
+          <p:nvPr/>
+        </p:nvSpPr>
+        <p:spPr>
+          <a:xfrm>
+            <a:off x="6461608" y="1865376"/>
+            <a:ext cx="4852264" cy="908304"/>
+          </a:xfrm>
+          <a:prstGeom prst="rect">
+            <a:avLst/>
+          </a:prstGeom>
+          <a:noFill/>
+          <a:ln/>
+        </p:spPr>
+        <p:txBody>
+          <a:bodyPr wrap="square" lIns="0" tIns="0" rIns="0" bIns="0" rtlCol="0" anchor="t"/>
+          <a:lstStyle/>
+          <a:p>
+            <a:pPr indent="0" marL="0">
+              <a:lnSpc>
+                <a:spcPct val="90000"/>
+              </a:lnSpc>
+              <a:buNone/>
+            </a:pPr>
+            <a:r>
+              <a:rPr lang="en-US" sz="1050" b="1" dirty="0">
+                <a:solidFill>
+                  <a:srgbClr val="093259"/>
+                </a:solidFill>
+                <a:latin typeface="Yu Gothic" pitchFamily="34" charset="0"/>
+                <a:ea typeface="Yu Gothic" pitchFamily="34" charset="-122"/>
+                <a:cs typeface="Yu Gothic" pitchFamily="34" charset="-120"/>
+              </a:rPr>
+              <a:t>B ホワイトボード</a:t>
+            </a:r>
+            <a:endParaRPr lang="en-US" sz="1050" dirty="0"/>
+          </a:p>
+          <a:p>
+            <a:pPr indent="0" marL="0">
+              <a:lnSpc>
+                <a:spcPct val="90000"/>
+              </a:lnSpc>
+              <a:buNone/>
+            </a:pPr>
+            <a:r>
+              <a:rPr lang="en-US" sz="1050" b="1" dirty="0">
+                <a:solidFill>
+                  <a:srgbClr val="1B2733"/>
+                </a:solidFill>
+                <a:latin typeface="Yu Gothic" pitchFamily="34" charset="0"/>
+                <a:ea typeface="Yu Gothic" pitchFamily="34" charset="-122"/>
+                <a:cs typeface="Yu Gothic" pitchFamily="34" charset="-120"/>
+              </a:rPr>
+              <a:t>消してよいかは現場による。消す前に記録が必要な場合がある。</a:t>
+            </a:r>
+            <a:endParaRPr lang="en-US" sz="1050" dirty="0"/>
+          </a:p>
+          <a:p>
+            <a:pPr indent="0" marL="0">
+              <a:lnSpc>
+                <a:spcPct val="90000"/>
+              </a:lnSpc>
+              <a:buNone/>
+            </a:pPr>
+            <a:r>
+              <a:rPr lang="en-US" sz="800" i="1" dirty="0">
+                <a:solidFill>
+                  <a:srgbClr val="5F7183"/>
+                </a:solidFill>
+                <a:latin typeface="Calibri" pitchFamily="34" charset="0"/>
+                <a:ea typeface="Calibri" pitchFamily="34" charset="-122"/>
+                <a:cs typeface="Calibri" pitchFamily="34" charset="-120"/>
+              </a:rPr>
+              <a:t>Whether to erase depends on the site. It may need recording first.</a:t>
+            </a:r>
+            <a:endParaRPr lang="en-US" sz="1050" dirty="0"/>
+          </a:p>
+        </p:txBody>
+      </p:sp>
+      <p:sp>
+        <p:nvSpPr>
+          <p:cNvPr id="11" name="Shape 8"/>
+          <p:cNvSpPr/>
+          <p:nvPr/>
+        </p:nvSpPr>
+        <p:spPr>
+          <a:xfrm>
+            <a:off x="640080" y="2993136"/>
+            <a:ext cx="5327752" cy="1091184"/>
+          </a:xfrm>
+          <a:prstGeom prst="roundRect">
+            <a:avLst>
+              <a:gd name="adj" fmla="val 3352"/>
+            </a:avLst>
+          </a:prstGeom>
+          <a:solidFill>
+            <a:srgbClr val="E4F4F0"/>
+          </a:solidFill>
+          <a:ln/>
+        </p:spPr>
+      </p:sp>
+      <p:sp>
+        <p:nvSpPr>
+          <p:cNvPr id="12" name="Text 9"/>
+          <p:cNvSpPr/>
+          <p:nvPr/>
+        </p:nvSpPr>
+        <p:spPr>
+          <a:xfrm>
+            <a:off x="877824" y="3084576"/>
+            <a:ext cx="4852264" cy="908304"/>
+          </a:xfrm>
+          <a:prstGeom prst="rect">
+            <a:avLst/>
+          </a:prstGeom>
+          <a:noFill/>
+          <a:ln/>
+        </p:spPr>
+        <p:txBody>
+          <a:bodyPr wrap="square" lIns="0" tIns="0" rIns="0" bIns="0" rtlCol="0" anchor="t"/>
+          <a:lstStyle/>
+          <a:p>
+            <a:pPr indent="0" marL="0">
+              <a:lnSpc>
+                <a:spcPct val="90000"/>
+              </a:lnSpc>
+              <a:buNone/>
+            </a:pPr>
+            <a:r>
+              <a:rPr lang="en-US" sz="1050" b="1" dirty="0">
+                <a:solidFill>
+                  <a:srgbClr val="0D8A76"/>
+                </a:solidFill>
+                <a:latin typeface="Yu Gothic" pitchFamily="34" charset="0"/>
+                <a:ea typeface="Yu Gothic" pitchFamily="34" charset="-122"/>
+                <a:cs typeface="Yu Gothic" pitchFamily="34" charset="-120"/>
+              </a:rPr>
+              <a:t>C 非常口の段ボール</a:t>
+            </a:r>
+            <a:endParaRPr lang="en-US" sz="1050" dirty="0"/>
+          </a:p>
+          <a:p>
+            <a:pPr indent="0" marL="0">
+              <a:lnSpc>
+                <a:spcPct val="90000"/>
+              </a:lnSpc>
+              <a:buNone/>
+            </a:pPr>
+            <a:r>
+              <a:rPr lang="en-US" sz="1050" b="1" dirty="0">
+                <a:solidFill>
+                  <a:srgbClr val="1B2733"/>
+                </a:solidFill>
+                <a:latin typeface="Yu Gothic" pitchFamily="34" charset="0"/>
+                <a:ea typeface="Yu Gothic" pitchFamily="34" charset="-122"/>
+                <a:cs typeface="Yu Gothic" pitchFamily="34" charset="-120"/>
+              </a:rPr>
+              <a:t>避難障害。その場で除去してよい数少ない例。作業者への声かけが要る。</a:t>
+            </a:r>
+            <a:endParaRPr lang="en-US" sz="1050" dirty="0"/>
+          </a:p>
+          <a:p>
+            <a:pPr indent="0" marL="0">
+              <a:lnSpc>
+                <a:spcPct val="90000"/>
+              </a:lnSpc>
+              <a:buNone/>
+            </a:pPr>
+            <a:r>
+              <a:rPr lang="en-US" sz="800" i="1" dirty="0">
+                <a:solidFill>
+                  <a:srgbClr val="5F7183"/>
+                </a:solidFill>
+                <a:latin typeface="Calibri" pitchFamily="34" charset="0"/>
+                <a:ea typeface="Calibri" pitchFamily="34" charset="-122"/>
+                <a:cs typeface="Calibri" pitchFamily="34" charset="-120"/>
+              </a:rPr>
+              <a:t>It blocks escape. One of the few cases you may clear on the spot — after speaking to the workers.</a:t>
+            </a:r>
+            <a:endParaRPr lang="en-US" sz="1050" dirty="0"/>
+          </a:p>
+        </p:txBody>
+      </p:sp>
+      <p:sp>
+        <p:nvSpPr>
+          <p:cNvPr id="13" name="Shape 10"/>
+          <p:cNvSpPr/>
+          <p:nvPr/>
+        </p:nvSpPr>
+        <p:spPr>
+          <a:xfrm>
+            <a:off x="6223864" y="2993136"/>
+            <a:ext cx="5327752" cy="1091184"/>
+          </a:xfrm>
+          <a:prstGeom prst="roundRect">
+            <a:avLst>
+              <a:gd name="adj" fmla="val 3352"/>
+            </a:avLst>
+          </a:prstGeom>
+          <a:solidFill>
+            <a:srgbClr val="EFF4F8"/>
+          </a:solidFill>
+          <a:ln/>
+        </p:spPr>
+      </p:sp>
+      <p:sp>
+        <p:nvSpPr>
+          <p:cNvPr id="14" name="Text 11"/>
+          <p:cNvSpPr/>
+          <p:nvPr/>
+        </p:nvSpPr>
+        <p:spPr>
+          <a:xfrm>
+            <a:off x="6461608" y="3084576"/>
+            <a:ext cx="4852264" cy="908304"/>
+          </a:xfrm>
+          <a:prstGeom prst="rect">
+            <a:avLst/>
+          </a:prstGeom>
+          <a:noFill/>
+          <a:ln/>
+        </p:spPr>
+        <p:txBody>
+          <a:bodyPr wrap="square" lIns="0" tIns="0" rIns="0" bIns="0" rtlCol="0" anchor="t"/>
+          <a:lstStyle/>
+          <a:p>
+            <a:pPr indent="0" marL="0">
+              <a:lnSpc>
+                <a:spcPct val="90000"/>
+              </a:lnSpc>
+              <a:buNone/>
+            </a:pPr>
+            <a:r>
+              <a:rPr lang="en-US" sz="1050" b="1" dirty="0">
+                <a:solidFill>
+                  <a:srgbClr val="093259"/>
+                </a:solidFill>
+                <a:latin typeface="Yu Gothic" pitchFamily="34" charset="0"/>
+                <a:ea typeface="Yu Gothic" pitchFamily="34" charset="-122"/>
+                <a:cs typeface="Yu Gothic" pitchFamily="34" charset="-120"/>
+              </a:rPr>
+              <a:t>D サーバ室の扉</a:t>
+            </a:r>
+            <a:endParaRPr lang="en-US" sz="1050" dirty="0"/>
+          </a:p>
+          <a:p>
+            <a:pPr indent="0" marL="0">
+              <a:lnSpc>
+                <a:spcPct val="90000"/>
+              </a:lnSpc>
+              <a:buNone/>
+            </a:pPr>
+            <a:r>
+              <a:rPr lang="en-US" sz="1050" b="1" dirty="0">
+                <a:solidFill>
+                  <a:srgbClr val="1B2733"/>
+                </a:solidFill>
+                <a:latin typeface="Yu Gothic" pitchFamily="34" charset="0"/>
+                <a:ea typeface="Yu Gothic" pitchFamily="34" charset="-122"/>
+                <a:cs typeface="Yu Gothic" pitchFamily="34" charset="-120"/>
+              </a:rPr>
+              <a:t>中に人がいる可能性がある。単独で入らない。</a:t>
+            </a:r>
+            <a:endParaRPr lang="en-US" sz="1050" dirty="0"/>
+          </a:p>
+          <a:p>
+            <a:pPr indent="0" marL="0">
+              <a:lnSpc>
+                <a:spcPct val="90000"/>
+              </a:lnSpc>
+              <a:buNone/>
+            </a:pPr>
+            <a:r>
+              <a:rPr lang="en-US" sz="800" i="1" dirty="0">
+                <a:solidFill>
+                  <a:srgbClr val="5F7183"/>
+                </a:solidFill>
+                <a:latin typeface="Calibri" pitchFamily="34" charset="0"/>
+                <a:ea typeface="Calibri" pitchFamily="34" charset="-122"/>
+                <a:cs typeface="Calibri" pitchFamily="34" charset="-120"/>
+              </a:rPr>
+              <a:t>Someone may be inside. Do not enter alone.</a:t>
+            </a:r>
+            <a:endParaRPr lang="en-US" sz="1050" dirty="0"/>
+          </a:p>
+        </p:txBody>
+      </p:sp>
+      <p:sp>
+        <p:nvSpPr>
+          <p:cNvPr id="15" name="Shape 12"/>
+          <p:cNvSpPr/>
+          <p:nvPr/>
+        </p:nvSpPr>
+        <p:spPr>
+          <a:xfrm>
+            <a:off x="640080" y="4212336"/>
+            <a:ext cx="5327752" cy="1091184"/>
+          </a:xfrm>
+          <a:prstGeom prst="roundRect">
+            <a:avLst>
+              <a:gd name="adj" fmla="val 3352"/>
+            </a:avLst>
+          </a:prstGeom>
+          <a:solidFill>
+            <a:srgbClr val="EFF4F8"/>
+          </a:solidFill>
+          <a:ln/>
+        </p:spPr>
+      </p:sp>
+      <p:sp>
+        <p:nvSpPr>
+          <p:cNvPr id="16" name="Text 13"/>
+          <p:cNvSpPr/>
+          <p:nvPr/>
+        </p:nvSpPr>
+        <p:spPr>
+          <a:xfrm>
+            <a:off x="877824" y="4303776"/>
+            <a:ext cx="4852264" cy="908304"/>
+          </a:xfrm>
+          <a:prstGeom prst="rect">
+            <a:avLst/>
+          </a:prstGeom>
+          <a:noFill/>
+          <a:ln/>
+        </p:spPr>
+        <p:txBody>
+          <a:bodyPr wrap="square" lIns="0" tIns="0" rIns="0" bIns="0" rtlCol="0" anchor="t"/>
+          <a:lstStyle/>
+          <a:p>
+            <a:pPr indent="0" marL="0">
+              <a:lnSpc>
+                <a:spcPct val="90000"/>
+              </a:lnSpc>
+              <a:buNone/>
+            </a:pPr>
+            <a:r>
+              <a:rPr lang="en-US" sz="1050" b="1" dirty="0">
+                <a:solidFill>
+                  <a:srgbClr val="093259"/>
+                </a:solidFill>
+                <a:latin typeface="Yu Gothic" pitchFamily="34" charset="0"/>
+                <a:ea typeface="Yu Gothic" pitchFamily="34" charset="-122"/>
+                <a:cs typeface="Yu Gothic" pitchFamily="34" charset="-120"/>
+              </a:rPr>
+              <a:t>E バッジ未着用</a:t>
+            </a:r>
+            <a:endParaRPr lang="en-US" sz="1050" dirty="0"/>
+          </a:p>
+          <a:p>
+            <a:pPr indent="0" marL="0">
+              <a:lnSpc>
+                <a:spcPct val="90000"/>
+              </a:lnSpc>
+              <a:buNone/>
+            </a:pPr>
+            <a:r>
+              <a:rPr lang="en-US" sz="1050" b="1" dirty="0">
+                <a:solidFill>
+                  <a:srgbClr val="1B2733"/>
+                </a:solidFill>
+                <a:latin typeface="Yu Gothic" pitchFamily="34" charset="0"/>
+                <a:ea typeface="Yu Gothic" pitchFamily="34" charset="-122"/>
+                <a:cs typeface="Yu Gothic" pitchFamily="34" charset="-120"/>
+              </a:rPr>
+              <a:t>断定しない。手続きに戻す。第5時限の対応につながる。</a:t>
+            </a:r>
+            <a:endParaRPr lang="en-US" sz="1050" dirty="0"/>
+          </a:p>
+          <a:p>
+            <a:pPr indent="0" marL="0">
+              <a:lnSpc>
+                <a:spcPct val="90000"/>
+              </a:lnSpc>
+              <a:buNone/>
+            </a:pPr>
+            <a:r>
+              <a:rPr lang="en-US" sz="800" i="1" dirty="0">
+                <a:solidFill>
+                  <a:srgbClr val="5F7183"/>
+                </a:solidFill>
+                <a:latin typeface="Calibri" pitchFamily="34" charset="0"/>
+                <a:ea typeface="Calibri" pitchFamily="34" charset="-122"/>
+                <a:cs typeface="Calibri" pitchFamily="34" charset="-120"/>
+              </a:rPr>
+              <a:t>Do not conclude. Return them to the procedure. This links to Period 5.</a:t>
+            </a:r>
+            <a:endParaRPr lang="en-US" sz="1050" dirty="0"/>
+          </a:p>
+        </p:txBody>
+      </p:sp>
+      <p:sp>
+        <p:nvSpPr>
+          <p:cNvPr id="17" name="Shape 14"/>
+          <p:cNvSpPr/>
+          <p:nvPr/>
+        </p:nvSpPr>
+        <p:spPr>
+          <a:xfrm>
+            <a:off x="6223864" y="4212336"/>
+            <a:ext cx="5327752" cy="1091184"/>
+          </a:xfrm>
+          <a:prstGeom prst="roundRect">
+            <a:avLst>
+              <a:gd name="adj" fmla="val 3352"/>
+            </a:avLst>
+          </a:prstGeom>
+          <a:solidFill>
+            <a:srgbClr val="E4F4F0"/>
+          </a:solidFill>
+          <a:ln/>
+        </p:spPr>
+      </p:sp>
+      <p:sp>
+        <p:nvSpPr>
+          <p:cNvPr id="18" name="Text 15"/>
+          <p:cNvSpPr/>
+          <p:nvPr/>
+        </p:nvSpPr>
+        <p:spPr>
+          <a:xfrm>
+            <a:off x="6461608" y="4303776"/>
+            <a:ext cx="4852264" cy="908304"/>
+          </a:xfrm>
+          <a:prstGeom prst="rect">
+            <a:avLst/>
+          </a:prstGeom>
+          <a:noFill/>
+          <a:ln/>
+        </p:spPr>
+        <p:txBody>
+          <a:bodyPr wrap="square" lIns="0" tIns="0" rIns="0" bIns="0" rtlCol="0" anchor="t"/>
+          <a:lstStyle/>
+          <a:p>
+            <a:pPr indent="0" marL="0">
+              <a:lnSpc>
+                <a:spcPct val="90000"/>
+              </a:lnSpc>
+              <a:buNone/>
+            </a:pPr>
+            <a:r>
+              <a:rPr lang="en-US" sz="1050" b="1" dirty="0">
+                <a:solidFill>
+                  <a:srgbClr val="0D8A76"/>
+                </a:solidFill>
+                <a:latin typeface="Yu Gothic" pitchFamily="34" charset="0"/>
+                <a:ea typeface="Yu Gothic" pitchFamily="34" charset="-122"/>
+                <a:cs typeface="Yu Gothic" pitchFamily="34" charset="-120"/>
+              </a:rPr>
+              <a:t>F フェンス破損</a:t>
+            </a:r>
+            <a:endParaRPr lang="en-US" sz="1050" dirty="0"/>
+          </a:p>
+          <a:p>
+            <a:pPr indent="0" marL="0">
+              <a:lnSpc>
+                <a:spcPct val="90000"/>
+              </a:lnSpc>
+              <a:buNone/>
+            </a:pPr>
+            <a:r>
+              <a:rPr lang="en-US" sz="1050" b="1" dirty="0">
+                <a:solidFill>
+                  <a:srgbClr val="1B2733"/>
+                </a:solidFill>
+                <a:latin typeface="Yu Gothic" pitchFamily="34" charset="0"/>
+                <a:ea typeface="Yu Gothic" pitchFamily="34" charset="-122"/>
+                <a:cs typeface="Yu Gothic" pitchFamily="34" charset="-120"/>
+              </a:rPr>
+              <a:t>記憶が不確かなことを報告に書く。写真と時刻が価値をもつ。</a:t>
+            </a:r>
+            <a:endParaRPr lang="en-US" sz="1050" dirty="0"/>
+          </a:p>
+          <a:p>
+            <a:pPr indent="0" marL="0">
+              <a:lnSpc>
+                <a:spcPct val="90000"/>
+              </a:lnSpc>
+              <a:buNone/>
+            </a:pPr>
+            <a:r>
+              <a:rPr lang="en-US" sz="800" i="1" dirty="0">
+                <a:solidFill>
+                  <a:srgbClr val="5F7183"/>
+                </a:solidFill>
+                <a:latin typeface="Calibri" pitchFamily="34" charset="0"/>
+                <a:ea typeface="Calibri" pitchFamily="34" charset="-122"/>
+                <a:cs typeface="Calibri" pitchFamily="34" charset="-120"/>
+              </a:rPr>
+              <a:t>Write that you were unsure. The photograph and the time are what carry value.</a:t>
+            </a:r>
+            <a:endParaRPr lang="en-US" sz="1050" dirty="0"/>
+          </a:p>
+        </p:txBody>
+      </p:sp>
+      <p:sp>
+        <p:nvSpPr>
+          <p:cNvPr id="19" name="Shape 16"/>
+          <p:cNvSpPr/>
+          <p:nvPr/>
+        </p:nvSpPr>
+        <p:spPr>
+          <a:xfrm>
+            <a:off x="640080" y="5358384"/>
+            <a:ext cx="10911535" cy="493776"/>
+          </a:xfrm>
+          <a:prstGeom prst="roundRect">
+            <a:avLst>
+              <a:gd name="adj" fmla="val 7407"/>
+            </a:avLst>
+          </a:prstGeom>
+          <a:solidFill>
+            <a:srgbClr val="093259"/>
+          </a:solidFill>
+          <a:ln/>
+        </p:spPr>
+      </p:sp>
+      <p:sp>
+        <p:nvSpPr>
+          <p:cNvPr id="20" name="Text 17"/>
+          <p:cNvSpPr/>
+          <p:nvPr/>
+        </p:nvSpPr>
+        <p:spPr>
+          <a:xfrm>
+            <a:off x="877824" y="5404104"/>
+            <a:ext cx="10436047" cy="402336"/>
+          </a:xfrm>
+          <a:prstGeom prst="rect">
+            <a:avLst/>
+          </a:prstGeom>
+          <a:noFill/>
+          <a:ln/>
+        </p:spPr>
+        <p:txBody>
+          <a:bodyPr wrap="square" lIns="0" tIns="0" rIns="0" bIns="0" rtlCol="0" anchor="ctr"/>
+          <a:lstStyle/>
+          <a:p>
+            <a:pPr indent="0" marL="0">
+              <a:lnSpc>
+                <a:spcPct val="86000"/>
+              </a:lnSpc>
+              <a:buNone/>
+            </a:pPr>
+            <a:r>
+              <a:rPr lang="en-US" sz="950" b="1" dirty="0">
+                <a:solidFill>
+                  <a:srgbClr val="12B198"/>
+                </a:solidFill>
+                <a:latin typeface="Yu Gothic" pitchFamily="34" charset="0"/>
+                <a:ea typeface="Yu Gothic" pitchFamily="34" charset="-122"/>
+                <a:cs typeface="Yu Gothic" pitchFamily="34" charset="-120"/>
+              </a:rPr>
+              <a:t>割れる論点　</a:t>
+            </a:r>
+            <a:pPr indent="0" marL="0">
+              <a:lnSpc>
+                <a:spcPct val="86000"/>
+              </a:lnSpc>
+              <a:buNone/>
+            </a:pPr>
+            <a:r>
+              <a:rPr lang="en-US" sz="1100" b="1" dirty="0">
+                <a:solidFill>
+                  <a:srgbClr val="FFFFFF"/>
+                </a:solidFill>
+                <a:latin typeface="Yu Gothic" pitchFamily="34" charset="0"/>
+                <a:ea typeface="Yu Gothic" pitchFamily="34" charset="-122"/>
+                <a:cs typeface="Yu Gothic" pitchFamily="34" charset="-120"/>
+              </a:rPr>
+              <a:t>③「次の巡回で何を変えるか」まで届いた班は少ない。設計の変更に踏み込めたかを評価する。</a:t>
+            </a:r>
+            <a:endParaRPr lang="en-US" sz="950" dirty="0"/>
+          </a:p>
+          <a:p>
+            <a:pPr indent="0" marL="0">
+              <a:lnSpc>
+                <a:spcPct val="86000"/>
+              </a:lnSpc>
+              <a:buNone/>
+            </a:pPr>
+            <a:r>
+              <a:rPr lang="en-US" sz="800" i="1" dirty="0">
+                <a:solidFill>
+                  <a:srgbClr val="9FD8CD"/>
+                </a:solidFill>
+                <a:latin typeface="Calibri" pitchFamily="34" charset="0"/>
+                <a:ea typeface="Calibri" pitchFamily="34" charset="-122"/>
+                <a:cs typeface="Calibri" pitchFamily="34" charset="-120"/>
+              </a:rPr>
+              <a:t>Few groups reach question 3. Credit those who changed the design of the next patrol.</a:t>
+            </a:r>
+            <a:endParaRPr lang="en-US" sz="950" dirty="0"/>
+          </a:p>
+        </p:txBody>
+      </p:sp>
+      <p:sp>
+        <p:nvSpPr>
+          <p:cNvPr id="21" name="Text 18"/>
+          <p:cNvSpPr/>
+          <p:nvPr/>
+        </p:nvSpPr>
+        <p:spPr>
+          <a:xfrm>
+            <a:off x="640080" y="5907024"/>
+            <a:ext cx="10911535" cy="310896"/>
+          </a:xfrm>
+          <a:prstGeom prst="rect">
+            <a:avLst/>
+          </a:prstGeom>
+          <a:noFill/>
+          <a:ln/>
+        </p:spPr>
+        <p:txBody>
+          <a:bodyPr wrap="square" lIns="0" tIns="0" rIns="0" bIns="0" rtlCol="0" anchor="t"/>
+          <a:lstStyle/>
+          <a:p>
+            <a:pPr indent="0" marL="0">
+              <a:lnSpc>
+                <a:spcPct val="88000"/>
+              </a:lnSpc>
+              <a:buNone/>
+            </a:pPr>
+            <a:r>
+              <a:rPr lang="en-US" sz="900" b="1" dirty="0">
+                <a:solidFill>
+                  <a:srgbClr val="0D8A76"/>
+                </a:solidFill>
+                <a:latin typeface="Yu Gothic" pitchFamily="34" charset="0"/>
+                <a:ea typeface="Yu Gothic" pitchFamily="34" charset="-122"/>
+                <a:cs typeface="Yu Gothic" pitchFamily="34" charset="-120"/>
+              </a:rPr>
+              <a:t>Site SOP優先　</a:t>
+            </a:r>
+            <a:pPr indent="0" marL="0">
+              <a:lnSpc>
+                <a:spcPct val="88000"/>
+              </a:lnSpc>
+              <a:buNone/>
+            </a:pPr>
+            <a:r>
+              <a:rPr lang="en-US" sz="900" dirty="0">
+                <a:solidFill>
+                  <a:srgbClr val="1B2733"/>
+                </a:solidFill>
+                <a:latin typeface="Yu Gothic" pitchFamily="34" charset="0"/>
+                <a:ea typeface="Yu Gothic" pitchFamily="34" charset="-122"/>
+                <a:cs typeface="Yu Gothic" pitchFamily="34" charset="-120"/>
+              </a:rPr>
+              <a:t>巡回記録の様式、立寄点、報告先は現場ごとに異なる。Site SOPと警備指令書による。</a:t>
+            </a:r>
+            <a:endParaRPr lang="en-US" sz="900" dirty="0"/>
+          </a:p>
+          <a:p>
+            <a:pPr indent="0" marL="0">
+              <a:lnSpc>
+                <a:spcPct val="88000"/>
+              </a:lnSpc>
+              <a:buNone/>
+            </a:pPr>
+            <a:r>
+              <a:rPr lang="en-US" sz="750" i="1" dirty="0">
+                <a:solidFill>
+                  <a:srgbClr val="5F7183"/>
+                </a:solidFill>
+                <a:latin typeface="Calibri" pitchFamily="34" charset="0"/>
+                <a:ea typeface="Calibri" pitchFamily="34" charset="-122"/>
+                <a:cs typeface="Calibri" pitchFamily="34" charset="-120"/>
+              </a:rPr>
+              <a:t>Record formats, checkpoints and reporting lines differ by site.</a:t>
+            </a:r>
+            <a:endParaRPr lang="en-US" sz="900" dirty="0"/>
+          </a:p>
+        </p:txBody>
+      </p:sp>
+      <p:sp>
+        <p:nvSpPr>
+          <p:cNvPr id="22" name="Text 19"/>
+          <p:cNvSpPr/>
+          <p:nvPr/>
+        </p:nvSpPr>
+        <p:spPr>
+          <a:xfrm>
+            <a:off x="640080" y="6272784"/>
+            <a:ext cx="9905695" cy="237744"/>
+          </a:xfrm>
+          <a:prstGeom prst="rect">
+            <a:avLst/>
+          </a:prstGeom>
+          <a:noFill/>
+          <a:ln/>
+        </p:spPr>
+        <p:txBody>
+          <a:bodyPr wrap="square" lIns="0" tIns="0" rIns="0" bIns="0" rtlCol="0" anchor="t"/>
+          <a:lstStyle/>
+          <a:p>
+            <a:pPr indent="0" marL="0">
+              <a:buNone/>
+            </a:pPr>
+            <a:r>
+              <a:rPr lang="en-US" sz="750" b="1" dirty="0">
+                <a:solidFill>
+                  <a:srgbClr val="D6E0E9"/>
+                </a:solidFill>
+                <a:latin typeface="Yu Gothic" pitchFamily="34" charset="0"/>
+                <a:ea typeface="Yu Gothic" pitchFamily="34" charset="-122"/>
+                <a:cs typeface="Yu Gothic" pitchFamily="34" charset="-120"/>
+              </a:rPr>
+              <a:t>ソース　</a:t>
+            </a:r>
+            <a:pPr indent="0" marL="0">
+              <a:buNone/>
+            </a:pPr>
+            <a:r>
+              <a:rPr lang="en-US" sz="750" dirty="0">
+                <a:solidFill>
+                  <a:srgbClr val="5F7183"/>
+                </a:solidFill>
+                <a:latin typeface="Yu Gothic" pitchFamily="34" charset="0"/>
+                <a:ea typeface="Yu Gothic" pitchFamily="34" charset="-122"/>
+                <a:cs typeface="Yu Gothic" pitchFamily="34" charset="-120"/>
+              </a:rPr>
+              <a:t>警備業法、警察庁「警備員教育」、消防法</a:t>
+            </a:r>
+            <a:endParaRPr lang="en-US" sz="750" dirty="0"/>
+          </a:p>
+        </p:txBody>
+      </p:sp>
+      <p:sp>
+        <p:nvSpPr>
+          <p:cNvPr id="23" name="Text 20"/>
+          <p:cNvSpPr/>
+          <p:nvPr/>
+        </p:nvSpPr>
+        <p:spPr>
+          <a:xfrm>
+            <a:off x="640080" y="6382512"/>
+            <a:ext cx="8778240" cy="292608"/>
+          </a:xfrm>
+          <a:prstGeom prst="rect">
+            <a:avLst/>
+          </a:prstGeom>
+          <a:noFill/>
+          <a:ln/>
+        </p:spPr>
+        <p:txBody>
+          <a:bodyPr wrap="square" lIns="0" tIns="0" rIns="0" bIns="0" rtlCol="0" anchor="ctr"/>
+          <a:lstStyle/>
+          <a:p>
+            <a:pPr indent="0" marL="0">
+              <a:buNone/>
+            </a:pPr>
+            <a:r>
+              <a:rPr lang="en-US" sz="900" dirty="0">
+                <a:solidFill>
+                  <a:srgbClr val="5F7183"/>
+                </a:solidFill>
+                <a:latin typeface="Yu Gothic" pitchFamily="34" charset="0"/>
+                <a:ea typeface="Yu Gothic" pitchFamily="34" charset="-122"/>
+                <a:cs typeface="Yu Gothic" pitchFamily="34" charset="-120"/>
+              </a:rPr>
+              <a:t>第4時限｜業務別教育1 巡回の方法に関すること  </a:t>
+            </a:r>
+            <a:pPr indent="0" marL="0">
+              <a:buNone/>
+            </a:pPr>
+            <a:r>
+              <a:rPr lang="en-US" sz="850" i="1" dirty="0">
+                <a:solidFill>
+                  <a:srgbClr val="D6E0E9"/>
+                </a:solidFill>
+                <a:latin typeface="Calibri" pitchFamily="34" charset="0"/>
+                <a:ea typeface="Calibri" pitchFamily="34" charset="-122"/>
+                <a:cs typeface="Calibri" pitchFamily="34" charset="-120"/>
+              </a:rPr>
+              <a:t>Period 4 | Task-Specific Training 1 — Patrol Methods</a:t>
+            </a:r>
+            <a:endParaRPr lang="en-US" sz="900" dirty="0"/>
+          </a:p>
+        </p:txBody>
+      </p:sp>
+      <p:sp>
+        <p:nvSpPr>
+          <p:cNvPr id="24" name="Text 21"/>
+          <p:cNvSpPr/>
+          <p:nvPr/>
+        </p:nvSpPr>
+        <p:spPr>
+          <a:xfrm>
+            <a:off x="10637215" y="6382512"/>
+            <a:ext cx="914400" cy="292608"/>
+          </a:xfrm>
+          <a:prstGeom prst="rect">
+            <a:avLst/>
+          </a:prstGeom>
+          <a:noFill/>
+          <a:ln/>
+        </p:spPr>
+        <p:txBody>
+          <a:bodyPr wrap="square" lIns="0" tIns="0" rIns="0" bIns="0" rtlCol="0" anchor="ctr"/>
+          <a:lstStyle/>
+          <a:p>
+            <a:pPr algn="r" indent="0" marL="0">
+              <a:buNone/>
+            </a:pPr>
+            <a:r>
+              <a:rPr lang="en-US" sz="1000" dirty="0">
+                <a:solidFill>
+                  <a:srgbClr val="5F7183"/>
+                </a:solidFill>
+                <a:latin typeface="Calibri" pitchFamily="34" charset="0"/>
+                <a:ea typeface="Calibri" pitchFamily="34" charset="-122"/>
+                <a:cs typeface="Calibri" pitchFamily="34" charset="-120"/>
+              </a:rPr>
+              <a:t>8</a:t>
+            </a:r>
+            <a:endParaRPr lang="en-US" sz="1000" dirty="0"/>
+          </a:p>
+        </p:txBody>
+      </p:sp>
+    </p:spTree>
+  </p:cSld>
+  <p:clrMapOvr>
+    <a:masterClrMapping/>
+  </p:clrMapOvr>
+</p:sld>
+</file>
+
+<file path=ppt/slides/slide9.xml><?xml version="1.0" encoding="utf-8"?>
+<p:sld xmlns:a="http://schemas.openxmlformats.org/drawingml/2006/main" xmlns:r="http://schemas.openxmlformats.org/officeDocument/2006/relationships" xmlns:p="http://schemas.openxmlformats.org/presentationml/2006/main">
+  <p:cSld name="Slide 9">
+    <p:bg>
+      <p:bgPr>
+        <a:solidFill>
+          <a:srgbClr val="FFFFFF"/>
+        </a:solidFill>
+      </p:bgPr>
+    </p:bg>
+    <p:spTree>
+      <p:nvGrpSpPr>
+        <p:cNvPr id="1" name=""/>
+        <p:cNvGrpSpPr/>
+        <p:nvPr/>
+      </p:nvGrpSpPr>
+      <p:grpSpPr>
+        <a:xfrm>
+          <a:off x="0" y="0"/>
+          <a:ext cx="0" cy="0"/>
+          <a:chOff x="0" y="0"/>
+          <a:chExt cx="0" cy="0"/>
+        </a:xfrm>
+      </p:grpSpPr>
+      <p:pic>
+        <p:nvPicPr>
+          <p:cNvPr id="2" name="Image 0" descr="/home/user/Training-/assets/logo.png">    </p:cNvPr>
+          <p:cNvPicPr>
+            <a:picLocks noChangeAspect="1"/>
+          </p:cNvPicPr>
+          <p:nvPr/>
+        </p:nvPicPr>
+        <p:blipFill>
+          <a:blip r:embed="rId1"/>
+          <a:stretch>
+            <a:fillRect/>
+          </a:stretch>
+        </p:blipFill>
+        <p:spPr>
+          <a:xfrm>
+            <a:off x="10765231" y="332912"/>
+            <a:ext cx="786384" cy="742353"/>
+          </a:xfrm>
+          <a:prstGeom prst="rect">
+            <a:avLst/>
+          </a:prstGeom>
+        </p:spPr>
+      </p:pic>
+      <p:sp>
+        <p:nvSpPr>
+          <p:cNvPr id="3" name="Text 0"/>
+          <p:cNvSpPr/>
+          <p:nvPr/>
+        </p:nvSpPr>
+        <p:spPr>
+          <a:xfrm>
+            <a:off x="640080" y="384048"/>
+            <a:ext cx="8982151" cy="768096"/>
+          </a:xfrm>
+          <a:prstGeom prst="rect">
+            <a:avLst/>
+          </a:prstGeom>
+          <a:noFill/>
+          <a:ln/>
+        </p:spPr>
+        <p:txBody>
+          <a:bodyPr wrap="square" lIns="0" tIns="0" rIns="0" bIns="0" rtlCol="0" anchor="t"/>
+          <a:lstStyle/>
+          <a:p>
+            <a:pPr indent="0" marL="0">
+              <a:lnSpc>
+                <a:spcPct val="94000"/>
+              </a:lnSpc>
+              <a:buNone/>
+            </a:pPr>
+            <a:r>
+              <a:rPr lang="en-US" sz="2300" b="1" dirty="0">
+                <a:solidFill>
+                  <a:srgbClr val="093259"/>
+                </a:solidFill>
+                <a:latin typeface="Yu Gothic" pitchFamily="34" charset="0"/>
+                <a:ea typeface="Yu Gothic" pitchFamily="34" charset="-122"/>
+                <a:cs typeface="Yu Gothic" pitchFamily="34" charset="-120"/>
+              </a:rPr>
+              <a:t>TTX 4-B　深夜、非常口が開放されている</a:t>
+            </a:r>
+            <a:endParaRPr lang="en-US" sz="2300" dirty="0"/>
+          </a:p>
+          <a:p>
+            <a:pPr indent="0" marL="0">
+              <a:lnSpc>
+                <a:spcPct val="94000"/>
+              </a:lnSpc>
+              <a:buNone/>
+            </a:pPr>
+            <a:r>
+              <a:rPr lang="en-US" sz="1100" i="1" dirty="0">
+                <a:solidFill>
+                  <a:srgbClr val="12B198"/>
+                </a:solidFill>
+                <a:latin typeface="Calibri" pitchFamily="34" charset="0"/>
+                <a:ea typeface="Calibri" pitchFamily="34" charset="-122"/>
+                <a:cs typeface="Calibri" pitchFamily="34" charset="-120"/>
+              </a:rPr>
+              <a:t>TTX 4-B — An Emergency Door Standing Open at Night</a:t>
+            </a:r>
+            <a:endParaRPr lang="en-US" sz="2300" dirty="0"/>
+          </a:p>
+        </p:txBody>
+      </p:sp>
+      <p:sp>
+        <p:nvSpPr>
+          <p:cNvPr id="4" name="Shape 1"/>
+          <p:cNvSpPr/>
+          <p:nvPr/>
+        </p:nvSpPr>
+        <p:spPr>
+          <a:xfrm>
+            <a:off x="9686239" y="438912"/>
+            <a:ext cx="932688" cy="310896"/>
+          </a:xfrm>
+          <a:prstGeom prst="roundRect">
+            <a:avLst>
+              <a:gd name="adj" fmla="val 14706"/>
+            </a:avLst>
+          </a:prstGeom>
+          <a:solidFill>
+            <a:srgbClr val="093259"/>
+          </a:solidFill>
+          <a:ln/>
+        </p:spPr>
+      </p:sp>
+      <p:sp>
+        <p:nvSpPr>
+          <p:cNvPr id="5" name="Text 2"/>
+          <p:cNvSpPr/>
+          <p:nvPr/>
+        </p:nvSpPr>
+        <p:spPr>
+          <a:xfrm>
+            <a:off x="9686239" y="438912"/>
+            <a:ext cx="932688" cy="310896"/>
+          </a:xfrm>
+          <a:prstGeom prst="rect">
+            <a:avLst/>
+          </a:prstGeom>
+          <a:noFill/>
+          <a:ln/>
+        </p:spPr>
+        <p:txBody>
+          <a:bodyPr wrap="square" lIns="0" tIns="0" rIns="0" bIns="0" rtlCol="0" anchor="ctr"/>
+          <a:lstStyle/>
+          <a:p>
+            <a:pPr algn="ctr" indent="0" marL="0">
+              <a:buNone/>
+            </a:pPr>
+            <a:r>
+              <a:rPr lang="en-US" sz="1100" b="1" dirty="0">
+                <a:solidFill>
+                  <a:srgbClr val="FFFFFF"/>
+                </a:solidFill>
+                <a:latin typeface="Calibri" pitchFamily="34" charset="0"/>
+                <a:ea typeface="Calibri" pitchFamily="34" charset="-122"/>
+                <a:cs typeface="Calibri" pitchFamily="34" charset="-120"/>
+              </a:rPr>
               <a:t>CASE 4-B</a:t>
             </a:r>
             <a:endParaRPr lang="en-US" sz="1100" dirty="0"/>
@@ -12669,7 +15160,7 @@
                 <a:ea typeface="Calibri" pitchFamily="34" charset="-122"/>
                 <a:cs typeface="Calibri" pitchFamily="34" charset="-120"/>
               </a:rPr>
-              <a:t>8</a:t>
+              <a:t>9</a:t>
             </a:r>
             <a:endParaRPr lang="en-US" sz="1000" dirty="0"/>
           </a:p>

--- a/decks/03_4限_巡回.pptx
+++ b/decks/03_4限_巡回.pptx
@@ -2027,7 +2027,7 @@
                 <a:ea typeface="Yu Gothic" pitchFamily="34" charset="-122"/>
                 <a:cs typeface="Yu Gothic" pitchFamily="34" charset="-120"/>
               </a:rPr>
-              <a:t>TTX 4-B 講評 ― 模範解答</a:t>
+              <a:t>TTX 4-B 模範解答</a:t>
             </a:r>
             <a:endParaRPr lang="en-US" sz="2300" dirty="0"/>
           </a:p>
@@ -2047,7 +2047,7 @@
                 <a:ea typeface="Calibri" pitchFamily="34" charset="-122"/>
                 <a:cs typeface="Calibri" pitchFamily="34" charset="-120"/>
               </a:rPr>
-              <a:t>TTX 4-B Debrief — Model Answer</a:t>
+              <a:t>TTX 4-B — Model Answers</a:t>
             </a:r>
             <a:endParaRPr lang="en-US" sz="2300" dirty="0"/>
           </a:p>
@@ -2116,97 +2116,18 @@
       </p:sp>
       <p:sp>
         <p:nvSpPr>
-          <p:cNvPr id="6" name="Text 3"/>
+          <p:cNvPr id="6" name="Shape 3"/>
           <p:cNvSpPr/>
           <p:nvPr/>
         </p:nvSpPr>
         <p:spPr>
           <a:xfrm>
             <a:off x="640080" y="1188720"/>
-            <a:ext cx="10911535" cy="530352"/>
-          </a:xfrm>
-          <a:prstGeom prst="rect">
-            <a:avLst/>
-          </a:prstGeom>
-          <a:noFill/>
-          <a:ln/>
-        </p:spPr>
-        <p:txBody>
-          <a:bodyPr wrap="square" lIns="0" tIns="0" rIns="0" bIns="0" rtlCol="0" anchor="t"/>
-          <a:lstStyle/>
-          <a:p>
-            <a:pPr indent="0" marL="0">
-              <a:lnSpc>
-                <a:spcPct val="90000"/>
-              </a:lnSpc>
-              <a:buNone/>
-            </a:pPr>
-            <a:r>
-              <a:rPr lang="en-US" sz="1000" b="1" dirty="0">
-                <a:solidFill>
-                  <a:srgbClr val="0D8A76"/>
-                </a:solidFill>
-                <a:latin typeface="Yu Gothic" pitchFamily="34" charset="0"/>
-                <a:ea typeface="Yu Gothic" pitchFamily="34" charset="-122"/>
-                <a:cs typeface="Yu Gothic" pitchFamily="34" charset="-120"/>
-              </a:rPr>
-              <a:t>狙い　</a:t>
-            </a:r>
-            <a:pPr indent="0" marL="0">
-              <a:lnSpc>
-                <a:spcPct val="90000"/>
-              </a:lnSpc>
-              <a:buNone/>
-            </a:pPr>
-            <a:r>
-              <a:rPr lang="en-US" sz="1150" b="1" dirty="0">
-                <a:solidFill>
-                  <a:srgbClr val="093259"/>
-                </a:solidFill>
-                <a:latin typeface="Yu Gothic" pitchFamily="34" charset="0"/>
-                <a:ea typeface="Yu Gothic" pitchFamily="34" charset="-122"/>
-                <a:cs typeface="Yu Gothic" pitchFamily="34" charset="-120"/>
-              </a:rPr>
-              <a:t>安全（People）と保全（Asset）が衝突する。順序を言えるかを見る。</a:t>
-            </a:r>
-            <a:endParaRPr lang="en-US" sz="1000" dirty="0"/>
-          </a:p>
-          <a:p>
-            <a:pPr indent="0" marL="0">
-              <a:lnSpc>
-                <a:spcPct val="90000"/>
-              </a:lnSpc>
-              <a:buNone/>
-            </a:pPr>
-            <a:r>
-              <a:rPr lang="en-US" sz="850" i="1" dirty="0">
-                <a:solidFill>
-                  <a:srgbClr val="5F7183"/>
-                </a:solidFill>
-                <a:latin typeface="Calibri" pitchFamily="34" charset="0"/>
-                <a:ea typeface="Calibri" pitchFamily="34" charset="-122"/>
-                <a:cs typeface="Calibri" pitchFamily="34" charset="-120"/>
-              </a:rPr>
-              <a:t>Safety and preservation collide. Can you state the order?</a:t>
-            </a:r>
-            <a:endParaRPr lang="en-US" sz="1000" dirty="0"/>
-          </a:p>
-        </p:txBody>
-      </p:sp>
-      <p:sp>
-        <p:nvSpPr>
-          <p:cNvPr id="7" name="Shape 4"/>
-          <p:cNvSpPr/>
-          <p:nvPr/>
-        </p:nvSpPr>
-        <p:spPr>
-          <a:xfrm>
-            <a:off x="640080" y="1773936"/>
-            <a:ext cx="5327752" cy="1274064"/>
+            <a:ext cx="10911535" cy="825246"/>
           </a:xfrm>
           <a:prstGeom prst="roundRect">
             <a:avLst>
-              <a:gd name="adj" fmla="val 2871"/>
+              <a:gd name="adj" fmla="val 4432"/>
             </a:avLst>
           </a:prstGeom>
           <a:solidFill>
@@ -2217,14 +2138,34 @@
       </p:sp>
       <p:sp>
         <p:nvSpPr>
+          <p:cNvPr id="7" name="Shape 4"/>
+          <p:cNvSpPr/>
+          <p:nvPr/>
+        </p:nvSpPr>
+        <p:spPr>
+          <a:xfrm>
+            <a:off x="841248" y="1427607"/>
+            <a:ext cx="347472" cy="347472"/>
+          </a:xfrm>
+          <a:prstGeom prst="ellipse">
+            <a:avLst/>
+          </a:prstGeom>
+          <a:solidFill>
+            <a:srgbClr val="12B198"/>
+          </a:solidFill>
+          <a:ln/>
+        </p:spPr>
+      </p:sp>
+      <p:sp>
+        <p:nvSpPr>
           <p:cNvPr id="8" name="Text 5"/>
           <p:cNvSpPr/>
           <p:nvPr/>
         </p:nvSpPr>
         <p:spPr>
           <a:xfrm>
-            <a:off x="877824" y="1865376"/>
-            <a:ext cx="4852264" cy="1091184"/>
+            <a:off x="841248" y="1427607"/>
+            <a:ext cx="347472" cy="347472"/>
           </a:xfrm>
           <a:prstGeom prst="rect">
             <a:avLst/>
@@ -2233,37 +2174,76 @@
           <a:ln/>
         </p:spPr>
         <p:txBody>
-          <a:bodyPr wrap="square" lIns="0" tIns="0" rIns="0" bIns="0" rtlCol="0" anchor="t"/>
-          <a:lstStyle/>
-          <a:p>
-            <a:pPr indent="0" marL="0">
-              <a:lnSpc>
-                <a:spcPct val="90000"/>
-              </a:lnSpc>
-              <a:buNone/>
-            </a:pPr>
-            <a:r>
-              <a:rPr lang="en-US" sz="1050" b="1" dirty="0">
-                <a:solidFill>
-                  <a:srgbClr val="0D8A76"/>
-                </a:solidFill>
-                <a:latin typeface="Yu Gothic" pitchFamily="34" charset="0"/>
-                <a:ea typeface="Yu Gothic" pitchFamily="34" charset="-122"/>
-                <a:cs typeface="Yu Gothic" pitchFamily="34" charset="-120"/>
-              </a:rPr>
-              <a:t>扉を閉めるか</a:t>
-            </a:r>
-            <a:endParaRPr lang="en-US" sz="1050" dirty="0"/>
-          </a:p>
-          <a:p>
-            <a:pPr indent="0" marL="0">
-              <a:lnSpc>
-                <a:spcPct val="90000"/>
-              </a:lnSpc>
-              <a:buNone/>
-            </a:pPr>
-            <a:r>
-              <a:rPr lang="en-US" sz="1050" b="1" dirty="0">
+          <a:bodyPr wrap="square" lIns="0" tIns="0" rIns="0" bIns="0" rtlCol="0" anchor="ctr"/>
+          <a:lstStyle/>
+          <a:p>
+            <a:pPr algn="ctr" indent="0" marL="0">
+              <a:buNone/>
+            </a:pPr>
+            <a:r>
+              <a:rPr lang="en-US" sz="1100" b="1" dirty="0">
+                <a:solidFill>
+                  <a:srgbClr val="FFFFFF"/>
+                </a:solidFill>
+                <a:latin typeface="Calibri" pitchFamily="34" charset="0"/>
+                <a:ea typeface="Calibri" pitchFamily="34" charset="-122"/>
+                <a:cs typeface="Calibri" pitchFamily="34" charset="-120"/>
+              </a:rPr>
+              <a:t>1</a:t>
+            </a:r>
+            <a:endParaRPr lang="en-US" sz="1100" dirty="0"/>
+          </a:p>
+        </p:txBody>
+      </p:sp>
+      <p:sp>
+        <p:nvSpPr>
+          <p:cNvPr id="9" name="Text 6"/>
+          <p:cNvSpPr/>
+          <p:nvPr/>
+        </p:nvSpPr>
+        <p:spPr>
+          <a:xfrm>
+            <a:off x="1280160" y="1252728"/>
+            <a:ext cx="10033711" cy="697230"/>
+          </a:xfrm>
+          <a:prstGeom prst="rect">
+            <a:avLst/>
+          </a:prstGeom>
+          <a:noFill/>
+          <a:ln/>
+        </p:spPr>
+        <p:txBody>
+          <a:bodyPr wrap="square" lIns="0" tIns="0" rIns="0" bIns="0" rtlCol="0" anchor="ctr"/>
+          <a:lstStyle/>
+          <a:p>
+            <a:pPr indent="0" marL="0">
+              <a:lnSpc>
+                <a:spcPct val="88000"/>
+              </a:lnSpc>
+              <a:buNone/>
+            </a:pPr>
+            <a:r>
+              <a:rPr lang="en-US" sz="900" dirty="0">
+                <a:solidFill>
+                  <a:srgbClr val="5F7183"/>
+                </a:solidFill>
+                <a:latin typeface="Yu Gothic" pitchFamily="34" charset="0"/>
+                <a:ea typeface="Yu Gothic" pitchFamily="34" charset="-122"/>
+                <a:cs typeface="Yu Gothic" pitchFamily="34" charset="-120"/>
+              </a:rPr>
+              <a:t>問1　扉を閉めるか</a:t>
+            </a:r>
+            <a:endParaRPr lang="en-US" sz="900" dirty="0"/>
+          </a:p>
+          <a:p>
+            <a:pPr indent="0" marL="0">
+              <a:lnSpc>
+                <a:spcPct val="88000"/>
+              </a:lnSpc>
+              <a:buNone/>
+            </a:pPr>
+            <a:r>
+              <a:rPr lang="en-US" sz="1200" b="1" dirty="0">
                 <a:solidFill>
                   <a:srgbClr val="1B2733"/>
                 </a:solidFill>
@@ -2271,14 +2251,14 @@
                 <a:ea typeface="Yu Gothic" pitchFamily="34" charset="-122"/>
                 <a:cs typeface="Yu Gothic" pitchFamily="34" charset="-120"/>
               </a:rPr>
-              <a:t>すぐには閉めない。中に人がいる場合、退路を塞ぐことになる。</a:t>
-            </a:r>
-            <a:endParaRPr lang="en-US" sz="1050" dirty="0"/>
-          </a:p>
-          <a:p>
-            <a:pPr indent="0" marL="0">
-              <a:lnSpc>
-                <a:spcPct val="90000"/>
+              <a:t>すぐには閉めない。中に人がいる場合、退路を塞ぐことになる。まず状況を把握する。</a:t>
+            </a:r>
+            <a:endParaRPr lang="en-US" sz="900" dirty="0"/>
+          </a:p>
+          <a:p>
+            <a:pPr indent="0" marL="0">
+              <a:lnSpc>
+                <a:spcPct val="88000"/>
               </a:lnSpc>
               <a:buNone/>
             </a:pPr>
@@ -2291,26 +2271,26 @@
                 <a:ea typeface="Calibri" pitchFamily="34" charset="-122"/>
                 <a:cs typeface="Calibri" pitchFamily="34" charset="-120"/>
               </a:rPr>
-              <a:t>Not immediately. If someone is inside, you would be cutting off their exit.</a:t>
-            </a:r>
-            <a:endParaRPr lang="en-US" sz="1050" dirty="0"/>
-          </a:p>
-        </p:txBody>
-      </p:sp>
-      <p:sp>
-        <p:nvSpPr>
-          <p:cNvPr id="9" name="Shape 6"/>
-          <p:cNvSpPr/>
-          <p:nvPr/>
-        </p:nvSpPr>
-        <p:spPr>
-          <a:xfrm>
-            <a:off x="6223864" y="1773936"/>
-            <a:ext cx="5327752" cy="1274064"/>
+              <a:t>Not immediately. If someone is inside you would cut off their exit. Establish the situation first.</a:t>
+            </a:r>
+            <a:endParaRPr lang="en-US" sz="900" dirty="0"/>
+          </a:p>
+        </p:txBody>
+      </p:sp>
+      <p:sp>
+        <p:nvSpPr>
+          <p:cNvPr id="10" name="Shape 7"/>
+          <p:cNvSpPr/>
+          <p:nvPr/>
+        </p:nvSpPr>
+        <p:spPr>
+          <a:xfrm>
+            <a:off x="640080" y="2114550"/>
+            <a:ext cx="10911535" cy="825246"/>
           </a:xfrm>
           <a:prstGeom prst="roundRect">
             <a:avLst>
-              <a:gd name="adj" fmla="val 2871"/>
+              <a:gd name="adj" fmla="val 4432"/>
             </a:avLst>
           </a:prstGeom>
           <a:solidFill>
@@ -2321,14 +2301,34 @@
       </p:sp>
       <p:sp>
         <p:nvSpPr>
-          <p:cNvPr id="10" name="Text 7"/>
-          <p:cNvSpPr/>
-          <p:nvPr/>
-        </p:nvSpPr>
-        <p:spPr>
-          <a:xfrm>
-            <a:off x="6461608" y="1865376"/>
-            <a:ext cx="4852264" cy="1091184"/>
+          <p:cNvPr id="11" name="Shape 8"/>
+          <p:cNvSpPr/>
+          <p:nvPr/>
+        </p:nvSpPr>
+        <p:spPr>
+          <a:xfrm>
+            <a:off x="841248" y="2353437"/>
+            <a:ext cx="347472" cy="347472"/>
+          </a:xfrm>
+          <a:prstGeom prst="ellipse">
+            <a:avLst/>
+          </a:prstGeom>
+          <a:solidFill>
+            <a:srgbClr val="12B198"/>
+          </a:solidFill>
+          <a:ln/>
+        </p:spPr>
+      </p:sp>
+      <p:sp>
+        <p:nvSpPr>
+          <p:cNvPr id="12" name="Text 9"/>
+          <p:cNvSpPr/>
+          <p:nvPr/>
+        </p:nvSpPr>
+        <p:spPr>
+          <a:xfrm>
+            <a:off x="841248" y="2353437"/>
+            <a:ext cx="347472" cy="347472"/>
           </a:xfrm>
           <a:prstGeom prst="rect">
             <a:avLst/>
@@ -2337,37 +2337,76 @@
           <a:ln/>
         </p:spPr>
         <p:txBody>
-          <a:bodyPr wrap="square" lIns="0" tIns="0" rIns="0" bIns="0" rtlCol="0" anchor="t"/>
-          <a:lstStyle/>
-          <a:p>
-            <a:pPr indent="0" marL="0">
-              <a:lnSpc>
-                <a:spcPct val="90000"/>
-              </a:lnSpc>
-              <a:buNone/>
-            </a:pPr>
-            <a:r>
-              <a:rPr lang="en-US" sz="1050" b="1" dirty="0">
-                <a:solidFill>
-                  <a:srgbClr val="093259"/>
-                </a:solidFill>
-                <a:latin typeface="Yu Gothic" pitchFamily="34" charset="0"/>
-                <a:ea typeface="Yu Gothic" pitchFamily="34" charset="-122"/>
-                <a:cs typeface="Yu Gothic" pitchFamily="34" charset="-120"/>
-              </a:rPr>
-              <a:t>単独で外へ</a:t>
-            </a:r>
-            <a:endParaRPr lang="en-US" sz="1050" dirty="0"/>
-          </a:p>
-          <a:p>
-            <a:pPr indent="0" marL="0">
-              <a:lnSpc>
-                <a:spcPct val="90000"/>
-              </a:lnSpc>
-              <a:buNone/>
-            </a:pPr>
-            <a:r>
-              <a:rPr lang="en-US" sz="1050" b="1" dirty="0">
+          <a:bodyPr wrap="square" lIns="0" tIns="0" rIns="0" bIns="0" rtlCol="0" anchor="ctr"/>
+          <a:lstStyle/>
+          <a:p>
+            <a:pPr algn="ctr" indent="0" marL="0">
+              <a:buNone/>
+            </a:pPr>
+            <a:r>
+              <a:rPr lang="en-US" sz="1100" b="1" dirty="0">
+                <a:solidFill>
+                  <a:srgbClr val="FFFFFF"/>
+                </a:solidFill>
+                <a:latin typeface="Calibri" pitchFamily="34" charset="0"/>
+                <a:ea typeface="Calibri" pitchFamily="34" charset="-122"/>
+                <a:cs typeface="Calibri" pitchFamily="34" charset="-120"/>
+              </a:rPr>
+              <a:t>2</a:t>
+            </a:r>
+            <a:endParaRPr lang="en-US" sz="1100" dirty="0"/>
+          </a:p>
+        </p:txBody>
+      </p:sp>
+      <p:sp>
+        <p:nvSpPr>
+          <p:cNvPr id="13" name="Text 10"/>
+          <p:cNvSpPr/>
+          <p:nvPr/>
+        </p:nvSpPr>
+        <p:spPr>
+          <a:xfrm>
+            <a:off x="1280160" y="2178558"/>
+            <a:ext cx="10033711" cy="697230"/>
+          </a:xfrm>
+          <a:prstGeom prst="rect">
+            <a:avLst/>
+          </a:prstGeom>
+          <a:noFill/>
+          <a:ln/>
+        </p:spPr>
+        <p:txBody>
+          <a:bodyPr wrap="square" lIns="0" tIns="0" rIns="0" bIns="0" rtlCol="0" anchor="ctr"/>
+          <a:lstStyle/>
+          <a:p>
+            <a:pPr indent="0" marL="0">
+              <a:lnSpc>
+                <a:spcPct val="88000"/>
+              </a:lnSpc>
+              <a:buNone/>
+            </a:pPr>
+            <a:r>
+              <a:rPr lang="en-US" sz="900" dirty="0">
+                <a:solidFill>
+                  <a:srgbClr val="5F7183"/>
+                </a:solidFill>
+                <a:latin typeface="Yu Gothic" pitchFamily="34" charset="0"/>
+                <a:ea typeface="Yu Gothic" pitchFamily="34" charset="-122"/>
+                <a:cs typeface="Yu Gothic" pitchFamily="34" charset="-120"/>
+              </a:rPr>
+              <a:t>問2　単独で外を確認するか</a:t>
+            </a:r>
+            <a:endParaRPr lang="en-US" sz="900" dirty="0"/>
+          </a:p>
+          <a:p>
+            <a:pPr indent="0" marL="0">
+              <a:lnSpc>
+                <a:spcPct val="88000"/>
+              </a:lnSpc>
+              <a:buNone/>
+            </a:pPr>
+            <a:r>
+              <a:rPr lang="en-US" sz="1200" b="1" dirty="0">
                 <a:solidFill>
                   <a:srgbClr val="1B2733"/>
                 </a:solidFill>
@@ -2375,14 +2414,14 @@
                 <a:ea typeface="Yu Gothic" pitchFamily="34" charset="-122"/>
                 <a:cs typeface="Yu Gothic" pitchFamily="34" charset="-120"/>
               </a:rPr>
-              <a:t>行かない。応援を待つ。行く場合は所在を伝えてから。</a:t>
-            </a:r>
-            <a:endParaRPr lang="en-US" sz="1050" dirty="0"/>
-          </a:p>
-          <a:p>
-            <a:pPr indent="0" marL="0">
-              <a:lnSpc>
-                <a:spcPct val="90000"/>
+              <a:t>行かない。応援を待つ。やむを得ず行く場合は所在を伝えてから行く。</a:t>
+            </a:r>
+            <a:endParaRPr lang="en-US" sz="900" dirty="0"/>
+          </a:p>
+          <a:p>
+            <a:pPr indent="0" marL="0">
+              <a:lnSpc>
+                <a:spcPct val="88000"/>
               </a:lnSpc>
               <a:buNone/>
             </a:pPr>
@@ -2395,26 +2434,26 @@
                 <a:ea typeface="Calibri" pitchFamily="34" charset="-122"/>
                 <a:cs typeface="Calibri" pitchFamily="34" charset="-120"/>
               </a:rPr>
-              <a:t>Do not go. Wait for backup. If you must, tell someone where you are.</a:t>
-            </a:r>
-            <a:endParaRPr lang="en-US" sz="1050" dirty="0"/>
-          </a:p>
-        </p:txBody>
-      </p:sp>
-      <p:sp>
-        <p:nvSpPr>
-          <p:cNvPr id="11" name="Shape 8"/>
-          <p:cNvSpPr/>
-          <p:nvPr/>
-        </p:nvSpPr>
-        <p:spPr>
-          <a:xfrm>
-            <a:off x="640080" y="3176016"/>
-            <a:ext cx="5327752" cy="1274064"/>
+              <a:t>No. Wait for backup. If you must go, tell someone where you are first.</a:t>
+            </a:r>
+            <a:endParaRPr lang="en-US" sz="900" dirty="0"/>
+          </a:p>
+        </p:txBody>
+      </p:sp>
+      <p:sp>
+        <p:nvSpPr>
+          <p:cNvPr id="14" name="Shape 11"/>
+          <p:cNvSpPr/>
+          <p:nvPr/>
+        </p:nvSpPr>
+        <p:spPr>
+          <a:xfrm>
+            <a:off x="640080" y="3040380"/>
+            <a:ext cx="10911535" cy="825246"/>
           </a:xfrm>
           <a:prstGeom prst="roundRect">
             <a:avLst>
-              <a:gd name="adj" fmla="val 2871"/>
+              <a:gd name="adj" fmla="val 4432"/>
             </a:avLst>
           </a:prstGeom>
           <a:solidFill>
@@ -2425,14 +2464,34 @@
       </p:sp>
       <p:sp>
         <p:nvSpPr>
-          <p:cNvPr id="12" name="Text 9"/>
-          <p:cNvSpPr/>
-          <p:nvPr/>
-        </p:nvSpPr>
-        <p:spPr>
-          <a:xfrm>
-            <a:off x="877824" y="3267456"/>
-            <a:ext cx="4852264" cy="1091184"/>
+          <p:cNvPr id="15" name="Shape 12"/>
+          <p:cNvSpPr/>
+          <p:nvPr/>
+        </p:nvSpPr>
+        <p:spPr>
+          <a:xfrm>
+            <a:off x="841248" y="3279267"/>
+            <a:ext cx="347472" cy="347472"/>
+          </a:xfrm>
+          <a:prstGeom prst="ellipse">
+            <a:avLst/>
+          </a:prstGeom>
+          <a:solidFill>
+            <a:srgbClr val="12B198"/>
+          </a:solidFill>
+          <a:ln/>
+        </p:spPr>
+      </p:sp>
+      <p:sp>
+        <p:nvSpPr>
+          <p:cNvPr id="16" name="Text 13"/>
+          <p:cNvSpPr/>
+          <p:nvPr/>
+        </p:nvSpPr>
+        <p:spPr>
+          <a:xfrm>
+            <a:off x="841248" y="3279267"/>
+            <a:ext cx="347472" cy="347472"/>
           </a:xfrm>
           <a:prstGeom prst="rect">
             <a:avLst/>
@@ -2441,37 +2500,76 @@
           <a:ln/>
         </p:spPr>
         <p:txBody>
-          <a:bodyPr wrap="square" lIns="0" tIns="0" rIns="0" bIns="0" rtlCol="0" anchor="t"/>
-          <a:lstStyle/>
-          <a:p>
-            <a:pPr indent="0" marL="0">
-              <a:lnSpc>
-                <a:spcPct val="90000"/>
-              </a:lnSpc>
-              <a:buNone/>
-            </a:pPr>
-            <a:r>
-              <a:rPr lang="en-US" sz="1050" b="1" dirty="0">
-                <a:solidFill>
-                  <a:srgbClr val="093259"/>
-                </a:solidFill>
-                <a:latin typeface="Yu Gothic" pitchFamily="34" charset="0"/>
-                <a:ea typeface="Yu Gothic" pitchFamily="34" charset="-122"/>
-                <a:cs typeface="Yu Gothic" pitchFamily="34" charset="-120"/>
-              </a:rPr>
-              <a:t>残業者の存在</a:t>
-            </a:r>
-            <a:endParaRPr lang="en-US" sz="1050" dirty="0"/>
-          </a:p>
-          <a:p>
-            <a:pPr indent="0" marL="0">
-              <a:lnSpc>
-                <a:spcPct val="90000"/>
-              </a:lnSpc>
-              <a:buNone/>
-            </a:pPr>
-            <a:r>
-              <a:rPr lang="en-US" sz="1050" b="1" dirty="0">
+          <a:bodyPr wrap="square" lIns="0" tIns="0" rIns="0" bIns="0" rtlCol="0" anchor="ctr"/>
+          <a:lstStyle/>
+          <a:p>
+            <a:pPr algn="ctr" indent="0" marL="0">
+              <a:buNone/>
+            </a:pPr>
+            <a:r>
+              <a:rPr lang="en-US" sz="1100" b="1" dirty="0">
+                <a:solidFill>
+                  <a:srgbClr val="FFFFFF"/>
+                </a:solidFill>
+                <a:latin typeface="Calibri" pitchFamily="34" charset="0"/>
+                <a:ea typeface="Calibri" pitchFamily="34" charset="-122"/>
+                <a:cs typeface="Calibri" pitchFamily="34" charset="-120"/>
+              </a:rPr>
+              <a:t>3</a:t>
+            </a:r>
+            <a:endParaRPr lang="en-US" sz="1100" dirty="0"/>
+          </a:p>
+        </p:txBody>
+      </p:sp>
+      <p:sp>
+        <p:nvSpPr>
+          <p:cNvPr id="17" name="Text 14"/>
+          <p:cNvSpPr/>
+          <p:nvPr/>
+        </p:nvSpPr>
+        <p:spPr>
+          <a:xfrm>
+            <a:off x="1280160" y="3104388"/>
+            <a:ext cx="10033711" cy="697230"/>
+          </a:xfrm>
+          <a:prstGeom prst="rect">
+            <a:avLst/>
+          </a:prstGeom>
+          <a:noFill/>
+          <a:ln/>
+        </p:spPr>
+        <p:txBody>
+          <a:bodyPr wrap="square" lIns="0" tIns="0" rIns="0" bIns="0" rtlCol="0" anchor="ctr"/>
+          <a:lstStyle/>
+          <a:p>
+            <a:pPr indent="0" marL="0">
+              <a:lnSpc>
+                <a:spcPct val="88000"/>
+              </a:lnSpc>
+              <a:buNone/>
+            </a:pPr>
+            <a:r>
+              <a:rPr lang="en-US" sz="900" dirty="0">
+                <a:solidFill>
+                  <a:srgbClr val="5F7183"/>
+                </a:solidFill>
+                <a:latin typeface="Yu Gothic" pitchFamily="34" charset="0"/>
+                <a:ea typeface="Yu Gothic" pitchFamily="34" charset="-122"/>
+                <a:cs typeface="Yu Gothic" pitchFamily="34" charset="-120"/>
+              </a:rPr>
+              <a:t>問3　残業中の社員の存在</a:t>
+            </a:r>
+            <a:endParaRPr lang="en-US" sz="900" dirty="0"/>
+          </a:p>
+          <a:p>
+            <a:pPr indent="0" marL="0">
+              <a:lnSpc>
+                <a:spcPct val="88000"/>
+              </a:lnSpc>
+              <a:buNone/>
+            </a:pPr>
+            <a:r>
+              <a:rPr lang="en-US" sz="1200" b="1" dirty="0">
                 <a:solidFill>
                   <a:srgbClr val="1B2733"/>
                 </a:solidFill>
@@ -2479,14 +2577,14 @@
                 <a:ea typeface="Yu Gothic" pitchFamily="34" charset="-122"/>
                 <a:cs typeface="Yu Gothic" pitchFamily="34" charset="-120"/>
               </a:rPr>
-              <a:t>People が最優先。所在確認を先に行う。</a:t>
-            </a:r>
-            <a:endParaRPr lang="en-US" sz="1050" dirty="0"/>
-          </a:p>
-          <a:p>
-            <a:pPr indent="0" marL="0">
-              <a:lnSpc>
-                <a:spcPct val="90000"/>
+              <a:t>People が最優先。所在確認を扉の処置より先に行う。</a:t>
+            </a:r>
+            <a:endParaRPr lang="en-US" sz="900" dirty="0"/>
+          </a:p>
+          <a:p>
+            <a:pPr indent="0" marL="0">
+              <a:lnSpc>
+                <a:spcPct val="88000"/>
               </a:lnSpc>
               <a:buNone/>
             </a:pPr>
@@ -2499,26 +2597,26 @@
                 <a:ea typeface="Calibri" pitchFamily="34" charset="-122"/>
                 <a:cs typeface="Calibri" pitchFamily="34" charset="-120"/>
               </a:rPr>
-              <a:t>People come first. Confirm where they are before anything else.</a:t>
-            </a:r>
-            <a:endParaRPr lang="en-US" sz="1050" dirty="0"/>
-          </a:p>
-        </p:txBody>
-      </p:sp>
-      <p:sp>
-        <p:nvSpPr>
-          <p:cNvPr id="13" name="Shape 10"/>
-          <p:cNvSpPr/>
-          <p:nvPr/>
-        </p:nvSpPr>
-        <p:spPr>
-          <a:xfrm>
-            <a:off x="6223864" y="3176016"/>
-            <a:ext cx="5327752" cy="1274064"/>
+              <a:t>People come first. Confirm where they are before you deal with the door.</a:t>
+            </a:r>
+            <a:endParaRPr lang="en-US" sz="900" dirty="0"/>
+          </a:p>
+        </p:txBody>
+      </p:sp>
+      <p:sp>
+        <p:nvSpPr>
+          <p:cNvPr id="18" name="Shape 15"/>
+          <p:cNvSpPr/>
+          <p:nvPr/>
+        </p:nvSpPr>
+        <p:spPr>
+          <a:xfrm>
+            <a:off x="640080" y="3966210"/>
+            <a:ext cx="10911535" cy="825246"/>
           </a:xfrm>
           <a:prstGeom prst="roundRect">
             <a:avLst>
-              <a:gd name="adj" fmla="val 2871"/>
+              <a:gd name="adj" fmla="val 4432"/>
             </a:avLst>
           </a:prstGeom>
           <a:solidFill>
@@ -2529,14 +2627,34 @@
       </p:sp>
       <p:sp>
         <p:nvSpPr>
-          <p:cNvPr id="14" name="Text 11"/>
-          <p:cNvSpPr/>
-          <p:nvPr/>
-        </p:nvSpPr>
-        <p:spPr>
-          <a:xfrm>
-            <a:off x="6461608" y="3267456"/>
-            <a:ext cx="4852264" cy="1091184"/>
+          <p:cNvPr id="19" name="Shape 16"/>
+          <p:cNvSpPr/>
+          <p:nvPr/>
+        </p:nvSpPr>
+        <p:spPr>
+          <a:xfrm>
+            <a:off x="841248" y="4205097"/>
+            <a:ext cx="347472" cy="347472"/>
+          </a:xfrm>
+          <a:prstGeom prst="ellipse">
+            <a:avLst/>
+          </a:prstGeom>
+          <a:solidFill>
+            <a:srgbClr val="12B198"/>
+          </a:solidFill>
+          <a:ln/>
+        </p:spPr>
+      </p:sp>
+      <p:sp>
+        <p:nvSpPr>
+          <p:cNvPr id="20" name="Text 17"/>
+          <p:cNvSpPr/>
+          <p:nvPr/>
+        </p:nvSpPr>
+        <p:spPr>
+          <a:xfrm>
+            <a:off x="841248" y="4205097"/>
+            <a:ext cx="347472" cy="347472"/>
           </a:xfrm>
           <a:prstGeom prst="rect">
             <a:avLst/>
@@ -2545,37 +2663,76 @@
           <a:ln/>
         </p:spPr>
         <p:txBody>
-          <a:bodyPr wrap="square" lIns="0" tIns="0" rIns="0" bIns="0" rtlCol="0" anchor="t"/>
-          <a:lstStyle/>
-          <a:p>
-            <a:pPr indent="0" marL="0">
-              <a:lnSpc>
-                <a:spcPct val="90000"/>
-              </a:lnSpc>
-              <a:buNone/>
-            </a:pPr>
-            <a:r>
-              <a:rPr lang="en-US" sz="1050" b="1" dirty="0">
-                <a:solidFill>
-                  <a:srgbClr val="093259"/>
-                </a:solidFill>
-                <a:latin typeface="Yu Gothic" pitchFamily="34" charset="0"/>
-                <a:ea typeface="Yu Gothic" pitchFamily="34" charset="-122"/>
-                <a:cs typeface="Yu Gothic" pitchFamily="34" charset="-120"/>
-              </a:rPr>
-              <a:t>足跡</a:t>
-            </a:r>
-            <a:endParaRPr lang="en-US" sz="1050" dirty="0"/>
-          </a:p>
-          <a:p>
-            <a:pPr indent="0" marL="0">
-              <a:lnSpc>
-                <a:spcPct val="90000"/>
-              </a:lnSpc>
-              <a:buNone/>
-            </a:pPr>
-            <a:r>
-              <a:rPr lang="en-US" sz="1050" b="1" dirty="0">
+          <a:bodyPr wrap="square" lIns="0" tIns="0" rIns="0" bIns="0" rtlCol="0" anchor="ctr"/>
+          <a:lstStyle/>
+          <a:p>
+            <a:pPr algn="ctr" indent="0" marL="0">
+              <a:buNone/>
+            </a:pPr>
+            <a:r>
+              <a:rPr lang="en-US" sz="1100" b="1" dirty="0">
+                <a:solidFill>
+                  <a:srgbClr val="FFFFFF"/>
+                </a:solidFill>
+                <a:latin typeface="Calibri" pitchFamily="34" charset="0"/>
+                <a:ea typeface="Calibri" pitchFamily="34" charset="-122"/>
+                <a:cs typeface="Calibri" pitchFamily="34" charset="-120"/>
+              </a:rPr>
+              <a:t>4</a:t>
+            </a:r>
+            <a:endParaRPr lang="en-US" sz="1100" dirty="0"/>
+          </a:p>
+        </p:txBody>
+      </p:sp>
+      <p:sp>
+        <p:nvSpPr>
+          <p:cNvPr id="21" name="Text 18"/>
+          <p:cNvSpPr/>
+          <p:nvPr/>
+        </p:nvSpPr>
+        <p:spPr>
+          <a:xfrm>
+            <a:off x="1280160" y="4030218"/>
+            <a:ext cx="10033711" cy="697230"/>
+          </a:xfrm>
+          <a:prstGeom prst="rect">
+            <a:avLst/>
+          </a:prstGeom>
+          <a:noFill/>
+          <a:ln/>
+        </p:spPr>
+        <p:txBody>
+          <a:bodyPr wrap="square" lIns="0" tIns="0" rIns="0" bIns="0" rtlCol="0" anchor="ctr"/>
+          <a:lstStyle/>
+          <a:p>
+            <a:pPr indent="0" marL="0">
+              <a:lnSpc>
+                <a:spcPct val="88000"/>
+              </a:lnSpc>
+              <a:buNone/>
+            </a:pPr>
+            <a:r>
+              <a:rPr lang="en-US" sz="900" dirty="0">
+                <a:solidFill>
+                  <a:srgbClr val="5F7183"/>
+                </a:solidFill>
+                <a:latin typeface="Yu Gothic" pitchFamily="34" charset="0"/>
+                <a:ea typeface="Yu Gothic" pitchFamily="34" charset="-122"/>
+                <a:cs typeface="Yu Gothic" pitchFamily="34" charset="-120"/>
+              </a:rPr>
+              <a:t>問4　一次報告に何を入れるか</a:t>
+            </a:r>
+            <a:endParaRPr lang="en-US" sz="900" dirty="0"/>
+          </a:p>
+          <a:p>
+            <a:pPr indent="0" marL="0">
+              <a:lnSpc>
+                <a:spcPct val="88000"/>
+              </a:lnSpc>
+              <a:buNone/>
+            </a:pPr>
+            <a:r>
+              <a:rPr lang="en-US" sz="1200" b="1" dirty="0">
                 <a:solidFill>
                   <a:srgbClr val="1B2733"/>
                 </a:solidFill>
@@ -2583,14 +2740,14 @@
                 <a:ea typeface="Yu Gothic" pitchFamily="34" charset="-122"/>
                 <a:cs typeface="Yu Gothic" pitchFamily="34" charset="-120"/>
               </a:rPr>
-              <a:t>現場保存の対象。踏まない。写真と時刻を残す。</a:t>
-            </a:r>
-            <a:endParaRPr lang="en-US" sz="1050" dirty="0"/>
-          </a:p>
-          <a:p>
-            <a:pPr indent="0" marL="0">
-              <a:lnSpc>
-                <a:spcPct val="90000"/>
+              <a:t>事実（施錠されているはずの扉が15cm開いていた、1時40分）と評価（侵入の可能性）を分ける。</a:t>
+            </a:r>
+            <a:endParaRPr lang="en-US" sz="900" dirty="0"/>
+          </a:p>
+          <a:p>
+            <a:pPr indent="0" marL="0">
+              <a:lnSpc>
+                <a:spcPct val="88000"/>
               </a:lnSpc>
               <a:buNone/>
             </a:pPr>
@@ -2603,44 +2760,44 @@
                 <a:ea typeface="Calibri" pitchFamily="34" charset="-122"/>
                 <a:cs typeface="Calibri" pitchFamily="34" charset="-120"/>
               </a:rPr>
-              <a:t>It is evidence. Do not step on it. Photograph it with the time.</a:t>
-            </a:r>
-            <a:endParaRPr lang="en-US" sz="1050" dirty="0"/>
-          </a:p>
-        </p:txBody>
-      </p:sp>
-      <p:sp>
-        <p:nvSpPr>
-          <p:cNvPr id="15" name="Shape 12"/>
-          <p:cNvSpPr/>
-          <p:nvPr/>
-        </p:nvSpPr>
-        <p:spPr>
-          <a:xfrm>
-            <a:off x="640080" y="4578096"/>
-            <a:ext cx="5327752" cy="1274064"/>
+              <a:t>Separate fact (a door that should be locked stood 15 cm open at 01:40) from assessment (possible intrusion).</a:t>
+            </a:r>
+            <a:endParaRPr lang="en-US" sz="900" dirty="0"/>
+          </a:p>
+        </p:txBody>
+      </p:sp>
+      <p:sp>
+        <p:nvSpPr>
+          <p:cNvPr id="22" name="Shape 19"/>
+          <p:cNvSpPr/>
+          <p:nvPr/>
+        </p:nvSpPr>
+        <p:spPr>
+          <a:xfrm>
+            <a:off x="640080" y="4901184"/>
+            <a:ext cx="10911535" cy="420624"/>
           </a:xfrm>
           <a:prstGeom prst="roundRect">
             <a:avLst>
-              <a:gd name="adj" fmla="val 2871"/>
+              <a:gd name="adj" fmla="val 8696"/>
             </a:avLst>
           </a:prstGeom>
           <a:solidFill>
-            <a:srgbClr val="EFF4F8"/>
+            <a:srgbClr val="EEF6FA"/>
           </a:solidFill>
           <a:ln/>
         </p:spPr>
       </p:sp>
       <p:sp>
         <p:nvSpPr>
-          <p:cNvPr id="16" name="Text 13"/>
-          <p:cNvSpPr/>
-          <p:nvPr/>
-        </p:nvSpPr>
-        <p:spPr>
-          <a:xfrm>
-            <a:off x="877824" y="4669536"/>
-            <a:ext cx="4852264" cy="1091184"/>
+          <p:cNvPr id="23" name="Text 20"/>
+          <p:cNvSpPr/>
+          <p:nvPr/>
+        </p:nvSpPr>
+        <p:spPr>
+          <a:xfrm>
+            <a:off x="859536" y="4928616"/>
+            <a:ext cx="10472623" cy="365760"/>
           </a:xfrm>
           <a:prstGeom prst="rect">
             <a:avLst/>
@@ -2649,37 +2806,51 @@
           <a:ln/>
         </p:spPr>
         <p:txBody>
-          <a:bodyPr wrap="square" lIns="0" tIns="0" rIns="0" bIns="0" rtlCol="0" anchor="t"/>
-          <a:lstStyle/>
-          <a:p>
-            <a:pPr indent="0" marL="0">
-              <a:lnSpc>
-                <a:spcPct val="90000"/>
-              </a:lnSpc>
-              <a:buNone/>
-            </a:pPr>
-            <a:r>
-              <a:rPr lang="en-US" sz="1050" b="1" dirty="0">
-                <a:solidFill>
-                  <a:srgbClr val="093259"/>
-                </a:solidFill>
-                <a:latin typeface="Yu Gothic" pitchFamily="34" charset="0"/>
-                <a:ea typeface="Yu Gothic" pitchFamily="34" charset="-122"/>
-                <a:cs typeface="Yu Gothic" pitchFamily="34" charset="-120"/>
-              </a:rPr>
-              <a:t>無線が通じない</a:t>
-            </a:r>
-            <a:endParaRPr lang="en-US" sz="1050" dirty="0"/>
-          </a:p>
-          <a:p>
-            <a:pPr indent="0" marL="0">
-              <a:lnSpc>
-                <a:spcPct val="90000"/>
-              </a:lnSpc>
-              <a:buNone/>
-            </a:pPr>
-            <a:r>
-              <a:rPr lang="en-US" sz="1050" b="1" dirty="0">
+          <a:bodyPr wrap="square" lIns="0" tIns="0" rIns="0" bIns="0" rtlCol="0" anchor="ctr"/>
+          <a:lstStyle/>
+          <a:p>
+            <a:pPr indent="0" marL="0">
+              <a:lnSpc>
+                <a:spcPct val="86000"/>
+              </a:lnSpc>
+              <a:buNone/>
+            </a:pPr>
+            <a:r>
+              <a:rPr lang="en-US" sz="850" b="1" dirty="0">
+                <a:solidFill>
+                  <a:srgbClr val="0D8A76"/>
+                </a:solidFill>
+                <a:latin typeface="Yu Gothic" pitchFamily="34" charset="0"/>
+                <a:ea typeface="Yu Gothic" pitchFamily="34" charset="-122"/>
+                <a:cs typeface="Yu Gothic" pitchFamily="34" charset="-120"/>
+              </a:rPr>
+              <a:t>追加付与①　</a:t>
+            </a:r>
+            <a:pPr indent="0" marL="0">
+              <a:lnSpc>
+                <a:spcPct val="86000"/>
+              </a:lnSpc>
+              <a:buNone/>
+            </a:pPr>
+            <a:r>
+              <a:rPr lang="en-US" sz="850" dirty="0">
+                <a:solidFill>
+                  <a:srgbClr val="5F7183"/>
+                </a:solidFill>
+                <a:latin typeface="Yu Gothic" pitchFamily="34" charset="0"/>
+                <a:ea typeface="Yu Gothic" pitchFamily="34" charset="-122"/>
+                <a:cs typeface="Yu Gothic" pitchFamily="34" charset="-120"/>
+              </a:rPr>
+              <a:t>館内のものでない足跡　→　</a:t>
+            </a:r>
+            <a:pPr indent="0" marL="0">
+              <a:lnSpc>
+                <a:spcPct val="86000"/>
+              </a:lnSpc>
+              <a:buNone/>
+            </a:pPr>
+            <a:r>
+              <a:rPr lang="en-US" sz="1100" b="1" dirty="0">
                 <a:solidFill>
                   <a:srgbClr val="1B2733"/>
                 </a:solidFill>
@@ -2687,19 +2858,19 @@
                 <a:ea typeface="Yu Gothic" pitchFamily="34" charset="-122"/>
                 <a:cs typeface="Yu Gothic" pitchFamily="34" charset="-120"/>
               </a:rPr>
-              <a:t>代替手段を決めていたか。戻って報告することも選択肢。</a:t>
-            </a:r>
-            <a:endParaRPr lang="en-US" sz="1050" dirty="0"/>
-          </a:p>
-          <a:p>
-            <a:pPr indent="0" marL="0">
-              <a:lnSpc>
-                <a:spcPct val="90000"/>
-              </a:lnSpc>
-              <a:buNone/>
-            </a:pPr>
-            <a:r>
-              <a:rPr lang="en-US" sz="800" i="1" dirty="0">
+              <a:t>現場保存の対象。踏まない。写真と時刻を残し、範囲を広めに取る。</a:t>
+            </a:r>
+            <a:endParaRPr lang="en-US" sz="850" dirty="0"/>
+          </a:p>
+          <a:p>
+            <a:pPr indent="0" marL="0">
+              <a:lnSpc>
+                <a:spcPct val="86000"/>
+              </a:lnSpc>
+              <a:buNone/>
+            </a:pPr>
+            <a:r>
+              <a:rPr lang="en-US" sz="750" i="1" dirty="0">
                 <a:solidFill>
                   <a:srgbClr val="5F7183"/>
                 </a:solidFill>
@@ -2707,44 +2878,44 @@
                 <a:ea typeface="Calibri" pitchFamily="34" charset="-122"/>
                 <a:cs typeface="Calibri" pitchFamily="34" charset="-120"/>
               </a:rPr>
-              <a:t>Had you agreed a fallback? Returning to report in person is a valid option.</a:t>
-            </a:r>
-            <a:endParaRPr lang="en-US" sz="1050" dirty="0"/>
-          </a:p>
-        </p:txBody>
-      </p:sp>
-      <p:sp>
-        <p:nvSpPr>
-          <p:cNvPr id="17" name="Shape 14"/>
-          <p:cNvSpPr/>
-          <p:nvPr/>
-        </p:nvSpPr>
-        <p:spPr>
-          <a:xfrm>
-            <a:off x="6223864" y="4578096"/>
-            <a:ext cx="5327752" cy="1274064"/>
+              <a:t>It is evidence. Do not step on it. Photograph it with the time, and cordon wide.</a:t>
+            </a:r>
+            <a:endParaRPr lang="en-US" sz="850" dirty="0"/>
+          </a:p>
+        </p:txBody>
+      </p:sp>
+      <p:sp>
+        <p:nvSpPr>
+          <p:cNvPr id="24" name="Shape 21"/>
+          <p:cNvSpPr/>
+          <p:nvPr/>
+        </p:nvSpPr>
+        <p:spPr>
+          <a:xfrm>
+            <a:off x="640080" y="5394960"/>
+            <a:ext cx="10911535" cy="420624"/>
           </a:xfrm>
           <a:prstGeom prst="roundRect">
             <a:avLst>
-              <a:gd name="adj" fmla="val 2871"/>
+              <a:gd name="adj" fmla="val 8696"/>
             </a:avLst>
           </a:prstGeom>
           <a:solidFill>
-            <a:srgbClr val="EFF4F8"/>
+            <a:srgbClr val="EEF6FA"/>
           </a:solidFill>
           <a:ln/>
         </p:spPr>
       </p:sp>
       <p:sp>
         <p:nvSpPr>
-          <p:cNvPr id="18" name="Text 15"/>
-          <p:cNvSpPr/>
-          <p:nvPr/>
-        </p:nvSpPr>
-        <p:spPr>
-          <a:xfrm>
-            <a:off x="6461608" y="4669536"/>
-            <a:ext cx="4852264" cy="1091184"/>
+          <p:cNvPr id="25" name="Text 22"/>
+          <p:cNvSpPr/>
+          <p:nvPr/>
+        </p:nvSpPr>
+        <p:spPr>
+          <a:xfrm>
+            <a:off x="859536" y="5422392"/>
+            <a:ext cx="10472623" cy="365760"/>
           </a:xfrm>
           <a:prstGeom prst="rect">
             <a:avLst/>
@@ -2753,37 +2924,51 @@
           <a:ln/>
         </p:spPr>
         <p:txBody>
-          <a:bodyPr wrap="square" lIns="0" tIns="0" rIns="0" bIns="0" rtlCol="0" anchor="t"/>
-          <a:lstStyle/>
-          <a:p>
-            <a:pPr indent="0" marL="0">
-              <a:lnSpc>
-                <a:spcPct val="90000"/>
-              </a:lnSpc>
-              <a:buNone/>
-            </a:pPr>
-            <a:r>
-              <a:rPr lang="en-US" sz="1050" b="1" dirty="0">
-                <a:solidFill>
-                  <a:srgbClr val="093259"/>
-                </a:solidFill>
-                <a:latin typeface="Yu Gothic" pitchFamily="34" charset="0"/>
-                <a:ea typeface="Yu Gothic" pitchFamily="34" charset="-122"/>
-                <a:cs typeface="Yu Gothic" pitchFamily="34" charset="-120"/>
-              </a:rPr>
-              <a:t>一次報告</a:t>
-            </a:r>
-            <a:endParaRPr lang="en-US" sz="1050" dirty="0"/>
-          </a:p>
-          <a:p>
-            <a:pPr indent="0" marL="0">
-              <a:lnSpc>
-                <a:spcPct val="90000"/>
-              </a:lnSpc>
-              <a:buNone/>
-            </a:pPr>
-            <a:r>
-              <a:rPr lang="en-US" sz="1050" b="1" dirty="0">
+          <a:bodyPr wrap="square" lIns="0" tIns="0" rIns="0" bIns="0" rtlCol="0" anchor="ctr"/>
+          <a:lstStyle/>
+          <a:p>
+            <a:pPr indent="0" marL="0">
+              <a:lnSpc>
+                <a:spcPct val="86000"/>
+              </a:lnSpc>
+              <a:buNone/>
+            </a:pPr>
+            <a:r>
+              <a:rPr lang="en-US" sz="850" b="1" dirty="0">
+                <a:solidFill>
+                  <a:srgbClr val="0D8A76"/>
+                </a:solidFill>
+                <a:latin typeface="Yu Gothic" pitchFamily="34" charset="0"/>
+                <a:ea typeface="Yu Gothic" pitchFamily="34" charset="-122"/>
+                <a:cs typeface="Yu Gothic" pitchFamily="34" charset="-120"/>
+              </a:rPr>
+              <a:t>追加付与②　</a:t>
+            </a:r>
+            <a:pPr indent="0" marL="0">
+              <a:lnSpc>
+                <a:spcPct val="86000"/>
+              </a:lnSpc>
+              <a:buNone/>
+            </a:pPr>
+            <a:r>
+              <a:rPr lang="en-US" sz="850" dirty="0">
+                <a:solidFill>
+                  <a:srgbClr val="5F7183"/>
+                </a:solidFill>
+                <a:latin typeface="Yu Gothic" pitchFamily="34" charset="0"/>
+                <a:ea typeface="Yu Gothic" pitchFamily="34" charset="-122"/>
+                <a:cs typeface="Yu Gothic" pitchFamily="34" charset="-120"/>
+              </a:rPr>
+              <a:t>地下で無線が通じない　→　</a:t>
+            </a:r>
+            <a:pPr indent="0" marL="0">
+              <a:lnSpc>
+                <a:spcPct val="86000"/>
+              </a:lnSpc>
+              <a:buNone/>
+            </a:pPr>
+            <a:r>
+              <a:rPr lang="en-US" sz="1100" b="1" dirty="0">
                 <a:solidFill>
                   <a:srgbClr val="1B2733"/>
                 </a:solidFill>
@@ -2791,19 +2976,19 @@
                 <a:ea typeface="Yu Gothic" pitchFamily="34" charset="-122"/>
                 <a:cs typeface="Yu Gothic" pitchFamily="34" charset="-120"/>
               </a:rPr>
-              <a:t>事実（開いていた、幅、時刻）と評価（侵入の可能性）を分ける。</a:t>
-            </a:r>
-            <a:endParaRPr lang="en-US" sz="1050" dirty="0"/>
-          </a:p>
-          <a:p>
-            <a:pPr indent="0" marL="0">
-              <a:lnSpc>
-                <a:spcPct val="90000"/>
-              </a:lnSpc>
-              <a:buNone/>
-            </a:pPr>
-            <a:r>
-              <a:rPr lang="en-US" sz="800" i="1" dirty="0">
+              <a:t>代替手段を決めていたか。戻って報告することも選択肢。単独で奥へ進まない。</a:t>
+            </a:r>
+            <a:endParaRPr lang="en-US" sz="850" dirty="0"/>
+          </a:p>
+          <a:p>
+            <a:pPr indent="0" marL="0">
+              <a:lnSpc>
+                <a:spcPct val="86000"/>
+              </a:lnSpc>
+              <a:buNone/>
+            </a:pPr>
+            <a:r>
+              <a:rPr lang="en-US" sz="750" i="1" dirty="0">
                 <a:solidFill>
                   <a:srgbClr val="5F7183"/>
                 </a:solidFill>
@@ -2811,15 +2996,15 @@
                 <a:ea typeface="Calibri" pitchFamily="34" charset="-122"/>
                 <a:cs typeface="Calibri" pitchFamily="34" charset="-120"/>
               </a:rPr>
-              <a:t>Separate fact (open, width, time) from assessment (possible intrusion).</a:t>
-            </a:r>
-            <a:endParaRPr lang="en-US" sz="1050" dirty="0"/>
-          </a:p>
-        </p:txBody>
-      </p:sp>
-      <p:sp>
-        <p:nvSpPr>
-          <p:cNvPr id="19" name="Text 16"/>
+              <a:t>Had you agreed a fallback? Returning to report in person is valid. Do not push further in alone.</a:t>
+            </a:r>
+            <a:endParaRPr lang="en-US" sz="850" dirty="0"/>
+          </a:p>
+        </p:txBody>
+      </p:sp>
+      <p:sp>
+        <p:nvSpPr>
+          <p:cNvPr id="26" name="Text 23"/>
           <p:cNvSpPr/>
           <p:nvPr/>
         </p:nvSpPr>
@@ -2898,7 +3083,7 @@
       </p:sp>
       <p:sp>
         <p:nvSpPr>
-          <p:cNvPr id="20" name="Text 17"/>
+          <p:cNvPr id="27" name="Text 24"/>
           <p:cNvSpPr/>
           <p:nvPr/>
         </p:nvSpPr>
@@ -2951,7 +3136,7 @@
       </p:sp>
       <p:sp>
         <p:nvSpPr>
-          <p:cNvPr id="21" name="Text 18"/>
+          <p:cNvPr id="28" name="Text 25"/>
           <p:cNvSpPr/>
           <p:nvPr/>
         </p:nvSpPr>
@@ -3004,7 +3189,7 @@
       </p:sp>
       <p:sp>
         <p:nvSpPr>
-          <p:cNvPr id="22" name="Text 19"/>
+          <p:cNvPr id="29" name="Text 26"/>
           <p:cNvSpPr/>
           <p:nvPr/>
         </p:nvSpPr>
@@ -12775,7 +12960,7 @@
                 <a:ea typeface="Yu Gothic" pitchFamily="34" charset="-122"/>
                 <a:cs typeface="Yu Gothic" pitchFamily="34" charset="-120"/>
               </a:rPr>
-              <a:t>TTX 4-A 講評 ― 模範解答</a:t>
+              <a:t>TTX 4-A 模範解答</a:t>
             </a:r>
             <a:endParaRPr lang="en-US" sz="2300" dirty="0"/>
           </a:p>
@@ -12795,7 +12980,7 @@
                 <a:ea typeface="Calibri" pitchFamily="34" charset="-122"/>
                 <a:cs typeface="Calibri" pitchFamily="34" charset="-120"/>
               </a:rPr>
-              <a:t>TTX 4-A Debrief — Model Answer</a:t>
+              <a:t>TTX 4-A — Model Answers</a:t>
             </a:r>
             <a:endParaRPr lang="en-US" sz="2300" dirty="0"/>
           </a:p>
@@ -12864,97 +13049,18 @@
       </p:sp>
       <p:sp>
         <p:nvSpPr>
-          <p:cNvPr id="6" name="Text 3"/>
+          <p:cNvPr id="6" name="Shape 3"/>
           <p:cNvSpPr/>
           <p:nvPr/>
         </p:nvSpPr>
         <p:spPr>
           <a:xfrm>
             <a:off x="640080" y="1188720"/>
-            <a:ext cx="10911535" cy="530352"/>
-          </a:xfrm>
-          <a:prstGeom prst="rect">
-            <a:avLst/>
-          </a:prstGeom>
-          <a:noFill/>
-          <a:ln/>
-        </p:spPr>
-        <p:txBody>
-          <a:bodyPr wrap="square" lIns="0" tIns="0" rIns="0" bIns="0" rtlCol="0" anchor="t"/>
-          <a:lstStyle/>
-          <a:p>
-            <a:pPr indent="0" marL="0">
-              <a:lnSpc>
-                <a:spcPct val="90000"/>
-              </a:lnSpc>
-              <a:buNone/>
-            </a:pPr>
-            <a:r>
-              <a:rPr lang="en-US" sz="1000" b="1" dirty="0">
-                <a:solidFill>
-                  <a:srgbClr val="0D8A76"/>
-                </a:solidFill>
-                <a:latin typeface="Yu Gothic" pitchFamily="34" charset="0"/>
-                <a:ea typeface="Yu Gothic" pitchFamily="34" charset="-122"/>
-                <a:cs typeface="Yu Gothic" pitchFamily="34" charset="-120"/>
-              </a:rPr>
-              <a:t>狙い　</a:t>
-            </a:r>
-            <a:pPr indent="0" marL="0">
-              <a:lnSpc>
-                <a:spcPct val="90000"/>
-              </a:lnSpc>
-              <a:buNone/>
-            </a:pPr>
-            <a:r>
-              <a:rPr lang="en-US" sz="1150" b="1" dirty="0">
-                <a:solidFill>
-                  <a:srgbClr val="093259"/>
-                </a:solidFill>
-                <a:latin typeface="Yu Gothic" pitchFamily="34" charset="0"/>
-                <a:ea typeface="Yu Gothic" pitchFamily="34" charset="-122"/>
-                <a:cs typeface="Yu Gothic" pitchFamily="34" charset="-120"/>
-              </a:rPr>
-              <a:t>6場面に共通するのは、情報が足りないこと。足りないと書けるかを見る。</a:t>
-            </a:r>
-            <a:endParaRPr lang="en-US" sz="1000" dirty="0"/>
-          </a:p>
-          <a:p>
-            <a:pPr indent="0" marL="0">
-              <a:lnSpc>
-                <a:spcPct val="90000"/>
-              </a:lnSpc>
-              <a:buNone/>
-            </a:pPr>
-            <a:r>
-              <a:rPr lang="en-US" sz="850" i="1" dirty="0">
-                <a:solidFill>
-                  <a:srgbClr val="5F7183"/>
-                </a:solidFill>
-                <a:latin typeface="Calibri" pitchFamily="34" charset="0"/>
-                <a:ea typeface="Calibri" pitchFamily="34" charset="-122"/>
-                <a:cs typeface="Calibri" pitchFamily="34" charset="-120"/>
-              </a:rPr>
-              <a:t>All six scenes share one thing: incomplete information. Can you write that it was incomplete?</a:t>
-            </a:r>
-            <a:endParaRPr lang="en-US" sz="1000" dirty="0"/>
-          </a:p>
-        </p:txBody>
-      </p:sp>
-      <p:sp>
-        <p:nvSpPr>
-          <p:cNvPr id="7" name="Shape 4"/>
-          <p:cNvSpPr/>
-          <p:nvPr/>
-        </p:nvSpPr>
-        <p:spPr>
-          <a:xfrm>
-            <a:off x="640080" y="1773936"/>
-            <a:ext cx="5327752" cy="1091184"/>
+            <a:ext cx="10911535" cy="683514"/>
           </a:xfrm>
           <a:prstGeom prst="roundRect">
             <a:avLst>
-              <a:gd name="adj" fmla="val 3352"/>
+              <a:gd name="adj" fmla="val 5351"/>
             </a:avLst>
           </a:prstGeom>
           <a:solidFill>
@@ -12965,14 +13071,34 @@
       </p:sp>
       <p:sp>
         <p:nvSpPr>
+          <p:cNvPr id="7" name="Shape 4"/>
+          <p:cNvSpPr/>
+          <p:nvPr/>
+        </p:nvSpPr>
+        <p:spPr>
+          <a:xfrm>
+            <a:off x="841248" y="1356741"/>
+            <a:ext cx="347472" cy="347472"/>
+          </a:xfrm>
+          <a:prstGeom prst="ellipse">
+            <a:avLst/>
+          </a:prstGeom>
+          <a:solidFill>
+            <a:srgbClr val="12B198"/>
+          </a:solidFill>
+          <a:ln/>
+        </p:spPr>
+      </p:sp>
+      <p:sp>
+        <p:nvSpPr>
           <p:cNvPr id="8" name="Text 5"/>
           <p:cNvSpPr/>
           <p:nvPr/>
         </p:nvSpPr>
         <p:spPr>
           <a:xfrm>
-            <a:off x="877824" y="1865376"/>
-            <a:ext cx="4852264" cy="908304"/>
+            <a:off x="841248" y="1356741"/>
+            <a:ext cx="347472" cy="347472"/>
           </a:xfrm>
           <a:prstGeom prst="rect">
             <a:avLst/>
@@ -12981,37 +13107,76 @@
           <a:ln/>
         </p:spPr>
         <p:txBody>
-          <a:bodyPr wrap="square" lIns="0" tIns="0" rIns="0" bIns="0" rtlCol="0" anchor="t"/>
-          <a:lstStyle/>
-          <a:p>
-            <a:pPr indent="0" marL="0">
-              <a:lnSpc>
-                <a:spcPct val="90000"/>
-              </a:lnSpc>
-              <a:buNone/>
-            </a:pPr>
-            <a:r>
-              <a:rPr lang="en-US" sz="1050" b="1" dirty="0">
-                <a:solidFill>
-                  <a:srgbClr val="093259"/>
-                </a:solidFill>
-                <a:latin typeface="Yu Gothic" pitchFamily="34" charset="0"/>
-                <a:ea typeface="Yu Gothic" pitchFamily="34" charset="-122"/>
-                <a:cs typeface="Yu Gothic" pitchFamily="34" charset="-120"/>
-              </a:rPr>
-              <a:t>A ID カード</a:t>
-            </a:r>
-            <a:endParaRPr lang="en-US" sz="1050" dirty="0"/>
-          </a:p>
-          <a:p>
-            <a:pPr indent="0" marL="0">
-              <a:lnSpc>
-                <a:spcPct val="90000"/>
-              </a:lnSpc>
-              <a:buNone/>
-            </a:pPr>
-            <a:r>
-              <a:rPr lang="en-US" sz="1050" b="1" dirty="0">
+          <a:bodyPr wrap="square" lIns="0" tIns="0" rIns="0" bIns="0" rtlCol="0" anchor="ctr"/>
+          <a:lstStyle/>
+          <a:p>
+            <a:pPr algn="ctr" indent="0" marL="0">
+              <a:buNone/>
+            </a:pPr>
+            <a:r>
+              <a:rPr lang="en-US" sz="1100" b="1" dirty="0">
+                <a:solidFill>
+                  <a:srgbClr val="FFFFFF"/>
+                </a:solidFill>
+                <a:latin typeface="Calibri" pitchFamily="34" charset="0"/>
+                <a:ea typeface="Calibri" pitchFamily="34" charset="-122"/>
+                <a:cs typeface="Calibri" pitchFamily="34" charset="-120"/>
+              </a:rPr>
+              <a:t>1</a:t>
+            </a:r>
+            <a:endParaRPr lang="en-US" sz="1100" dirty="0"/>
+          </a:p>
+        </p:txBody>
+      </p:sp>
+      <p:sp>
+        <p:nvSpPr>
+          <p:cNvPr id="9" name="Text 6"/>
+          <p:cNvSpPr/>
+          <p:nvPr/>
+        </p:nvSpPr>
+        <p:spPr>
+          <a:xfrm>
+            <a:off x="1280160" y="1252728"/>
+            <a:ext cx="10033711" cy="555498"/>
+          </a:xfrm>
+          <a:prstGeom prst="rect">
+            <a:avLst/>
+          </a:prstGeom>
+          <a:noFill/>
+          <a:ln/>
+        </p:spPr>
+        <p:txBody>
+          <a:bodyPr wrap="square" lIns="0" tIns="0" rIns="0" bIns="0" rtlCol="0" anchor="ctr"/>
+          <a:lstStyle/>
+          <a:p>
+            <a:pPr indent="0" marL="0">
+              <a:lnSpc>
+                <a:spcPct val="88000"/>
+              </a:lnSpc>
+              <a:buNone/>
+            </a:pPr>
+            <a:r>
+              <a:rPr lang="en-US" sz="900" dirty="0">
+                <a:solidFill>
+                  <a:srgbClr val="5F7183"/>
+                </a:solidFill>
+                <a:latin typeface="Yu Gothic" pitchFamily="34" charset="0"/>
+                <a:ea typeface="Yu Gothic" pitchFamily="34" charset="-122"/>
+                <a:cs typeface="Yu Gothic" pitchFamily="34" charset="-120"/>
+              </a:rPr>
+              <a:t>問1　何に注意するか</a:t>
+            </a:r>
+            <a:endParaRPr lang="en-US" sz="900" dirty="0"/>
+          </a:p>
+          <a:p>
+            <a:pPr indent="0" marL="0">
+              <a:lnSpc>
+                <a:spcPct val="88000"/>
+              </a:lnSpc>
+              <a:buNone/>
+            </a:pPr>
+            <a:r>
+              <a:rPr lang="en-US" sz="1200" b="1" dirty="0">
                 <a:solidFill>
                   <a:srgbClr val="1B2733"/>
                 </a:solidFill>
@@ -13019,14 +13184,14 @@
                 <a:ea typeface="Yu Gothic" pitchFamily="34" charset="-122"/>
                 <a:cs typeface="Yu Gothic" pitchFamily="34" charset="-120"/>
               </a:rPr>
-              <a:t>預かるか、残して報告か。触れた場合は必ず記録する。</a:t>
-            </a:r>
-            <a:endParaRPr lang="en-US" sz="1050" dirty="0"/>
-          </a:p>
-          <a:p>
-            <a:pPr indent="0" marL="0">
-              <a:lnSpc>
-                <a:spcPct val="90000"/>
+              <a:t>A・B・D は Asset（情報）、C・E は People、F は Asset（物的）。分類してから動く。</a:t>
+            </a:r>
+            <a:endParaRPr lang="en-US" sz="900" dirty="0"/>
+          </a:p>
+          <a:p>
+            <a:pPr indent="0" marL="0">
+              <a:lnSpc>
+                <a:spcPct val="88000"/>
               </a:lnSpc>
               <a:buNone/>
             </a:pPr>
@@ -13039,26 +13204,26 @@
                 <a:ea typeface="Calibri" pitchFamily="34" charset="-122"/>
                 <a:cs typeface="Calibri" pitchFamily="34" charset="-120"/>
               </a:rPr>
-              <a:t>Secure it or leave and report. If you touched it, record that you did.</a:t>
-            </a:r>
-            <a:endParaRPr lang="en-US" sz="1050" dirty="0"/>
-          </a:p>
-        </p:txBody>
-      </p:sp>
-      <p:sp>
-        <p:nvSpPr>
-          <p:cNvPr id="9" name="Shape 6"/>
-          <p:cNvSpPr/>
-          <p:nvPr/>
-        </p:nvSpPr>
-        <p:spPr>
-          <a:xfrm>
-            <a:off x="6223864" y="1773936"/>
-            <a:ext cx="5327752" cy="1091184"/>
+              <a:t>A, B and D are Asset (information); C and E are People; F is Asset (physical). Classify before acting.</a:t>
+            </a:r>
+            <a:endParaRPr lang="en-US" sz="900" dirty="0"/>
+          </a:p>
+        </p:txBody>
+      </p:sp>
+      <p:sp>
+        <p:nvSpPr>
+          <p:cNvPr id="10" name="Shape 7"/>
+          <p:cNvSpPr/>
+          <p:nvPr/>
+        </p:nvSpPr>
+        <p:spPr>
+          <a:xfrm>
+            <a:off x="640080" y="1972818"/>
+            <a:ext cx="10911535" cy="683514"/>
           </a:xfrm>
           <a:prstGeom prst="roundRect">
             <a:avLst>
-              <a:gd name="adj" fmla="val 3352"/>
+              <a:gd name="adj" fmla="val 5351"/>
             </a:avLst>
           </a:prstGeom>
           <a:solidFill>
@@ -13069,14 +13234,34 @@
       </p:sp>
       <p:sp>
         <p:nvSpPr>
-          <p:cNvPr id="10" name="Text 7"/>
-          <p:cNvSpPr/>
-          <p:nvPr/>
-        </p:nvSpPr>
-        <p:spPr>
-          <a:xfrm>
-            <a:off x="6461608" y="1865376"/>
-            <a:ext cx="4852264" cy="908304"/>
+          <p:cNvPr id="11" name="Shape 8"/>
+          <p:cNvSpPr/>
+          <p:nvPr/>
+        </p:nvSpPr>
+        <p:spPr>
+          <a:xfrm>
+            <a:off x="841248" y="2140839"/>
+            <a:ext cx="347472" cy="347472"/>
+          </a:xfrm>
+          <a:prstGeom prst="ellipse">
+            <a:avLst/>
+          </a:prstGeom>
+          <a:solidFill>
+            <a:srgbClr val="12B198"/>
+          </a:solidFill>
+          <a:ln/>
+        </p:spPr>
+      </p:sp>
+      <p:sp>
+        <p:nvSpPr>
+          <p:cNvPr id="12" name="Text 9"/>
+          <p:cNvSpPr/>
+          <p:nvPr/>
+        </p:nvSpPr>
+        <p:spPr>
+          <a:xfrm>
+            <a:off x="841248" y="2140839"/>
+            <a:ext cx="347472" cy="347472"/>
           </a:xfrm>
           <a:prstGeom prst="rect">
             <a:avLst/>
@@ -13085,37 +13270,76 @@
           <a:ln/>
         </p:spPr>
         <p:txBody>
-          <a:bodyPr wrap="square" lIns="0" tIns="0" rIns="0" bIns="0" rtlCol="0" anchor="t"/>
-          <a:lstStyle/>
-          <a:p>
-            <a:pPr indent="0" marL="0">
-              <a:lnSpc>
-                <a:spcPct val="90000"/>
-              </a:lnSpc>
-              <a:buNone/>
-            </a:pPr>
-            <a:r>
-              <a:rPr lang="en-US" sz="1050" b="1" dirty="0">
-                <a:solidFill>
-                  <a:srgbClr val="093259"/>
-                </a:solidFill>
-                <a:latin typeface="Yu Gothic" pitchFamily="34" charset="0"/>
-                <a:ea typeface="Yu Gothic" pitchFamily="34" charset="-122"/>
-                <a:cs typeface="Yu Gothic" pitchFamily="34" charset="-120"/>
-              </a:rPr>
-              <a:t>B ホワイトボード</a:t>
-            </a:r>
-            <a:endParaRPr lang="en-US" sz="1050" dirty="0"/>
-          </a:p>
-          <a:p>
-            <a:pPr indent="0" marL="0">
-              <a:lnSpc>
-                <a:spcPct val="90000"/>
-              </a:lnSpc>
-              <a:buNone/>
-            </a:pPr>
-            <a:r>
-              <a:rPr lang="en-US" sz="1050" b="1" dirty="0">
+          <a:bodyPr wrap="square" lIns="0" tIns="0" rIns="0" bIns="0" rtlCol="0" anchor="ctr"/>
+          <a:lstStyle/>
+          <a:p>
+            <a:pPr algn="ctr" indent="0" marL="0">
+              <a:buNone/>
+            </a:pPr>
+            <a:r>
+              <a:rPr lang="en-US" sz="1100" b="1" dirty="0">
+                <a:solidFill>
+                  <a:srgbClr val="FFFFFF"/>
+                </a:solidFill>
+                <a:latin typeface="Calibri" pitchFamily="34" charset="0"/>
+                <a:ea typeface="Calibri" pitchFamily="34" charset="-122"/>
+                <a:cs typeface="Calibri" pitchFamily="34" charset="-120"/>
+              </a:rPr>
+              <a:t>2</a:t>
+            </a:r>
+            <a:endParaRPr lang="en-US" sz="1100" dirty="0"/>
+          </a:p>
+        </p:txBody>
+      </p:sp>
+      <p:sp>
+        <p:nvSpPr>
+          <p:cNvPr id="13" name="Text 10"/>
+          <p:cNvSpPr/>
+          <p:nvPr/>
+        </p:nvSpPr>
+        <p:spPr>
+          <a:xfrm>
+            <a:off x="1280160" y="2036826"/>
+            <a:ext cx="10033711" cy="555498"/>
+          </a:xfrm>
+          <a:prstGeom prst="rect">
+            <a:avLst/>
+          </a:prstGeom>
+          <a:noFill/>
+          <a:ln/>
+        </p:spPr>
+        <p:txBody>
+          <a:bodyPr wrap="square" lIns="0" tIns="0" rIns="0" bIns="0" rtlCol="0" anchor="ctr"/>
+          <a:lstStyle/>
+          <a:p>
+            <a:pPr indent="0" marL="0">
+              <a:lnSpc>
+                <a:spcPct val="88000"/>
+              </a:lnSpc>
+              <a:buNone/>
+            </a:pPr>
+            <a:r>
+              <a:rPr lang="en-US" sz="900" dirty="0">
+                <a:solidFill>
+                  <a:srgbClr val="5F7183"/>
+                </a:solidFill>
+                <a:latin typeface="Yu Gothic" pitchFamily="34" charset="0"/>
+                <a:ea typeface="Yu Gothic" pitchFamily="34" charset="-122"/>
+                <a:cs typeface="Yu Gothic" pitchFamily="34" charset="-120"/>
+              </a:rPr>
+              <a:t>問2　どこを見るか</a:t>
+            </a:r>
+            <a:endParaRPr lang="en-US" sz="900" dirty="0"/>
+          </a:p>
+          <a:p>
+            <a:pPr indent="0" marL="0">
+              <a:lnSpc>
+                <a:spcPct val="88000"/>
+              </a:lnSpc>
+              <a:buNone/>
+            </a:pPr>
+            <a:r>
+              <a:rPr lang="en-US" sz="1200" b="1" dirty="0">
                 <a:solidFill>
                   <a:srgbClr val="1B2733"/>
                 </a:solidFill>
@@ -13123,14 +13347,14 @@
                 <a:ea typeface="Yu Gothic" pitchFamily="34" charset="-122"/>
                 <a:cs typeface="Yu Gothic" pitchFamily="34" charset="-120"/>
               </a:rPr>
-              <a:t>消してよいかは現場による。消す前に記録が必要な場合がある。</a:t>
-            </a:r>
-            <a:endParaRPr lang="en-US" sz="1050" dirty="0"/>
-          </a:p>
-          <a:p>
-            <a:pPr indent="0" marL="0">
-              <a:lnSpc>
-                <a:spcPct val="90000"/>
+              <a:t>周囲と時系列。誰の席か、会議は終わったか、作業は継続中か、前回はどうだったか。</a:t>
+            </a:r>
+            <a:endParaRPr lang="en-US" sz="900" dirty="0"/>
+          </a:p>
+          <a:p>
+            <a:pPr indent="0" marL="0">
+              <a:lnSpc>
+                <a:spcPct val="88000"/>
               </a:lnSpc>
               <a:buNone/>
             </a:pPr>
@@ -13143,26 +13367,26 @@
                 <a:ea typeface="Calibri" pitchFamily="34" charset="-122"/>
                 <a:cs typeface="Calibri" pitchFamily="34" charset="-120"/>
               </a:rPr>
-              <a:t>Whether to erase depends on the site. It may need recording first.</a:t>
-            </a:r>
-            <a:endParaRPr lang="en-US" sz="1050" dirty="0"/>
-          </a:p>
-        </p:txBody>
-      </p:sp>
-      <p:sp>
-        <p:nvSpPr>
-          <p:cNvPr id="11" name="Shape 8"/>
-          <p:cNvSpPr/>
-          <p:nvPr/>
-        </p:nvSpPr>
-        <p:spPr>
-          <a:xfrm>
-            <a:off x="640080" y="2993136"/>
-            <a:ext cx="5327752" cy="1091184"/>
+              <a:t>The surroundings and the timeline: whose desk, is the meeting over, is work ongoing, how was it last round.</a:t>
+            </a:r>
+            <a:endParaRPr lang="en-US" sz="900" dirty="0"/>
+          </a:p>
+        </p:txBody>
+      </p:sp>
+      <p:sp>
+        <p:nvSpPr>
+          <p:cNvPr id="14" name="Shape 11"/>
+          <p:cNvSpPr/>
+          <p:nvPr/>
+        </p:nvSpPr>
+        <p:spPr>
+          <a:xfrm>
+            <a:off x="640080" y="2756916"/>
+            <a:ext cx="10911535" cy="683514"/>
           </a:xfrm>
           <a:prstGeom prst="roundRect">
             <a:avLst>
-              <a:gd name="adj" fmla="val 3352"/>
+              <a:gd name="adj" fmla="val 5351"/>
             </a:avLst>
           </a:prstGeom>
           <a:solidFill>
@@ -13173,14 +13397,34 @@
       </p:sp>
       <p:sp>
         <p:nvSpPr>
-          <p:cNvPr id="12" name="Text 9"/>
-          <p:cNvSpPr/>
-          <p:nvPr/>
-        </p:nvSpPr>
-        <p:spPr>
-          <a:xfrm>
-            <a:off x="877824" y="3084576"/>
-            <a:ext cx="4852264" cy="908304"/>
+          <p:cNvPr id="15" name="Shape 12"/>
+          <p:cNvSpPr/>
+          <p:nvPr/>
+        </p:nvSpPr>
+        <p:spPr>
+          <a:xfrm>
+            <a:off x="841248" y="2924937"/>
+            <a:ext cx="347472" cy="347472"/>
+          </a:xfrm>
+          <a:prstGeom prst="ellipse">
+            <a:avLst/>
+          </a:prstGeom>
+          <a:solidFill>
+            <a:srgbClr val="12B198"/>
+          </a:solidFill>
+          <a:ln/>
+        </p:spPr>
+      </p:sp>
+      <p:sp>
+        <p:nvSpPr>
+          <p:cNvPr id="16" name="Text 13"/>
+          <p:cNvSpPr/>
+          <p:nvPr/>
+        </p:nvSpPr>
+        <p:spPr>
+          <a:xfrm>
+            <a:off x="841248" y="2924937"/>
+            <a:ext cx="347472" cy="347472"/>
           </a:xfrm>
           <a:prstGeom prst="rect">
             <a:avLst/>
@@ -13189,37 +13433,76 @@
           <a:ln/>
         </p:spPr>
         <p:txBody>
-          <a:bodyPr wrap="square" lIns="0" tIns="0" rIns="0" bIns="0" rtlCol="0" anchor="t"/>
-          <a:lstStyle/>
-          <a:p>
-            <a:pPr indent="0" marL="0">
-              <a:lnSpc>
-                <a:spcPct val="90000"/>
-              </a:lnSpc>
-              <a:buNone/>
-            </a:pPr>
-            <a:r>
-              <a:rPr lang="en-US" sz="1050" b="1" dirty="0">
-                <a:solidFill>
-                  <a:srgbClr val="0D8A76"/>
-                </a:solidFill>
-                <a:latin typeface="Yu Gothic" pitchFamily="34" charset="0"/>
-                <a:ea typeface="Yu Gothic" pitchFamily="34" charset="-122"/>
-                <a:cs typeface="Yu Gothic" pitchFamily="34" charset="-120"/>
-              </a:rPr>
-              <a:t>C 非常口の段ボール</a:t>
-            </a:r>
-            <a:endParaRPr lang="en-US" sz="1050" dirty="0"/>
-          </a:p>
-          <a:p>
-            <a:pPr indent="0" marL="0">
-              <a:lnSpc>
-                <a:spcPct val="90000"/>
-              </a:lnSpc>
-              <a:buNone/>
-            </a:pPr>
-            <a:r>
-              <a:rPr lang="en-US" sz="1050" b="1" dirty="0">
+          <a:bodyPr wrap="square" lIns="0" tIns="0" rIns="0" bIns="0" rtlCol="0" anchor="ctr"/>
+          <a:lstStyle/>
+          <a:p>
+            <a:pPr algn="ctr" indent="0" marL="0">
+              <a:buNone/>
+            </a:pPr>
+            <a:r>
+              <a:rPr lang="en-US" sz="1100" b="1" dirty="0">
+                <a:solidFill>
+                  <a:srgbClr val="FFFFFF"/>
+                </a:solidFill>
+                <a:latin typeface="Calibri" pitchFamily="34" charset="0"/>
+                <a:ea typeface="Calibri" pitchFamily="34" charset="-122"/>
+                <a:cs typeface="Calibri" pitchFamily="34" charset="-120"/>
+              </a:rPr>
+              <a:t>3</a:t>
+            </a:r>
+            <a:endParaRPr lang="en-US" sz="1100" dirty="0"/>
+          </a:p>
+        </p:txBody>
+      </p:sp>
+      <p:sp>
+        <p:nvSpPr>
+          <p:cNvPr id="17" name="Text 14"/>
+          <p:cNvSpPr/>
+          <p:nvPr/>
+        </p:nvSpPr>
+        <p:spPr>
+          <a:xfrm>
+            <a:off x="1280160" y="2820924"/>
+            <a:ext cx="10033711" cy="555498"/>
+          </a:xfrm>
+          <a:prstGeom prst="rect">
+            <a:avLst/>
+          </a:prstGeom>
+          <a:noFill/>
+          <a:ln/>
+        </p:spPr>
+        <p:txBody>
+          <a:bodyPr wrap="square" lIns="0" tIns="0" rIns="0" bIns="0" rtlCol="0" anchor="ctr"/>
+          <a:lstStyle/>
+          <a:p>
+            <a:pPr indent="0" marL="0">
+              <a:lnSpc>
+                <a:spcPct val="88000"/>
+              </a:lnSpc>
+              <a:buNone/>
+            </a:pPr>
+            <a:r>
+              <a:rPr lang="en-US" sz="900" dirty="0">
+                <a:solidFill>
+                  <a:srgbClr val="5F7183"/>
+                </a:solidFill>
+                <a:latin typeface="Yu Gothic" pitchFamily="34" charset="0"/>
+                <a:ea typeface="Yu Gothic" pitchFamily="34" charset="-122"/>
+                <a:cs typeface="Yu Gothic" pitchFamily="34" charset="-120"/>
+              </a:rPr>
+              <a:t>問3　どう巡回するか</a:t>
+            </a:r>
+            <a:endParaRPr lang="en-US" sz="900" dirty="0"/>
+          </a:p>
+          <a:p>
+            <a:pPr indent="0" marL="0">
+              <a:lnSpc>
+                <a:spcPct val="88000"/>
+              </a:lnSpc>
+              <a:buNone/>
+            </a:pPr>
+            <a:r>
+              <a:rPr lang="en-US" sz="1200" b="1" dirty="0">
                 <a:solidFill>
                   <a:srgbClr val="1B2733"/>
                 </a:solidFill>
@@ -13227,14 +13510,14 @@
                 <a:ea typeface="Yu Gothic" pitchFamily="34" charset="-122"/>
                 <a:cs typeface="Yu Gothic" pitchFamily="34" charset="-120"/>
               </a:rPr>
-              <a:t>避難障害。その場で除去してよい数少ない例。作業者への声かけが要る。</a:t>
-            </a:r>
-            <a:endParaRPr lang="en-US" sz="1050" dirty="0"/>
-          </a:p>
-          <a:p>
-            <a:pPr indent="0" marL="0">
-              <a:lnSpc>
-                <a:spcPct val="90000"/>
+              <a:t>次の巡回で立寄点を増やす、時刻をずらす、経路を逆順にする。設計を変えるところまで踏み込む。</a:t>
+            </a:r>
+            <a:endParaRPr lang="en-US" sz="900" dirty="0"/>
+          </a:p>
+          <a:p>
+            <a:pPr indent="0" marL="0">
+              <a:lnSpc>
+                <a:spcPct val="88000"/>
               </a:lnSpc>
               <a:buNone/>
             </a:pPr>
@@ -13247,26 +13530,26 @@
                 <a:ea typeface="Calibri" pitchFamily="34" charset="-122"/>
                 <a:cs typeface="Calibri" pitchFamily="34" charset="-120"/>
               </a:rPr>
-              <a:t>It blocks escape. One of the few cases you may clear on the spot — after speaking to the workers.</a:t>
-            </a:r>
-            <a:endParaRPr lang="en-US" sz="1050" dirty="0"/>
-          </a:p>
-        </p:txBody>
-      </p:sp>
-      <p:sp>
-        <p:nvSpPr>
-          <p:cNvPr id="13" name="Shape 10"/>
-          <p:cNvSpPr/>
-          <p:nvPr/>
-        </p:nvSpPr>
-        <p:spPr>
-          <a:xfrm>
-            <a:off x="6223864" y="2993136"/>
-            <a:ext cx="5327752" cy="1091184"/>
+              <a:t>Add a checkpoint, shift the timing, reverse the route. Go as far as changing the design.</a:t>
+            </a:r>
+            <a:endParaRPr lang="en-US" sz="900" dirty="0"/>
+          </a:p>
+        </p:txBody>
+      </p:sp>
+      <p:sp>
+        <p:nvSpPr>
+          <p:cNvPr id="18" name="Shape 15"/>
+          <p:cNvSpPr/>
+          <p:nvPr/>
+        </p:nvSpPr>
+        <p:spPr>
+          <a:xfrm>
+            <a:off x="640080" y="3541014"/>
+            <a:ext cx="10911535" cy="683514"/>
           </a:xfrm>
           <a:prstGeom prst="roundRect">
             <a:avLst>
-              <a:gd name="adj" fmla="val 3352"/>
+              <a:gd name="adj" fmla="val 5351"/>
             </a:avLst>
           </a:prstGeom>
           <a:solidFill>
@@ -13277,14 +13560,34 @@
       </p:sp>
       <p:sp>
         <p:nvSpPr>
-          <p:cNvPr id="14" name="Text 11"/>
-          <p:cNvSpPr/>
-          <p:nvPr/>
-        </p:nvSpPr>
-        <p:spPr>
-          <a:xfrm>
-            <a:off x="6461608" y="3084576"/>
-            <a:ext cx="4852264" cy="908304"/>
+          <p:cNvPr id="19" name="Shape 16"/>
+          <p:cNvSpPr/>
+          <p:nvPr/>
+        </p:nvSpPr>
+        <p:spPr>
+          <a:xfrm>
+            <a:off x="841248" y="3709035"/>
+            <a:ext cx="347472" cy="347472"/>
+          </a:xfrm>
+          <a:prstGeom prst="ellipse">
+            <a:avLst/>
+          </a:prstGeom>
+          <a:solidFill>
+            <a:srgbClr val="12B198"/>
+          </a:solidFill>
+          <a:ln/>
+        </p:spPr>
+      </p:sp>
+      <p:sp>
+        <p:nvSpPr>
+          <p:cNvPr id="20" name="Text 17"/>
+          <p:cNvSpPr/>
+          <p:nvPr/>
+        </p:nvSpPr>
+        <p:spPr>
+          <a:xfrm>
+            <a:off x="841248" y="3709035"/>
+            <a:ext cx="347472" cy="347472"/>
           </a:xfrm>
           <a:prstGeom prst="rect">
             <a:avLst/>
@@ -13293,37 +13596,76 @@
           <a:ln/>
         </p:spPr>
         <p:txBody>
-          <a:bodyPr wrap="square" lIns="0" tIns="0" rIns="0" bIns="0" rtlCol="0" anchor="t"/>
-          <a:lstStyle/>
-          <a:p>
-            <a:pPr indent="0" marL="0">
-              <a:lnSpc>
-                <a:spcPct val="90000"/>
-              </a:lnSpc>
-              <a:buNone/>
-            </a:pPr>
-            <a:r>
-              <a:rPr lang="en-US" sz="1050" b="1" dirty="0">
-                <a:solidFill>
-                  <a:srgbClr val="093259"/>
-                </a:solidFill>
-                <a:latin typeface="Yu Gothic" pitchFamily="34" charset="0"/>
-                <a:ea typeface="Yu Gothic" pitchFamily="34" charset="-122"/>
-                <a:cs typeface="Yu Gothic" pitchFamily="34" charset="-120"/>
-              </a:rPr>
-              <a:t>D サーバ室の扉</a:t>
-            </a:r>
-            <a:endParaRPr lang="en-US" sz="1050" dirty="0"/>
-          </a:p>
-          <a:p>
-            <a:pPr indent="0" marL="0">
-              <a:lnSpc>
-                <a:spcPct val="90000"/>
-              </a:lnSpc>
-              <a:buNone/>
-            </a:pPr>
-            <a:r>
-              <a:rPr lang="en-US" sz="1050" b="1" dirty="0">
+          <a:bodyPr wrap="square" lIns="0" tIns="0" rIns="0" bIns="0" rtlCol="0" anchor="ctr"/>
+          <a:lstStyle/>
+          <a:p>
+            <a:pPr algn="ctr" indent="0" marL="0">
+              <a:buNone/>
+            </a:pPr>
+            <a:r>
+              <a:rPr lang="en-US" sz="1100" b="1" dirty="0">
+                <a:solidFill>
+                  <a:srgbClr val="FFFFFF"/>
+                </a:solidFill>
+                <a:latin typeface="Calibri" pitchFamily="34" charset="0"/>
+                <a:ea typeface="Calibri" pitchFamily="34" charset="-122"/>
+                <a:cs typeface="Calibri" pitchFamily="34" charset="-120"/>
+              </a:rPr>
+              <a:t>4</a:t>
+            </a:r>
+            <a:endParaRPr lang="en-US" sz="1100" dirty="0"/>
+          </a:p>
+        </p:txBody>
+      </p:sp>
+      <p:sp>
+        <p:nvSpPr>
+          <p:cNvPr id="21" name="Text 18"/>
+          <p:cNvSpPr/>
+          <p:nvPr/>
+        </p:nvSpPr>
+        <p:spPr>
+          <a:xfrm>
+            <a:off x="1280160" y="3605022"/>
+            <a:ext cx="10033711" cy="555498"/>
+          </a:xfrm>
+          <a:prstGeom prst="rect">
+            <a:avLst/>
+          </a:prstGeom>
+          <a:noFill/>
+          <a:ln/>
+        </p:spPr>
+        <p:txBody>
+          <a:bodyPr wrap="square" lIns="0" tIns="0" rIns="0" bIns="0" rtlCol="0" anchor="ctr"/>
+          <a:lstStyle/>
+          <a:p>
+            <a:pPr indent="0" marL="0">
+              <a:lnSpc>
+                <a:spcPct val="88000"/>
+              </a:lnSpc>
+              <a:buNone/>
+            </a:pPr>
+            <a:r>
+              <a:rPr lang="en-US" sz="900" dirty="0">
+                <a:solidFill>
+                  <a:srgbClr val="5F7183"/>
+                </a:solidFill>
+                <a:latin typeface="Yu Gothic" pitchFamily="34" charset="0"/>
+                <a:ea typeface="Yu Gothic" pitchFamily="34" charset="-122"/>
+                <a:cs typeface="Yu Gothic" pitchFamily="34" charset="-120"/>
+              </a:rPr>
+              <a:t>問4　どう報告するか</a:t>
+            </a:r>
+            <a:endParaRPr lang="en-US" sz="900" dirty="0"/>
+          </a:p>
+          <a:p>
+            <a:pPr indent="0" marL="0">
+              <a:lnSpc>
+                <a:spcPct val="88000"/>
+              </a:lnSpc>
+              <a:buNone/>
+            </a:pPr>
+            <a:r>
+              <a:rPr lang="en-US" sz="1200" b="1" dirty="0">
                 <a:solidFill>
                   <a:srgbClr val="1B2733"/>
                 </a:solidFill>
@@ -13331,14 +13673,14 @@
                 <a:ea typeface="Yu Gothic" pitchFamily="34" charset="-122"/>
                 <a:cs typeface="Yu Gothic" pitchFamily="34" charset="-120"/>
               </a:rPr>
-              <a:t>中に人がいる可能性がある。単独で入らない。</a:t>
-            </a:r>
-            <a:endParaRPr lang="en-US" sz="1050" dirty="0"/>
-          </a:p>
-          <a:p>
-            <a:pPr indent="0" marL="0">
-              <a:lnSpc>
-                <a:spcPct val="90000"/>
+              <a:t>事実を先に、評価を後に。分からないことは「不明」と書く。C は避難障害として即時報告。</a:t>
+            </a:r>
+            <a:endParaRPr lang="en-US" sz="900" dirty="0"/>
+          </a:p>
+          <a:p>
+            <a:pPr indent="0" marL="0">
+              <a:lnSpc>
+                <a:spcPct val="88000"/>
               </a:lnSpc>
               <a:buNone/>
             </a:pPr>
@@ -13351,44 +13693,44 @@
                 <a:ea typeface="Calibri" pitchFamily="34" charset="-122"/>
                 <a:cs typeface="Calibri" pitchFamily="34" charset="-120"/>
               </a:rPr>
-              <a:t>Someone may be inside. Do not enter alone.</a:t>
-            </a:r>
-            <a:endParaRPr lang="en-US" sz="1050" dirty="0"/>
-          </a:p>
-        </p:txBody>
-      </p:sp>
-      <p:sp>
-        <p:nvSpPr>
-          <p:cNvPr id="15" name="Shape 12"/>
-          <p:cNvSpPr/>
-          <p:nvPr/>
-        </p:nvSpPr>
-        <p:spPr>
-          <a:xfrm>
-            <a:off x="640080" y="4212336"/>
-            <a:ext cx="5327752" cy="1091184"/>
+              <a:t>Fact first, assessment second. Write "unknown" where you did not know. Report C immediately as an escape obstruction.</a:t>
+            </a:r>
+            <a:endParaRPr lang="en-US" sz="900" dirty="0"/>
+          </a:p>
+        </p:txBody>
+      </p:sp>
+      <p:sp>
+        <p:nvSpPr>
+          <p:cNvPr id="22" name="Shape 19"/>
+          <p:cNvSpPr/>
+          <p:nvPr/>
+        </p:nvSpPr>
+        <p:spPr>
+          <a:xfrm>
+            <a:off x="640080" y="4334256"/>
+            <a:ext cx="10911535" cy="420624"/>
           </a:xfrm>
           <a:prstGeom prst="roundRect">
             <a:avLst>
-              <a:gd name="adj" fmla="val 3352"/>
+              <a:gd name="adj" fmla="val 8696"/>
             </a:avLst>
           </a:prstGeom>
           <a:solidFill>
-            <a:srgbClr val="EFF4F8"/>
+            <a:srgbClr val="EEF6FA"/>
           </a:solidFill>
           <a:ln/>
         </p:spPr>
       </p:sp>
       <p:sp>
         <p:nvSpPr>
-          <p:cNvPr id="16" name="Text 13"/>
-          <p:cNvSpPr/>
-          <p:nvPr/>
-        </p:nvSpPr>
-        <p:spPr>
-          <a:xfrm>
-            <a:off x="877824" y="4303776"/>
-            <a:ext cx="4852264" cy="908304"/>
+          <p:cNvPr id="23" name="Text 20"/>
+          <p:cNvSpPr/>
+          <p:nvPr/>
+        </p:nvSpPr>
+        <p:spPr>
+          <a:xfrm>
+            <a:off x="859536" y="4361688"/>
+            <a:ext cx="10472623" cy="365760"/>
           </a:xfrm>
           <a:prstGeom prst="rect">
             <a:avLst/>
@@ -13397,37 +13739,51 @@
           <a:ln/>
         </p:spPr>
         <p:txBody>
-          <a:bodyPr wrap="square" lIns="0" tIns="0" rIns="0" bIns="0" rtlCol="0" anchor="t"/>
-          <a:lstStyle/>
-          <a:p>
-            <a:pPr indent="0" marL="0">
-              <a:lnSpc>
-                <a:spcPct val="90000"/>
-              </a:lnSpc>
-              <a:buNone/>
-            </a:pPr>
-            <a:r>
-              <a:rPr lang="en-US" sz="1050" b="1" dirty="0">
-                <a:solidFill>
-                  <a:srgbClr val="093259"/>
-                </a:solidFill>
-                <a:latin typeface="Yu Gothic" pitchFamily="34" charset="0"/>
-                <a:ea typeface="Yu Gothic" pitchFamily="34" charset="-122"/>
-                <a:cs typeface="Yu Gothic" pitchFamily="34" charset="-120"/>
-              </a:rPr>
-              <a:t>E バッジ未着用</a:t>
-            </a:r>
-            <a:endParaRPr lang="en-US" sz="1050" dirty="0"/>
-          </a:p>
-          <a:p>
-            <a:pPr indent="0" marL="0">
-              <a:lnSpc>
-                <a:spcPct val="90000"/>
-              </a:lnSpc>
-              <a:buNone/>
-            </a:pPr>
-            <a:r>
-              <a:rPr lang="en-US" sz="1050" b="1" dirty="0">
+          <a:bodyPr wrap="square" lIns="0" tIns="0" rIns="0" bIns="0" rtlCol="0" anchor="ctr"/>
+          <a:lstStyle/>
+          <a:p>
+            <a:pPr indent="0" marL="0">
+              <a:lnSpc>
+                <a:spcPct val="86000"/>
+              </a:lnSpc>
+              <a:buNone/>
+            </a:pPr>
+            <a:r>
+              <a:rPr lang="en-US" sz="850" b="1" dirty="0">
+                <a:solidFill>
+                  <a:srgbClr val="0D8A76"/>
+                </a:solidFill>
+                <a:latin typeface="Yu Gothic" pitchFamily="34" charset="0"/>
+                <a:ea typeface="Yu Gothic" pitchFamily="34" charset="-122"/>
+                <a:cs typeface="Yu Gothic" pitchFamily="34" charset="-120"/>
+              </a:rPr>
+              <a:t>追加付与①　</a:t>
+            </a:r>
+            <a:pPr indent="0" marL="0">
+              <a:lnSpc>
+                <a:spcPct val="86000"/>
+              </a:lnSpc>
+              <a:buNone/>
+            </a:pPr>
+            <a:r>
+              <a:rPr lang="en-US" sz="850" dirty="0">
+                <a:solidFill>
+                  <a:srgbClr val="5F7183"/>
+                </a:solidFill>
+                <a:latin typeface="Yu Gothic" pitchFamily="34" charset="0"/>
+                <a:ea typeface="Yu Gothic" pitchFamily="34" charset="-122"/>
+                <a:cs typeface="Yu Gothic" pitchFamily="34" charset="-120"/>
+              </a:rPr>
+              <a:t>C 搬入作業が継続中　→　</a:t>
+            </a:r>
+            <a:pPr indent="0" marL="0">
+              <a:lnSpc>
+                <a:spcPct val="86000"/>
+              </a:lnSpc>
+              <a:buNone/>
+            </a:pPr>
+            <a:r>
+              <a:rPr lang="en-US" sz="1100" b="1" dirty="0">
                 <a:solidFill>
                   <a:srgbClr val="1B2733"/>
                 </a:solidFill>
@@ -13435,19 +13791,19 @@
                 <a:ea typeface="Yu Gothic" pitchFamily="34" charset="-122"/>
                 <a:cs typeface="Yu Gothic" pitchFamily="34" charset="-120"/>
               </a:rPr>
-              <a:t>断定しない。手続きに戻す。第5時限の対応につながる。</a:t>
-            </a:r>
-            <a:endParaRPr lang="en-US" sz="1050" dirty="0"/>
-          </a:p>
-          <a:p>
-            <a:pPr indent="0" marL="0">
-              <a:lnSpc>
-                <a:spcPct val="90000"/>
-              </a:lnSpc>
-              <a:buNone/>
-            </a:pPr>
-            <a:r>
-              <a:rPr lang="en-US" sz="800" i="1" dirty="0">
+              <a:t>避難障害。その場で除去してよい数少ない例。作業者に声をかけてから動かす。</a:t>
+            </a:r>
+            <a:endParaRPr lang="en-US" sz="850" dirty="0"/>
+          </a:p>
+          <a:p>
+            <a:pPr indent="0" marL="0">
+              <a:lnSpc>
+                <a:spcPct val="86000"/>
+              </a:lnSpc>
+              <a:buNone/>
+            </a:pPr>
+            <a:r>
+              <a:rPr lang="en-US" sz="750" i="1" dirty="0">
                 <a:solidFill>
                   <a:srgbClr val="5F7183"/>
                 </a:solidFill>
@@ -13455,44 +13811,44 @@
                 <a:ea typeface="Calibri" pitchFamily="34" charset="-122"/>
                 <a:cs typeface="Calibri" pitchFamily="34" charset="-120"/>
               </a:rPr>
-              <a:t>Do not conclude. Return them to the procedure. This links to Period 5.</a:t>
-            </a:r>
-            <a:endParaRPr lang="en-US" sz="1050" dirty="0"/>
-          </a:p>
-        </p:txBody>
-      </p:sp>
-      <p:sp>
-        <p:nvSpPr>
-          <p:cNvPr id="17" name="Shape 14"/>
-          <p:cNvSpPr/>
-          <p:nvPr/>
-        </p:nvSpPr>
-        <p:spPr>
-          <a:xfrm>
-            <a:off x="6223864" y="4212336"/>
-            <a:ext cx="5327752" cy="1091184"/>
+              <a:t>It blocks escape — one of the few things you may clear on the spot, after speaking to the workers.</a:t>
+            </a:r>
+            <a:endParaRPr lang="en-US" sz="850" dirty="0"/>
+          </a:p>
+        </p:txBody>
+      </p:sp>
+      <p:sp>
+        <p:nvSpPr>
+          <p:cNvPr id="24" name="Shape 21"/>
+          <p:cNvSpPr/>
+          <p:nvPr/>
+        </p:nvSpPr>
+        <p:spPr>
+          <a:xfrm>
+            <a:off x="640080" y="4828032"/>
+            <a:ext cx="10911535" cy="420624"/>
           </a:xfrm>
           <a:prstGeom prst="roundRect">
             <a:avLst>
-              <a:gd name="adj" fmla="val 3352"/>
+              <a:gd name="adj" fmla="val 8696"/>
             </a:avLst>
           </a:prstGeom>
           <a:solidFill>
-            <a:srgbClr val="E4F4F0"/>
+            <a:srgbClr val="EEF6FA"/>
           </a:solidFill>
           <a:ln/>
         </p:spPr>
       </p:sp>
       <p:sp>
         <p:nvSpPr>
-          <p:cNvPr id="18" name="Text 15"/>
-          <p:cNvSpPr/>
-          <p:nvPr/>
-        </p:nvSpPr>
-        <p:spPr>
-          <a:xfrm>
-            <a:off x="6461608" y="4303776"/>
-            <a:ext cx="4852264" cy="908304"/>
+          <p:cNvPr id="25" name="Text 22"/>
+          <p:cNvSpPr/>
+          <p:nvPr/>
+        </p:nvSpPr>
+        <p:spPr>
+          <a:xfrm>
+            <a:off x="859536" y="4855464"/>
+            <a:ext cx="10472623" cy="365760"/>
           </a:xfrm>
           <a:prstGeom prst="rect">
             <a:avLst/>
@@ -13501,17 +13857,17 @@
           <a:ln/>
         </p:spPr>
         <p:txBody>
-          <a:bodyPr wrap="square" lIns="0" tIns="0" rIns="0" bIns="0" rtlCol="0" anchor="t"/>
-          <a:lstStyle/>
-          <a:p>
-            <a:pPr indent="0" marL="0">
-              <a:lnSpc>
-                <a:spcPct val="90000"/>
-              </a:lnSpc>
-              <a:buNone/>
-            </a:pPr>
-            <a:r>
-              <a:rPr lang="en-US" sz="1050" b="1" dirty="0">
+          <a:bodyPr wrap="square" lIns="0" tIns="0" rIns="0" bIns="0" rtlCol="0" anchor="ctr"/>
+          <a:lstStyle/>
+          <a:p>
+            <a:pPr indent="0" marL="0">
+              <a:lnSpc>
+                <a:spcPct val="86000"/>
+              </a:lnSpc>
+              <a:buNone/>
+            </a:pPr>
+            <a:r>
+              <a:rPr lang="en-US" sz="850" b="1" dirty="0">
                 <a:solidFill>
                   <a:srgbClr val="0D8A76"/>
                 </a:solidFill>
@@ -13519,19 +13875,33 @@
                 <a:ea typeface="Yu Gothic" pitchFamily="34" charset="-122"/>
                 <a:cs typeface="Yu Gothic" pitchFamily="34" charset="-120"/>
               </a:rPr>
-              <a:t>F フェンス破損</a:t>
-            </a:r>
-            <a:endParaRPr lang="en-US" sz="1050" dirty="0"/>
-          </a:p>
-          <a:p>
-            <a:pPr indent="0" marL="0">
-              <a:lnSpc>
-                <a:spcPct val="90000"/>
-              </a:lnSpc>
-              <a:buNone/>
-            </a:pPr>
-            <a:r>
-              <a:rPr lang="en-US" sz="1050" b="1" dirty="0">
+              <a:t>追加付与②　</a:t>
+            </a:r>
+            <a:pPr indent="0" marL="0">
+              <a:lnSpc>
+                <a:spcPct val="86000"/>
+              </a:lnSpc>
+              <a:buNone/>
+            </a:pPr>
+            <a:r>
+              <a:rPr lang="en-US" sz="850" dirty="0">
+                <a:solidFill>
+                  <a:srgbClr val="5F7183"/>
+                </a:solidFill>
+                <a:latin typeface="Yu Gothic" pitchFamily="34" charset="0"/>
+                <a:ea typeface="Yu Gothic" pitchFamily="34" charset="-122"/>
+                <a:cs typeface="Yu Gothic" pitchFamily="34" charset="-120"/>
+              </a:rPr>
+              <a:t>F 前回の記憶が不確か　→　</a:t>
+            </a:r>
+            <a:pPr indent="0" marL="0">
+              <a:lnSpc>
+                <a:spcPct val="86000"/>
+              </a:lnSpc>
+              <a:buNone/>
+            </a:pPr>
+            <a:r>
+              <a:rPr lang="en-US" sz="1100" b="1" dirty="0">
                 <a:solidFill>
                   <a:srgbClr val="1B2733"/>
                 </a:solidFill>
@@ -13539,19 +13909,19 @@
                 <a:ea typeface="Yu Gothic" pitchFamily="34" charset="-122"/>
                 <a:cs typeface="Yu Gothic" pitchFamily="34" charset="-120"/>
               </a:rPr>
-              <a:t>記憶が不確かなことを報告に書く。写真と時刻が価値をもつ。</a:t>
-            </a:r>
-            <a:endParaRPr lang="en-US" sz="1050" dirty="0"/>
-          </a:p>
-          <a:p>
-            <a:pPr indent="0" marL="0">
-              <a:lnSpc>
-                <a:spcPct val="90000"/>
-              </a:lnSpc>
-              <a:buNone/>
-            </a:pPr>
-            <a:r>
-              <a:rPr lang="en-US" sz="800" i="1" dirty="0">
+              <a:t>不確かであることを報告に書く。写真と時刻を残せば、次の巡回で比較できる。</a:t>
+            </a:r>
+            <a:endParaRPr lang="en-US" sz="850" dirty="0"/>
+          </a:p>
+          <a:p>
+            <a:pPr indent="0" marL="0">
+              <a:lnSpc>
+                <a:spcPct val="86000"/>
+              </a:lnSpc>
+              <a:buNone/>
+            </a:pPr>
+            <a:r>
+              <a:rPr lang="en-US" sz="750" i="1" dirty="0">
                 <a:solidFill>
                   <a:srgbClr val="5F7183"/>
                 </a:solidFill>
@@ -13559,26 +13929,26 @@
                 <a:ea typeface="Calibri" pitchFamily="34" charset="-122"/>
                 <a:cs typeface="Calibri" pitchFamily="34" charset="-120"/>
               </a:rPr>
-              <a:t>Write that you were unsure. The photograph and the time are what carry value.</a:t>
-            </a:r>
-            <a:endParaRPr lang="en-US" sz="1050" dirty="0"/>
-          </a:p>
-        </p:txBody>
-      </p:sp>
-      <p:sp>
-        <p:nvSpPr>
-          <p:cNvPr id="19" name="Shape 16"/>
+              <a:t>Write that you were unsure. A photograph and a time make the next round comparable.</a:t>
+            </a:r>
+            <a:endParaRPr lang="en-US" sz="850" dirty="0"/>
+          </a:p>
+        </p:txBody>
+      </p:sp>
+      <p:sp>
+        <p:nvSpPr>
+          <p:cNvPr id="26" name="Shape 23"/>
           <p:cNvSpPr/>
           <p:nvPr/>
         </p:nvSpPr>
         <p:spPr>
           <a:xfrm>
             <a:off x="640080" y="5358384"/>
-            <a:ext cx="10911535" cy="493776"/>
+            <a:ext cx="10911535" cy="457200"/>
           </a:xfrm>
           <a:prstGeom prst="roundRect">
             <a:avLst>
-              <a:gd name="adj" fmla="val 7407"/>
+              <a:gd name="adj" fmla="val 8000"/>
             </a:avLst>
           </a:prstGeom>
           <a:solidFill>
@@ -13589,14 +13959,14 @@
       </p:sp>
       <p:sp>
         <p:nvSpPr>
-          <p:cNvPr id="20" name="Text 17"/>
-          <p:cNvSpPr/>
-          <p:nvPr/>
-        </p:nvSpPr>
-        <p:spPr>
-          <a:xfrm>
-            <a:off x="877824" y="5404104"/>
-            <a:ext cx="10436047" cy="402336"/>
+          <p:cNvPr id="27" name="Text 24"/>
+          <p:cNvSpPr/>
+          <p:nvPr/>
+        </p:nvSpPr>
+        <p:spPr>
+          <a:xfrm>
+            <a:off x="859536" y="5385816"/>
+            <a:ext cx="10472623" cy="402336"/>
           </a:xfrm>
           <a:prstGeom prst="rect">
             <a:avLst/>
@@ -13615,7 +13985,7 @@
               <a:buNone/>
             </a:pPr>
             <a:r>
-              <a:rPr lang="en-US" sz="950" b="1" dirty="0">
+              <a:rPr lang="en-US" sz="900" b="1" dirty="0">
                 <a:solidFill>
                   <a:srgbClr val="12B198"/>
                 </a:solidFill>
@@ -13632,7 +14002,7 @@
               <a:buNone/>
             </a:pPr>
             <a:r>
-              <a:rPr lang="en-US" sz="1100" b="1" dirty="0">
+              <a:rPr lang="en-US" sz="1050" b="1" dirty="0">
                 <a:solidFill>
                   <a:srgbClr val="FFFFFF"/>
                 </a:solidFill>
@@ -13640,9 +14010,9 @@
                 <a:ea typeface="Yu Gothic" pitchFamily="34" charset="-122"/>
                 <a:cs typeface="Yu Gothic" pitchFamily="34" charset="-120"/>
               </a:rPr>
-              <a:t>③「次の巡回で何を変えるか」まで届いた班は少ない。設計の変更に踏み込めたかを評価する。</a:t>
-            </a:r>
-            <a:endParaRPr lang="en-US" sz="950" dirty="0"/>
+              <a:t>③まで届いた班は少ない。設計の変更に踏み込めたかを評価する。</a:t>
+            </a:r>
+            <a:endParaRPr lang="en-US" sz="900" dirty="0"/>
           </a:p>
           <a:p>
             <a:pPr indent="0" marL="0">
@@ -13652,7 +14022,7 @@
               <a:buNone/>
             </a:pPr>
             <a:r>
-              <a:rPr lang="en-US" sz="800" i="1" dirty="0">
+              <a:rPr lang="en-US" sz="750" i="1" dirty="0">
                 <a:solidFill>
                   <a:srgbClr val="9FD8CD"/>
                 </a:solidFill>
@@ -13662,13 +14032,13 @@
               </a:rPr>
               <a:t>Few groups reach question 3. Credit those who changed the design of the next patrol.</a:t>
             </a:r>
-            <a:endParaRPr lang="en-US" sz="950" dirty="0"/>
-          </a:p>
-        </p:txBody>
-      </p:sp>
-      <p:sp>
-        <p:nvSpPr>
-          <p:cNvPr id="21" name="Text 18"/>
+            <a:endParaRPr lang="en-US" sz="900" dirty="0"/>
+          </a:p>
+        </p:txBody>
+      </p:sp>
+      <p:sp>
+        <p:nvSpPr>
+          <p:cNvPr id="28" name="Text 25"/>
           <p:cNvSpPr/>
           <p:nvPr/>
         </p:nvSpPr>
@@ -13747,7 +14117,7 @@
       </p:sp>
       <p:sp>
         <p:nvSpPr>
-          <p:cNvPr id="22" name="Text 19"/>
+          <p:cNvPr id="29" name="Text 26"/>
           <p:cNvSpPr/>
           <p:nvPr/>
         </p:nvSpPr>
@@ -13800,7 +14170,7 @@
       </p:sp>
       <p:sp>
         <p:nvSpPr>
-          <p:cNvPr id="23" name="Text 20"/>
+          <p:cNvPr id="30" name="Text 27"/>
           <p:cNvSpPr/>
           <p:nvPr/>
         </p:nvSpPr>
@@ -13853,7 +14223,7 @@
       </p:sp>
       <p:sp>
         <p:nvSpPr>
-          <p:cNvPr id="24" name="Text 21"/>
+          <p:cNvPr id="31" name="Text 28"/>
           <p:cNvSpPr/>
           <p:nvPr/>
         </p:nvSpPr>

--- a/decks/03_4限_巡回.pptx
+++ b/decks/03_4限_巡回.pptx
@@ -13056,11 +13056,11 @@
         <p:spPr>
           <a:xfrm>
             <a:off x="640080" y="1188720"/>
-            <a:ext cx="10911535" cy="683514"/>
+            <a:ext cx="10911535" cy="939546"/>
           </a:xfrm>
           <a:prstGeom prst="roundRect">
             <a:avLst>
-              <a:gd name="adj" fmla="val 5351"/>
+              <a:gd name="adj" fmla="val 3893"/>
             </a:avLst>
           </a:prstGeom>
           <a:solidFill>
@@ -13077,7 +13077,7 @@
         </p:nvSpPr>
         <p:spPr>
           <a:xfrm>
-            <a:off x="841248" y="1356741"/>
+            <a:off x="841248" y="1484757"/>
             <a:ext cx="347472" cy="347472"/>
           </a:xfrm>
           <a:prstGeom prst="ellipse">
@@ -13097,7 +13097,7 @@
         </p:nvSpPr>
         <p:spPr>
           <a:xfrm>
-            <a:off x="841248" y="1356741"/>
+            <a:off x="841248" y="1484757"/>
             <a:ext cx="347472" cy="347472"/>
           </a:xfrm>
           <a:prstGeom prst="rect">
@@ -13137,7 +13137,7 @@
         <p:spPr>
           <a:xfrm>
             <a:off x="1280160" y="1252728"/>
-            <a:ext cx="10033711" cy="555498"/>
+            <a:ext cx="10033711" cy="811530"/>
           </a:xfrm>
           <a:prstGeom prst="rect">
             <a:avLst/>
@@ -13218,12 +13218,12 @@
         </p:nvSpPr>
         <p:spPr>
           <a:xfrm>
-            <a:off x="640080" y="1972818"/>
-            <a:ext cx="10911535" cy="683514"/>
+            <a:off x="640080" y="2228850"/>
+            <a:ext cx="10911535" cy="939546"/>
           </a:xfrm>
           <a:prstGeom prst="roundRect">
             <a:avLst>
-              <a:gd name="adj" fmla="val 5351"/>
+              <a:gd name="adj" fmla="val 3893"/>
             </a:avLst>
           </a:prstGeom>
           <a:solidFill>
@@ -13240,7 +13240,7 @@
         </p:nvSpPr>
         <p:spPr>
           <a:xfrm>
-            <a:off x="841248" y="2140839"/>
+            <a:off x="841248" y="2524887"/>
             <a:ext cx="347472" cy="347472"/>
           </a:xfrm>
           <a:prstGeom prst="ellipse">
@@ -13260,7 +13260,7 @@
         </p:nvSpPr>
         <p:spPr>
           <a:xfrm>
-            <a:off x="841248" y="2140839"/>
+            <a:off x="841248" y="2524887"/>
             <a:ext cx="347472" cy="347472"/>
           </a:xfrm>
           <a:prstGeom prst="rect">
@@ -13299,8 +13299,8 @@
         </p:nvSpPr>
         <p:spPr>
           <a:xfrm>
-            <a:off x="1280160" y="2036826"/>
-            <a:ext cx="10033711" cy="555498"/>
+            <a:off x="1280160" y="2292858"/>
+            <a:ext cx="10033711" cy="811530"/>
           </a:xfrm>
           <a:prstGeom prst="rect">
             <a:avLst/>
@@ -13381,12 +13381,12 @@
         </p:nvSpPr>
         <p:spPr>
           <a:xfrm>
-            <a:off x="640080" y="2756916"/>
-            <a:ext cx="10911535" cy="683514"/>
+            <a:off x="640080" y="3268980"/>
+            <a:ext cx="10911535" cy="939546"/>
           </a:xfrm>
           <a:prstGeom prst="roundRect">
             <a:avLst>
-              <a:gd name="adj" fmla="val 5351"/>
+              <a:gd name="adj" fmla="val 3893"/>
             </a:avLst>
           </a:prstGeom>
           <a:solidFill>
@@ -13403,7 +13403,7 @@
         </p:nvSpPr>
         <p:spPr>
           <a:xfrm>
-            <a:off x="841248" y="2924937"/>
+            <a:off x="841248" y="3565017"/>
             <a:ext cx="347472" cy="347472"/>
           </a:xfrm>
           <a:prstGeom prst="ellipse">
@@ -13423,7 +13423,7 @@
         </p:nvSpPr>
         <p:spPr>
           <a:xfrm>
-            <a:off x="841248" y="2924937"/>
+            <a:off x="841248" y="3565017"/>
             <a:ext cx="347472" cy="347472"/>
           </a:xfrm>
           <a:prstGeom prst="rect">
@@ -13462,8 +13462,8 @@
         </p:nvSpPr>
         <p:spPr>
           <a:xfrm>
-            <a:off x="1280160" y="2820924"/>
-            <a:ext cx="10033711" cy="555498"/>
+            <a:off x="1280160" y="3332988"/>
+            <a:ext cx="10033711" cy="811530"/>
           </a:xfrm>
           <a:prstGeom prst="rect">
             <a:avLst/>
@@ -13544,12 +13544,12 @@
         </p:nvSpPr>
         <p:spPr>
           <a:xfrm>
-            <a:off x="640080" y="3541014"/>
-            <a:ext cx="10911535" cy="683514"/>
+            <a:off x="640080" y="4309110"/>
+            <a:ext cx="10911535" cy="939546"/>
           </a:xfrm>
           <a:prstGeom prst="roundRect">
             <a:avLst>
-              <a:gd name="adj" fmla="val 5351"/>
+              <a:gd name="adj" fmla="val 3893"/>
             </a:avLst>
           </a:prstGeom>
           <a:solidFill>
@@ -13566,7 +13566,7 @@
         </p:nvSpPr>
         <p:spPr>
           <a:xfrm>
-            <a:off x="841248" y="3709035"/>
+            <a:off x="841248" y="4605147"/>
             <a:ext cx="347472" cy="347472"/>
           </a:xfrm>
           <a:prstGeom prst="ellipse">
@@ -13586,7 +13586,7 @@
         </p:nvSpPr>
         <p:spPr>
           <a:xfrm>
-            <a:off x="841248" y="3709035"/>
+            <a:off x="841248" y="4605147"/>
             <a:ext cx="347472" cy="347472"/>
           </a:xfrm>
           <a:prstGeom prst="rect">
@@ -13625,8 +13625,8 @@
         </p:nvSpPr>
         <p:spPr>
           <a:xfrm>
-            <a:off x="1280160" y="3605022"/>
-            <a:ext cx="10033711" cy="555498"/>
+            <a:off x="1280160" y="4373118"/>
+            <a:ext cx="10033711" cy="811530"/>
           </a:xfrm>
           <a:prstGeom prst="rect">
             <a:avLst/>
@@ -13702,242 +13702,6 @@
       <p:sp>
         <p:nvSpPr>
           <p:cNvPr id="22" name="Shape 19"/>
-          <p:cNvSpPr/>
-          <p:nvPr/>
-        </p:nvSpPr>
-        <p:spPr>
-          <a:xfrm>
-            <a:off x="640080" y="4334256"/>
-            <a:ext cx="10911535" cy="420624"/>
-          </a:xfrm>
-          <a:prstGeom prst="roundRect">
-            <a:avLst>
-              <a:gd name="adj" fmla="val 8696"/>
-            </a:avLst>
-          </a:prstGeom>
-          <a:solidFill>
-            <a:srgbClr val="EEF6FA"/>
-          </a:solidFill>
-          <a:ln/>
-        </p:spPr>
-      </p:sp>
-      <p:sp>
-        <p:nvSpPr>
-          <p:cNvPr id="23" name="Text 20"/>
-          <p:cNvSpPr/>
-          <p:nvPr/>
-        </p:nvSpPr>
-        <p:spPr>
-          <a:xfrm>
-            <a:off x="859536" y="4361688"/>
-            <a:ext cx="10472623" cy="365760"/>
-          </a:xfrm>
-          <a:prstGeom prst="rect">
-            <a:avLst/>
-          </a:prstGeom>
-          <a:noFill/>
-          <a:ln/>
-        </p:spPr>
-        <p:txBody>
-          <a:bodyPr wrap="square" lIns="0" tIns="0" rIns="0" bIns="0" rtlCol="0" anchor="ctr"/>
-          <a:lstStyle/>
-          <a:p>
-            <a:pPr indent="0" marL="0">
-              <a:lnSpc>
-                <a:spcPct val="86000"/>
-              </a:lnSpc>
-              <a:buNone/>
-            </a:pPr>
-            <a:r>
-              <a:rPr lang="en-US" sz="850" b="1" dirty="0">
-                <a:solidFill>
-                  <a:srgbClr val="0D8A76"/>
-                </a:solidFill>
-                <a:latin typeface="Yu Gothic" pitchFamily="34" charset="0"/>
-                <a:ea typeface="Yu Gothic" pitchFamily="34" charset="-122"/>
-                <a:cs typeface="Yu Gothic" pitchFamily="34" charset="-120"/>
-              </a:rPr>
-              <a:t>追加付与①　</a:t>
-            </a:r>
-            <a:pPr indent="0" marL="0">
-              <a:lnSpc>
-                <a:spcPct val="86000"/>
-              </a:lnSpc>
-              <a:buNone/>
-            </a:pPr>
-            <a:r>
-              <a:rPr lang="en-US" sz="850" dirty="0">
-                <a:solidFill>
-                  <a:srgbClr val="5F7183"/>
-                </a:solidFill>
-                <a:latin typeface="Yu Gothic" pitchFamily="34" charset="0"/>
-                <a:ea typeface="Yu Gothic" pitchFamily="34" charset="-122"/>
-                <a:cs typeface="Yu Gothic" pitchFamily="34" charset="-120"/>
-              </a:rPr>
-              <a:t>C 搬入作業が継続中　→　</a:t>
-            </a:r>
-            <a:pPr indent="0" marL="0">
-              <a:lnSpc>
-                <a:spcPct val="86000"/>
-              </a:lnSpc>
-              <a:buNone/>
-            </a:pPr>
-            <a:r>
-              <a:rPr lang="en-US" sz="1100" b="1" dirty="0">
-                <a:solidFill>
-                  <a:srgbClr val="1B2733"/>
-                </a:solidFill>
-                <a:latin typeface="Yu Gothic" pitchFamily="34" charset="0"/>
-                <a:ea typeface="Yu Gothic" pitchFamily="34" charset="-122"/>
-                <a:cs typeface="Yu Gothic" pitchFamily="34" charset="-120"/>
-              </a:rPr>
-              <a:t>避難障害。その場で除去してよい数少ない例。作業者に声をかけてから動かす。</a:t>
-            </a:r>
-            <a:endParaRPr lang="en-US" sz="850" dirty="0"/>
-          </a:p>
-          <a:p>
-            <a:pPr indent="0" marL="0">
-              <a:lnSpc>
-                <a:spcPct val="86000"/>
-              </a:lnSpc>
-              <a:buNone/>
-            </a:pPr>
-            <a:r>
-              <a:rPr lang="en-US" sz="750" i="1" dirty="0">
-                <a:solidFill>
-                  <a:srgbClr val="5F7183"/>
-                </a:solidFill>
-                <a:latin typeface="Calibri" pitchFamily="34" charset="0"/>
-                <a:ea typeface="Calibri" pitchFamily="34" charset="-122"/>
-                <a:cs typeface="Calibri" pitchFamily="34" charset="-120"/>
-              </a:rPr>
-              <a:t>It blocks escape — one of the few things you may clear on the spot, after speaking to the workers.</a:t>
-            </a:r>
-            <a:endParaRPr lang="en-US" sz="850" dirty="0"/>
-          </a:p>
-        </p:txBody>
-      </p:sp>
-      <p:sp>
-        <p:nvSpPr>
-          <p:cNvPr id="24" name="Shape 21"/>
-          <p:cNvSpPr/>
-          <p:nvPr/>
-        </p:nvSpPr>
-        <p:spPr>
-          <a:xfrm>
-            <a:off x="640080" y="4828032"/>
-            <a:ext cx="10911535" cy="420624"/>
-          </a:xfrm>
-          <a:prstGeom prst="roundRect">
-            <a:avLst>
-              <a:gd name="adj" fmla="val 8696"/>
-            </a:avLst>
-          </a:prstGeom>
-          <a:solidFill>
-            <a:srgbClr val="EEF6FA"/>
-          </a:solidFill>
-          <a:ln/>
-        </p:spPr>
-      </p:sp>
-      <p:sp>
-        <p:nvSpPr>
-          <p:cNvPr id="25" name="Text 22"/>
-          <p:cNvSpPr/>
-          <p:nvPr/>
-        </p:nvSpPr>
-        <p:spPr>
-          <a:xfrm>
-            <a:off x="859536" y="4855464"/>
-            <a:ext cx="10472623" cy="365760"/>
-          </a:xfrm>
-          <a:prstGeom prst="rect">
-            <a:avLst/>
-          </a:prstGeom>
-          <a:noFill/>
-          <a:ln/>
-        </p:spPr>
-        <p:txBody>
-          <a:bodyPr wrap="square" lIns="0" tIns="0" rIns="0" bIns="0" rtlCol="0" anchor="ctr"/>
-          <a:lstStyle/>
-          <a:p>
-            <a:pPr indent="0" marL="0">
-              <a:lnSpc>
-                <a:spcPct val="86000"/>
-              </a:lnSpc>
-              <a:buNone/>
-            </a:pPr>
-            <a:r>
-              <a:rPr lang="en-US" sz="850" b="1" dirty="0">
-                <a:solidFill>
-                  <a:srgbClr val="0D8A76"/>
-                </a:solidFill>
-                <a:latin typeface="Yu Gothic" pitchFamily="34" charset="0"/>
-                <a:ea typeface="Yu Gothic" pitchFamily="34" charset="-122"/>
-                <a:cs typeface="Yu Gothic" pitchFamily="34" charset="-120"/>
-              </a:rPr>
-              <a:t>追加付与②　</a:t>
-            </a:r>
-            <a:pPr indent="0" marL="0">
-              <a:lnSpc>
-                <a:spcPct val="86000"/>
-              </a:lnSpc>
-              <a:buNone/>
-            </a:pPr>
-            <a:r>
-              <a:rPr lang="en-US" sz="850" dirty="0">
-                <a:solidFill>
-                  <a:srgbClr val="5F7183"/>
-                </a:solidFill>
-                <a:latin typeface="Yu Gothic" pitchFamily="34" charset="0"/>
-                <a:ea typeface="Yu Gothic" pitchFamily="34" charset="-122"/>
-                <a:cs typeface="Yu Gothic" pitchFamily="34" charset="-120"/>
-              </a:rPr>
-              <a:t>F 前回の記憶が不確か　→　</a:t>
-            </a:r>
-            <a:pPr indent="0" marL="0">
-              <a:lnSpc>
-                <a:spcPct val="86000"/>
-              </a:lnSpc>
-              <a:buNone/>
-            </a:pPr>
-            <a:r>
-              <a:rPr lang="en-US" sz="1100" b="1" dirty="0">
-                <a:solidFill>
-                  <a:srgbClr val="1B2733"/>
-                </a:solidFill>
-                <a:latin typeface="Yu Gothic" pitchFamily="34" charset="0"/>
-                <a:ea typeface="Yu Gothic" pitchFamily="34" charset="-122"/>
-                <a:cs typeface="Yu Gothic" pitchFamily="34" charset="-120"/>
-              </a:rPr>
-              <a:t>不確かであることを報告に書く。写真と時刻を残せば、次の巡回で比較できる。</a:t>
-            </a:r>
-            <a:endParaRPr lang="en-US" sz="850" dirty="0"/>
-          </a:p>
-          <a:p>
-            <a:pPr indent="0" marL="0">
-              <a:lnSpc>
-                <a:spcPct val="86000"/>
-              </a:lnSpc>
-              <a:buNone/>
-            </a:pPr>
-            <a:r>
-              <a:rPr lang="en-US" sz="750" i="1" dirty="0">
-                <a:solidFill>
-                  <a:srgbClr val="5F7183"/>
-                </a:solidFill>
-                <a:latin typeface="Calibri" pitchFamily="34" charset="0"/>
-                <a:ea typeface="Calibri" pitchFamily="34" charset="-122"/>
-                <a:cs typeface="Calibri" pitchFamily="34" charset="-120"/>
-              </a:rPr>
-              <a:t>Write that you were unsure. A photograph and a time make the next round comparable.</a:t>
-            </a:r>
-            <a:endParaRPr lang="en-US" sz="850" dirty="0"/>
-          </a:p>
-        </p:txBody>
-      </p:sp>
-      <p:sp>
-        <p:nvSpPr>
-          <p:cNvPr id="26" name="Shape 23"/>
           <p:cNvSpPr/>
           <p:nvPr/>
         </p:nvSpPr>
@@ -13959,7 +13723,7 @@
       </p:sp>
       <p:sp>
         <p:nvSpPr>
-          <p:cNvPr id="27" name="Text 24"/>
+          <p:cNvPr id="23" name="Text 20"/>
           <p:cNvSpPr/>
           <p:nvPr/>
         </p:nvSpPr>
@@ -14010,7 +13774,7 @@
                 <a:ea typeface="Yu Gothic" pitchFamily="34" charset="-122"/>
                 <a:cs typeface="Yu Gothic" pitchFamily="34" charset="-120"/>
               </a:rPr>
-              <a:t>③まで届いた班は少ない。設計の変更に踏み込めたかを評価する。</a:t>
+              <a:t>C は避難障害で、その場で除去してよい数少ない例。F は「不確か」と報告に書けるかが要点。</a:t>
             </a:r>
             <a:endParaRPr lang="en-US" sz="900" dirty="0"/>
           </a:p>
@@ -14030,7 +13794,7 @@
                 <a:ea typeface="Calibri" pitchFamily="34" charset="-122"/>
                 <a:cs typeface="Calibri" pitchFamily="34" charset="-120"/>
               </a:rPr>
-              <a:t>Few groups reach question 3. Credit those who changed the design of the next patrol.</a:t>
+              <a:t>C may be cleared on the spot — one of the few. For F, the point is writing that you were unsure.</a:t>
             </a:r>
             <a:endParaRPr lang="en-US" sz="900" dirty="0"/>
           </a:p>
@@ -14038,7 +13802,7 @@
       </p:sp>
       <p:sp>
         <p:nvSpPr>
-          <p:cNvPr id="28" name="Text 25"/>
+          <p:cNvPr id="24" name="Text 21"/>
           <p:cNvSpPr/>
           <p:nvPr/>
         </p:nvSpPr>
@@ -14117,7 +13881,7 @@
       </p:sp>
       <p:sp>
         <p:nvSpPr>
-          <p:cNvPr id="29" name="Text 26"/>
+          <p:cNvPr id="25" name="Text 22"/>
           <p:cNvSpPr/>
           <p:nvPr/>
         </p:nvSpPr>
@@ -14170,7 +13934,7 @@
       </p:sp>
       <p:sp>
         <p:nvSpPr>
-          <p:cNvPr id="30" name="Text 27"/>
+          <p:cNvPr id="26" name="Text 23"/>
           <p:cNvSpPr/>
           <p:nvPr/>
         </p:nvSpPr>
@@ -14223,7 +13987,7 @@
       </p:sp>
       <p:sp>
         <p:nvSpPr>
-          <p:cNvPr id="31" name="Text 28"/>
+          <p:cNvPr id="27" name="Text 24"/>
           <p:cNvSpPr/>
           <p:nvPr/>
         </p:nvSpPr>
@@ -14648,11 +14412,11 @@
         <p:spPr>
           <a:xfrm>
             <a:off x="640080" y="3081528"/>
-            <a:ext cx="5327752" cy="1074420"/>
+            <a:ext cx="5327752" cy="836676"/>
           </a:xfrm>
           <a:prstGeom prst="roundRect">
             <a:avLst>
-              <a:gd name="adj" fmla="val 3404"/>
+              <a:gd name="adj" fmla="val 4372"/>
             </a:avLst>
           </a:prstGeom>
           <a:solidFill>
@@ -14669,7 +14433,7 @@
         </p:nvSpPr>
         <p:spPr>
           <a:xfrm>
-            <a:off x="804672" y="3472434"/>
+            <a:off x="804672" y="3353562"/>
             <a:ext cx="292608" cy="292608"/>
           </a:xfrm>
           <a:prstGeom prst="ellipse">
@@ -14689,7 +14453,7 @@
         </p:nvSpPr>
         <p:spPr>
           <a:xfrm>
-            <a:off x="804672" y="3472434"/>
+            <a:off x="804672" y="3353562"/>
             <a:ext cx="292608" cy="292608"/>
           </a:xfrm>
           <a:prstGeom prst="rect">
@@ -14729,7 +14493,7 @@
         <p:spPr>
           <a:xfrm>
             <a:off x="1188720" y="3136392"/>
-            <a:ext cx="4596232" cy="964692"/>
+            <a:ext cx="4596232" cy="726948"/>
           </a:xfrm>
           <a:prstGeom prst="rect">
             <a:avLst/>
@@ -14791,11 +14555,11 @@
         <p:spPr>
           <a:xfrm>
             <a:off x="6223864" y="3081528"/>
-            <a:ext cx="5327752" cy="1074420"/>
+            <a:ext cx="5327752" cy="836676"/>
           </a:xfrm>
           <a:prstGeom prst="roundRect">
             <a:avLst>
-              <a:gd name="adj" fmla="val 3404"/>
+              <a:gd name="adj" fmla="val 4372"/>
             </a:avLst>
           </a:prstGeom>
           <a:solidFill>
@@ -14812,7 +14576,7 @@
         </p:nvSpPr>
         <p:spPr>
           <a:xfrm>
-            <a:off x="6388456" y="3472434"/>
+            <a:off x="6388456" y="3353562"/>
             <a:ext cx="292608" cy="292608"/>
           </a:xfrm>
           <a:prstGeom prst="ellipse">
@@ -14832,7 +14596,7 @@
         </p:nvSpPr>
         <p:spPr>
           <a:xfrm>
-            <a:off x="6388456" y="3472434"/>
+            <a:off x="6388456" y="3353562"/>
             <a:ext cx="292608" cy="292608"/>
           </a:xfrm>
           <a:prstGeom prst="rect">
@@ -14872,7 +14636,7 @@
         <p:spPr>
           <a:xfrm>
             <a:off x="6772504" y="3136392"/>
-            <a:ext cx="4596232" cy="964692"/>
+            <a:ext cx="4596232" cy="726948"/>
           </a:xfrm>
           <a:prstGeom prst="rect">
             <a:avLst/>
@@ -14933,12 +14697,12 @@
         </p:nvSpPr>
         <p:spPr>
           <a:xfrm>
-            <a:off x="640080" y="4265676"/>
-            <a:ext cx="5327752" cy="1074420"/>
+            <a:off x="640080" y="4027932"/>
+            <a:ext cx="5327752" cy="836676"/>
           </a:xfrm>
           <a:prstGeom prst="roundRect">
             <a:avLst>
-              <a:gd name="adj" fmla="val 3404"/>
+              <a:gd name="adj" fmla="val 4372"/>
             </a:avLst>
           </a:prstGeom>
           <a:solidFill>
@@ -14955,7 +14719,7 @@
         </p:nvSpPr>
         <p:spPr>
           <a:xfrm>
-            <a:off x="804672" y="4656582"/>
+            <a:off x="804672" y="4299966"/>
             <a:ext cx="292608" cy="292608"/>
           </a:xfrm>
           <a:prstGeom prst="ellipse">
@@ -14975,7 +14739,7 @@
         </p:nvSpPr>
         <p:spPr>
           <a:xfrm>
-            <a:off x="804672" y="4656582"/>
+            <a:off x="804672" y="4299966"/>
             <a:ext cx="292608" cy="292608"/>
           </a:xfrm>
           <a:prstGeom prst="rect">
@@ -15014,8 +14778,8 @@
         </p:nvSpPr>
         <p:spPr>
           <a:xfrm>
-            <a:off x="1188720" y="4320540"/>
-            <a:ext cx="4596232" cy="964692"/>
+            <a:off x="1188720" y="4082796"/>
+            <a:ext cx="4596232" cy="726948"/>
           </a:xfrm>
           <a:prstGeom prst="rect">
             <a:avLst/>
@@ -15076,12 +14840,12 @@
         </p:nvSpPr>
         <p:spPr>
           <a:xfrm>
-            <a:off x="6223864" y="4265676"/>
-            <a:ext cx="5327752" cy="1074420"/>
+            <a:off x="6223864" y="4027932"/>
+            <a:ext cx="5327752" cy="836676"/>
           </a:xfrm>
           <a:prstGeom prst="roundRect">
             <a:avLst>
-              <a:gd name="adj" fmla="val 3404"/>
+              <a:gd name="adj" fmla="val 4372"/>
             </a:avLst>
           </a:prstGeom>
           <a:solidFill>
@@ -15098,7 +14862,7 @@
         </p:nvSpPr>
         <p:spPr>
           <a:xfrm>
-            <a:off x="6388456" y="4656582"/>
+            <a:off x="6388456" y="4299966"/>
             <a:ext cx="292608" cy="292608"/>
           </a:xfrm>
           <a:prstGeom prst="ellipse">
@@ -15118,7 +14882,7 @@
         </p:nvSpPr>
         <p:spPr>
           <a:xfrm>
-            <a:off x="6388456" y="4656582"/>
+            <a:off x="6388456" y="4299966"/>
             <a:ext cx="292608" cy="292608"/>
           </a:xfrm>
           <a:prstGeom prst="rect">
@@ -15157,8 +14921,8 @@
         </p:nvSpPr>
         <p:spPr>
           <a:xfrm>
-            <a:off x="6772504" y="4320540"/>
-            <a:ext cx="4596232" cy="964692"/>
+            <a:off x="6772504" y="4082796"/>
+            <a:ext cx="4596232" cy="726948"/>
           </a:xfrm>
           <a:prstGeom prst="rect">
             <a:avLst/>
@@ -15219,12 +14983,12 @@
         </p:nvSpPr>
         <p:spPr>
           <a:xfrm>
-            <a:off x="640080" y="5394960"/>
-            <a:ext cx="10911535" cy="457200"/>
+            <a:off x="640080" y="4919472"/>
+            <a:ext cx="10911535" cy="420624"/>
           </a:xfrm>
           <a:prstGeom prst="roundRect">
             <a:avLst>
-              <a:gd name="adj" fmla="val 8000"/>
+              <a:gd name="adj" fmla="val 8696"/>
             </a:avLst>
           </a:prstGeom>
           <a:solidFill>
@@ -15241,8 +15005,8 @@
         </p:nvSpPr>
         <p:spPr>
           <a:xfrm>
-            <a:off x="877824" y="5431536"/>
-            <a:ext cx="10436047" cy="384048"/>
+            <a:off x="877824" y="4946904"/>
+            <a:ext cx="10436047" cy="365760"/>
           </a:xfrm>
           <a:prstGeom prst="rect">
             <a:avLst/>
@@ -15269,7 +15033,7 @@
                 <a:ea typeface="Yu Gothic" pitchFamily="34" charset="-122"/>
                 <a:cs typeface="Yu Gothic" pitchFamily="34" charset="-120"/>
               </a:rPr>
-              <a:t>追加付与　</a:t>
+              <a:t>追加付与①　</a:t>
             </a:r>
             <a:pPr indent="0" marL="0">
               <a:lnSpc>
@@ -15314,7 +15078,108 @@
       </p:sp>
       <p:sp>
         <p:nvSpPr>
-          <p:cNvPr id="27" name="Text 24"/>
+          <p:cNvPr id="27" name="Shape 24"/>
+          <p:cNvSpPr/>
+          <p:nvPr/>
+        </p:nvSpPr>
+        <p:spPr>
+          <a:xfrm>
+            <a:off x="640080" y="5394960"/>
+            <a:ext cx="10911535" cy="420624"/>
+          </a:xfrm>
+          <a:prstGeom prst="roundRect">
+            <a:avLst>
+              <a:gd name="adj" fmla="val 8696"/>
+            </a:avLst>
+          </a:prstGeom>
+          <a:solidFill>
+            <a:srgbClr val="E4F4F0"/>
+          </a:solidFill>
+          <a:ln/>
+        </p:spPr>
+      </p:sp>
+      <p:sp>
+        <p:nvSpPr>
+          <p:cNvPr id="28" name="Text 25"/>
+          <p:cNvSpPr/>
+          <p:nvPr/>
+        </p:nvSpPr>
+        <p:spPr>
+          <a:xfrm>
+            <a:off x="877824" y="5422392"/>
+            <a:ext cx="10436047" cy="365760"/>
+          </a:xfrm>
+          <a:prstGeom prst="rect">
+            <a:avLst/>
+          </a:prstGeom>
+          <a:noFill/>
+          <a:ln/>
+        </p:spPr>
+        <p:txBody>
+          <a:bodyPr wrap="square" lIns="0" tIns="0" rIns="0" bIns="0" rtlCol="0" anchor="ctr"/>
+          <a:lstStyle/>
+          <a:p>
+            <a:pPr indent="0" marL="0">
+              <a:lnSpc>
+                <a:spcPct val="86000"/>
+              </a:lnSpc>
+              <a:buNone/>
+            </a:pPr>
+            <a:r>
+              <a:rPr lang="en-US" sz="850" b="1" dirty="0">
+                <a:solidFill>
+                  <a:srgbClr val="0D8A76"/>
+                </a:solidFill>
+                <a:latin typeface="Yu Gothic" pitchFamily="34" charset="0"/>
+                <a:ea typeface="Yu Gothic" pitchFamily="34" charset="-122"/>
+                <a:cs typeface="Yu Gothic" pitchFamily="34" charset="-120"/>
+              </a:rPr>
+              <a:t>追加付与②　</a:t>
+            </a:r>
+            <a:pPr indent="0" marL="0">
+              <a:lnSpc>
+                <a:spcPct val="86000"/>
+              </a:lnSpc>
+              <a:buNone/>
+            </a:pPr>
+            <a:r>
+              <a:rPr lang="en-US" sz="1050" b="1" dirty="0">
+                <a:solidFill>
+                  <a:srgbClr val="1B2733"/>
+                </a:solidFill>
+                <a:latin typeface="Yu Gothic" pitchFamily="34" charset="0"/>
+                <a:ea typeface="Yu Gothic" pitchFamily="34" charset="-122"/>
+                <a:cs typeface="Yu Gothic" pitchFamily="34" charset="-120"/>
+              </a:rPr>
+              <a:t>地下のため無線が通じない。</a:t>
+            </a:r>
+            <a:endParaRPr lang="en-US" sz="850" dirty="0"/>
+          </a:p>
+          <a:p>
+            <a:pPr indent="0" marL="0">
+              <a:lnSpc>
+                <a:spcPct val="86000"/>
+              </a:lnSpc>
+              <a:buNone/>
+            </a:pPr>
+            <a:r>
+              <a:rPr lang="en-US" sz="750" i="1" dirty="0">
+                <a:solidFill>
+                  <a:srgbClr val="5F7183"/>
+                </a:solidFill>
+                <a:latin typeface="Calibri" pitchFamily="34" charset="0"/>
+                <a:ea typeface="Calibri" pitchFamily="34" charset="-122"/>
+                <a:cs typeface="Calibri" pitchFamily="34" charset="-120"/>
+              </a:rPr>
+              <a:t>You are in the basement and the radio does not reach.</a:t>
+            </a:r>
+            <a:endParaRPr lang="en-US" sz="850" dirty="0"/>
+          </a:p>
+        </p:txBody>
+      </p:sp>
+      <p:sp>
+        <p:nvSpPr>
+          <p:cNvPr id="29" name="Text 26"/>
           <p:cNvSpPr/>
           <p:nvPr/>
         </p:nvSpPr>
@@ -15393,7 +15258,7 @@
       </p:sp>
       <p:sp>
         <p:nvSpPr>
-          <p:cNvPr id="28" name="Text 25"/>
+          <p:cNvPr id="30" name="Text 27"/>
           <p:cNvSpPr/>
           <p:nvPr/>
         </p:nvSpPr>
@@ -15446,7 +15311,7 @@
       </p:sp>
       <p:sp>
         <p:nvSpPr>
-          <p:cNvPr id="29" name="Text 26"/>
+          <p:cNvPr id="31" name="Text 28"/>
           <p:cNvSpPr/>
           <p:nvPr/>
         </p:nvSpPr>
@@ -15499,7 +15364,7 @@
       </p:sp>
       <p:sp>
         <p:nvSpPr>
-          <p:cNvPr id="30" name="Text 27"/>
+          <p:cNvPr id="32" name="Text 29"/>
           <p:cNvSpPr/>
           <p:nvPr/>
         </p:nvSpPr>

--- a/decks/03_4限_巡回.pptx
+++ b/decks/03_4限_巡回.pptx
@@ -1764,7 +1764,7 @@
               <a:buNone/>
             </a:pPr>
             <a:r>
-              <a:rPr lang="en-US" sz="1050" i="1" dirty="0">
+              <a:rPr lang="en-US" sz="1050" dirty="0">
                 <a:solidFill>
                   <a:srgbClr val="A9BCCE"/>
                 </a:solidFill>
@@ -1921,7 +1921,7 @@
               <a:buNone/>
             </a:pPr>
             <a:r>
-              <a:rPr lang="en-US" sz="1000" i="1" dirty="0">
+              <a:rPr lang="en-US" sz="1000" dirty="0">
                 <a:solidFill>
                   <a:srgbClr val="8EA3B7"/>
                 </a:solidFill>
@@ -1999,8 +1999,8 @@
         </p:nvSpPr>
         <p:spPr>
           <a:xfrm>
-            <a:off x="640080" y="384048"/>
-            <a:ext cx="8982151" cy="768096"/>
+            <a:off x="640080" y="365760"/>
+            <a:ext cx="8982151" cy="749808"/>
           </a:xfrm>
           <a:prstGeom prst="rect">
             <a:avLst/>
@@ -2039,7 +2039,7 @@
               <a:buNone/>
             </a:pPr>
             <a:r>
-              <a:rPr lang="en-US" sz="1100" i="1" dirty="0">
+              <a:rPr lang="en-US" sz="1100" dirty="0">
                 <a:solidFill>
                   <a:srgbClr val="12B198"/>
                 </a:solidFill>
@@ -2061,7 +2061,7 @@
         </p:nvSpPr>
         <p:spPr>
           <a:xfrm>
-            <a:off x="9686239" y="438912"/>
+            <a:off x="9686239" y="420624"/>
             <a:ext cx="932688" cy="310896"/>
           </a:xfrm>
           <a:prstGeom prst="roundRect">
@@ -2083,7 +2083,7 @@
         </p:nvSpPr>
         <p:spPr>
           <a:xfrm>
-            <a:off x="9686239" y="438912"/>
+            <a:off x="9686239" y="420624"/>
             <a:ext cx="932688" cy="310896"/>
           </a:xfrm>
           <a:prstGeom prst="rect">
@@ -2122,12 +2122,12 @@
         </p:nvSpPr>
         <p:spPr>
           <a:xfrm>
-            <a:off x="640080" y="1188720"/>
-            <a:ext cx="10911535" cy="825246"/>
+            <a:off x="640080" y="1115568"/>
+            <a:ext cx="10911535" cy="857250"/>
           </a:xfrm>
           <a:prstGeom prst="roundRect">
             <a:avLst>
-              <a:gd name="adj" fmla="val 4432"/>
+              <a:gd name="adj" fmla="val 4267"/>
             </a:avLst>
           </a:prstGeom>
           <a:solidFill>
@@ -2144,7 +2144,7 @@
         </p:nvSpPr>
         <p:spPr>
           <a:xfrm>
-            <a:off x="841248" y="1427607"/>
+            <a:off x="841248" y="1370457"/>
             <a:ext cx="347472" cy="347472"/>
           </a:xfrm>
           <a:prstGeom prst="ellipse">
@@ -2164,7 +2164,7 @@
         </p:nvSpPr>
         <p:spPr>
           <a:xfrm>
-            <a:off x="841248" y="1427607"/>
+            <a:off x="841248" y="1370457"/>
             <a:ext cx="347472" cy="347472"/>
           </a:xfrm>
           <a:prstGeom prst="rect">
@@ -2203,8 +2203,8 @@
         </p:nvSpPr>
         <p:spPr>
           <a:xfrm>
-            <a:off x="1280160" y="1252728"/>
-            <a:ext cx="10033711" cy="697230"/>
+            <a:off x="1280160" y="1179576"/>
+            <a:ext cx="10033711" cy="729234"/>
           </a:xfrm>
           <a:prstGeom prst="rect">
             <a:avLst/>
@@ -2223,7 +2223,7 @@
               <a:buNone/>
             </a:pPr>
             <a:r>
-              <a:rPr lang="en-US" sz="900" dirty="0">
+              <a:rPr lang="en-US" sz="950" dirty="0">
                 <a:solidFill>
                   <a:srgbClr val="5F7183"/>
                 </a:solidFill>
@@ -2233,7 +2233,7 @@
               </a:rPr>
               <a:t>問1　扉を閉めるか</a:t>
             </a:r>
-            <a:endParaRPr lang="en-US" sz="900" dirty="0"/>
+            <a:endParaRPr lang="en-US" sz="950" dirty="0"/>
           </a:p>
           <a:p>
             <a:pPr indent="0" marL="0">
@@ -2253,7 +2253,7 @@
               </a:rPr>
               <a:t>すぐには閉めない。中に人がいる場合、退路を塞ぐことになる。まず状況を把握する。</a:t>
             </a:r>
-            <a:endParaRPr lang="en-US" sz="900" dirty="0"/>
+            <a:endParaRPr lang="en-US" sz="950" dirty="0"/>
           </a:p>
           <a:p>
             <a:pPr indent="0" marL="0">
@@ -2263,9 +2263,9 @@
               <a:buNone/>
             </a:pPr>
             <a:r>
-              <a:rPr lang="en-US" sz="800" i="1" dirty="0">
-                <a:solidFill>
-                  <a:srgbClr val="5F7183"/>
+              <a:rPr lang="en-US" sz="1100" dirty="0">
+                <a:solidFill>
+                  <a:srgbClr val="1B2733"/>
                 </a:solidFill>
                 <a:latin typeface="Calibri" pitchFamily="34" charset="0"/>
                 <a:ea typeface="Calibri" pitchFamily="34" charset="-122"/>
@@ -2273,7 +2273,7 @@
               </a:rPr>
               <a:t>Not immediately. If someone is inside you would cut off their exit. Establish the situation first.</a:t>
             </a:r>
-            <a:endParaRPr lang="en-US" sz="900" dirty="0"/>
+            <a:endParaRPr lang="en-US" sz="950" dirty="0"/>
           </a:p>
         </p:txBody>
       </p:sp>
@@ -2285,12 +2285,12 @@
         </p:nvSpPr>
         <p:spPr>
           <a:xfrm>
-            <a:off x="640080" y="2114550"/>
-            <a:ext cx="10911535" cy="825246"/>
+            <a:off x="640080" y="2073402"/>
+            <a:ext cx="10911535" cy="857250"/>
           </a:xfrm>
           <a:prstGeom prst="roundRect">
             <a:avLst>
-              <a:gd name="adj" fmla="val 4432"/>
+              <a:gd name="adj" fmla="val 4267"/>
             </a:avLst>
           </a:prstGeom>
           <a:solidFill>
@@ -2307,7 +2307,7 @@
         </p:nvSpPr>
         <p:spPr>
           <a:xfrm>
-            <a:off x="841248" y="2353437"/>
+            <a:off x="841248" y="2328291"/>
             <a:ext cx="347472" cy="347472"/>
           </a:xfrm>
           <a:prstGeom prst="ellipse">
@@ -2327,7 +2327,7 @@
         </p:nvSpPr>
         <p:spPr>
           <a:xfrm>
-            <a:off x="841248" y="2353437"/>
+            <a:off x="841248" y="2328291"/>
             <a:ext cx="347472" cy="347472"/>
           </a:xfrm>
           <a:prstGeom prst="rect">
@@ -2366,8 +2366,8 @@
         </p:nvSpPr>
         <p:spPr>
           <a:xfrm>
-            <a:off x="1280160" y="2178558"/>
-            <a:ext cx="10033711" cy="697230"/>
+            <a:off x="1280160" y="2137410"/>
+            <a:ext cx="10033711" cy="729234"/>
           </a:xfrm>
           <a:prstGeom prst="rect">
             <a:avLst/>
@@ -2386,7 +2386,7 @@
               <a:buNone/>
             </a:pPr>
             <a:r>
-              <a:rPr lang="en-US" sz="900" dirty="0">
+              <a:rPr lang="en-US" sz="950" dirty="0">
                 <a:solidFill>
                   <a:srgbClr val="5F7183"/>
                 </a:solidFill>
@@ -2396,7 +2396,7 @@
               </a:rPr>
               <a:t>問2　単独で外を確認するか</a:t>
             </a:r>
-            <a:endParaRPr lang="en-US" sz="900" dirty="0"/>
+            <a:endParaRPr lang="en-US" sz="950" dirty="0"/>
           </a:p>
           <a:p>
             <a:pPr indent="0" marL="0">
@@ -2416,7 +2416,7 @@
               </a:rPr>
               <a:t>行かない。応援を待つ。やむを得ず行く場合は所在を伝えてから行く。</a:t>
             </a:r>
-            <a:endParaRPr lang="en-US" sz="900" dirty="0"/>
+            <a:endParaRPr lang="en-US" sz="950" dirty="0"/>
           </a:p>
           <a:p>
             <a:pPr indent="0" marL="0">
@@ -2426,9 +2426,9 @@
               <a:buNone/>
             </a:pPr>
             <a:r>
-              <a:rPr lang="en-US" sz="800" i="1" dirty="0">
-                <a:solidFill>
-                  <a:srgbClr val="5F7183"/>
+              <a:rPr lang="en-US" sz="1100" dirty="0">
+                <a:solidFill>
+                  <a:srgbClr val="1B2733"/>
                 </a:solidFill>
                 <a:latin typeface="Calibri" pitchFamily="34" charset="0"/>
                 <a:ea typeface="Calibri" pitchFamily="34" charset="-122"/>
@@ -2436,7 +2436,7 @@
               </a:rPr>
               <a:t>No. Wait for backup. If you must go, tell someone where you are first.</a:t>
             </a:r>
-            <a:endParaRPr lang="en-US" sz="900" dirty="0"/>
+            <a:endParaRPr lang="en-US" sz="950" dirty="0"/>
           </a:p>
         </p:txBody>
       </p:sp>
@@ -2448,12 +2448,12 @@
         </p:nvSpPr>
         <p:spPr>
           <a:xfrm>
-            <a:off x="640080" y="3040380"/>
-            <a:ext cx="10911535" cy="825246"/>
+            <a:off x="640080" y="3031236"/>
+            <a:ext cx="10911535" cy="857250"/>
           </a:xfrm>
           <a:prstGeom prst="roundRect">
             <a:avLst>
-              <a:gd name="adj" fmla="val 4432"/>
+              <a:gd name="adj" fmla="val 4267"/>
             </a:avLst>
           </a:prstGeom>
           <a:solidFill>
@@ -2470,7 +2470,7 @@
         </p:nvSpPr>
         <p:spPr>
           <a:xfrm>
-            <a:off x="841248" y="3279267"/>
+            <a:off x="841248" y="3286125"/>
             <a:ext cx="347472" cy="347472"/>
           </a:xfrm>
           <a:prstGeom prst="ellipse">
@@ -2490,7 +2490,7 @@
         </p:nvSpPr>
         <p:spPr>
           <a:xfrm>
-            <a:off x="841248" y="3279267"/>
+            <a:off x="841248" y="3286125"/>
             <a:ext cx="347472" cy="347472"/>
           </a:xfrm>
           <a:prstGeom prst="rect">
@@ -2529,8 +2529,8 @@
         </p:nvSpPr>
         <p:spPr>
           <a:xfrm>
-            <a:off x="1280160" y="3104388"/>
-            <a:ext cx="10033711" cy="697230"/>
+            <a:off x="1280160" y="3095244"/>
+            <a:ext cx="10033711" cy="729234"/>
           </a:xfrm>
           <a:prstGeom prst="rect">
             <a:avLst/>
@@ -2549,7 +2549,7 @@
               <a:buNone/>
             </a:pPr>
             <a:r>
-              <a:rPr lang="en-US" sz="900" dirty="0">
+              <a:rPr lang="en-US" sz="950" dirty="0">
                 <a:solidFill>
                   <a:srgbClr val="5F7183"/>
                 </a:solidFill>
@@ -2559,7 +2559,7 @@
               </a:rPr>
               <a:t>問3　残業中の社員の存在</a:t>
             </a:r>
-            <a:endParaRPr lang="en-US" sz="900" dirty="0"/>
+            <a:endParaRPr lang="en-US" sz="950" dirty="0"/>
           </a:p>
           <a:p>
             <a:pPr indent="0" marL="0">
@@ -2579,7 +2579,7 @@
               </a:rPr>
               <a:t>People が最優先。所在確認を扉の処置より先に行う。</a:t>
             </a:r>
-            <a:endParaRPr lang="en-US" sz="900" dirty="0"/>
+            <a:endParaRPr lang="en-US" sz="950" dirty="0"/>
           </a:p>
           <a:p>
             <a:pPr indent="0" marL="0">
@@ -2589,9 +2589,9 @@
               <a:buNone/>
             </a:pPr>
             <a:r>
-              <a:rPr lang="en-US" sz="800" i="1" dirty="0">
-                <a:solidFill>
-                  <a:srgbClr val="5F7183"/>
+              <a:rPr lang="en-US" sz="1100" dirty="0">
+                <a:solidFill>
+                  <a:srgbClr val="1B2733"/>
                 </a:solidFill>
                 <a:latin typeface="Calibri" pitchFamily="34" charset="0"/>
                 <a:ea typeface="Calibri" pitchFamily="34" charset="-122"/>
@@ -2599,7 +2599,7 @@
               </a:rPr>
               <a:t>People come first. Confirm where they are before you deal with the door.</a:t>
             </a:r>
-            <a:endParaRPr lang="en-US" sz="900" dirty="0"/>
+            <a:endParaRPr lang="en-US" sz="950" dirty="0"/>
           </a:p>
         </p:txBody>
       </p:sp>
@@ -2611,12 +2611,12 @@
         </p:nvSpPr>
         <p:spPr>
           <a:xfrm>
-            <a:off x="640080" y="3966210"/>
-            <a:ext cx="10911535" cy="825246"/>
+            <a:off x="640080" y="3989070"/>
+            <a:ext cx="10911535" cy="857250"/>
           </a:xfrm>
           <a:prstGeom prst="roundRect">
             <a:avLst>
-              <a:gd name="adj" fmla="val 4432"/>
+              <a:gd name="adj" fmla="val 4267"/>
             </a:avLst>
           </a:prstGeom>
           <a:solidFill>
@@ -2633,7 +2633,7 @@
         </p:nvSpPr>
         <p:spPr>
           <a:xfrm>
-            <a:off x="841248" y="4205097"/>
+            <a:off x="841248" y="4243959"/>
             <a:ext cx="347472" cy="347472"/>
           </a:xfrm>
           <a:prstGeom prst="ellipse">
@@ -2653,7 +2653,7 @@
         </p:nvSpPr>
         <p:spPr>
           <a:xfrm>
-            <a:off x="841248" y="4205097"/>
+            <a:off x="841248" y="4243959"/>
             <a:ext cx="347472" cy="347472"/>
           </a:xfrm>
           <a:prstGeom prst="rect">
@@ -2692,8 +2692,8 @@
         </p:nvSpPr>
         <p:spPr>
           <a:xfrm>
-            <a:off x="1280160" y="4030218"/>
-            <a:ext cx="10033711" cy="697230"/>
+            <a:off x="1280160" y="4053078"/>
+            <a:ext cx="10033711" cy="729234"/>
           </a:xfrm>
           <a:prstGeom prst="rect">
             <a:avLst/>
@@ -2712,7 +2712,7 @@
               <a:buNone/>
             </a:pPr>
             <a:r>
-              <a:rPr lang="en-US" sz="900" dirty="0">
+              <a:rPr lang="en-US" sz="950" dirty="0">
                 <a:solidFill>
                   <a:srgbClr val="5F7183"/>
                 </a:solidFill>
@@ -2722,7 +2722,7 @@
               </a:rPr>
               <a:t>問4　一次報告に何を入れるか</a:t>
             </a:r>
-            <a:endParaRPr lang="en-US" sz="900" dirty="0"/>
+            <a:endParaRPr lang="en-US" sz="950" dirty="0"/>
           </a:p>
           <a:p>
             <a:pPr indent="0" marL="0">
@@ -2742,7 +2742,7 @@
               </a:rPr>
               <a:t>事実（施錠されているはずの扉が15cm開いていた、1時40分）と評価（侵入の可能性）を分ける。</a:t>
             </a:r>
-            <a:endParaRPr lang="en-US" sz="900" dirty="0"/>
+            <a:endParaRPr lang="en-US" sz="950" dirty="0"/>
           </a:p>
           <a:p>
             <a:pPr indent="0" marL="0">
@@ -2752,9 +2752,9 @@
               <a:buNone/>
             </a:pPr>
             <a:r>
-              <a:rPr lang="en-US" sz="800" i="1" dirty="0">
-                <a:solidFill>
-                  <a:srgbClr val="5F7183"/>
+              <a:rPr lang="en-US" sz="1100" dirty="0">
+                <a:solidFill>
+                  <a:srgbClr val="1B2733"/>
                 </a:solidFill>
                 <a:latin typeface="Calibri" pitchFamily="34" charset="0"/>
                 <a:ea typeface="Calibri" pitchFamily="34" charset="-122"/>
@@ -2762,7 +2762,7 @@
               </a:rPr>
               <a:t>Separate fact (a door that should be locked stood 15 cm open at 01:40) from assessment (possible intrusion).</a:t>
             </a:r>
-            <a:endParaRPr lang="en-US" sz="900" dirty="0"/>
+            <a:endParaRPr lang="en-US" sz="950" dirty="0"/>
           </a:p>
         </p:txBody>
       </p:sp>
@@ -2774,7 +2774,7 @@
         </p:nvSpPr>
         <p:spPr>
           <a:xfrm>
-            <a:off x="640080" y="4901184"/>
+            <a:off x="640080" y="4956048"/>
             <a:ext cx="10911535" cy="420624"/>
           </a:xfrm>
           <a:prstGeom prst="roundRect">
@@ -2796,7 +2796,7 @@
         </p:nvSpPr>
         <p:spPr>
           <a:xfrm>
-            <a:off x="859536" y="4928616"/>
+            <a:off x="859536" y="4983480"/>
             <a:ext cx="10472623" cy="365760"/>
           </a:xfrm>
           <a:prstGeom prst="rect">
@@ -2870,9 +2870,9 @@
               <a:buNone/>
             </a:pPr>
             <a:r>
-              <a:rPr lang="en-US" sz="750" i="1" dirty="0">
-                <a:solidFill>
-                  <a:srgbClr val="5F7183"/>
+              <a:rPr lang="en-US" sz="950" dirty="0">
+                <a:solidFill>
+                  <a:srgbClr val="1B2733"/>
                 </a:solidFill>
                 <a:latin typeface="Calibri" pitchFamily="34" charset="0"/>
                 <a:ea typeface="Calibri" pitchFamily="34" charset="-122"/>
@@ -2892,7 +2892,7 @@
         </p:nvSpPr>
         <p:spPr>
           <a:xfrm>
-            <a:off x="640080" y="5394960"/>
+            <a:off x="640080" y="5449824"/>
             <a:ext cx="10911535" cy="420624"/>
           </a:xfrm>
           <a:prstGeom prst="roundRect">
@@ -2914,7 +2914,7 @@
         </p:nvSpPr>
         <p:spPr>
           <a:xfrm>
-            <a:off x="859536" y="5422392"/>
+            <a:off x="859536" y="5477256"/>
             <a:ext cx="10472623" cy="365760"/>
           </a:xfrm>
           <a:prstGeom prst="rect">
@@ -2988,7 +2988,86 @@
               <a:buNone/>
             </a:pPr>
             <a:r>
-              <a:rPr lang="en-US" sz="750" i="1" dirty="0">
+              <a:rPr lang="en-US" sz="950" dirty="0">
+                <a:solidFill>
+                  <a:srgbClr val="1B2733"/>
+                </a:solidFill>
+                <a:latin typeface="Calibri" pitchFamily="34" charset="0"/>
+                <a:ea typeface="Calibri" pitchFamily="34" charset="-122"/>
+                <a:cs typeface="Calibri" pitchFamily="34" charset="-120"/>
+              </a:rPr>
+              <a:t>Had you agreed a fallback? Returning to report in person is valid. Do not push further in alone.</a:t>
+            </a:r>
+            <a:endParaRPr lang="en-US" sz="850" dirty="0"/>
+          </a:p>
+        </p:txBody>
+      </p:sp>
+      <p:sp>
+        <p:nvSpPr>
+          <p:cNvPr id="26" name="Text 23"/>
+          <p:cNvSpPr/>
+          <p:nvPr/>
+        </p:nvSpPr>
+        <p:spPr>
+          <a:xfrm>
+            <a:off x="640080" y="5961888"/>
+            <a:ext cx="10911535" cy="292608"/>
+          </a:xfrm>
+          <a:prstGeom prst="rect">
+            <a:avLst/>
+          </a:prstGeom>
+          <a:noFill/>
+          <a:ln/>
+        </p:spPr>
+        <p:txBody>
+          <a:bodyPr wrap="square" lIns="0" tIns="0" rIns="0" bIns="0" rtlCol="0" anchor="t"/>
+          <a:lstStyle/>
+          <a:p>
+            <a:pPr indent="0" marL="0">
+              <a:lnSpc>
+                <a:spcPct val="88000"/>
+              </a:lnSpc>
+              <a:buNone/>
+            </a:pPr>
+            <a:r>
+              <a:rPr lang="en-US" sz="900" b="1" dirty="0">
+                <a:solidFill>
+                  <a:srgbClr val="0D8A76"/>
+                </a:solidFill>
+                <a:latin typeface="Yu Gothic" pitchFamily="34" charset="0"/>
+                <a:ea typeface="Yu Gothic" pitchFamily="34" charset="-122"/>
+                <a:cs typeface="Yu Gothic" pitchFamily="34" charset="-120"/>
+              </a:rPr>
+              <a:t>Site SOP優先　</a:t>
+            </a:r>
+            <a:pPr indent="0" marL="0">
+              <a:lnSpc>
+                <a:spcPct val="88000"/>
+              </a:lnSpc>
+              <a:buNone/>
+            </a:pPr>
+            <a:r>
+              <a:rPr lang="en-US" sz="900" dirty="0">
+                <a:solidFill>
+                  <a:srgbClr val="1B2733"/>
+                </a:solidFill>
+                <a:latin typeface="Yu Gothic" pitchFamily="34" charset="0"/>
+                <a:ea typeface="Yu Gothic" pitchFamily="34" charset="-122"/>
+                <a:cs typeface="Yu Gothic" pitchFamily="34" charset="-120"/>
+              </a:rPr>
+              <a:t>単独行動の可否、応援要請の基準、通信不良時の代替手段は現場ごとに定められている。</a:t>
+            </a:r>
+            <a:endParaRPr lang="en-US" sz="900" dirty="0"/>
+          </a:p>
+          <a:p>
+            <a:pPr indent="0" marL="0">
+              <a:lnSpc>
+                <a:spcPct val="88000"/>
+              </a:lnSpc>
+              <a:buNone/>
+            </a:pPr>
+            <a:r>
+              <a:rPr lang="en-US" sz="800" i="1" dirty="0">
                 <a:solidFill>
                   <a:srgbClr val="5F7183"/>
                 </a:solidFill>
@@ -2996,22 +3075,22 @@
                 <a:ea typeface="Calibri" pitchFamily="34" charset="-122"/>
                 <a:cs typeface="Calibri" pitchFamily="34" charset="-120"/>
               </a:rPr>
-              <a:t>Had you agreed a fallback? Returning to report in person is valid. Do not push further in alone.</a:t>
-            </a:r>
-            <a:endParaRPr lang="en-US" sz="850" dirty="0"/>
-          </a:p>
-        </p:txBody>
-      </p:sp>
-      <p:sp>
-        <p:nvSpPr>
-          <p:cNvPr id="26" name="Text 23"/>
-          <p:cNvSpPr/>
-          <p:nvPr/>
-        </p:nvSpPr>
-        <p:spPr>
-          <a:xfrm>
-            <a:off x="640080" y="5907024"/>
-            <a:ext cx="10911535" cy="310896"/>
+              <a:t>Whether to act alone, when to call backup, and comms fallbacks are set per site.</a:t>
+            </a:r>
+            <a:endParaRPr lang="en-US" sz="900" dirty="0"/>
+          </a:p>
+        </p:txBody>
+      </p:sp>
+      <p:sp>
+        <p:nvSpPr>
+          <p:cNvPr id="27" name="Text 24"/>
+          <p:cNvSpPr/>
+          <p:nvPr/>
+        </p:nvSpPr>
+        <p:spPr>
+          <a:xfrm>
+            <a:off x="640080" y="6272784"/>
+            <a:ext cx="9905695" cy="219456"/>
           </a:xfrm>
           <a:prstGeom prst="rect">
             <a:avLst/>
@@ -3024,167 +3103,88 @@
           <a:lstStyle/>
           <a:p>
             <a:pPr indent="0" marL="0">
-              <a:lnSpc>
-                <a:spcPct val="88000"/>
-              </a:lnSpc>
-              <a:buNone/>
-            </a:pPr>
-            <a:r>
-              <a:rPr lang="en-US" sz="900" b="1" dirty="0">
-                <a:solidFill>
-                  <a:srgbClr val="0D8A76"/>
-                </a:solidFill>
-                <a:latin typeface="Yu Gothic" pitchFamily="34" charset="0"/>
-                <a:ea typeface="Yu Gothic" pitchFamily="34" charset="-122"/>
-                <a:cs typeface="Yu Gothic" pitchFamily="34" charset="-120"/>
-              </a:rPr>
-              <a:t>Site SOP優先　</a:t>
-            </a:r>
-            <a:pPr indent="0" marL="0">
-              <a:lnSpc>
-                <a:spcPct val="88000"/>
-              </a:lnSpc>
+              <a:buNone/>
+            </a:pPr>
+            <a:r>
+              <a:rPr lang="en-US" sz="750" b="1" dirty="0">
+                <a:solidFill>
+                  <a:srgbClr val="D6E0E9"/>
+                </a:solidFill>
+                <a:latin typeface="Yu Gothic" pitchFamily="34" charset="0"/>
+                <a:ea typeface="Yu Gothic" pitchFamily="34" charset="-122"/>
+                <a:cs typeface="Yu Gothic" pitchFamily="34" charset="-120"/>
+              </a:rPr>
+              <a:t>ソース　</a:t>
+            </a:r>
+            <a:pPr indent="0" marL="0">
+              <a:buNone/>
+            </a:pPr>
+            <a:r>
+              <a:rPr lang="en-US" sz="750" dirty="0">
+                <a:solidFill>
+                  <a:srgbClr val="5F7183"/>
+                </a:solidFill>
+                <a:latin typeface="Yu Gothic" pitchFamily="34" charset="0"/>
+                <a:ea typeface="Yu Gothic" pitchFamily="34" charset="-122"/>
+                <a:cs typeface="Yu Gothic" pitchFamily="34" charset="-120"/>
+              </a:rPr>
+              <a:t>警備業法、警察庁「警備員教育」</a:t>
+            </a:r>
+            <a:endParaRPr lang="en-US" sz="750" dirty="0"/>
+          </a:p>
+        </p:txBody>
+      </p:sp>
+      <p:sp>
+        <p:nvSpPr>
+          <p:cNvPr id="28" name="Text 25"/>
+          <p:cNvSpPr/>
+          <p:nvPr/>
+        </p:nvSpPr>
+        <p:spPr>
+          <a:xfrm>
+            <a:off x="640080" y="6492240"/>
+            <a:ext cx="8778240" cy="292608"/>
+          </a:xfrm>
+          <a:prstGeom prst="rect">
+            <a:avLst/>
+          </a:prstGeom>
+          <a:noFill/>
+          <a:ln/>
+        </p:spPr>
+        <p:txBody>
+          <a:bodyPr wrap="square" lIns="0" tIns="0" rIns="0" bIns="0" rtlCol="0" anchor="ctr"/>
+          <a:lstStyle/>
+          <a:p>
+            <a:pPr indent="0" marL="0">
               <a:buNone/>
             </a:pPr>
             <a:r>
               <a:rPr lang="en-US" sz="900" dirty="0">
                 <a:solidFill>
-                  <a:srgbClr val="1B2733"/>
-                </a:solidFill>
-                <a:latin typeface="Yu Gothic" pitchFamily="34" charset="0"/>
-                <a:ea typeface="Yu Gothic" pitchFamily="34" charset="-122"/>
-                <a:cs typeface="Yu Gothic" pitchFamily="34" charset="-120"/>
-              </a:rPr>
-              <a:t>単独行動の可否、応援要請の基準、通信不良時の代替手段は現場ごとに定められている。</a:t>
+                  <a:srgbClr val="5F7183"/>
+                </a:solidFill>
+                <a:latin typeface="Yu Gothic" pitchFamily="34" charset="0"/>
+                <a:ea typeface="Yu Gothic" pitchFamily="34" charset="-122"/>
+                <a:cs typeface="Yu Gothic" pitchFamily="34" charset="-120"/>
+              </a:rPr>
+              <a:t>第4時限｜業務別教育1 巡回の方法に関すること  </a:t>
+            </a:r>
+            <a:pPr indent="0" marL="0">
+              <a:buNone/>
+            </a:pPr>
+            <a:r>
+              <a:rPr lang="en-US" sz="850" i="1" dirty="0">
+                <a:solidFill>
+                  <a:srgbClr val="D6E0E9"/>
+                </a:solidFill>
+                <a:latin typeface="Calibri" pitchFamily="34" charset="0"/>
+                <a:ea typeface="Calibri" pitchFamily="34" charset="-122"/>
+                <a:cs typeface="Calibri" pitchFamily="34" charset="-120"/>
+              </a:rPr>
+              <a:t>Period 4 | Task-Specific Training 1 — Patrol Methods</a:t>
             </a:r>
             <a:endParaRPr lang="en-US" sz="900" dirty="0"/>
           </a:p>
-          <a:p>
-            <a:pPr indent="0" marL="0">
-              <a:lnSpc>
-                <a:spcPct val="88000"/>
-              </a:lnSpc>
-              <a:buNone/>
-            </a:pPr>
-            <a:r>
-              <a:rPr lang="en-US" sz="750" i="1" dirty="0">
-                <a:solidFill>
-                  <a:srgbClr val="5F7183"/>
-                </a:solidFill>
-                <a:latin typeface="Calibri" pitchFamily="34" charset="0"/>
-                <a:ea typeface="Calibri" pitchFamily="34" charset="-122"/>
-                <a:cs typeface="Calibri" pitchFamily="34" charset="-120"/>
-              </a:rPr>
-              <a:t>Whether to act alone, when to call backup, and comms fallbacks are set per site.</a:t>
-            </a:r>
-            <a:endParaRPr lang="en-US" sz="900" dirty="0"/>
-          </a:p>
-        </p:txBody>
-      </p:sp>
-      <p:sp>
-        <p:nvSpPr>
-          <p:cNvPr id="27" name="Text 24"/>
-          <p:cNvSpPr/>
-          <p:nvPr/>
-        </p:nvSpPr>
-        <p:spPr>
-          <a:xfrm>
-            <a:off x="640080" y="6272784"/>
-            <a:ext cx="9905695" cy="237744"/>
-          </a:xfrm>
-          <a:prstGeom prst="rect">
-            <a:avLst/>
-          </a:prstGeom>
-          <a:noFill/>
-          <a:ln/>
-        </p:spPr>
-        <p:txBody>
-          <a:bodyPr wrap="square" lIns="0" tIns="0" rIns="0" bIns="0" rtlCol="0" anchor="t"/>
-          <a:lstStyle/>
-          <a:p>
-            <a:pPr indent="0" marL="0">
-              <a:buNone/>
-            </a:pPr>
-            <a:r>
-              <a:rPr lang="en-US" sz="750" b="1" dirty="0">
-                <a:solidFill>
-                  <a:srgbClr val="D6E0E9"/>
-                </a:solidFill>
-                <a:latin typeface="Yu Gothic" pitchFamily="34" charset="0"/>
-                <a:ea typeface="Yu Gothic" pitchFamily="34" charset="-122"/>
-                <a:cs typeface="Yu Gothic" pitchFamily="34" charset="-120"/>
-              </a:rPr>
-              <a:t>ソース　</a:t>
-            </a:r>
-            <a:pPr indent="0" marL="0">
-              <a:buNone/>
-            </a:pPr>
-            <a:r>
-              <a:rPr lang="en-US" sz="750" dirty="0">
-                <a:solidFill>
-                  <a:srgbClr val="5F7183"/>
-                </a:solidFill>
-                <a:latin typeface="Yu Gothic" pitchFamily="34" charset="0"/>
-                <a:ea typeface="Yu Gothic" pitchFamily="34" charset="-122"/>
-                <a:cs typeface="Yu Gothic" pitchFamily="34" charset="-120"/>
-              </a:rPr>
-              <a:t>警備業法、警察庁「警備員教育」</a:t>
-            </a:r>
-            <a:endParaRPr lang="en-US" sz="750" dirty="0"/>
-          </a:p>
-        </p:txBody>
-      </p:sp>
-      <p:sp>
-        <p:nvSpPr>
-          <p:cNvPr id="28" name="Text 25"/>
-          <p:cNvSpPr/>
-          <p:nvPr/>
-        </p:nvSpPr>
-        <p:spPr>
-          <a:xfrm>
-            <a:off x="640080" y="6382512"/>
-            <a:ext cx="8778240" cy="292608"/>
-          </a:xfrm>
-          <a:prstGeom prst="rect">
-            <a:avLst/>
-          </a:prstGeom>
-          <a:noFill/>
-          <a:ln/>
-        </p:spPr>
-        <p:txBody>
-          <a:bodyPr wrap="square" lIns="0" tIns="0" rIns="0" bIns="0" rtlCol="0" anchor="ctr"/>
-          <a:lstStyle/>
-          <a:p>
-            <a:pPr indent="0" marL="0">
-              <a:buNone/>
-            </a:pPr>
-            <a:r>
-              <a:rPr lang="en-US" sz="900" dirty="0">
-                <a:solidFill>
-                  <a:srgbClr val="5F7183"/>
-                </a:solidFill>
-                <a:latin typeface="Yu Gothic" pitchFamily="34" charset="0"/>
-                <a:ea typeface="Yu Gothic" pitchFamily="34" charset="-122"/>
-                <a:cs typeface="Yu Gothic" pitchFamily="34" charset="-120"/>
-              </a:rPr>
-              <a:t>第4時限｜業務別教育1 巡回の方法に関すること  </a:t>
-            </a:r>
-            <a:pPr indent="0" marL="0">
-              <a:buNone/>
-            </a:pPr>
-            <a:r>
-              <a:rPr lang="en-US" sz="850" i="1" dirty="0">
-                <a:solidFill>
-                  <a:srgbClr val="D6E0E9"/>
-                </a:solidFill>
-                <a:latin typeface="Calibri" pitchFamily="34" charset="0"/>
-                <a:ea typeface="Calibri" pitchFamily="34" charset="-122"/>
-                <a:cs typeface="Calibri" pitchFamily="34" charset="-120"/>
-              </a:rPr>
-              <a:t>Period 4 | Task-Specific Training 1 — Patrol Methods</a:t>
-            </a:r>
-            <a:endParaRPr lang="en-US" sz="900" dirty="0"/>
-          </a:p>
         </p:txBody>
       </p:sp>
       <p:sp>
@@ -3195,7 +3195,7 @@
         </p:nvSpPr>
         <p:spPr>
           <a:xfrm>
-            <a:off x="10637215" y="6382512"/>
+            <a:off x="10637215" y="6492240"/>
             <a:ext cx="914400" cy="292608"/>
           </a:xfrm>
           <a:prstGeom prst="rect">
@@ -3290,8 +3290,8 @@
         </p:nvSpPr>
         <p:spPr>
           <a:xfrm>
-            <a:off x="640080" y="384048"/>
-            <a:ext cx="8982151" cy="768096"/>
+            <a:off x="640080" y="365760"/>
+            <a:ext cx="8982151" cy="749808"/>
           </a:xfrm>
           <a:prstGeom prst="rect">
             <a:avLst/>
@@ -3330,7 +3330,7 @@
               <a:buNone/>
             </a:pPr>
             <a:r>
-              <a:rPr lang="en-US" sz="1100" i="1" dirty="0">
+              <a:rPr lang="en-US" sz="1100" dirty="0">
                 <a:solidFill>
                   <a:srgbClr val="12B198"/>
                 </a:solidFill>
@@ -3352,7 +3352,7 @@
         </p:nvSpPr>
         <p:spPr>
           <a:xfrm>
-            <a:off x="9686239" y="438912"/>
+            <a:off x="9686239" y="420624"/>
             <a:ext cx="932688" cy="310896"/>
           </a:xfrm>
           <a:prstGeom prst="roundRect">
@@ -3374,7 +3374,7 @@
         </p:nvSpPr>
         <p:spPr>
           <a:xfrm>
-            <a:off x="9686239" y="438912"/>
+            <a:off x="9686239" y="420624"/>
             <a:ext cx="932688" cy="310896"/>
           </a:xfrm>
           <a:prstGeom prst="rect">
@@ -3413,12 +3413,12 @@
         </p:nvSpPr>
         <p:spPr>
           <a:xfrm>
-            <a:off x="640080" y="1188720"/>
-            <a:ext cx="10911535" cy="530352"/>
+            <a:off x="640080" y="1115568"/>
+            <a:ext cx="10911535" cy="585216"/>
           </a:xfrm>
           <a:prstGeom prst="roundRect">
             <a:avLst>
-              <a:gd name="adj" fmla="val 6897"/>
+              <a:gd name="adj" fmla="val 6250"/>
             </a:avLst>
           </a:prstGeom>
           <a:solidFill>
@@ -3435,8 +3435,8 @@
         </p:nvSpPr>
         <p:spPr>
           <a:xfrm>
-            <a:off x="877824" y="1234440"/>
-            <a:ext cx="10436047" cy="438912"/>
+            <a:off x="877824" y="1161288"/>
+            <a:ext cx="10436047" cy="493776"/>
           </a:xfrm>
           <a:prstGeom prst="rect">
             <a:avLst/>
@@ -3472,7 +3472,7 @@
               <a:buNone/>
             </a:pPr>
             <a:r>
-              <a:rPr lang="en-US" sz="800" dirty="0">
+              <a:rPr lang="en-US" sz="900" dirty="0">
                 <a:solidFill>
                   <a:srgbClr val="0D8A76"/>
                 </a:solidFill>
@@ -3509,9 +3509,9 @@
               <a:buNone/>
             </a:pPr>
             <a:r>
-              <a:rPr lang="en-US" sz="850" i="1" dirty="0">
-                <a:solidFill>
-                  <a:srgbClr val="5F7183"/>
+              <a:rPr lang="en-US" sz="1050" dirty="0">
+                <a:solidFill>
+                  <a:srgbClr val="1B2733"/>
                 </a:solidFill>
                 <a:latin typeface="Calibri" pitchFamily="34" charset="0"/>
                 <a:ea typeface="Calibri" pitchFamily="34" charset="-122"/>
@@ -3531,12 +3531,12 @@
         </p:nvSpPr>
         <p:spPr>
           <a:xfrm>
-            <a:off x="640080" y="1810512"/>
-            <a:ext cx="5327752" cy="1920240"/>
+            <a:off x="640080" y="1773936"/>
+            <a:ext cx="5327752" cy="1965960"/>
           </a:xfrm>
           <a:prstGeom prst="roundRect">
             <a:avLst>
-              <a:gd name="adj" fmla="val 1905"/>
+              <a:gd name="adj" fmla="val 1860"/>
             </a:avLst>
           </a:prstGeom>
           <a:solidFill>
@@ -3553,7 +3553,7 @@
         </p:nvSpPr>
         <p:spPr>
           <a:xfrm>
-            <a:off x="822960" y="1975104"/>
+            <a:off x="822960" y="1938528"/>
             <a:ext cx="310896" cy="310896"/>
           </a:xfrm>
           <a:prstGeom prst="ellipse">
@@ -3573,7 +3573,7 @@
         </p:nvSpPr>
         <p:spPr>
           <a:xfrm>
-            <a:off x="822960" y="1975104"/>
+            <a:off x="822960" y="1938528"/>
             <a:ext cx="310896" cy="310896"/>
           </a:xfrm>
           <a:prstGeom prst="rect">
@@ -3612,7 +3612,7 @@
         </p:nvSpPr>
         <p:spPr>
           <a:xfrm>
-            <a:off x="1207008" y="1938528"/>
+            <a:off x="1207008" y="1901952"/>
             <a:ext cx="4559656" cy="512064"/>
           </a:xfrm>
           <a:prstGeom prst="rect">
@@ -3652,7 +3652,7 @@
               <a:buNone/>
             </a:pPr>
             <a:r>
-              <a:rPr lang="en-US" sz="800" i="1" dirty="0">
+              <a:rPr lang="en-US" sz="1050" dirty="0">
                 <a:solidFill>
                   <a:srgbClr val="12B198"/>
                 </a:solidFill>
@@ -3674,8 +3674,8 @@
         </p:nvSpPr>
         <p:spPr>
           <a:xfrm>
-            <a:off x="859536" y="2487168"/>
-            <a:ext cx="4888840" cy="1097280"/>
+            <a:off x="859536" y="2450592"/>
+            <a:ext cx="4888840" cy="1143000"/>
           </a:xfrm>
           <a:prstGeom prst="rect">
             <a:avLst/>
@@ -3720,9 +3720,9 @@
               <a:buNone/>
             </a:pPr>
             <a:r>
-              <a:rPr lang="en-US" sz="750" i="1" dirty="0">
-                <a:solidFill>
-                  <a:srgbClr val="5F7183"/>
+              <a:rPr lang="en-US" sz="950" dirty="0">
+                <a:solidFill>
+                  <a:srgbClr val="1B2733"/>
                 </a:solidFill>
                 <a:latin typeface="Calibri" pitchFamily="34" charset="0"/>
                 <a:ea typeface="Calibri" pitchFamily="34" charset="-122"/>
@@ -3766,9 +3766,9 @@
               <a:buNone/>
             </a:pPr>
             <a:r>
-              <a:rPr lang="en-US" sz="750" i="1" dirty="0">
-                <a:solidFill>
-                  <a:srgbClr val="5F7183"/>
+              <a:rPr lang="en-US" sz="950" dirty="0">
+                <a:solidFill>
+                  <a:srgbClr val="1B2733"/>
                 </a:solidFill>
                 <a:latin typeface="Calibri" pitchFamily="34" charset="0"/>
                 <a:ea typeface="Calibri" pitchFamily="34" charset="-122"/>
@@ -3812,9 +3812,9 @@
               <a:buNone/>
             </a:pPr>
             <a:r>
-              <a:rPr lang="en-US" sz="750" i="1" dirty="0">
-                <a:solidFill>
-                  <a:srgbClr val="5F7183"/>
+              <a:rPr lang="en-US" sz="950" dirty="0">
+                <a:solidFill>
+                  <a:srgbClr val="1B2733"/>
                 </a:solidFill>
                 <a:latin typeface="Calibri" pitchFamily="34" charset="0"/>
                 <a:ea typeface="Calibri" pitchFamily="34" charset="-122"/>
@@ -3858,9 +3858,9 @@
               <a:buNone/>
             </a:pPr>
             <a:r>
-              <a:rPr lang="en-US" sz="750" i="1" dirty="0">
-                <a:solidFill>
-                  <a:srgbClr val="5F7183"/>
+              <a:rPr lang="en-US" sz="950" dirty="0">
+                <a:solidFill>
+                  <a:srgbClr val="1B2733"/>
                 </a:solidFill>
                 <a:latin typeface="Calibri" pitchFamily="34" charset="0"/>
                 <a:ea typeface="Calibri" pitchFamily="34" charset="-122"/>
@@ -3880,12 +3880,12 @@
         </p:nvSpPr>
         <p:spPr>
           <a:xfrm>
-            <a:off x="6223864" y="1810512"/>
-            <a:ext cx="5327752" cy="1920240"/>
+            <a:off x="6223864" y="1773936"/>
+            <a:ext cx="5327752" cy="1965960"/>
           </a:xfrm>
           <a:prstGeom prst="roundRect">
             <a:avLst>
-              <a:gd name="adj" fmla="val 1905"/>
+              <a:gd name="adj" fmla="val 1860"/>
             </a:avLst>
           </a:prstGeom>
           <a:solidFill>
@@ -3902,7 +3902,7 @@
         </p:nvSpPr>
         <p:spPr>
           <a:xfrm>
-            <a:off x="6406744" y="1975104"/>
+            <a:off x="6406744" y="1938528"/>
             <a:ext cx="310896" cy="310896"/>
           </a:xfrm>
           <a:prstGeom prst="ellipse">
@@ -3922,7 +3922,7 @@
         </p:nvSpPr>
         <p:spPr>
           <a:xfrm>
-            <a:off x="6406744" y="1975104"/>
+            <a:off x="6406744" y="1938528"/>
             <a:ext cx="310896" cy="310896"/>
           </a:xfrm>
           <a:prstGeom prst="rect">
@@ -3961,7 +3961,7 @@
         </p:nvSpPr>
         <p:spPr>
           <a:xfrm>
-            <a:off x="6790792" y="1938528"/>
+            <a:off x="6790792" y="1901952"/>
             <a:ext cx="4559656" cy="512064"/>
           </a:xfrm>
           <a:prstGeom prst="rect">
@@ -4001,7 +4001,7 @@
               <a:buNone/>
             </a:pPr>
             <a:r>
-              <a:rPr lang="en-US" sz="800" i="1" dirty="0">
+              <a:rPr lang="en-US" sz="1050" dirty="0">
                 <a:solidFill>
                   <a:srgbClr val="12B198"/>
                 </a:solidFill>
@@ -4023,8 +4023,8 @@
         </p:nvSpPr>
         <p:spPr>
           <a:xfrm>
-            <a:off x="6443320" y="2487168"/>
-            <a:ext cx="4888840" cy="1097280"/>
+            <a:off x="6443320" y="2450592"/>
+            <a:ext cx="4888840" cy="1143000"/>
           </a:xfrm>
           <a:prstGeom prst="rect">
             <a:avLst/>
@@ -4069,9 +4069,9 @@
               <a:buNone/>
             </a:pPr>
             <a:r>
-              <a:rPr lang="en-US" sz="750" i="1" dirty="0">
-                <a:solidFill>
-                  <a:srgbClr val="5F7183"/>
+              <a:rPr lang="en-US" sz="950" dirty="0">
+                <a:solidFill>
+                  <a:srgbClr val="1B2733"/>
                 </a:solidFill>
                 <a:latin typeface="Calibri" pitchFamily="34" charset="0"/>
                 <a:ea typeface="Calibri" pitchFamily="34" charset="-122"/>
@@ -4115,9 +4115,9 @@
               <a:buNone/>
             </a:pPr>
             <a:r>
-              <a:rPr lang="en-US" sz="750" i="1" dirty="0">
-                <a:solidFill>
-                  <a:srgbClr val="5F7183"/>
+              <a:rPr lang="en-US" sz="950" dirty="0">
+                <a:solidFill>
+                  <a:srgbClr val="1B2733"/>
                 </a:solidFill>
                 <a:latin typeface="Calibri" pitchFamily="34" charset="0"/>
                 <a:ea typeface="Calibri" pitchFamily="34" charset="-122"/>
@@ -4161,9 +4161,9 @@
               <a:buNone/>
             </a:pPr>
             <a:r>
-              <a:rPr lang="en-US" sz="750" i="1" dirty="0">
-                <a:solidFill>
-                  <a:srgbClr val="5F7183"/>
+              <a:rPr lang="en-US" sz="950" dirty="0">
+                <a:solidFill>
+                  <a:srgbClr val="1B2733"/>
                 </a:solidFill>
                 <a:latin typeface="Calibri" pitchFamily="34" charset="0"/>
                 <a:ea typeface="Calibri" pitchFamily="34" charset="-122"/>
@@ -4207,9 +4207,9 @@
               <a:buNone/>
             </a:pPr>
             <a:r>
-              <a:rPr lang="en-US" sz="750" i="1" dirty="0">
-                <a:solidFill>
-                  <a:srgbClr val="5F7183"/>
+              <a:rPr lang="en-US" sz="950" dirty="0">
+                <a:solidFill>
+                  <a:srgbClr val="1B2733"/>
                 </a:solidFill>
                 <a:latin typeface="Calibri" pitchFamily="34" charset="0"/>
                 <a:ea typeface="Calibri" pitchFamily="34" charset="-122"/>
@@ -4229,12 +4229,12 @@
         </p:nvSpPr>
         <p:spPr>
           <a:xfrm>
-            <a:off x="640080" y="3931920"/>
-            <a:ext cx="5327752" cy="1920240"/>
+            <a:off x="640080" y="3941064"/>
+            <a:ext cx="5327752" cy="1965960"/>
           </a:xfrm>
           <a:prstGeom prst="roundRect">
             <a:avLst>
-              <a:gd name="adj" fmla="val 1905"/>
+              <a:gd name="adj" fmla="val 1860"/>
             </a:avLst>
           </a:prstGeom>
           <a:solidFill>
@@ -4251,7 +4251,7 @@
         </p:nvSpPr>
         <p:spPr>
           <a:xfrm>
-            <a:off x="822960" y="4096512"/>
+            <a:off x="822960" y="4105656"/>
             <a:ext cx="310896" cy="310896"/>
           </a:xfrm>
           <a:prstGeom prst="ellipse">
@@ -4271,7 +4271,7 @@
         </p:nvSpPr>
         <p:spPr>
           <a:xfrm>
-            <a:off x="822960" y="4096512"/>
+            <a:off x="822960" y="4105656"/>
             <a:ext cx="310896" cy="310896"/>
           </a:xfrm>
           <a:prstGeom prst="rect">
@@ -4310,7 +4310,7 @@
         </p:nvSpPr>
         <p:spPr>
           <a:xfrm>
-            <a:off x="1207008" y="4059936"/>
+            <a:off x="1207008" y="4069080"/>
             <a:ext cx="4559656" cy="512064"/>
           </a:xfrm>
           <a:prstGeom prst="rect">
@@ -4350,7 +4350,7 @@
               <a:buNone/>
             </a:pPr>
             <a:r>
-              <a:rPr lang="en-US" sz="800" i="1" dirty="0">
+              <a:rPr lang="en-US" sz="1050" dirty="0">
                 <a:solidFill>
                   <a:srgbClr val="12B198"/>
                 </a:solidFill>
@@ -4372,8 +4372,8 @@
         </p:nvSpPr>
         <p:spPr>
           <a:xfrm>
-            <a:off x="859536" y="4608576"/>
-            <a:ext cx="4888840" cy="1097280"/>
+            <a:off x="859536" y="4617720"/>
+            <a:ext cx="4888840" cy="1143000"/>
           </a:xfrm>
           <a:prstGeom prst="rect">
             <a:avLst/>
@@ -4418,9 +4418,9 @@
               <a:buNone/>
             </a:pPr>
             <a:r>
-              <a:rPr lang="en-US" sz="750" i="1" dirty="0">
-                <a:solidFill>
-                  <a:srgbClr val="5F7183"/>
+              <a:rPr lang="en-US" sz="950" dirty="0">
+                <a:solidFill>
+                  <a:srgbClr val="1B2733"/>
                 </a:solidFill>
                 <a:latin typeface="Calibri" pitchFamily="34" charset="0"/>
                 <a:ea typeface="Calibri" pitchFamily="34" charset="-122"/>
@@ -4464,9 +4464,9 @@
               <a:buNone/>
             </a:pPr>
             <a:r>
-              <a:rPr lang="en-US" sz="750" i="1" dirty="0">
-                <a:solidFill>
-                  <a:srgbClr val="5F7183"/>
+              <a:rPr lang="en-US" sz="950" dirty="0">
+                <a:solidFill>
+                  <a:srgbClr val="1B2733"/>
                 </a:solidFill>
                 <a:latin typeface="Calibri" pitchFamily="34" charset="0"/>
                 <a:ea typeface="Calibri" pitchFamily="34" charset="-122"/>
@@ -4510,9 +4510,9 @@
               <a:buNone/>
             </a:pPr>
             <a:r>
-              <a:rPr lang="en-US" sz="750" i="1" dirty="0">
-                <a:solidFill>
-                  <a:srgbClr val="5F7183"/>
+              <a:rPr lang="en-US" sz="950" dirty="0">
+                <a:solidFill>
+                  <a:srgbClr val="1B2733"/>
                 </a:solidFill>
                 <a:latin typeface="Calibri" pitchFamily="34" charset="0"/>
                 <a:ea typeface="Calibri" pitchFamily="34" charset="-122"/>
@@ -4556,9 +4556,9 @@
               <a:buNone/>
             </a:pPr>
             <a:r>
-              <a:rPr lang="en-US" sz="750" i="1" dirty="0">
-                <a:solidFill>
-                  <a:srgbClr val="5F7183"/>
+              <a:rPr lang="en-US" sz="950" dirty="0">
+                <a:solidFill>
+                  <a:srgbClr val="1B2733"/>
                 </a:solidFill>
                 <a:latin typeface="Calibri" pitchFamily="34" charset="0"/>
                 <a:ea typeface="Calibri" pitchFamily="34" charset="-122"/>
@@ -4578,12 +4578,12 @@
         </p:nvSpPr>
         <p:spPr>
           <a:xfrm>
-            <a:off x="6223864" y="3931920"/>
-            <a:ext cx="5327752" cy="1920240"/>
+            <a:off x="6223864" y="3941064"/>
+            <a:ext cx="5327752" cy="1965960"/>
           </a:xfrm>
           <a:prstGeom prst="roundRect">
             <a:avLst>
-              <a:gd name="adj" fmla="val 1905"/>
+              <a:gd name="adj" fmla="val 1860"/>
             </a:avLst>
           </a:prstGeom>
           <a:solidFill>
@@ -4600,7 +4600,7 @@
         </p:nvSpPr>
         <p:spPr>
           <a:xfrm>
-            <a:off x="6406744" y="4096512"/>
+            <a:off x="6406744" y="4105656"/>
             <a:ext cx="310896" cy="310896"/>
           </a:xfrm>
           <a:prstGeom prst="ellipse">
@@ -4620,7 +4620,7 @@
         </p:nvSpPr>
         <p:spPr>
           <a:xfrm>
-            <a:off x="6406744" y="4096512"/>
+            <a:off x="6406744" y="4105656"/>
             <a:ext cx="310896" cy="310896"/>
           </a:xfrm>
           <a:prstGeom prst="rect">
@@ -4659,7 +4659,7 @@
         </p:nvSpPr>
         <p:spPr>
           <a:xfrm>
-            <a:off x="6790792" y="4059936"/>
+            <a:off x="6790792" y="4069080"/>
             <a:ext cx="4559656" cy="512064"/>
           </a:xfrm>
           <a:prstGeom prst="rect">
@@ -4699,7 +4699,7 @@
               <a:buNone/>
             </a:pPr>
             <a:r>
-              <a:rPr lang="en-US" sz="800" i="1" dirty="0">
+              <a:rPr lang="en-US" sz="1050" dirty="0">
                 <a:solidFill>
                   <a:srgbClr val="12B198"/>
                 </a:solidFill>
@@ -4721,8 +4721,8 @@
         </p:nvSpPr>
         <p:spPr>
           <a:xfrm>
-            <a:off x="6443320" y="4608576"/>
-            <a:ext cx="4888840" cy="1097280"/>
+            <a:off x="6443320" y="4617720"/>
+            <a:ext cx="4888840" cy="1143000"/>
           </a:xfrm>
           <a:prstGeom prst="rect">
             <a:avLst/>
@@ -4767,9 +4767,9 @@
               <a:buNone/>
             </a:pPr>
             <a:r>
-              <a:rPr lang="en-US" sz="750" i="1" dirty="0">
-                <a:solidFill>
-                  <a:srgbClr val="5F7183"/>
+              <a:rPr lang="en-US" sz="950" dirty="0">
+                <a:solidFill>
+                  <a:srgbClr val="1B2733"/>
                 </a:solidFill>
                 <a:latin typeface="Calibri" pitchFamily="34" charset="0"/>
                 <a:ea typeface="Calibri" pitchFamily="34" charset="-122"/>
@@ -4813,9 +4813,9 @@
               <a:buNone/>
             </a:pPr>
             <a:r>
-              <a:rPr lang="en-US" sz="750" i="1" dirty="0">
-                <a:solidFill>
-                  <a:srgbClr val="5F7183"/>
+              <a:rPr lang="en-US" sz="950" dirty="0">
+                <a:solidFill>
+                  <a:srgbClr val="1B2733"/>
                 </a:solidFill>
                 <a:latin typeface="Calibri" pitchFamily="34" charset="0"/>
                 <a:ea typeface="Calibri" pitchFamily="34" charset="-122"/>
@@ -4859,9 +4859,9 @@
               <a:buNone/>
             </a:pPr>
             <a:r>
-              <a:rPr lang="en-US" sz="750" i="1" dirty="0">
-                <a:solidFill>
-                  <a:srgbClr val="5F7183"/>
+              <a:rPr lang="en-US" sz="950" dirty="0">
+                <a:solidFill>
+                  <a:srgbClr val="1B2733"/>
                 </a:solidFill>
                 <a:latin typeface="Calibri" pitchFamily="34" charset="0"/>
                 <a:ea typeface="Calibri" pitchFamily="34" charset="-122"/>
@@ -4905,7 +4905,86 @@
               <a:buNone/>
             </a:pPr>
             <a:r>
-              <a:rPr lang="en-US" sz="750" i="1" dirty="0">
+              <a:rPr lang="en-US" sz="950" dirty="0">
+                <a:solidFill>
+                  <a:srgbClr val="1B2733"/>
+                </a:solidFill>
+                <a:latin typeface="Calibri" pitchFamily="34" charset="0"/>
+                <a:ea typeface="Calibri" pitchFamily="34" charset="-122"/>
+                <a:cs typeface="Calibri" pitchFamily="34" charset="-120"/>
+              </a:rPr>
+              <a:t>  Choose routes and times that do not disturb the client's work</a:t>
+            </a:r>
+            <a:endParaRPr lang="en-US" sz="950" dirty="0"/>
+          </a:p>
+        </p:txBody>
+      </p:sp>
+      <p:sp>
+        <p:nvSpPr>
+          <p:cNvPr id="28" name="Text 25"/>
+          <p:cNvSpPr/>
+          <p:nvPr/>
+        </p:nvSpPr>
+        <p:spPr>
+          <a:xfrm>
+            <a:off x="640080" y="5961888"/>
+            <a:ext cx="10911535" cy="292608"/>
+          </a:xfrm>
+          <a:prstGeom prst="rect">
+            <a:avLst/>
+          </a:prstGeom>
+          <a:noFill/>
+          <a:ln/>
+        </p:spPr>
+        <p:txBody>
+          <a:bodyPr wrap="square" lIns="0" tIns="0" rIns="0" bIns="0" rtlCol="0" anchor="t"/>
+          <a:lstStyle/>
+          <a:p>
+            <a:pPr indent="0" marL="0">
+              <a:lnSpc>
+                <a:spcPct val="88000"/>
+              </a:lnSpc>
+              <a:buNone/>
+            </a:pPr>
+            <a:r>
+              <a:rPr lang="en-US" sz="900" b="1" dirty="0">
+                <a:solidFill>
+                  <a:srgbClr val="0D8A76"/>
+                </a:solidFill>
+                <a:latin typeface="Yu Gothic" pitchFamily="34" charset="0"/>
+                <a:ea typeface="Yu Gothic" pitchFamily="34" charset="-122"/>
+                <a:cs typeface="Yu Gothic" pitchFamily="34" charset="-120"/>
+              </a:rPr>
+              <a:t>Site SOP優先　</a:t>
+            </a:r>
+            <a:pPr indent="0" marL="0">
+              <a:lnSpc>
+                <a:spcPct val="88000"/>
+              </a:lnSpc>
+              <a:buNone/>
+            </a:pPr>
+            <a:r>
+              <a:rPr lang="en-US" sz="900" dirty="0">
+                <a:solidFill>
+                  <a:srgbClr val="1B2733"/>
+                </a:solidFill>
+                <a:latin typeface="Yu Gothic" pitchFamily="34" charset="0"/>
+                <a:ea typeface="Yu Gothic" pitchFamily="34" charset="-122"/>
+                <a:cs typeface="Yu Gothic" pitchFamily="34" charset="-120"/>
+              </a:rPr>
+              <a:t>巡回の回数、時間帯、経路は現場ごとに指定される。Site SOPと警備指令書に従う。</a:t>
+            </a:r>
+            <a:endParaRPr lang="en-US" sz="900" dirty="0"/>
+          </a:p>
+          <a:p>
+            <a:pPr indent="0" marL="0">
+              <a:lnSpc>
+                <a:spcPct val="88000"/>
+              </a:lnSpc>
+              <a:buNone/>
+            </a:pPr>
+            <a:r>
+              <a:rPr lang="en-US" sz="800" i="1" dirty="0">
                 <a:solidFill>
                   <a:srgbClr val="5F7183"/>
                 </a:solidFill>
@@ -4913,22 +4992,22 @@
                 <a:ea typeface="Calibri" pitchFamily="34" charset="-122"/>
                 <a:cs typeface="Calibri" pitchFamily="34" charset="-120"/>
               </a:rPr>
-              <a:t>  Choose routes and times that do not disturb the client's work</a:t>
-            </a:r>
-            <a:endParaRPr lang="en-US" sz="950" dirty="0"/>
-          </a:p>
-        </p:txBody>
-      </p:sp>
-      <p:sp>
-        <p:nvSpPr>
-          <p:cNvPr id="28" name="Text 25"/>
-          <p:cNvSpPr/>
-          <p:nvPr/>
-        </p:nvSpPr>
-        <p:spPr>
-          <a:xfrm>
-            <a:off x="640080" y="5907024"/>
-            <a:ext cx="10911535" cy="310896"/>
+              <a:t>Frequency, timing and route are specified per site. Follow the Site SOP and post orders.</a:t>
+            </a:r>
+            <a:endParaRPr lang="en-US" sz="900" dirty="0"/>
+          </a:p>
+        </p:txBody>
+      </p:sp>
+      <p:sp>
+        <p:nvSpPr>
+          <p:cNvPr id="29" name="Text 26"/>
+          <p:cNvSpPr/>
+          <p:nvPr/>
+        </p:nvSpPr>
+        <p:spPr>
+          <a:xfrm>
+            <a:off x="640080" y="6272784"/>
+            <a:ext cx="9905695" cy="219456"/>
           </a:xfrm>
           <a:prstGeom prst="rect">
             <a:avLst/>
@@ -4941,167 +5020,88 @@
           <a:lstStyle/>
           <a:p>
             <a:pPr indent="0" marL="0">
-              <a:lnSpc>
-                <a:spcPct val="88000"/>
-              </a:lnSpc>
-              <a:buNone/>
-            </a:pPr>
-            <a:r>
-              <a:rPr lang="en-US" sz="900" b="1" dirty="0">
-                <a:solidFill>
-                  <a:srgbClr val="0D8A76"/>
-                </a:solidFill>
-                <a:latin typeface="Yu Gothic" pitchFamily="34" charset="0"/>
-                <a:ea typeface="Yu Gothic" pitchFamily="34" charset="-122"/>
-                <a:cs typeface="Yu Gothic" pitchFamily="34" charset="-120"/>
-              </a:rPr>
-              <a:t>Site SOP優先　</a:t>
-            </a:r>
-            <a:pPr indent="0" marL="0">
-              <a:lnSpc>
-                <a:spcPct val="88000"/>
-              </a:lnSpc>
+              <a:buNone/>
+            </a:pPr>
+            <a:r>
+              <a:rPr lang="en-US" sz="750" b="1" dirty="0">
+                <a:solidFill>
+                  <a:srgbClr val="D6E0E9"/>
+                </a:solidFill>
+                <a:latin typeface="Yu Gothic" pitchFamily="34" charset="0"/>
+                <a:ea typeface="Yu Gothic" pitchFamily="34" charset="-122"/>
+                <a:cs typeface="Yu Gothic" pitchFamily="34" charset="-120"/>
+              </a:rPr>
+              <a:t>ソース　</a:t>
+            </a:r>
+            <a:pPr indent="0" marL="0">
+              <a:buNone/>
+            </a:pPr>
+            <a:r>
+              <a:rPr lang="en-US" sz="750" dirty="0">
+                <a:solidFill>
+                  <a:srgbClr val="5F7183"/>
+                </a:solidFill>
+                <a:latin typeface="Yu Gothic" pitchFamily="34" charset="0"/>
+                <a:ea typeface="Yu Gothic" pitchFamily="34" charset="-122"/>
+                <a:cs typeface="Yu Gothic" pitchFamily="34" charset="-120"/>
+              </a:rPr>
+              <a:t>警備業法、警察庁「警備員教育」、消防法</a:t>
+            </a:r>
+            <a:endParaRPr lang="en-US" sz="750" dirty="0"/>
+          </a:p>
+        </p:txBody>
+      </p:sp>
+      <p:sp>
+        <p:nvSpPr>
+          <p:cNvPr id="30" name="Text 27"/>
+          <p:cNvSpPr/>
+          <p:nvPr/>
+        </p:nvSpPr>
+        <p:spPr>
+          <a:xfrm>
+            <a:off x="640080" y="6492240"/>
+            <a:ext cx="8778240" cy="292608"/>
+          </a:xfrm>
+          <a:prstGeom prst="rect">
+            <a:avLst/>
+          </a:prstGeom>
+          <a:noFill/>
+          <a:ln/>
+        </p:spPr>
+        <p:txBody>
+          <a:bodyPr wrap="square" lIns="0" tIns="0" rIns="0" bIns="0" rtlCol="0" anchor="ctr"/>
+          <a:lstStyle/>
+          <a:p>
+            <a:pPr indent="0" marL="0">
               <a:buNone/>
             </a:pPr>
             <a:r>
               <a:rPr lang="en-US" sz="900" dirty="0">
                 <a:solidFill>
-                  <a:srgbClr val="1B2733"/>
-                </a:solidFill>
-                <a:latin typeface="Yu Gothic" pitchFamily="34" charset="0"/>
-                <a:ea typeface="Yu Gothic" pitchFamily="34" charset="-122"/>
-                <a:cs typeface="Yu Gothic" pitchFamily="34" charset="-120"/>
-              </a:rPr>
-              <a:t>巡回の回数、時間帯、経路は現場ごとに指定される。Site SOPと警備指令書に従う。</a:t>
+                  <a:srgbClr val="5F7183"/>
+                </a:solidFill>
+                <a:latin typeface="Yu Gothic" pitchFamily="34" charset="0"/>
+                <a:ea typeface="Yu Gothic" pitchFamily="34" charset="-122"/>
+                <a:cs typeface="Yu Gothic" pitchFamily="34" charset="-120"/>
+              </a:rPr>
+              <a:t>第4時限｜業務別教育1 巡回の方法に関すること  </a:t>
+            </a:r>
+            <a:pPr indent="0" marL="0">
+              <a:buNone/>
+            </a:pPr>
+            <a:r>
+              <a:rPr lang="en-US" sz="850" i="1" dirty="0">
+                <a:solidFill>
+                  <a:srgbClr val="D6E0E9"/>
+                </a:solidFill>
+                <a:latin typeface="Calibri" pitchFamily="34" charset="0"/>
+                <a:ea typeface="Calibri" pitchFamily="34" charset="-122"/>
+                <a:cs typeface="Calibri" pitchFamily="34" charset="-120"/>
+              </a:rPr>
+              <a:t>Period 4 | Task-Specific Training 1 — Patrol Methods</a:t>
             </a:r>
             <a:endParaRPr lang="en-US" sz="900" dirty="0"/>
           </a:p>
-          <a:p>
-            <a:pPr indent="0" marL="0">
-              <a:lnSpc>
-                <a:spcPct val="88000"/>
-              </a:lnSpc>
-              <a:buNone/>
-            </a:pPr>
-            <a:r>
-              <a:rPr lang="en-US" sz="750" i="1" dirty="0">
-                <a:solidFill>
-                  <a:srgbClr val="5F7183"/>
-                </a:solidFill>
-                <a:latin typeface="Calibri" pitchFamily="34" charset="0"/>
-                <a:ea typeface="Calibri" pitchFamily="34" charset="-122"/>
-                <a:cs typeface="Calibri" pitchFamily="34" charset="-120"/>
-              </a:rPr>
-              <a:t>Frequency, timing and route are specified per site. Follow the Site SOP and post orders.</a:t>
-            </a:r>
-            <a:endParaRPr lang="en-US" sz="900" dirty="0"/>
-          </a:p>
-        </p:txBody>
-      </p:sp>
-      <p:sp>
-        <p:nvSpPr>
-          <p:cNvPr id="29" name="Text 26"/>
-          <p:cNvSpPr/>
-          <p:nvPr/>
-        </p:nvSpPr>
-        <p:spPr>
-          <a:xfrm>
-            <a:off x="640080" y="6272784"/>
-            <a:ext cx="9905695" cy="237744"/>
-          </a:xfrm>
-          <a:prstGeom prst="rect">
-            <a:avLst/>
-          </a:prstGeom>
-          <a:noFill/>
-          <a:ln/>
-        </p:spPr>
-        <p:txBody>
-          <a:bodyPr wrap="square" lIns="0" tIns="0" rIns="0" bIns="0" rtlCol="0" anchor="t"/>
-          <a:lstStyle/>
-          <a:p>
-            <a:pPr indent="0" marL="0">
-              <a:buNone/>
-            </a:pPr>
-            <a:r>
-              <a:rPr lang="en-US" sz="750" b="1" dirty="0">
-                <a:solidFill>
-                  <a:srgbClr val="D6E0E9"/>
-                </a:solidFill>
-                <a:latin typeface="Yu Gothic" pitchFamily="34" charset="0"/>
-                <a:ea typeface="Yu Gothic" pitchFamily="34" charset="-122"/>
-                <a:cs typeface="Yu Gothic" pitchFamily="34" charset="-120"/>
-              </a:rPr>
-              <a:t>ソース　</a:t>
-            </a:r>
-            <a:pPr indent="0" marL="0">
-              <a:buNone/>
-            </a:pPr>
-            <a:r>
-              <a:rPr lang="en-US" sz="750" dirty="0">
-                <a:solidFill>
-                  <a:srgbClr val="5F7183"/>
-                </a:solidFill>
-                <a:latin typeface="Yu Gothic" pitchFamily="34" charset="0"/>
-                <a:ea typeface="Yu Gothic" pitchFamily="34" charset="-122"/>
-                <a:cs typeface="Yu Gothic" pitchFamily="34" charset="-120"/>
-              </a:rPr>
-              <a:t>警備業法、警察庁「警備員教育」、消防法</a:t>
-            </a:r>
-            <a:endParaRPr lang="en-US" sz="750" dirty="0"/>
-          </a:p>
-        </p:txBody>
-      </p:sp>
-      <p:sp>
-        <p:nvSpPr>
-          <p:cNvPr id="30" name="Text 27"/>
-          <p:cNvSpPr/>
-          <p:nvPr/>
-        </p:nvSpPr>
-        <p:spPr>
-          <a:xfrm>
-            <a:off x="640080" y="6382512"/>
-            <a:ext cx="8778240" cy="292608"/>
-          </a:xfrm>
-          <a:prstGeom prst="rect">
-            <a:avLst/>
-          </a:prstGeom>
-          <a:noFill/>
-          <a:ln/>
-        </p:spPr>
-        <p:txBody>
-          <a:bodyPr wrap="square" lIns="0" tIns="0" rIns="0" bIns="0" rtlCol="0" anchor="ctr"/>
-          <a:lstStyle/>
-          <a:p>
-            <a:pPr indent="0" marL="0">
-              <a:buNone/>
-            </a:pPr>
-            <a:r>
-              <a:rPr lang="en-US" sz="900" dirty="0">
-                <a:solidFill>
-                  <a:srgbClr val="5F7183"/>
-                </a:solidFill>
-                <a:latin typeface="Yu Gothic" pitchFamily="34" charset="0"/>
-                <a:ea typeface="Yu Gothic" pitchFamily="34" charset="-122"/>
-                <a:cs typeface="Yu Gothic" pitchFamily="34" charset="-120"/>
-              </a:rPr>
-              <a:t>第4時限｜業務別教育1 巡回の方法に関すること  </a:t>
-            </a:r>
-            <a:pPr indent="0" marL="0">
-              <a:buNone/>
-            </a:pPr>
-            <a:r>
-              <a:rPr lang="en-US" sz="850" i="1" dirty="0">
-                <a:solidFill>
-                  <a:srgbClr val="D6E0E9"/>
-                </a:solidFill>
-                <a:latin typeface="Calibri" pitchFamily="34" charset="0"/>
-                <a:ea typeface="Calibri" pitchFamily="34" charset="-122"/>
-                <a:cs typeface="Calibri" pitchFamily="34" charset="-120"/>
-              </a:rPr>
-              <a:t>Period 4 | Task-Specific Training 1 — Patrol Methods</a:t>
-            </a:r>
-            <a:endParaRPr lang="en-US" sz="900" dirty="0"/>
-          </a:p>
         </p:txBody>
       </p:sp>
       <p:sp>
@@ -5112,7 +5112,7 @@
         </p:nvSpPr>
         <p:spPr>
           <a:xfrm>
-            <a:off x="10637215" y="6382512"/>
+            <a:off x="10637215" y="6492240"/>
             <a:ext cx="914400" cy="292608"/>
           </a:xfrm>
           <a:prstGeom prst="rect">
@@ -5207,8 +5207,8 @@
         </p:nvSpPr>
         <p:spPr>
           <a:xfrm>
-            <a:off x="640080" y="384048"/>
-            <a:ext cx="8982151" cy="768096"/>
+            <a:off x="640080" y="365760"/>
+            <a:ext cx="8982151" cy="749808"/>
           </a:xfrm>
           <a:prstGeom prst="rect">
             <a:avLst/>
@@ -5247,7 +5247,7 @@
               <a:buNone/>
             </a:pPr>
             <a:r>
-              <a:rPr lang="en-US" sz="1100" i="1" dirty="0">
+              <a:rPr lang="en-US" sz="1100" dirty="0">
                 <a:solidFill>
                   <a:srgbClr val="12B198"/>
                 </a:solidFill>
@@ -5269,7 +5269,7 @@
         </p:nvSpPr>
         <p:spPr>
           <a:xfrm>
-            <a:off x="9686239" y="438912"/>
+            <a:off x="9686239" y="420624"/>
             <a:ext cx="932688" cy="310896"/>
           </a:xfrm>
           <a:prstGeom prst="roundRect">
@@ -5291,7 +5291,7 @@
         </p:nvSpPr>
         <p:spPr>
           <a:xfrm>
-            <a:off x="9686239" y="438912"/>
+            <a:off x="9686239" y="420624"/>
             <a:ext cx="932688" cy="310896"/>
           </a:xfrm>
           <a:prstGeom prst="rect">
@@ -5330,12 +5330,12 @@
         </p:nvSpPr>
         <p:spPr>
           <a:xfrm>
-            <a:off x="640080" y="1188720"/>
-            <a:ext cx="10911535" cy="530352"/>
+            <a:off x="640080" y="1115568"/>
+            <a:ext cx="10911535" cy="585216"/>
           </a:xfrm>
           <a:prstGeom prst="roundRect">
             <a:avLst>
-              <a:gd name="adj" fmla="val 6897"/>
+              <a:gd name="adj" fmla="val 6250"/>
             </a:avLst>
           </a:prstGeom>
           <a:solidFill>
@@ -5352,8 +5352,8 @@
         </p:nvSpPr>
         <p:spPr>
           <a:xfrm>
-            <a:off x="877824" y="1234440"/>
-            <a:ext cx="10436047" cy="438912"/>
+            <a:off x="877824" y="1161288"/>
+            <a:ext cx="10436047" cy="493776"/>
           </a:xfrm>
           <a:prstGeom prst="rect">
             <a:avLst/>
@@ -5389,7 +5389,7 @@
               <a:buNone/>
             </a:pPr>
             <a:r>
-              <a:rPr lang="en-US" sz="800" dirty="0">
+              <a:rPr lang="en-US" sz="900" dirty="0">
                 <a:solidFill>
                   <a:srgbClr val="0D8A76"/>
                 </a:solidFill>
@@ -5426,9 +5426,9 @@
               <a:buNone/>
             </a:pPr>
             <a:r>
-              <a:rPr lang="en-US" sz="850" i="1" dirty="0">
-                <a:solidFill>
-                  <a:srgbClr val="5F7183"/>
+              <a:rPr lang="en-US" sz="1050" dirty="0">
+                <a:solidFill>
+                  <a:srgbClr val="1B2733"/>
                 </a:solidFill>
                 <a:latin typeface="Calibri" pitchFamily="34" charset="0"/>
                 <a:ea typeface="Calibri" pitchFamily="34" charset="-122"/>
@@ -5448,12 +5448,12 @@
         </p:nvSpPr>
         <p:spPr>
           <a:xfrm>
-            <a:off x="640080" y="1810512"/>
-            <a:ext cx="5327752" cy="1920240"/>
+            <a:off x="640080" y="1773936"/>
+            <a:ext cx="5327752" cy="1965960"/>
           </a:xfrm>
           <a:prstGeom prst="roundRect">
             <a:avLst>
-              <a:gd name="adj" fmla="val 1905"/>
+              <a:gd name="adj" fmla="val 1860"/>
             </a:avLst>
           </a:prstGeom>
           <a:solidFill>
@@ -5470,7 +5470,7 @@
         </p:nvSpPr>
         <p:spPr>
           <a:xfrm>
-            <a:off x="822960" y="1975104"/>
+            <a:off x="822960" y="1938528"/>
             <a:ext cx="310896" cy="310896"/>
           </a:xfrm>
           <a:prstGeom prst="ellipse">
@@ -5490,7 +5490,7 @@
         </p:nvSpPr>
         <p:spPr>
           <a:xfrm>
-            <a:off x="822960" y="1975104"/>
+            <a:off x="822960" y="1938528"/>
             <a:ext cx="310896" cy="310896"/>
           </a:xfrm>
           <a:prstGeom prst="rect">
@@ -5529,7 +5529,7 @@
         </p:nvSpPr>
         <p:spPr>
           <a:xfrm>
-            <a:off x="1207008" y="1938528"/>
+            <a:off x="1207008" y="1901952"/>
             <a:ext cx="4559656" cy="512064"/>
           </a:xfrm>
           <a:prstGeom prst="rect">
@@ -5569,7 +5569,7 @@
               <a:buNone/>
             </a:pPr>
             <a:r>
-              <a:rPr lang="en-US" sz="800" i="1" dirty="0">
+              <a:rPr lang="en-US" sz="1050" dirty="0">
                 <a:solidFill>
                   <a:srgbClr val="12B198"/>
                 </a:solidFill>
@@ -5591,8 +5591,8 @@
         </p:nvSpPr>
         <p:spPr>
           <a:xfrm>
-            <a:off x="859536" y="2487168"/>
-            <a:ext cx="4888840" cy="1097280"/>
+            <a:off x="859536" y="2450592"/>
+            <a:ext cx="4888840" cy="1143000"/>
           </a:xfrm>
           <a:prstGeom prst="rect">
             <a:avLst/>
@@ -5637,9 +5637,9 @@
               <a:buNone/>
             </a:pPr>
             <a:r>
-              <a:rPr lang="en-US" sz="750" i="1" dirty="0">
-                <a:solidFill>
-                  <a:srgbClr val="5F7183"/>
+              <a:rPr lang="en-US" sz="950" dirty="0">
+                <a:solidFill>
+                  <a:srgbClr val="1B2733"/>
                 </a:solidFill>
                 <a:latin typeface="Calibri" pitchFamily="34" charset="0"/>
                 <a:ea typeface="Calibri" pitchFamily="34" charset="-122"/>
@@ -5683,9 +5683,9 @@
               <a:buNone/>
             </a:pPr>
             <a:r>
-              <a:rPr lang="en-US" sz="750" i="1" dirty="0">
-                <a:solidFill>
-                  <a:srgbClr val="5F7183"/>
+              <a:rPr lang="en-US" sz="950" dirty="0">
+                <a:solidFill>
+                  <a:srgbClr val="1B2733"/>
                 </a:solidFill>
                 <a:latin typeface="Calibri" pitchFamily="34" charset="0"/>
                 <a:ea typeface="Calibri" pitchFamily="34" charset="-122"/>
@@ -5729,9 +5729,9 @@
               <a:buNone/>
             </a:pPr>
             <a:r>
-              <a:rPr lang="en-US" sz="750" i="1" dirty="0">
-                <a:solidFill>
-                  <a:srgbClr val="5F7183"/>
+              <a:rPr lang="en-US" sz="950" dirty="0">
+                <a:solidFill>
+                  <a:srgbClr val="1B2733"/>
                 </a:solidFill>
                 <a:latin typeface="Calibri" pitchFamily="34" charset="0"/>
                 <a:ea typeface="Calibri" pitchFamily="34" charset="-122"/>
@@ -5775,9 +5775,9 @@
               <a:buNone/>
             </a:pPr>
             <a:r>
-              <a:rPr lang="en-US" sz="750" i="1" dirty="0">
-                <a:solidFill>
-                  <a:srgbClr val="5F7183"/>
+              <a:rPr lang="en-US" sz="950" dirty="0">
+                <a:solidFill>
+                  <a:srgbClr val="1B2733"/>
                 </a:solidFill>
                 <a:latin typeface="Calibri" pitchFamily="34" charset="0"/>
                 <a:ea typeface="Calibri" pitchFamily="34" charset="-122"/>
@@ -5797,12 +5797,12 @@
         </p:nvSpPr>
         <p:spPr>
           <a:xfrm>
-            <a:off x="6223864" y="1810512"/>
-            <a:ext cx="5327752" cy="1920240"/>
+            <a:off x="6223864" y="1773936"/>
+            <a:ext cx="5327752" cy="1965960"/>
           </a:xfrm>
           <a:prstGeom prst="roundRect">
             <a:avLst>
-              <a:gd name="adj" fmla="val 1905"/>
+              <a:gd name="adj" fmla="val 1860"/>
             </a:avLst>
           </a:prstGeom>
           <a:solidFill>
@@ -5819,7 +5819,7 @@
         </p:nvSpPr>
         <p:spPr>
           <a:xfrm>
-            <a:off x="6406744" y="1975104"/>
+            <a:off x="6406744" y="1938528"/>
             <a:ext cx="310896" cy="310896"/>
           </a:xfrm>
           <a:prstGeom prst="ellipse">
@@ -5839,7 +5839,7 @@
         </p:nvSpPr>
         <p:spPr>
           <a:xfrm>
-            <a:off x="6406744" y="1975104"/>
+            <a:off x="6406744" y="1938528"/>
             <a:ext cx="310896" cy="310896"/>
           </a:xfrm>
           <a:prstGeom prst="rect">
@@ -5878,7 +5878,7 @@
         </p:nvSpPr>
         <p:spPr>
           <a:xfrm>
-            <a:off x="6790792" y="1938528"/>
+            <a:off x="6790792" y="1901952"/>
             <a:ext cx="4559656" cy="512064"/>
           </a:xfrm>
           <a:prstGeom prst="rect">
@@ -5918,7 +5918,7 @@
               <a:buNone/>
             </a:pPr>
             <a:r>
-              <a:rPr lang="en-US" sz="800" i="1" dirty="0">
+              <a:rPr lang="en-US" sz="1050" dirty="0">
                 <a:solidFill>
                   <a:srgbClr val="12B198"/>
                 </a:solidFill>
@@ -5940,8 +5940,8 @@
         </p:nvSpPr>
         <p:spPr>
           <a:xfrm>
-            <a:off x="6443320" y="2487168"/>
-            <a:ext cx="4888840" cy="1097280"/>
+            <a:off x="6443320" y="2450592"/>
+            <a:ext cx="4888840" cy="1143000"/>
           </a:xfrm>
           <a:prstGeom prst="rect">
             <a:avLst/>
@@ -5986,9 +5986,9 @@
               <a:buNone/>
             </a:pPr>
             <a:r>
-              <a:rPr lang="en-US" sz="750" i="1" dirty="0">
-                <a:solidFill>
-                  <a:srgbClr val="5F7183"/>
+              <a:rPr lang="en-US" sz="950" dirty="0">
+                <a:solidFill>
+                  <a:srgbClr val="1B2733"/>
                 </a:solidFill>
                 <a:latin typeface="Calibri" pitchFamily="34" charset="0"/>
                 <a:ea typeface="Calibri" pitchFamily="34" charset="-122"/>
@@ -6032,9 +6032,9 @@
               <a:buNone/>
             </a:pPr>
             <a:r>
-              <a:rPr lang="en-US" sz="750" i="1" dirty="0">
-                <a:solidFill>
-                  <a:srgbClr val="5F7183"/>
+              <a:rPr lang="en-US" sz="950" dirty="0">
+                <a:solidFill>
+                  <a:srgbClr val="1B2733"/>
                 </a:solidFill>
                 <a:latin typeface="Calibri" pitchFamily="34" charset="0"/>
                 <a:ea typeface="Calibri" pitchFamily="34" charset="-122"/>
@@ -6078,9 +6078,9 @@
               <a:buNone/>
             </a:pPr>
             <a:r>
-              <a:rPr lang="en-US" sz="750" i="1" dirty="0">
-                <a:solidFill>
-                  <a:srgbClr val="5F7183"/>
+              <a:rPr lang="en-US" sz="950" dirty="0">
+                <a:solidFill>
+                  <a:srgbClr val="1B2733"/>
                 </a:solidFill>
                 <a:latin typeface="Calibri" pitchFamily="34" charset="0"/>
                 <a:ea typeface="Calibri" pitchFamily="34" charset="-122"/>
@@ -6124,9 +6124,9 @@
               <a:buNone/>
             </a:pPr>
             <a:r>
-              <a:rPr lang="en-US" sz="750" i="1" dirty="0">
-                <a:solidFill>
-                  <a:srgbClr val="5F7183"/>
+              <a:rPr lang="en-US" sz="950" dirty="0">
+                <a:solidFill>
+                  <a:srgbClr val="1B2733"/>
                 </a:solidFill>
                 <a:latin typeface="Calibri" pitchFamily="34" charset="0"/>
                 <a:ea typeface="Calibri" pitchFamily="34" charset="-122"/>
@@ -6146,12 +6146,12 @@
         </p:nvSpPr>
         <p:spPr>
           <a:xfrm>
-            <a:off x="640080" y="3931920"/>
-            <a:ext cx="5327752" cy="1920240"/>
+            <a:off x="640080" y="3941064"/>
+            <a:ext cx="5327752" cy="1965960"/>
           </a:xfrm>
           <a:prstGeom prst="roundRect">
             <a:avLst>
-              <a:gd name="adj" fmla="val 1905"/>
+              <a:gd name="adj" fmla="val 1860"/>
             </a:avLst>
           </a:prstGeom>
           <a:solidFill>
@@ -6168,7 +6168,7 @@
         </p:nvSpPr>
         <p:spPr>
           <a:xfrm>
-            <a:off x="822960" y="4096512"/>
+            <a:off x="822960" y="4105656"/>
             <a:ext cx="310896" cy="310896"/>
           </a:xfrm>
           <a:prstGeom prst="ellipse">
@@ -6188,7 +6188,7 @@
         </p:nvSpPr>
         <p:spPr>
           <a:xfrm>
-            <a:off x="822960" y="4096512"/>
+            <a:off x="822960" y="4105656"/>
             <a:ext cx="310896" cy="310896"/>
           </a:xfrm>
           <a:prstGeom prst="rect">
@@ -6227,7 +6227,7 @@
         </p:nvSpPr>
         <p:spPr>
           <a:xfrm>
-            <a:off x="1207008" y="4059936"/>
+            <a:off x="1207008" y="4069080"/>
             <a:ext cx="4559656" cy="512064"/>
           </a:xfrm>
           <a:prstGeom prst="rect">
@@ -6267,7 +6267,7 @@
               <a:buNone/>
             </a:pPr>
             <a:r>
-              <a:rPr lang="en-US" sz="800" i="1" dirty="0">
+              <a:rPr lang="en-US" sz="1050" dirty="0">
                 <a:solidFill>
                   <a:srgbClr val="12B198"/>
                 </a:solidFill>
@@ -6289,8 +6289,8 @@
         </p:nvSpPr>
         <p:spPr>
           <a:xfrm>
-            <a:off x="859536" y="4608576"/>
-            <a:ext cx="4888840" cy="1097280"/>
+            <a:off x="859536" y="4617720"/>
+            <a:ext cx="4888840" cy="1143000"/>
           </a:xfrm>
           <a:prstGeom prst="rect">
             <a:avLst/>
@@ -6335,9 +6335,9 @@
               <a:buNone/>
             </a:pPr>
             <a:r>
-              <a:rPr lang="en-US" sz="750" i="1" dirty="0">
-                <a:solidFill>
-                  <a:srgbClr val="5F7183"/>
+              <a:rPr lang="en-US" sz="950" dirty="0">
+                <a:solidFill>
+                  <a:srgbClr val="1B2733"/>
                 </a:solidFill>
                 <a:latin typeface="Calibri" pitchFamily="34" charset="0"/>
                 <a:ea typeface="Calibri" pitchFamily="34" charset="-122"/>
@@ -6381,9 +6381,9 @@
               <a:buNone/>
             </a:pPr>
             <a:r>
-              <a:rPr lang="en-US" sz="750" i="1" dirty="0">
-                <a:solidFill>
-                  <a:srgbClr val="5F7183"/>
+              <a:rPr lang="en-US" sz="950" dirty="0">
+                <a:solidFill>
+                  <a:srgbClr val="1B2733"/>
                 </a:solidFill>
                 <a:latin typeface="Calibri" pitchFamily="34" charset="0"/>
                 <a:ea typeface="Calibri" pitchFamily="34" charset="-122"/>
@@ -6427,9 +6427,9 @@
               <a:buNone/>
             </a:pPr>
             <a:r>
-              <a:rPr lang="en-US" sz="750" i="1" dirty="0">
-                <a:solidFill>
-                  <a:srgbClr val="5F7183"/>
+              <a:rPr lang="en-US" sz="950" dirty="0">
+                <a:solidFill>
+                  <a:srgbClr val="1B2733"/>
                 </a:solidFill>
                 <a:latin typeface="Calibri" pitchFamily="34" charset="0"/>
                 <a:ea typeface="Calibri" pitchFamily="34" charset="-122"/>
@@ -6473,9 +6473,9 @@
               <a:buNone/>
             </a:pPr>
             <a:r>
-              <a:rPr lang="en-US" sz="750" i="1" dirty="0">
-                <a:solidFill>
-                  <a:srgbClr val="5F7183"/>
+              <a:rPr lang="en-US" sz="950" dirty="0">
+                <a:solidFill>
+                  <a:srgbClr val="1B2733"/>
                 </a:solidFill>
                 <a:latin typeface="Calibri" pitchFamily="34" charset="0"/>
                 <a:ea typeface="Calibri" pitchFamily="34" charset="-122"/>
@@ -6495,12 +6495,12 @@
         </p:nvSpPr>
         <p:spPr>
           <a:xfrm>
-            <a:off x="6223864" y="3931920"/>
-            <a:ext cx="5327752" cy="1920240"/>
+            <a:off x="6223864" y="3941064"/>
+            <a:ext cx="5327752" cy="1965960"/>
           </a:xfrm>
           <a:prstGeom prst="roundRect">
             <a:avLst>
-              <a:gd name="adj" fmla="val 1905"/>
+              <a:gd name="adj" fmla="val 1860"/>
             </a:avLst>
           </a:prstGeom>
           <a:solidFill>
@@ -6517,7 +6517,7 @@
         </p:nvSpPr>
         <p:spPr>
           <a:xfrm>
-            <a:off x="6406744" y="4096512"/>
+            <a:off x="6406744" y="4105656"/>
             <a:ext cx="310896" cy="310896"/>
           </a:xfrm>
           <a:prstGeom prst="ellipse">
@@ -6537,7 +6537,7 @@
         </p:nvSpPr>
         <p:spPr>
           <a:xfrm>
-            <a:off x="6406744" y="4096512"/>
+            <a:off x="6406744" y="4105656"/>
             <a:ext cx="310896" cy="310896"/>
           </a:xfrm>
           <a:prstGeom prst="rect">
@@ -6576,7 +6576,7 @@
         </p:nvSpPr>
         <p:spPr>
           <a:xfrm>
-            <a:off x="6790792" y="4059936"/>
+            <a:off x="6790792" y="4069080"/>
             <a:ext cx="4559656" cy="512064"/>
           </a:xfrm>
           <a:prstGeom prst="rect">
@@ -6616,7 +6616,7 @@
               <a:buNone/>
             </a:pPr>
             <a:r>
-              <a:rPr lang="en-US" sz="800" i="1" dirty="0">
+              <a:rPr lang="en-US" sz="1050" dirty="0">
                 <a:solidFill>
                   <a:srgbClr val="12B198"/>
                 </a:solidFill>
@@ -6638,8 +6638,8 @@
         </p:nvSpPr>
         <p:spPr>
           <a:xfrm>
-            <a:off x="6443320" y="4608576"/>
-            <a:ext cx="4888840" cy="1097280"/>
+            <a:off x="6443320" y="4617720"/>
+            <a:ext cx="4888840" cy="1143000"/>
           </a:xfrm>
           <a:prstGeom prst="rect">
             <a:avLst/>
@@ -6684,9 +6684,9 @@
               <a:buNone/>
             </a:pPr>
             <a:r>
-              <a:rPr lang="en-US" sz="750" i="1" dirty="0">
-                <a:solidFill>
-                  <a:srgbClr val="5F7183"/>
+              <a:rPr lang="en-US" sz="950" dirty="0">
+                <a:solidFill>
+                  <a:srgbClr val="1B2733"/>
                 </a:solidFill>
                 <a:latin typeface="Calibri" pitchFamily="34" charset="0"/>
                 <a:ea typeface="Calibri" pitchFamily="34" charset="-122"/>
@@ -6730,9 +6730,9 @@
               <a:buNone/>
             </a:pPr>
             <a:r>
-              <a:rPr lang="en-US" sz="750" i="1" dirty="0">
-                <a:solidFill>
-                  <a:srgbClr val="5F7183"/>
+              <a:rPr lang="en-US" sz="950" dirty="0">
+                <a:solidFill>
+                  <a:srgbClr val="1B2733"/>
                 </a:solidFill>
                 <a:latin typeface="Calibri" pitchFamily="34" charset="0"/>
                 <a:ea typeface="Calibri" pitchFamily="34" charset="-122"/>
@@ -6776,9 +6776,9 @@
               <a:buNone/>
             </a:pPr>
             <a:r>
-              <a:rPr lang="en-US" sz="750" i="1" dirty="0">
-                <a:solidFill>
-                  <a:srgbClr val="5F7183"/>
+              <a:rPr lang="en-US" sz="950" dirty="0">
+                <a:solidFill>
+                  <a:srgbClr val="1B2733"/>
                 </a:solidFill>
                 <a:latin typeface="Calibri" pitchFamily="34" charset="0"/>
                 <a:ea typeface="Calibri" pitchFamily="34" charset="-122"/>
@@ -6822,7 +6822,86 @@
               <a:buNone/>
             </a:pPr>
             <a:r>
-              <a:rPr lang="en-US" sz="750" i="1" dirty="0">
+              <a:rPr lang="en-US" sz="950" dirty="0">
+                <a:solidFill>
+                  <a:srgbClr val="1B2733"/>
+                </a:solidFill>
+                <a:latin typeface="Calibri" pitchFamily="34" charset="0"/>
+                <a:ea typeface="Calibri" pitchFamily="34" charset="-122"/>
+                <a:cs typeface="Calibri" pitchFamily="34" charset="-120"/>
+              </a:rPr>
+              <a:t>  Designing a patrol means deciding how far to reduce the blind spots</a:t>
+            </a:r>
+            <a:endParaRPr lang="en-US" sz="950" dirty="0"/>
+          </a:p>
+        </p:txBody>
+      </p:sp>
+      <p:sp>
+        <p:nvSpPr>
+          <p:cNvPr id="28" name="Text 25"/>
+          <p:cNvSpPr/>
+          <p:nvPr/>
+        </p:nvSpPr>
+        <p:spPr>
+          <a:xfrm>
+            <a:off x="640080" y="5961888"/>
+            <a:ext cx="10911535" cy="292608"/>
+          </a:xfrm>
+          <a:prstGeom prst="rect">
+            <a:avLst/>
+          </a:prstGeom>
+          <a:noFill/>
+          <a:ln/>
+        </p:spPr>
+        <p:txBody>
+          <a:bodyPr wrap="square" lIns="0" tIns="0" rIns="0" bIns="0" rtlCol="0" anchor="t"/>
+          <a:lstStyle/>
+          <a:p>
+            <a:pPr indent="0" marL="0">
+              <a:lnSpc>
+                <a:spcPct val="88000"/>
+              </a:lnSpc>
+              <a:buNone/>
+            </a:pPr>
+            <a:r>
+              <a:rPr lang="en-US" sz="900" b="1" dirty="0">
+                <a:solidFill>
+                  <a:srgbClr val="0D8A76"/>
+                </a:solidFill>
+                <a:latin typeface="Yu Gothic" pitchFamily="34" charset="0"/>
+                <a:ea typeface="Yu Gothic" pitchFamily="34" charset="-122"/>
+                <a:cs typeface="Yu Gothic" pitchFamily="34" charset="-120"/>
+              </a:rPr>
+              <a:t>Site SOP優先　</a:t>
+            </a:r>
+            <a:pPr indent="0" marL="0">
+              <a:lnSpc>
+                <a:spcPct val="88000"/>
+              </a:lnSpc>
+              <a:buNone/>
+            </a:pPr>
+            <a:r>
+              <a:rPr lang="en-US" sz="900" dirty="0">
+                <a:solidFill>
+                  <a:srgbClr val="1B2733"/>
+                </a:solidFill>
+                <a:latin typeface="Yu Gothic" pitchFamily="34" charset="0"/>
+                <a:ea typeface="Yu Gothic" pitchFamily="34" charset="-122"/>
+                <a:cs typeface="Yu Gothic" pitchFamily="34" charset="-120"/>
+              </a:rPr>
+              <a:t>立寄点の数と位置、チェック方法（キー・QR・端末）は現場ごとに異なる。Site SOPによる。</a:t>
+            </a:r>
+            <a:endParaRPr lang="en-US" sz="900" dirty="0"/>
+          </a:p>
+          <a:p>
+            <a:pPr indent="0" marL="0">
+              <a:lnSpc>
+                <a:spcPct val="88000"/>
+              </a:lnSpc>
+              <a:buNone/>
+            </a:pPr>
+            <a:r>
+              <a:rPr lang="en-US" sz="800" i="1" dirty="0">
                 <a:solidFill>
                   <a:srgbClr val="5F7183"/>
                 </a:solidFill>
@@ -6830,22 +6909,22 @@
                 <a:ea typeface="Calibri" pitchFamily="34" charset="-122"/>
                 <a:cs typeface="Calibri" pitchFamily="34" charset="-120"/>
               </a:rPr>
-              <a:t>  Designing a patrol means deciding how far to reduce the blind spots</a:t>
-            </a:r>
-            <a:endParaRPr lang="en-US" sz="950" dirty="0"/>
-          </a:p>
-        </p:txBody>
-      </p:sp>
-      <p:sp>
-        <p:nvSpPr>
-          <p:cNvPr id="28" name="Text 25"/>
-          <p:cNvSpPr/>
-          <p:nvPr/>
-        </p:nvSpPr>
-        <p:spPr>
-          <a:xfrm>
-            <a:off x="640080" y="5907024"/>
-            <a:ext cx="10911535" cy="310896"/>
+              <a:t>The number and location of checkpoints, and the check method, differ by site.</a:t>
+            </a:r>
+            <a:endParaRPr lang="en-US" sz="900" dirty="0"/>
+          </a:p>
+        </p:txBody>
+      </p:sp>
+      <p:sp>
+        <p:nvSpPr>
+          <p:cNvPr id="29" name="Text 26"/>
+          <p:cNvSpPr/>
+          <p:nvPr/>
+        </p:nvSpPr>
+        <p:spPr>
+          <a:xfrm>
+            <a:off x="640080" y="6272784"/>
+            <a:ext cx="9905695" cy="219456"/>
           </a:xfrm>
           <a:prstGeom prst="rect">
             <a:avLst/>
@@ -6858,167 +6937,88 @@
           <a:lstStyle/>
           <a:p>
             <a:pPr indent="0" marL="0">
-              <a:lnSpc>
-                <a:spcPct val="88000"/>
-              </a:lnSpc>
-              <a:buNone/>
-            </a:pPr>
-            <a:r>
-              <a:rPr lang="en-US" sz="900" b="1" dirty="0">
-                <a:solidFill>
-                  <a:srgbClr val="0D8A76"/>
-                </a:solidFill>
-                <a:latin typeface="Yu Gothic" pitchFamily="34" charset="0"/>
-                <a:ea typeface="Yu Gothic" pitchFamily="34" charset="-122"/>
-                <a:cs typeface="Yu Gothic" pitchFamily="34" charset="-120"/>
-              </a:rPr>
-              <a:t>Site SOP優先　</a:t>
-            </a:r>
-            <a:pPr indent="0" marL="0">
-              <a:lnSpc>
-                <a:spcPct val="88000"/>
-              </a:lnSpc>
+              <a:buNone/>
+            </a:pPr>
+            <a:r>
+              <a:rPr lang="en-US" sz="750" b="1" dirty="0">
+                <a:solidFill>
+                  <a:srgbClr val="D6E0E9"/>
+                </a:solidFill>
+                <a:latin typeface="Yu Gothic" pitchFamily="34" charset="0"/>
+                <a:ea typeface="Yu Gothic" pitchFamily="34" charset="-122"/>
+                <a:cs typeface="Yu Gothic" pitchFamily="34" charset="-120"/>
+              </a:rPr>
+              <a:t>ソース　</a:t>
+            </a:r>
+            <a:pPr indent="0" marL="0">
+              <a:buNone/>
+            </a:pPr>
+            <a:r>
+              <a:rPr lang="en-US" sz="750" dirty="0">
+                <a:solidFill>
+                  <a:srgbClr val="5F7183"/>
+                </a:solidFill>
+                <a:latin typeface="Yu Gothic" pitchFamily="34" charset="0"/>
+                <a:ea typeface="Yu Gothic" pitchFamily="34" charset="-122"/>
+                <a:cs typeface="Yu Gothic" pitchFamily="34" charset="-120"/>
+              </a:rPr>
+              <a:t>警備業法、警察庁「警備員教育」、消防法</a:t>
+            </a:r>
+            <a:endParaRPr lang="en-US" sz="750" dirty="0"/>
+          </a:p>
+        </p:txBody>
+      </p:sp>
+      <p:sp>
+        <p:nvSpPr>
+          <p:cNvPr id="30" name="Text 27"/>
+          <p:cNvSpPr/>
+          <p:nvPr/>
+        </p:nvSpPr>
+        <p:spPr>
+          <a:xfrm>
+            <a:off x="640080" y="6492240"/>
+            <a:ext cx="8778240" cy="292608"/>
+          </a:xfrm>
+          <a:prstGeom prst="rect">
+            <a:avLst/>
+          </a:prstGeom>
+          <a:noFill/>
+          <a:ln/>
+        </p:spPr>
+        <p:txBody>
+          <a:bodyPr wrap="square" lIns="0" tIns="0" rIns="0" bIns="0" rtlCol="0" anchor="ctr"/>
+          <a:lstStyle/>
+          <a:p>
+            <a:pPr indent="0" marL="0">
               <a:buNone/>
             </a:pPr>
             <a:r>
               <a:rPr lang="en-US" sz="900" dirty="0">
                 <a:solidFill>
-                  <a:srgbClr val="1B2733"/>
-                </a:solidFill>
-                <a:latin typeface="Yu Gothic" pitchFamily="34" charset="0"/>
-                <a:ea typeface="Yu Gothic" pitchFamily="34" charset="-122"/>
-                <a:cs typeface="Yu Gothic" pitchFamily="34" charset="-120"/>
-              </a:rPr>
-              <a:t>立寄点の数と位置、チェック方法（キー・QR・端末）は現場ごとに異なる。Site SOPによる。</a:t>
+                  <a:srgbClr val="5F7183"/>
+                </a:solidFill>
+                <a:latin typeface="Yu Gothic" pitchFamily="34" charset="0"/>
+                <a:ea typeface="Yu Gothic" pitchFamily="34" charset="-122"/>
+                <a:cs typeface="Yu Gothic" pitchFamily="34" charset="-120"/>
+              </a:rPr>
+              <a:t>第4時限｜業務別教育1 巡回の方法に関すること  </a:t>
+            </a:r>
+            <a:pPr indent="0" marL="0">
+              <a:buNone/>
+            </a:pPr>
+            <a:r>
+              <a:rPr lang="en-US" sz="850" i="1" dirty="0">
+                <a:solidFill>
+                  <a:srgbClr val="D6E0E9"/>
+                </a:solidFill>
+                <a:latin typeface="Calibri" pitchFamily="34" charset="0"/>
+                <a:ea typeface="Calibri" pitchFamily="34" charset="-122"/>
+                <a:cs typeface="Calibri" pitchFamily="34" charset="-120"/>
+              </a:rPr>
+              <a:t>Period 4 | Task-Specific Training 1 — Patrol Methods</a:t>
             </a:r>
             <a:endParaRPr lang="en-US" sz="900" dirty="0"/>
           </a:p>
-          <a:p>
-            <a:pPr indent="0" marL="0">
-              <a:lnSpc>
-                <a:spcPct val="88000"/>
-              </a:lnSpc>
-              <a:buNone/>
-            </a:pPr>
-            <a:r>
-              <a:rPr lang="en-US" sz="750" i="1" dirty="0">
-                <a:solidFill>
-                  <a:srgbClr val="5F7183"/>
-                </a:solidFill>
-                <a:latin typeface="Calibri" pitchFamily="34" charset="0"/>
-                <a:ea typeface="Calibri" pitchFamily="34" charset="-122"/>
-                <a:cs typeface="Calibri" pitchFamily="34" charset="-120"/>
-              </a:rPr>
-              <a:t>The number and location of checkpoints, and the check method, differ by site.</a:t>
-            </a:r>
-            <a:endParaRPr lang="en-US" sz="900" dirty="0"/>
-          </a:p>
-        </p:txBody>
-      </p:sp>
-      <p:sp>
-        <p:nvSpPr>
-          <p:cNvPr id="29" name="Text 26"/>
-          <p:cNvSpPr/>
-          <p:nvPr/>
-        </p:nvSpPr>
-        <p:spPr>
-          <a:xfrm>
-            <a:off x="640080" y="6272784"/>
-            <a:ext cx="9905695" cy="237744"/>
-          </a:xfrm>
-          <a:prstGeom prst="rect">
-            <a:avLst/>
-          </a:prstGeom>
-          <a:noFill/>
-          <a:ln/>
-        </p:spPr>
-        <p:txBody>
-          <a:bodyPr wrap="square" lIns="0" tIns="0" rIns="0" bIns="0" rtlCol="0" anchor="t"/>
-          <a:lstStyle/>
-          <a:p>
-            <a:pPr indent="0" marL="0">
-              <a:buNone/>
-            </a:pPr>
-            <a:r>
-              <a:rPr lang="en-US" sz="750" b="1" dirty="0">
-                <a:solidFill>
-                  <a:srgbClr val="D6E0E9"/>
-                </a:solidFill>
-                <a:latin typeface="Yu Gothic" pitchFamily="34" charset="0"/>
-                <a:ea typeface="Yu Gothic" pitchFamily="34" charset="-122"/>
-                <a:cs typeface="Yu Gothic" pitchFamily="34" charset="-120"/>
-              </a:rPr>
-              <a:t>ソース　</a:t>
-            </a:r>
-            <a:pPr indent="0" marL="0">
-              <a:buNone/>
-            </a:pPr>
-            <a:r>
-              <a:rPr lang="en-US" sz="750" dirty="0">
-                <a:solidFill>
-                  <a:srgbClr val="5F7183"/>
-                </a:solidFill>
-                <a:latin typeface="Yu Gothic" pitchFamily="34" charset="0"/>
-                <a:ea typeface="Yu Gothic" pitchFamily="34" charset="-122"/>
-                <a:cs typeface="Yu Gothic" pitchFamily="34" charset="-120"/>
-              </a:rPr>
-              <a:t>警備業法、警察庁「警備員教育」、消防法</a:t>
-            </a:r>
-            <a:endParaRPr lang="en-US" sz="750" dirty="0"/>
-          </a:p>
-        </p:txBody>
-      </p:sp>
-      <p:sp>
-        <p:nvSpPr>
-          <p:cNvPr id="30" name="Text 27"/>
-          <p:cNvSpPr/>
-          <p:nvPr/>
-        </p:nvSpPr>
-        <p:spPr>
-          <a:xfrm>
-            <a:off x="640080" y="6382512"/>
-            <a:ext cx="8778240" cy="292608"/>
-          </a:xfrm>
-          <a:prstGeom prst="rect">
-            <a:avLst/>
-          </a:prstGeom>
-          <a:noFill/>
-          <a:ln/>
-        </p:spPr>
-        <p:txBody>
-          <a:bodyPr wrap="square" lIns="0" tIns="0" rIns="0" bIns="0" rtlCol="0" anchor="ctr"/>
-          <a:lstStyle/>
-          <a:p>
-            <a:pPr indent="0" marL="0">
-              <a:buNone/>
-            </a:pPr>
-            <a:r>
-              <a:rPr lang="en-US" sz="900" dirty="0">
-                <a:solidFill>
-                  <a:srgbClr val="5F7183"/>
-                </a:solidFill>
-                <a:latin typeface="Yu Gothic" pitchFamily="34" charset="0"/>
-                <a:ea typeface="Yu Gothic" pitchFamily="34" charset="-122"/>
-                <a:cs typeface="Yu Gothic" pitchFamily="34" charset="-120"/>
-              </a:rPr>
-              <a:t>第4時限｜業務別教育1 巡回の方法に関すること  </a:t>
-            </a:r>
-            <a:pPr indent="0" marL="0">
-              <a:buNone/>
-            </a:pPr>
-            <a:r>
-              <a:rPr lang="en-US" sz="850" i="1" dirty="0">
-                <a:solidFill>
-                  <a:srgbClr val="D6E0E9"/>
-                </a:solidFill>
-                <a:latin typeface="Calibri" pitchFamily="34" charset="0"/>
-                <a:ea typeface="Calibri" pitchFamily="34" charset="-122"/>
-                <a:cs typeface="Calibri" pitchFamily="34" charset="-120"/>
-              </a:rPr>
-              <a:t>Period 4 | Task-Specific Training 1 — Patrol Methods</a:t>
-            </a:r>
-            <a:endParaRPr lang="en-US" sz="900" dirty="0"/>
-          </a:p>
         </p:txBody>
       </p:sp>
       <p:sp>
@@ -7029,7 +7029,7 @@
         </p:nvSpPr>
         <p:spPr>
           <a:xfrm>
-            <a:off x="10637215" y="6382512"/>
+            <a:off x="10637215" y="6492240"/>
             <a:ext cx="914400" cy="292608"/>
           </a:xfrm>
           <a:prstGeom prst="rect">
@@ -7124,8 +7124,8 @@
         </p:nvSpPr>
         <p:spPr>
           <a:xfrm>
-            <a:off x="640080" y="384048"/>
-            <a:ext cx="8982151" cy="768096"/>
+            <a:off x="640080" y="365760"/>
+            <a:ext cx="8982151" cy="749808"/>
           </a:xfrm>
           <a:prstGeom prst="rect">
             <a:avLst/>
@@ -7164,7 +7164,7 @@
               <a:buNone/>
             </a:pPr>
             <a:r>
-              <a:rPr lang="en-US" sz="1100" i="1" dirty="0">
+              <a:rPr lang="en-US" sz="1100" dirty="0">
                 <a:solidFill>
                   <a:srgbClr val="12B198"/>
                 </a:solidFill>
@@ -7186,7 +7186,7 @@
         </p:nvSpPr>
         <p:spPr>
           <a:xfrm>
-            <a:off x="9686239" y="438912"/>
+            <a:off x="9686239" y="420624"/>
             <a:ext cx="932688" cy="310896"/>
           </a:xfrm>
           <a:prstGeom prst="roundRect">
@@ -7208,7 +7208,7 @@
         </p:nvSpPr>
         <p:spPr>
           <a:xfrm>
-            <a:off x="9686239" y="438912"/>
+            <a:off x="9686239" y="420624"/>
             <a:ext cx="932688" cy="310896"/>
           </a:xfrm>
           <a:prstGeom prst="rect">
@@ -7247,12 +7247,12 @@
         </p:nvSpPr>
         <p:spPr>
           <a:xfrm>
-            <a:off x="640080" y="1188720"/>
-            <a:ext cx="10911535" cy="530352"/>
+            <a:off x="640080" y="1115568"/>
+            <a:ext cx="10911535" cy="585216"/>
           </a:xfrm>
           <a:prstGeom prst="roundRect">
             <a:avLst>
-              <a:gd name="adj" fmla="val 6897"/>
+              <a:gd name="adj" fmla="val 6250"/>
             </a:avLst>
           </a:prstGeom>
           <a:solidFill>
@@ -7269,8 +7269,8 @@
         </p:nvSpPr>
         <p:spPr>
           <a:xfrm>
-            <a:off x="877824" y="1234440"/>
-            <a:ext cx="10436047" cy="438912"/>
+            <a:off x="877824" y="1161288"/>
+            <a:ext cx="10436047" cy="493776"/>
           </a:xfrm>
           <a:prstGeom prst="rect">
             <a:avLst/>
@@ -7306,7 +7306,7 @@
               <a:buNone/>
             </a:pPr>
             <a:r>
-              <a:rPr lang="en-US" sz="800" dirty="0">
+              <a:rPr lang="en-US" sz="900" dirty="0">
                 <a:solidFill>
                   <a:srgbClr val="0D8A76"/>
                 </a:solidFill>
@@ -7343,9 +7343,9 @@
               <a:buNone/>
             </a:pPr>
             <a:r>
-              <a:rPr lang="en-US" sz="850" i="1" dirty="0">
-                <a:solidFill>
-                  <a:srgbClr val="5F7183"/>
+              <a:rPr lang="en-US" sz="1050" dirty="0">
+                <a:solidFill>
+                  <a:srgbClr val="1B2733"/>
                 </a:solidFill>
                 <a:latin typeface="Calibri" pitchFamily="34" charset="0"/>
                 <a:ea typeface="Calibri" pitchFamily="34" charset="-122"/>
@@ -7365,12 +7365,12 @@
         </p:nvSpPr>
         <p:spPr>
           <a:xfrm>
-            <a:off x="640080" y="1810512"/>
-            <a:ext cx="5327752" cy="1920240"/>
+            <a:off x="640080" y="1773936"/>
+            <a:ext cx="5327752" cy="1965960"/>
           </a:xfrm>
           <a:prstGeom prst="roundRect">
             <a:avLst>
-              <a:gd name="adj" fmla="val 1905"/>
+              <a:gd name="adj" fmla="val 1860"/>
             </a:avLst>
           </a:prstGeom>
           <a:solidFill>
@@ -7387,7 +7387,7 @@
         </p:nvSpPr>
         <p:spPr>
           <a:xfrm>
-            <a:off x="822960" y="1975104"/>
+            <a:off x="822960" y="1938528"/>
             <a:ext cx="310896" cy="310896"/>
           </a:xfrm>
           <a:prstGeom prst="ellipse">
@@ -7407,7 +7407,7 @@
         </p:nvSpPr>
         <p:spPr>
           <a:xfrm>
-            <a:off x="822960" y="1975104"/>
+            <a:off x="822960" y="1938528"/>
             <a:ext cx="310896" cy="310896"/>
           </a:xfrm>
           <a:prstGeom prst="rect">
@@ -7446,7 +7446,7 @@
         </p:nvSpPr>
         <p:spPr>
           <a:xfrm>
-            <a:off x="1207008" y="1938528"/>
+            <a:off x="1207008" y="1901952"/>
             <a:ext cx="4559656" cy="512064"/>
           </a:xfrm>
           <a:prstGeom prst="rect">
@@ -7486,7 +7486,7 @@
               <a:buNone/>
             </a:pPr>
             <a:r>
-              <a:rPr lang="en-US" sz="800" i="1" dirty="0">
+              <a:rPr lang="en-US" sz="1050" dirty="0">
                 <a:solidFill>
                   <a:srgbClr val="12B198"/>
                 </a:solidFill>
@@ -7508,8 +7508,8 @@
         </p:nvSpPr>
         <p:spPr>
           <a:xfrm>
-            <a:off x="859536" y="2487168"/>
-            <a:ext cx="4888840" cy="1097280"/>
+            <a:off x="859536" y="2450592"/>
+            <a:ext cx="4888840" cy="1143000"/>
           </a:xfrm>
           <a:prstGeom prst="rect">
             <a:avLst/>
@@ -7554,9 +7554,9 @@
               <a:buNone/>
             </a:pPr>
             <a:r>
-              <a:rPr lang="en-US" sz="750" i="1" dirty="0">
-                <a:solidFill>
-                  <a:srgbClr val="5F7183"/>
+              <a:rPr lang="en-US" sz="950" dirty="0">
+                <a:solidFill>
+                  <a:srgbClr val="1B2733"/>
                 </a:solidFill>
                 <a:latin typeface="Calibri" pitchFamily="34" charset="0"/>
                 <a:ea typeface="Calibri" pitchFamily="34" charset="-122"/>
@@ -7600,9 +7600,9 @@
               <a:buNone/>
             </a:pPr>
             <a:r>
-              <a:rPr lang="en-US" sz="750" i="1" dirty="0">
-                <a:solidFill>
-                  <a:srgbClr val="5F7183"/>
+              <a:rPr lang="en-US" sz="950" dirty="0">
+                <a:solidFill>
+                  <a:srgbClr val="1B2733"/>
                 </a:solidFill>
                 <a:latin typeface="Calibri" pitchFamily="34" charset="0"/>
                 <a:ea typeface="Calibri" pitchFamily="34" charset="-122"/>
@@ -7646,9 +7646,9 @@
               <a:buNone/>
             </a:pPr>
             <a:r>
-              <a:rPr lang="en-US" sz="750" i="1" dirty="0">
-                <a:solidFill>
-                  <a:srgbClr val="5F7183"/>
+              <a:rPr lang="en-US" sz="950" dirty="0">
+                <a:solidFill>
+                  <a:srgbClr val="1B2733"/>
                 </a:solidFill>
                 <a:latin typeface="Calibri" pitchFamily="34" charset="0"/>
                 <a:ea typeface="Calibri" pitchFamily="34" charset="-122"/>
@@ -7692,9 +7692,9 @@
               <a:buNone/>
             </a:pPr>
             <a:r>
-              <a:rPr lang="en-US" sz="750" i="1" dirty="0">
-                <a:solidFill>
-                  <a:srgbClr val="5F7183"/>
+              <a:rPr lang="en-US" sz="950" dirty="0">
+                <a:solidFill>
+                  <a:srgbClr val="1B2733"/>
                 </a:solidFill>
                 <a:latin typeface="Calibri" pitchFamily="34" charset="0"/>
                 <a:ea typeface="Calibri" pitchFamily="34" charset="-122"/>
@@ -7714,12 +7714,12 @@
         </p:nvSpPr>
         <p:spPr>
           <a:xfrm>
-            <a:off x="6223864" y="1810512"/>
-            <a:ext cx="5327752" cy="1920240"/>
+            <a:off x="6223864" y="1773936"/>
+            <a:ext cx="5327752" cy="1965960"/>
           </a:xfrm>
           <a:prstGeom prst="roundRect">
             <a:avLst>
-              <a:gd name="adj" fmla="val 1905"/>
+              <a:gd name="adj" fmla="val 1860"/>
             </a:avLst>
           </a:prstGeom>
           <a:solidFill>
@@ -7736,7 +7736,7 @@
         </p:nvSpPr>
         <p:spPr>
           <a:xfrm>
-            <a:off x="6406744" y="1975104"/>
+            <a:off x="6406744" y="1938528"/>
             <a:ext cx="310896" cy="310896"/>
           </a:xfrm>
           <a:prstGeom prst="ellipse">
@@ -7756,7 +7756,7 @@
         </p:nvSpPr>
         <p:spPr>
           <a:xfrm>
-            <a:off x="6406744" y="1975104"/>
+            <a:off x="6406744" y="1938528"/>
             <a:ext cx="310896" cy="310896"/>
           </a:xfrm>
           <a:prstGeom prst="rect">
@@ -7795,7 +7795,7 @@
         </p:nvSpPr>
         <p:spPr>
           <a:xfrm>
-            <a:off x="6790792" y="1938528"/>
+            <a:off x="6790792" y="1901952"/>
             <a:ext cx="4559656" cy="512064"/>
           </a:xfrm>
           <a:prstGeom prst="rect">
@@ -7835,7 +7835,7 @@
               <a:buNone/>
             </a:pPr>
             <a:r>
-              <a:rPr lang="en-US" sz="800" i="1" dirty="0">
+              <a:rPr lang="en-US" sz="1050" dirty="0">
                 <a:solidFill>
                   <a:srgbClr val="12B198"/>
                 </a:solidFill>
@@ -7857,8 +7857,8 @@
         </p:nvSpPr>
         <p:spPr>
           <a:xfrm>
-            <a:off x="6443320" y="2487168"/>
-            <a:ext cx="4888840" cy="1097280"/>
+            <a:off x="6443320" y="2450592"/>
+            <a:ext cx="4888840" cy="1143000"/>
           </a:xfrm>
           <a:prstGeom prst="rect">
             <a:avLst/>
@@ -7903,9 +7903,9 @@
               <a:buNone/>
             </a:pPr>
             <a:r>
-              <a:rPr lang="en-US" sz="750" i="1" dirty="0">
-                <a:solidFill>
-                  <a:srgbClr val="5F7183"/>
+              <a:rPr lang="en-US" sz="950" dirty="0">
+                <a:solidFill>
+                  <a:srgbClr val="1B2733"/>
                 </a:solidFill>
                 <a:latin typeface="Calibri" pitchFamily="34" charset="0"/>
                 <a:ea typeface="Calibri" pitchFamily="34" charset="-122"/>
@@ -7949,9 +7949,9 @@
               <a:buNone/>
             </a:pPr>
             <a:r>
-              <a:rPr lang="en-US" sz="750" i="1" dirty="0">
-                <a:solidFill>
-                  <a:srgbClr val="5F7183"/>
+              <a:rPr lang="en-US" sz="950" dirty="0">
+                <a:solidFill>
+                  <a:srgbClr val="1B2733"/>
                 </a:solidFill>
                 <a:latin typeface="Calibri" pitchFamily="34" charset="0"/>
                 <a:ea typeface="Calibri" pitchFamily="34" charset="-122"/>
@@ -7995,9 +7995,9 @@
               <a:buNone/>
             </a:pPr>
             <a:r>
-              <a:rPr lang="en-US" sz="750" i="1" dirty="0">
-                <a:solidFill>
-                  <a:srgbClr val="5F7183"/>
+              <a:rPr lang="en-US" sz="950" dirty="0">
+                <a:solidFill>
+                  <a:srgbClr val="1B2733"/>
                 </a:solidFill>
                 <a:latin typeface="Calibri" pitchFamily="34" charset="0"/>
                 <a:ea typeface="Calibri" pitchFamily="34" charset="-122"/>
@@ -8041,9 +8041,9 @@
               <a:buNone/>
             </a:pPr>
             <a:r>
-              <a:rPr lang="en-US" sz="750" i="1" dirty="0">
-                <a:solidFill>
-                  <a:srgbClr val="5F7183"/>
+              <a:rPr lang="en-US" sz="950" dirty="0">
+                <a:solidFill>
+                  <a:srgbClr val="1B2733"/>
                 </a:solidFill>
                 <a:latin typeface="Calibri" pitchFamily="34" charset="0"/>
                 <a:ea typeface="Calibri" pitchFamily="34" charset="-122"/>
@@ -8063,12 +8063,12 @@
         </p:nvSpPr>
         <p:spPr>
           <a:xfrm>
-            <a:off x="640080" y="3931920"/>
-            <a:ext cx="5327752" cy="1920240"/>
+            <a:off x="640080" y="3941064"/>
+            <a:ext cx="5327752" cy="1965960"/>
           </a:xfrm>
           <a:prstGeom prst="roundRect">
             <a:avLst>
-              <a:gd name="adj" fmla="val 1905"/>
+              <a:gd name="adj" fmla="val 1860"/>
             </a:avLst>
           </a:prstGeom>
           <a:solidFill>
@@ -8085,7 +8085,7 @@
         </p:nvSpPr>
         <p:spPr>
           <a:xfrm>
-            <a:off x="822960" y="4096512"/>
+            <a:off x="822960" y="4105656"/>
             <a:ext cx="310896" cy="310896"/>
           </a:xfrm>
           <a:prstGeom prst="ellipse">
@@ -8105,7 +8105,7 @@
         </p:nvSpPr>
         <p:spPr>
           <a:xfrm>
-            <a:off x="822960" y="4096512"/>
+            <a:off x="822960" y="4105656"/>
             <a:ext cx="310896" cy="310896"/>
           </a:xfrm>
           <a:prstGeom prst="rect">
@@ -8144,7 +8144,7 @@
         </p:nvSpPr>
         <p:spPr>
           <a:xfrm>
-            <a:off x="1207008" y="4059936"/>
+            <a:off x="1207008" y="4069080"/>
             <a:ext cx="4559656" cy="512064"/>
           </a:xfrm>
           <a:prstGeom prst="rect">
@@ -8184,7 +8184,7 @@
               <a:buNone/>
             </a:pPr>
             <a:r>
-              <a:rPr lang="en-US" sz="800" i="1" dirty="0">
+              <a:rPr lang="en-US" sz="1050" dirty="0">
                 <a:solidFill>
                   <a:srgbClr val="12B198"/>
                 </a:solidFill>
@@ -8206,8 +8206,8 @@
         </p:nvSpPr>
         <p:spPr>
           <a:xfrm>
-            <a:off x="859536" y="4608576"/>
-            <a:ext cx="4888840" cy="1097280"/>
+            <a:off x="859536" y="4617720"/>
+            <a:ext cx="4888840" cy="1143000"/>
           </a:xfrm>
           <a:prstGeom prst="rect">
             <a:avLst/>
@@ -8252,9 +8252,9 @@
               <a:buNone/>
             </a:pPr>
             <a:r>
-              <a:rPr lang="en-US" sz="750" i="1" dirty="0">
-                <a:solidFill>
-                  <a:srgbClr val="5F7183"/>
+              <a:rPr lang="en-US" sz="950" dirty="0">
+                <a:solidFill>
+                  <a:srgbClr val="1B2733"/>
                 </a:solidFill>
                 <a:latin typeface="Calibri" pitchFamily="34" charset="0"/>
                 <a:ea typeface="Calibri" pitchFamily="34" charset="-122"/>
@@ -8298,9 +8298,9 @@
               <a:buNone/>
             </a:pPr>
             <a:r>
-              <a:rPr lang="en-US" sz="750" i="1" dirty="0">
-                <a:solidFill>
-                  <a:srgbClr val="5F7183"/>
+              <a:rPr lang="en-US" sz="950" dirty="0">
+                <a:solidFill>
+                  <a:srgbClr val="1B2733"/>
                 </a:solidFill>
                 <a:latin typeface="Calibri" pitchFamily="34" charset="0"/>
                 <a:ea typeface="Calibri" pitchFamily="34" charset="-122"/>
@@ -8344,9 +8344,9 @@
               <a:buNone/>
             </a:pPr>
             <a:r>
-              <a:rPr lang="en-US" sz="750" i="1" dirty="0">
-                <a:solidFill>
-                  <a:srgbClr val="5F7183"/>
+              <a:rPr lang="en-US" sz="950" dirty="0">
+                <a:solidFill>
+                  <a:srgbClr val="1B2733"/>
                 </a:solidFill>
                 <a:latin typeface="Calibri" pitchFamily="34" charset="0"/>
                 <a:ea typeface="Calibri" pitchFamily="34" charset="-122"/>
@@ -8390,9 +8390,9 @@
               <a:buNone/>
             </a:pPr>
             <a:r>
-              <a:rPr lang="en-US" sz="750" i="1" dirty="0">
-                <a:solidFill>
-                  <a:srgbClr val="5F7183"/>
+              <a:rPr lang="en-US" sz="950" dirty="0">
+                <a:solidFill>
+                  <a:srgbClr val="1B2733"/>
                 </a:solidFill>
                 <a:latin typeface="Calibri" pitchFamily="34" charset="0"/>
                 <a:ea typeface="Calibri" pitchFamily="34" charset="-122"/>
@@ -8412,12 +8412,12 @@
         </p:nvSpPr>
         <p:spPr>
           <a:xfrm>
-            <a:off x="6223864" y="3931920"/>
-            <a:ext cx="5327752" cy="1920240"/>
+            <a:off x="6223864" y="3941064"/>
+            <a:ext cx="5327752" cy="1965960"/>
           </a:xfrm>
           <a:prstGeom prst="roundRect">
             <a:avLst>
-              <a:gd name="adj" fmla="val 1905"/>
+              <a:gd name="adj" fmla="val 1860"/>
             </a:avLst>
           </a:prstGeom>
           <a:solidFill>
@@ -8434,7 +8434,7 @@
         </p:nvSpPr>
         <p:spPr>
           <a:xfrm>
-            <a:off x="6406744" y="4096512"/>
+            <a:off x="6406744" y="4105656"/>
             <a:ext cx="310896" cy="310896"/>
           </a:xfrm>
           <a:prstGeom prst="ellipse">
@@ -8454,7 +8454,7 @@
         </p:nvSpPr>
         <p:spPr>
           <a:xfrm>
-            <a:off x="6406744" y="4096512"/>
+            <a:off x="6406744" y="4105656"/>
             <a:ext cx="310896" cy="310896"/>
           </a:xfrm>
           <a:prstGeom prst="rect">
@@ -8493,7 +8493,7 @@
         </p:nvSpPr>
         <p:spPr>
           <a:xfrm>
-            <a:off x="6790792" y="4059936"/>
+            <a:off x="6790792" y="4069080"/>
             <a:ext cx="4559656" cy="512064"/>
           </a:xfrm>
           <a:prstGeom prst="rect">
@@ -8533,7 +8533,7 @@
               <a:buNone/>
             </a:pPr>
             <a:r>
-              <a:rPr lang="en-US" sz="800" i="1" dirty="0">
+              <a:rPr lang="en-US" sz="1050" dirty="0">
                 <a:solidFill>
                   <a:srgbClr val="12B198"/>
                 </a:solidFill>
@@ -8555,8 +8555,8 @@
         </p:nvSpPr>
         <p:spPr>
           <a:xfrm>
-            <a:off x="6443320" y="4608576"/>
-            <a:ext cx="4888840" cy="1097280"/>
+            <a:off x="6443320" y="4617720"/>
+            <a:ext cx="4888840" cy="1143000"/>
           </a:xfrm>
           <a:prstGeom prst="rect">
             <a:avLst/>
@@ -8601,9 +8601,9 @@
               <a:buNone/>
             </a:pPr>
             <a:r>
-              <a:rPr lang="en-US" sz="750" i="1" dirty="0">
-                <a:solidFill>
-                  <a:srgbClr val="5F7183"/>
+              <a:rPr lang="en-US" sz="950" dirty="0">
+                <a:solidFill>
+                  <a:srgbClr val="1B2733"/>
                 </a:solidFill>
                 <a:latin typeface="Calibri" pitchFamily="34" charset="0"/>
                 <a:ea typeface="Calibri" pitchFamily="34" charset="-122"/>
@@ -8647,9 +8647,9 @@
               <a:buNone/>
             </a:pPr>
             <a:r>
-              <a:rPr lang="en-US" sz="750" i="1" dirty="0">
-                <a:solidFill>
-                  <a:srgbClr val="5F7183"/>
+              <a:rPr lang="en-US" sz="950" dirty="0">
+                <a:solidFill>
+                  <a:srgbClr val="1B2733"/>
                 </a:solidFill>
                 <a:latin typeface="Calibri" pitchFamily="34" charset="0"/>
                 <a:ea typeface="Calibri" pitchFamily="34" charset="-122"/>
@@ -8693,9 +8693,9 @@
               <a:buNone/>
             </a:pPr>
             <a:r>
-              <a:rPr lang="en-US" sz="750" i="1" dirty="0">
-                <a:solidFill>
-                  <a:srgbClr val="5F7183"/>
+              <a:rPr lang="en-US" sz="950" dirty="0">
+                <a:solidFill>
+                  <a:srgbClr val="1B2733"/>
                 </a:solidFill>
                 <a:latin typeface="Calibri" pitchFamily="34" charset="0"/>
                 <a:ea typeface="Calibri" pitchFamily="34" charset="-122"/>
@@ -8739,7 +8739,86 @@
               <a:buNone/>
             </a:pPr>
             <a:r>
-              <a:rPr lang="en-US" sz="750" i="1" dirty="0">
+              <a:rPr lang="en-US" sz="950" dirty="0">
+                <a:solidFill>
+                  <a:srgbClr val="1B2733"/>
+                </a:solidFill>
+                <a:latin typeface="Calibri" pitchFamily="34" charset="0"/>
+                <a:ea typeface="Calibri" pitchFamily="34" charset="-122"/>
+                <a:cs typeface="Calibri" pitchFamily="34" charset="-120"/>
+              </a:rPr>
+              <a:t>  Leaks, unusual smells, unusual sounds, unusual temperature</a:t>
+            </a:r>
+            <a:endParaRPr lang="en-US" sz="950" dirty="0"/>
+          </a:p>
+        </p:txBody>
+      </p:sp>
+      <p:sp>
+        <p:nvSpPr>
+          <p:cNvPr id="28" name="Text 25"/>
+          <p:cNvSpPr/>
+          <p:nvPr/>
+        </p:nvSpPr>
+        <p:spPr>
+          <a:xfrm>
+            <a:off x="640080" y="5961888"/>
+            <a:ext cx="10911535" cy="292608"/>
+          </a:xfrm>
+          <a:prstGeom prst="rect">
+            <a:avLst/>
+          </a:prstGeom>
+          <a:noFill/>
+          <a:ln/>
+        </p:spPr>
+        <p:txBody>
+          <a:bodyPr wrap="square" lIns="0" tIns="0" rIns="0" bIns="0" rtlCol="0" anchor="t"/>
+          <a:lstStyle/>
+          <a:p>
+            <a:pPr indent="0" marL="0">
+              <a:lnSpc>
+                <a:spcPct val="88000"/>
+              </a:lnSpc>
+              <a:buNone/>
+            </a:pPr>
+            <a:r>
+              <a:rPr lang="en-US" sz="900" b="1" dirty="0">
+                <a:solidFill>
+                  <a:srgbClr val="0D8A76"/>
+                </a:solidFill>
+                <a:latin typeface="Yu Gothic" pitchFamily="34" charset="0"/>
+                <a:ea typeface="Yu Gothic" pitchFamily="34" charset="-122"/>
+                <a:cs typeface="Yu Gothic" pitchFamily="34" charset="-120"/>
+              </a:rPr>
+              <a:t>Site SOP優先　</a:t>
+            </a:r>
+            <a:pPr indent="0" marL="0">
+              <a:lnSpc>
+                <a:spcPct val="88000"/>
+              </a:lnSpc>
+              <a:buNone/>
+            </a:pPr>
+            <a:r>
+              <a:rPr lang="en-US" sz="900" dirty="0">
+                <a:solidFill>
+                  <a:srgbClr val="1B2733"/>
+                </a:solidFill>
+                <a:latin typeface="Yu Gothic" pitchFamily="34" charset="0"/>
+                <a:ea typeface="Yu Gothic" pitchFamily="34" charset="-122"/>
+                <a:cs typeface="Yu Gothic" pitchFamily="34" charset="-120"/>
+              </a:rPr>
+              <a:t>確認項目のチェックリストは現場ごとに定められている。Site SOPの項目を優先する。</a:t>
+            </a:r>
+            <a:endParaRPr lang="en-US" sz="900" dirty="0"/>
+          </a:p>
+          <a:p>
+            <a:pPr indent="0" marL="0">
+              <a:lnSpc>
+                <a:spcPct val="88000"/>
+              </a:lnSpc>
+              <a:buNone/>
+            </a:pPr>
+            <a:r>
+              <a:rPr lang="en-US" sz="800" i="1" dirty="0">
                 <a:solidFill>
                   <a:srgbClr val="5F7183"/>
                 </a:solidFill>
@@ -8747,22 +8826,22 @@
                 <a:ea typeface="Calibri" pitchFamily="34" charset="-122"/>
                 <a:cs typeface="Calibri" pitchFamily="34" charset="-120"/>
               </a:rPr>
-              <a:t>  Leaks, unusual smells, unusual sounds, unusual temperature</a:t>
-            </a:r>
-            <a:endParaRPr lang="en-US" sz="950" dirty="0"/>
-          </a:p>
-        </p:txBody>
-      </p:sp>
-      <p:sp>
-        <p:nvSpPr>
-          <p:cNvPr id="28" name="Text 25"/>
-          <p:cNvSpPr/>
-          <p:nvPr/>
-        </p:nvSpPr>
-        <p:spPr>
-          <a:xfrm>
-            <a:off x="640080" y="5907024"/>
-            <a:ext cx="10911535" cy="310896"/>
+              <a:t>The checklist is defined per site. The Site SOP items take priority.</a:t>
+            </a:r>
+            <a:endParaRPr lang="en-US" sz="900" dirty="0"/>
+          </a:p>
+        </p:txBody>
+      </p:sp>
+      <p:sp>
+        <p:nvSpPr>
+          <p:cNvPr id="29" name="Text 26"/>
+          <p:cNvSpPr/>
+          <p:nvPr/>
+        </p:nvSpPr>
+        <p:spPr>
+          <a:xfrm>
+            <a:off x="640080" y="6272784"/>
+            <a:ext cx="9905695" cy="219456"/>
           </a:xfrm>
           <a:prstGeom prst="rect">
             <a:avLst/>
@@ -8775,167 +8854,88 @@
           <a:lstStyle/>
           <a:p>
             <a:pPr indent="0" marL="0">
-              <a:lnSpc>
-                <a:spcPct val="88000"/>
-              </a:lnSpc>
-              <a:buNone/>
-            </a:pPr>
-            <a:r>
-              <a:rPr lang="en-US" sz="900" b="1" dirty="0">
-                <a:solidFill>
-                  <a:srgbClr val="0D8A76"/>
-                </a:solidFill>
-                <a:latin typeface="Yu Gothic" pitchFamily="34" charset="0"/>
-                <a:ea typeface="Yu Gothic" pitchFamily="34" charset="-122"/>
-                <a:cs typeface="Yu Gothic" pitchFamily="34" charset="-120"/>
-              </a:rPr>
-              <a:t>Site SOP優先　</a:t>
-            </a:r>
-            <a:pPr indent="0" marL="0">
-              <a:lnSpc>
-                <a:spcPct val="88000"/>
-              </a:lnSpc>
+              <a:buNone/>
+            </a:pPr>
+            <a:r>
+              <a:rPr lang="en-US" sz="750" b="1" dirty="0">
+                <a:solidFill>
+                  <a:srgbClr val="D6E0E9"/>
+                </a:solidFill>
+                <a:latin typeface="Yu Gothic" pitchFamily="34" charset="0"/>
+                <a:ea typeface="Yu Gothic" pitchFamily="34" charset="-122"/>
+                <a:cs typeface="Yu Gothic" pitchFamily="34" charset="-120"/>
+              </a:rPr>
+              <a:t>ソース　</a:t>
+            </a:r>
+            <a:pPr indent="0" marL="0">
+              <a:buNone/>
+            </a:pPr>
+            <a:r>
+              <a:rPr lang="en-US" sz="750" dirty="0">
+                <a:solidFill>
+                  <a:srgbClr val="5F7183"/>
+                </a:solidFill>
+                <a:latin typeface="Yu Gothic" pitchFamily="34" charset="0"/>
+                <a:ea typeface="Yu Gothic" pitchFamily="34" charset="-122"/>
+                <a:cs typeface="Yu Gothic" pitchFamily="34" charset="-120"/>
+              </a:rPr>
+              <a:t>警備業法、警察庁「警備員教育」、消防法</a:t>
+            </a:r>
+            <a:endParaRPr lang="en-US" sz="750" dirty="0"/>
+          </a:p>
+        </p:txBody>
+      </p:sp>
+      <p:sp>
+        <p:nvSpPr>
+          <p:cNvPr id="30" name="Text 27"/>
+          <p:cNvSpPr/>
+          <p:nvPr/>
+        </p:nvSpPr>
+        <p:spPr>
+          <a:xfrm>
+            <a:off x="640080" y="6492240"/>
+            <a:ext cx="8778240" cy="292608"/>
+          </a:xfrm>
+          <a:prstGeom prst="rect">
+            <a:avLst/>
+          </a:prstGeom>
+          <a:noFill/>
+          <a:ln/>
+        </p:spPr>
+        <p:txBody>
+          <a:bodyPr wrap="square" lIns="0" tIns="0" rIns="0" bIns="0" rtlCol="0" anchor="ctr"/>
+          <a:lstStyle/>
+          <a:p>
+            <a:pPr indent="0" marL="0">
               <a:buNone/>
             </a:pPr>
             <a:r>
               <a:rPr lang="en-US" sz="900" dirty="0">
                 <a:solidFill>
-                  <a:srgbClr val="1B2733"/>
-                </a:solidFill>
-                <a:latin typeface="Yu Gothic" pitchFamily="34" charset="0"/>
-                <a:ea typeface="Yu Gothic" pitchFamily="34" charset="-122"/>
-                <a:cs typeface="Yu Gothic" pitchFamily="34" charset="-120"/>
-              </a:rPr>
-              <a:t>確認項目のチェックリストは現場ごとに定められている。Site SOPの項目を優先する。</a:t>
+                  <a:srgbClr val="5F7183"/>
+                </a:solidFill>
+                <a:latin typeface="Yu Gothic" pitchFamily="34" charset="0"/>
+                <a:ea typeface="Yu Gothic" pitchFamily="34" charset="-122"/>
+                <a:cs typeface="Yu Gothic" pitchFamily="34" charset="-120"/>
+              </a:rPr>
+              <a:t>第4時限｜業務別教育1 巡回の方法に関すること  </a:t>
+            </a:r>
+            <a:pPr indent="0" marL="0">
+              <a:buNone/>
+            </a:pPr>
+            <a:r>
+              <a:rPr lang="en-US" sz="850" i="1" dirty="0">
+                <a:solidFill>
+                  <a:srgbClr val="D6E0E9"/>
+                </a:solidFill>
+                <a:latin typeface="Calibri" pitchFamily="34" charset="0"/>
+                <a:ea typeface="Calibri" pitchFamily="34" charset="-122"/>
+                <a:cs typeface="Calibri" pitchFamily="34" charset="-120"/>
+              </a:rPr>
+              <a:t>Period 4 | Task-Specific Training 1 — Patrol Methods</a:t>
             </a:r>
             <a:endParaRPr lang="en-US" sz="900" dirty="0"/>
           </a:p>
-          <a:p>
-            <a:pPr indent="0" marL="0">
-              <a:lnSpc>
-                <a:spcPct val="88000"/>
-              </a:lnSpc>
-              <a:buNone/>
-            </a:pPr>
-            <a:r>
-              <a:rPr lang="en-US" sz="750" i="1" dirty="0">
-                <a:solidFill>
-                  <a:srgbClr val="5F7183"/>
-                </a:solidFill>
-                <a:latin typeface="Calibri" pitchFamily="34" charset="0"/>
-                <a:ea typeface="Calibri" pitchFamily="34" charset="-122"/>
-                <a:cs typeface="Calibri" pitchFamily="34" charset="-120"/>
-              </a:rPr>
-              <a:t>The checklist is defined per site. The Site SOP items take priority.</a:t>
-            </a:r>
-            <a:endParaRPr lang="en-US" sz="900" dirty="0"/>
-          </a:p>
-        </p:txBody>
-      </p:sp>
-      <p:sp>
-        <p:nvSpPr>
-          <p:cNvPr id="29" name="Text 26"/>
-          <p:cNvSpPr/>
-          <p:nvPr/>
-        </p:nvSpPr>
-        <p:spPr>
-          <a:xfrm>
-            <a:off x="640080" y="6272784"/>
-            <a:ext cx="9905695" cy="237744"/>
-          </a:xfrm>
-          <a:prstGeom prst="rect">
-            <a:avLst/>
-          </a:prstGeom>
-          <a:noFill/>
-          <a:ln/>
-        </p:spPr>
-        <p:txBody>
-          <a:bodyPr wrap="square" lIns="0" tIns="0" rIns="0" bIns="0" rtlCol="0" anchor="t"/>
-          <a:lstStyle/>
-          <a:p>
-            <a:pPr indent="0" marL="0">
-              <a:buNone/>
-            </a:pPr>
-            <a:r>
-              <a:rPr lang="en-US" sz="750" b="1" dirty="0">
-                <a:solidFill>
-                  <a:srgbClr val="D6E0E9"/>
-                </a:solidFill>
-                <a:latin typeface="Yu Gothic" pitchFamily="34" charset="0"/>
-                <a:ea typeface="Yu Gothic" pitchFamily="34" charset="-122"/>
-                <a:cs typeface="Yu Gothic" pitchFamily="34" charset="-120"/>
-              </a:rPr>
-              <a:t>ソース　</a:t>
-            </a:r>
-            <a:pPr indent="0" marL="0">
-              <a:buNone/>
-            </a:pPr>
-            <a:r>
-              <a:rPr lang="en-US" sz="750" dirty="0">
-                <a:solidFill>
-                  <a:srgbClr val="5F7183"/>
-                </a:solidFill>
-                <a:latin typeface="Yu Gothic" pitchFamily="34" charset="0"/>
-                <a:ea typeface="Yu Gothic" pitchFamily="34" charset="-122"/>
-                <a:cs typeface="Yu Gothic" pitchFamily="34" charset="-120"/>
-              </a:rPr>
-              <a:t>警備業法、警察庁「警備員教育」、消防法</a:t>
-            </a:r>
-            <a:endParaRPr lang="en-US" sz="750" dirty="0"/>
-          </a:p>
-        </p:txBody>
-      </p:sp>
-      <p:sp>
-        <p:nvSpPr>
-          <p:cNvPr id="30" name="Text 27"/>
-          <p:cNvSpPr/>
-          <p:nvPr/>
-        </p:nvSpPr>
-        <p:spPr>
-          <a:xfrm>
-            <a:off x="640080" y="6382512"/>
-            <a:ext cx="8778240" cy="292608"/>
-          </a:xfrm>
-          <a:prstGeom prst="rect">
-            <a:avLst/>
-          </a:prstGeom>
-          <a:noFill/>
-          <a:ln/>
-        </p:spPr>
-        <p:txBody>
-          <a:bodyPr wrap="square" lIns="0" tIns="0" rIns="0" bIns="0" rtlCol="0" anchor="ctr"/>
-          <a:lstStyle/>
-          <a:p>
-            <a:pPr indent="0" marL="0">
-              <a:buNone/>
-            </a:pPr>
-            <a:r>
-              <a:rPr lang="en-US" sz="900" dirty="0">
-                <a:solidFill>
-                  <a:srgbClr val="5F7183"/>
-                </a:solidFill>
-                <a:latin typeface="Yu Gothic" pitchFamily="34" charset="0"/>
-                <a:ea typeface="Yu Gothic" pitchFamily="34" charset="-122"/>
-                <a:cs typeface="Yu Gothic" pitchFamily="34" charset="-120"/>
-              </a:rPr>
-              <a:t>第4時限｜業務別教育1 巡回の方法に関すること  </a:t>
-            </a:r>
-            <a:pPr indent="0" marL="0">
-              <a:buNone/>
-            </a:pPr>
-            <a:r>
-              <a:rPr lang="en-US" sz="850" i="1" dirty="0">
-                <a:solidFill>
-                  <a:srgbClr val="D6E0E9"/>
-                </a:solidFill>
-                <a:latin typeface="Calibri" pitchFamily="34" charset="0"/>
-                <a:ea typeface="Calibri" pitchFamily="34" charset="-122"/>
-                <a:cs typeface="Calibri" pitchFamily="34" charset="-120"/>
-              </a:rPr>
-              <a:t>Period 4 | Task-Specific Training 1 — Patrol Methods</a:t>
-            </a:r>
-            <a:endParaRPr lang="en-US" sz="900" dirty="0"/>
-          </a:p>
         </p:txBody>
       </p:sp>
       <p:sp>
@@ -8946,7 +8946,7 @@
         </p:nvSpPr>
         <p:spPr>
           <a:xfrm>
-            <a:off x="10637215" y="6382512"/>
+            <a:off x="10637215" y="6492240"/>
             <a:ext cx="914400" cy="292608"/>
           </a:xfrm>
           <a:prstGeom prst="rect">
@@ -9041,8 +9041,8 @@
         </p:nvSpPr>
         <p:spPr>
           <a:xfrm>
-            <a:off x="640080" y="384048"/>
-            <a:ext cx="8982151" cy="768096"/>
+            <a:off x="640080" y="365760"/>
+            <a:ext cx="8982151" cy="749808"/>
           </a:xfrm>
           <a:prstGeom prst="rect">
             <a:avLst/>
@@ -9081,7 +9081,7 @@
               <a:buNone/>
             </a:pPr>
             <a:r>
-              <a:rPr lang="en-US" sz="1100" i="1" dirty="0">
+              <a:rPr lang="en-US" sz="1100" dirty="0">
                 <a:solidFill>
                   <a:srgbClr val="12B198"/>
                 </a:solidFill>
@@ -9103,7 +9103,7 @@
         </p:nvSpPr>
         <p:spPr>
           <a:xfrm>
-            <a:off x="9686239" y="438912"/>
+            <a:off x="9686239" y="420624"/>
             <a:ext cx="932688" cy="310896"/>
           </a:xfrm>
           <a:prstGeom prst="roundRect">
@@ -9125,7 +9125,7 @@
         </p:nvSpPr>
         <p:spPr>
           <a:xfrm>
-            <a:off x="9686239" y="438912"/>
+            <a:off x="9686239" y="420624"/>
             <a:ext cx="932688" cy="310896"/>
           </a:xfrm>
           <a:prstGeom prst="rect">
@@ -9164,12 +9164,12 @@
         </p:nvSpPr>
         <p:spPr>
           <a:xfrm>
-            <a:off x="640080" y="1188720"/>
-            <a:ext cx="10911535" cy="530352"/>
+            <a:off x="640080" y="1115568"/>
+            <a:ext cx="10911535" cy="585216"/>
           </a:xfrm>
           <a:prstGeom prst="roundRect">
             <a:avLst>
-              <a:gd name="adj" fmla="val 6897"/>
+              <a:gd name="adj" fmla="val 6250"/>
             </a:avLst>
           </a:prstGeom>
           <a:solidFill>
@@ -9186,8 +9186,8 @@
         </p:nvSpPr>
         <p:spPr>
           <a:xfrm>
-            <a:off x="877824" y="1234440"/>
-            <a:ext cx="10436047" cy="438912"/>
+            <a:off x="877824" y="1161288"/>
+            <a:ext cx="10436047" cy="493776"/>
           </a:xfrm>
           <a:prstGeom prst="rect">
             <a:avLst/>
@@ -9223,7 +9223,7 @@
               <a:buNone/>
             </a:pPr>
             <a:r>
-              <a:rPr lang="en-US" sz="800" dirty="0">
+              <a:rPr lang="en-US" sz="900" dirty="0">
                 <a:solidFill>
                   <a:srgbClr val="0D8A76"/>
                 </a:solidFill>
@@ -9260,9 +9260,9 @@
               <a:buNone/>
             </a:pPr>
             <a:r>
-              <a:rPr lang="en-US" sz="850" i="1" dirty="0">
-                <a:solidFill>
-                  <a:srgbClr val="5F7183"/>
+              <a:rPr lang="en-US" sz="1050" dirty="0">
+                <a:solidFill>
+                  <a:srgbClr val="1B2733"/>
                 </a:solidFill>
                 <a:latin typeface="Calibri" pitchFamily="34" charset="0"/>
                 <a:ea typeface="Calibri" pitchFamily="34" charset="-122"/>
@@ -9282,12 +9282,12 @@
         </p:nvSpPr>
         <p:spPr>
           <a:xfrm>
-            <a:off x="640080" y="1810512"/>
-            <a:ext cx="5327752" cy="1920240"/>
+            <a:off x="640080" y="1773936"/>
+            <a:ext cx="5327752" cy="1965960"/>
           </a:xfrm>
           <a:prstGeom prst="roundRect">
             <a:avLst>
-              <a:gd name="adj" fmla="val 1905"/>
+              <a:gd name="adj" fmla="val 1860"/>
             </a:avLst>
           </a:prstGeom>
           <a:solidFill>
@@ -9304,7 +9304,7 @@
         </p:nvSpPr>
         <p:spPr>
           <a:xfrm>
-            <a:off x="822960" y="1975104"/>
+            <a:off x="822960" y="1938528"/>
             <a:ext cx="310896" cy="310896"/>
           </a:xfrm>
           <a:prstGeom prst="ellipse">
@@ -9324,7 +9324,7 @@
         </p:nvSpPr>
         <p:spPr>
           <a:xfrm>
-            <a:off x="822960" y="1975104"/>
+            <a:off x="822960" y="1938528"/>
             <a:ext cx="310896" cy="310896"/>
           </a:xfrm>
           <a:prstGeom prst="rect">
@@ -9363,7 +9363,7 @@
         </p:nvSpPr>
         <p:spPr>
           <a:xfrm>
-            <a:off x="1207008" y="1938528"/>
+            <a:off x="1207008" y="1901952"/>
             <a:ext cx="4559656" cy="512064"/>
           </a:xfrm>
           <a:prstGeom prst="rect">
@@ -9403,7 +9403,7 @@
               <a:buNone/>
             </a:pPr>
             <a:r>
-              <a:rPr lang="en-US" sz="800" i="1" dirty="0">
+              <a:rPr lang="en-US" sz="1050" dirty="0">
                 <a:solidFill>
                   <a:srgbClr val="12B198"/>
                 </a:solidFill>
@@ -9425,8 +9425,8 @@
         </p:nvSpPr>
         <p:spPr>
           <a:xfrm>
-            <a:off x="859536" y="2487168"/>
-            <a:ext cx="4888840" cy="1097280"/>
+            <a:off x="859536" y="2450592"/>
+            <a:ext cx="4888840" cy="1143000"/>
           </a:xfrm>
           <a:prstGeom prst="rect">
             <a:avLst/>
@@ -9471,9 +9471,9 @@
               <a:buNone/>
             </a:pPr>
             <a:r>
-              <a:rPr lang="en-US" sz="750" i="1" dirty="0">
-                <a:solidFill>
-                  <a:srgbClr val="5F7183"/>
+              <a:rPr lang="en-US" sz="950" dirty="0">
+                <a:solidFill>
+                  <a:srgbClr val="1B2733"/>
                 </a:solidFill>
                 <a:latin typeface="Calibri" pitchFamily="34" charset="0"/>
                 <a:ea typeface="Calibri" pitchFamily="34" charset="-122"/>
@@ -9517,9 +9517,9 @@
               <a:buNone/>
             </a:pPr>
             <a:r>
-              <a:rPr lang="en-US" sz="750" i="1" dirty="0">
-                <a:solidFill>
-                  <a:srgbClr val="5F7183"/>
+              <a:rPr lang="en-US" sz="950" dirty="0">
+                <a:solidFill>
+                  <a:srgbClr val="1B2733"/>
                 </a:solidFill>
                 <a:latin typeface="Calibri" pitchFamily="34" charset="0"/>
                 <a:ea typeface="Calibri" pitchFamily="34" charset="-122"/>
@@ -9563,9 +9563,9 @@
               <a:buNone/>
             </a:pPr>
             <a:r>
-              <a:rPr lang="en-US" sz="750" i="1" dirty="0">
-                <a:solidFill>
-                  <a:srgbClr val="5F7183"/>
+              <a:rPr lang="en-US" sz="950" dirty="0">
+                <a:solidFill>
+                  <a:srgbClr val="1B2733"/>
                 </a:solidFill>
                 <a:latin typeface="Calibri" pitchFamily="34" charset="0"/>
                 <a:ea typeface="Calibri" pitchFamily="34" charset="-122"/>
@@ -9609,9 +9609,9 @@
               <a:buNone/>
             </a:pPr>
             <a:r>
-              <a:rPr lang="en-US" sz="750" i="1" dirty="0">
-                <a:solidFill>
-                  <a:srgbClr val="5F7183"/>
+              <a:rPr lang="en-US" sz="950" dirty="0">
+                <a:solidFill>
+                  <a:srgbClr val="1B2733"/>
                 </a:solidFill>
                 <a:latin typeface="Calibri" pitchFamily="34" charset="0"/>
                 <a:ea typeface="Calibri" pitchFamily="34" charset="-122"/>
@@ -9631,12 +9631,12 @@
         </p:nvSpPr>
         <p:spPr>
           <a:xfrm>
-            <a:off x="6223864" y="1810512"/>
-            <a:ext cx="5327752" cy="1920240"/>
+            <a:off x="6223864" y="1773936"/>
+            <a:ext cx="5327752" cy="1965960"/>
           </a:xfrm>
           <a:prstGeom prst="roundRect">
             <a:avLst>
-              <a:gd name="adj" fmla="val 1905"/>
+              <a:gd name="adj" fmla="val 1860"/>
             </a:avLst>
           </a:prstGeom>
           <a:solidFill>
@@ -9653,7 +9653,7 @@
         </p:nvSpPr>
         <p:spPr>
           <a:xfrm>
-            <a:off x="6406744" y="1975104"/>
+            <a:off x="6406744" y="1938528"/>
             <a:ext cx="310896" cy="310896"/>
           </a:xfrm>
           <a:prstGeom prst="ellipse">
@@ -9673,7 +9673,7 @@
         </p:nvSpPr>
         <p:spPr>
           <a:xfrm>
-            <a:off x="6406744" y="1975104"/>
+            <a:off x="6406744" y="1938528"/>
             <a:ext cx="310896" cy="310896"/>
           </a:xfrm>
           <a:prstGeom prst="rect">
@@ -9712,7 +9712,7 @@
         </p:nvSpPr>
         <p:spPr>
           <a:xfrm>
-            <a:off x="6790792" y="1938528"/>
+            <a:off x="6790792" y="1901952"/>
             <a:ext cx="4559656" cy="512064"/>
           </a:xfrm>
           <a:prstGeom prst="rect">
@@ -9752,7 +9752,7 @@
               <a:buNone/>
             </a:pPr>
             <a:r>
-              <a:rPr lang="en-US" sz="800" i="1" dirty="0">
+              <a:rPr lang="en-US" sz="1050" dirty="0">
                 <a:solidFill>
                   <a:srgbClr val="12B198"/>
                 </a:solidFill>
@@ -9774,8 +9774,8 @@
         </p:nvSpPr>
         <p:spPr>
           <a:xfrm>
-            <a:off x="6443320" y="2487168"/>
-            <a:ext cx="4888840" cy="1097280"/>
+            <a:off x="6443320" y="2450592"/>
+            <a:ext cx="4888840" cy="1143000"/>
           </a:xfrm>
           <a:prstGeom prst="rect">
             <a:avLst/>
@@ -9820,9 +9820,9 @@
               <a:buNone/>
             </a:pPr>
             <a:r>
-              <a:rPr lang="en-US" sz="750" i="1" dirty="0">
-                <a:solidFill>
-                  <a:srgbClr val="5F7183"/>
+              <a:rPr lang="en-US" sz="950" dirty="0">
+                <a:solidFill>
+                  <a:srgbClr val="1B2733"/>
                 </a:solidFill>
                 <a:latin typeface="Calibri" pitchFamily="34" charset="0"/>
                 <a:ea typeface="Calibri" pitchFamily="34" charset="-122"/>
@@ -9866,9 +9866,9 @@
               <a:buNone/>
             </a:pPr>
             <a:r>
-              <a:rPr lang="en-US" sz="750" i="1" dirty="0">
-                <a:solidFill>
-                  <a:srgbClr val="5F7183"/>
+              <a:rPr lang="en-US" sz="950" dirty="0">
+                <a:solidFill>
+                  <a:srgbClr val="1B2733"/>
                 </a:solidFill>
                 <a:latin typeface="Calibri" pitchFamily="34" charset="0"/>
                 <a:ea typeface="Calibri" pitchFamily="34" charset="-122"/>
@@ -9912,9 +9912,9 @@
               <a:buNone/>
             </a:pPr>
             <a:r>
-              <a:rPr lang="en-US" sz="750" i="1" dirty="0">
-                <a:solidFill>
-                  <a:srgbClr val="5F7183"/>
+              <a:rPr lang="en-US" sz="950" dirty="0">
+                <a:solidFill>
+                  <a:srgbClr val="1B2733"/>
                 </a:solidFill>
                 <a:latin typeface="Calibri" pitchFamily="34" charset="0"/>
                 <a:ea typeface="Calibri" pitchFamily="34" charset="-122"/>
@@ -9958,9 +9958,9 @@
               <a:buNone/>
             </a:pPr>
             <a:r>
-              <a:rPr lang="en-US" sz="750" i="1" dirty="0">
-                <a:solidFill>
-                  <a:srgbClr val="5F7183"/>
+              <a:rPr lang="en-US" sz="950" dirty="0">
+                <a:solidFill>
+                  <a:srgbClr val="1B2733"/>
                 </a:solidFill>
                 <a:latin typeface="Calibri" pitchFamily="34" charset="0"/>
                 <a:ea typeface="Calibri" pitchFamily="34" charset="-122"/>
@@ -9980,12 +9980,12 @@
         </p:nvSpPr>
         <p:spPr>
           <a:xfrm>
-            <a:off x="640080" y="3931920"/>
-            <a:ext cx="5327752" cy="1920240"/>
+            <a:off x="640080" y="3941064"/>
+            <a:ext cx="5327752" cy="1965960"/>
           </a:xfrm>
           <a:prstGeom prst="roundRect">
             <a:avLst>
-              <a:gd name="adj" fmla="val 1905"/>
+              <a:gd name="adj" fmla="val 1860"/>
             </a:avLst>
           </a:prstGeom>
           <a:solidFill>
@@ -10002,7 +10002,7 @@
         </p:nvSpPr>
         <p:spPr>
           <a:xfrm>
-            <a:off x="822960" y="4096512"/>
+            <a:off x="822960" y="4105656"/>
             <a:ext cx="310896" cy="310896"/>
           </a:xfrm>
           <a:prstGeom prst="ellipse">
@@ -10022,7 +10022,7 @@
         </p:nvSpPr>
         <p:spPr>
           <a:xfrm>
-            <a:off x="822960" y="4096512"/>
+            <a:off x="822960" y="4105656"/>
             <a:ext cx="310896" cy="310896"/>
           </a:xfrm>
           <a:prstGeom prst="rect">
@@ -10061,7 +10061,7 @@
         </p:nvSpPr>
         <p:spPr>
           <a:xfrm>
-            <a:off x="1207008" y="4059936"/>
+            <a:off x="1207008" y="4069080"/>
             <a:ext cx="4559656" cy="512064"/>
           </a:xfrm>
           <a:prstGeom prst="rect">
@@ -10101,7 +10101,7 @@
               <a:buNone/>
             </a:pPr>
             <a:r>
-              <a:rPr lang="en-US" sz="800" i="1" dirty="0">
+              <a:rPr lang="en-US" sz="1050" dirty="0">
                 <a:solidFill>
                   <a:srgbClr val="12B198"/>
                 </a:solidFill>
@@ -10123,8 +10123,8 @@
         </p:nvSpPr>
         <p:spPr>
           <a:xfrm>
-            <a:off x="859536" y="4608576"/>
-            <a:ext cx="4888840" cy="1097280"/>
+            <a:off x="859536" y="4617720"/>
+            <a:ext cx="4888840" cy="1143000"/>
           </a:xfrm>
           <a:prstGeom prst="rect">
             <a:avLst/>
@@ -10169,9 +10169,9 @@
               <a:buNone/>
             </a:pPr>
             <a:r>
-              <a:rPr lang="en-US" sz="750" i="1" dirty="0">
-                <a:solidFill>
-                  <a:srgbClr val="5F7183"/>
+              <a:rPr lang="en-US" sz="950" dirty="0">
+                <a:solidFill>
+                  <a:srgbClr val="1B2733"/>
                 </a:solidFill>
                 <a:latin typeface="Calibri" pitchFamily="34" charset="0"/>
                 <a:ea typeface="Calibri" pitchFamily="34" charset="-122"/>
@@ -10215,9 +10215,9 @@
               <a:buNone/>
             </a:pPr>
             <a:r>
-              <a:rPr lang="en-US" sz="750" i="1" dirty="0">
-                <a:solidFill>
-                  <a:srgbClr val="5F7183"/>
+              <a:rPr lang="en-US" sz="950" dirty="0">
+                <a:solidFill>
+                  <a:srgbClr val="1B2733"/>
                 </a:solidFill>
                 <a:latin typeface="Calibri" pitchFamily="34" charset="0"/>
                 <a:ea typeface="Calibri" pitchFamily="34" charset="-122"/>
@@ -10261,9 +10261,9 @@
               <a:buNone/>
             </a:pPr>
             <a:r>
-              <a:rPr lang="en-US" sz="750" i="1" dirty="0">
-                <a:solidFill>
-                  <a:srgbClr val="5F7183"/>
+              <a:rPr lang="en-US" sz="950" dirty="0">
+                <a:solidFill>
+                  <a:srgbClr val="1B2733"/>
                 </a:solidFill>
                 <a:latin typeface="Calibri" pitchFamily="34" charset="0"/>
                 <a:ea typeface="Calibri" pitchFamily="34" charset="-122"/>
@@ -10307,9 +10307,9 @@
               <a:buNone/>
             </a:pPr>
             <a:r>
-              <a:rPr lang="en-US" sz="750" i="1" dirty="0">
-                <a:solidFill>
-                  <a:srgbClr val="5F7183"/>
+              <a:rPr lang="en-US" sz="950" dirty="0">
+                <a:solidFill>
+                  <a:srgbClr val="1B2733"/>
                 </a:solidFill>
                 <a:latin typeface="Calibri" pitchFamily="34" charset="0"/>
                 <a:ea typeface="Calibri" pitchFamily="34" charset="-122"/>
@@ -10329,12 +10329,12 @@
         </p:nvSpPr>
         <p:spPr>
           <a:xfrm>
-            <a:off x="6223864" y="3931920"/>
-            <a:ext cx="5327752" cy="1920240"/>
+            <a:off x="6223864" y="3941064"/>
+            <a:ext cx="5327752" cy="1965960"/>
           </a:xfrm>
           <a:prstGeom prst="roundRect">
             <a:avLst>
-              <a:gd name="adj" fmla="val 1905"/>
+              <a:gd name="adj" fmla="val 1860"/>
             </a:avLst>
           </a:prstGeom>
           <a:solidFill>
@@ -10351,7 +10351,7 @@
         </p:nvSpPr>
         <p:spPr>
           <a:xfrm>
-            <a:off x="6406744" y="4096512"/>
+            <a:off x="6406744" y="4105656"/>
             <a:ext cx="310896" cy="310896"/>
           </a:xfrm>
           <a:prstGeom prst="ellipse">
@@ -10371,7 +10371,7 @@
         </p:nvSpPr>
         <p:spPr>
           <a:xfrm>
-            <a:off x="6406744" y="4096512"/>
+            <a:off x="6406744" y="4105656"/>
             <a:ext cx="310896" cy="310896"/>
           </a:xfrm>
           <a:prstGeom prst="rect">
@@ -10410,7 +10410,7 @@
         </p:nvSpPr>
         <p:spPr>
           <a:xfrm>
-            <a:off x="6790792" y="4059936"/>
+            <a:off x="6790792" y="4069080"/>
             <a:ext cx="4559656" cy="512064"/>
           </a:xfrm>
           <a:prstGeom prst="rect">
@@ -10450,7 +10450,7 @@
               <a:buNone/>
             </a:pPr>
             <a:r>
-              <a:rPr lang="en-US" sz="800" i="1" dirty="0">
+              <a:rPr lang="en-US" sz="1050" dirty="0">
                 <a:solidFill>
                   <a:srgbClr val="12B198"/>
                 </a:solidFill>
@@ -10472,8 +10472,8 @@
         </p:nvSpPr>
         <p:spPr>
           <a:xfrm>
-            <a:off x="6443320" y="4608576"/>
-            <a:ext cx="4888840" cy="1097280"/>
+            <a:off x="6443320" y="4617720"/>
+            <a:ext cx="4888840" cy="1143000"/>
           </a:xfrm>
           <a:prstGeom prst="rect">
             <a:avLst/>
@@ -10518,9 +10518,9 @@
               <a:buNone/>
             </a:pPr>
             <a:r>
-              <a:rPr lang="en-US" sz="750" i="1" dirty="0">
-                <a:solidFill>
-                  <a:srgbClr val="5F7183"/>
+              <a:rPr lang="en-US" sz="950" dirty="0">
+                <a:solidFill>
+                  <a:srgbClr val="1B2733"/>
                 </a:solidFill>
                 <a:latin typeface="Calibri" pitchFamily="34" charset="0"/>
                 <a:ea typeface="Calibri" pitchFamily="34" charset="-122"/>
@@ -10564,9 +10564,9 @@
               <a:buNone/>
             </a:pPr>
             <a:r>
-              <a:rPr lang="en-US" sz="750" i="1" dirty="0">
-                <a:solidFill>
-                  <a:srgbClr val="5F7183"/>
+              <a:rPr lang="en-US" sz="950" dirty="0">
+                <a:solidFill>
+                  <a:srgbClr val="1B2733"/>
                 </a:solidFill>
                 <a:latin typeface="Calibri" pitchFamily="34" charset="0"/>
                 <a:ea typeface="Calibri" pitchFamily="34" charset="-122"/>
@@ -10610,9 +10610,9 @@
               <a:buNone/>
             </a:pPr>
             <a:r>
-              <a:rPr lang="en-US" sz="750" i="1" dirty="0">
-                <a:solidFill>
-                  <a:srgbClr val="5F7183"/>
+              <a:rPr lang="en-US" sz="950" dirty="0">
+                <a:solidFill>
+                  <a:srgbClr val="1B2733"/>
                 </a:solidFill>
                 <a:latin typeface="Calibri" pitchFamily="34" charset="0"/>
                 <a:ea typeface="Calibri" pitchFamily="34" charset="-122"/>
@@ -10656,7 +10656,86 @@
               <a:buNone/>
             </a:pPr>
             <a:r>
-              <a:rPr lang="en-US" sz="750" i="1" dirty="0">
+              <a:rPr lang="en-US" sz="950" dirty="0">
+                <a:solidFill>
+                  <a:srgbClr val="1B2733"/>
+                </a:solidFill>
+                <a:latin typeface="Calibri" pitchFamily="34" charset="0"/>
+                <a:ea typeface="Calibri" pitchFamily="34" charset="-122"/>
+                <a:cs typeface="Calibri" pitchFamily="34" charset="-120"/>
+              </a:rPr>
+              <a:t>  Writing your opinion or guess as though it were fact</a:t>
+            </a:r>
+            <a:endParaRPr lang="en-US" sz="950" dirty="0"/>
+          </a:p>
+        </p:txBody>
+      </p:sp>
+      <p:sp>
+        <p:nvSpPr>
+          <p:cNvPr id="28" name="Text 25"/>
+          <p:cNvSpPr/>
+          <p:nvPr/>
+        </p:nvSpPr>
+        <p:spPr>
+          <a:xfrm>
+            <a:off x="640080" y="5961888"/>
+            <a:ext cx="10911535" cy="292608"/>
+          </a:xfrm>
+          <a:prstGeom prst="rect">
+            <a:avLst/>
+          </a:prstGeom>
+          <a:noFill/>
+          <a:ln/>
+        </p:spPr>
+        <p:txBody>
+          <a:bodyPr wrap="square" lIns="0" tIns="0" rIns="0" bIns="0" rtlCol="0" anchor="t"/>
+          <a:lstStyle/>
+          <a:p>
+            <a:pPr indent="0" marL="0">
+              <a:lnSpc>
+                <a:spcPct val="88000"/>
+              </a:lnSpc>
+              <a:buNone/>
+            </a:pPr>
+            <a:r>
+              <a:rPr lang="en-US" sz="900" b="1" dirty="0">
+                <a:solidFill>
+                  <a:srgbClr val="0D8A76"/>
+                </a:solidFill>
+                <a:latin typeface="Yu Gothic" pitchFamily="34" charset="0"/>
+                <a:ea typeface="Yu Gothic" pitchFamily="34" charset="-122"/>
+                <a:cs typeface="Yu Gothic" pitchFamily="34" charset="-120"/>
+              </a:rPr>
+              <a:t>Site SOP優先　</a:t>
+            </a:r>
+            <a:pPr indent="0" marL="0">
+              <a:lnSpc>
+                <a:spcPct val="88000"/>
+              </a:lnSpc>
+              <a:buNone/>
+            </a:pPr>
+            <a:r>
+              <a:rPr lang="en-US" sz="900" dirty="0">
+                <a:solidFill>
+                  <a:srgbClr val="1B2733"/>
+                </a:solidFill>
+                <a:latin typeface="Yu Gothic" pitchFamily="34" charset="0"/>
+                <a:ea typeface="Yu Gothic" pitchFamily="34" charset="-122"/>
+                <a:cs typeface="Yu Gothic" pitchFamily="34" charset="-120"/>
+              </a:rPr>
+              <a:t>様式、頻度、保存期間、電子か紙かは現場ごとに大きく異なる。必ずSite SOPと警備指令書による。</a:t>
+            </a:r>
+            <a:endParaRPr lang="en-US" sz="900" dirty="0"/>
+          </a:p>
+          <a:p>
+            <a:pPr indent="0" marL="0">
+              <a:lnSpc>
+                <a:spcPct val="88000"/>
+              </a:lnSpc>
+              <a:buNone/>
+            </a:pPr>
+            <a:r>
+              <a:rPr lang="en-US" sz="800" i="1" dirty="0">
                 <a:solidFill>
                   <a:srgbClr val="5F7183"/>
                 </a:solidFill>
@@ -10664,22 +10743,22 @@
                 <a:ea typeface="Calibri" pitchFamily="34" charset="-122"/>
                 <a:cs typeface="Calibri" pitchFamily="34" charset="-120"/>
               </a:rPr>
-              <a:t>  Writing your opinion or guess as though it were fact</a:t>
-            </a:r>
-            <a:endParaRPr lang="en-US" sz="950" dirty="0"/>
-          </a:p>
-        </p:txBody>
-      </p:sp>
-      <p:sp>
-        <p:nvSpPr>
-          <p:cNvPr id="28" name="Text 25"/>
-          <p:cNvSpPr/>
-          <p:nvPr/>
-        </p:nvSpPr>
-        <p:spPr>
-          <a:xfrm>
-            <a:off x="640080" y="5907024"/>
-            <a:ext cx="10911535" cy="310896"/>
+              <a:t>Format, frequency, retention and medium differ greatly by site. Always follow the Site SOP and post orders.</a:t>
+            </a:r>
+            <a:endParaRPr lang="en-US" sz="900" dirty="0"/>
+          </a:p>
+        </p:txBody>
+      </p:sp>
+      <p:sp>
+        <p:nvSpPr>
+          <p:cNvPr id="29" name="Text 26"/>
+          <p:cNvSpPr/>
+          <p:nvPr/>
+        </p:nvSpPr>
+        <p:spPr>
+          <a:xfrm>
+            <a:off x="640080" y="6272784"/>
+            <a:ext cx="9905695" cy="219456"/>
           </a:xfrm>
           <a:prstGeom prst="rect">
             <a:avLst/>
@@ -10692,167 +10771,88 @@
           <a:lstStyle/>
           <a:p>
             <a:pPr indent="0" marL="0">
-              <a:lnSpc>
-                <a:spcPct val="88000"/>
-              </a:lnSpc>
-              <a:buNone/>
-            </a:pPr>
-            <a:r>
-              <a:rPr lang="en-US" sz="900" b="1" dirty="0">
-                <a:solidFill>
-                  <a:srgbClr val="0D8A76"/>
-                </a:solidFill>
-                <a:latin typeface="Yu Gothic" pitchFamily="34" charset="0"/>
-                <a:ea typeface="Yu Gothic" pitchFamily="34" charset="-122"/>
-                <a:cs typeface="Yu Gothic" pitchFamily="34" charset="-120"/>
-              </a:rPr>
-              <a:t>Site SOP優先　</a:t>
-            </a:r>
-            <a:pPr indent="0" marL="0">
-              <a:lnSpc>
-                <a:spcPct val="88000"/>
-              </a:lnSpc>
+              <a:buNone/>
+            </a:pPr>
+            <a:r>
+              <a:rPr lang="en-US" sz="750" b="1" dirty="0">
+                <a:solidFill>
+                  <a:srgbClr val="D6E0E9"/>
+                </a:solidFill>
+                <a:latin typeface="Yu Gothic" pitchFamily="34" charset="0"/>
+                <a:ea typeface="Yu Gothic" pitchFamily="34" charset="-122"/>
+                <a:cs typeface="Yu Gothic" pitchFamily="34" charset="-120"/>
+              </a:rPr>
+              <a:t>ソース　</a:t>
+            </a:r>
+            <a:pPr indent="0" marL="0">
+              <a:buNone/>
+            </a:pPr>
+            <a:r>
+              <a:rPr lang="en-US" sz="750" dirty="0">
+                <a:solidFill>
+                  <a:srgbClr val="5F7183"/>
+                </a:solidFill>
+                <a:latin typeface="Yu Gothic" pitchFamily="34" charset="0"/>
+                <a:ea typeface="Yu Gothic" pitchFamily="34" charset="-122"/>
+                <a:cs typeface="Yu Gothic" pitchFamily="34" charset="-120"/>
+              </a:rPr>
+              <a:t>警備業法、警察庁「警備員教育」、消防法</a:t>
+            </a:r>
+            <a:endParaRPr lang="en-US" sz="750" dirty="0"/>
+          </a:p>
+        </p:txBody>
+      </p:sp>
+      <p:sp>
+        <p:nvSpPr>
+          <p:cNvPr id="30" name="Text 27"/>
+          <p:cNvSpPr/>
+          <p:nvPr/>
+        </p:nvSpPr>
+        <p:spPr>
+          <a:xfrm>
+            <a:off x="640080" y="6492240"/>
+            <a:ext cx="8778240" cy="292608"/>
+          </a:xfrm>
+          <a:prstGeom prst="rect">
+            <a:avLst/>
+          </a:prstGeom>
+          <a:noFill/>
+          <a:ln/>
+        </p:spPr>
+        <p:txBody>
+          <a:bodyPr wrap="square" lIns="0" tIns="0" rIns="0" bIns="0" rtlCol="0" anchor="ctr"/>
+          <a:lstStyle/>
+          <a:p>
+            <a:pPr indent="0" marL="0">
               <a:buNone/>
             </a:pPr>
             <a:r>
               <a:rPr lang="en-US" sz="900" dirty="0">
                 <a:solidFill>
-                  <a:srgbClr val="1B2733"/>
-                </a:solidFill>
-                <a:latin typeface="Yu Gothic" pitchFamily="34" charset="0"/>
-                <a:ea typeface="Yu Gothic" pitchFamily="34" charset="-122"/>
-                <a:cs typeface="Yu Gothic" pitchFamily="34" charset="-120"/>
-              </a:rPr>
-              <a:t>様式、頻度、保存期間、電子か紙かは現場ごとに大きく異なる。必ずSite SOPと警備指令書による。</a:t>
+                  <a:srgbClr val="5F7183"/>
+                </a:solidFill>
+                <a:latin typeface="Yu Gothic" pitchFamily="34" charset="0"/>
+                <a:ea typeface="Yu Gothic" pitchFamily="34" charset="-122"/>
+                <a:cs typeface="Yu Gothic" pitchFamily="34" charset="-120"/>
+              </a:rPr>
+              <a:t>第4時限｜業務別教育1 巡回の方法に関すること  </a:t>
+            </a:r>
+            <a:pPr indent="0" marL="0">
+              <a:buNone/>
+            </a:pPr>
+            <a:r>
+              <a:rPr lang="en-US" sz="850" i="1" dirty="0">
+                <a:solidFill>
+                  <a:srgbClr val="D6E0E9"/>
+                </a:solidFill>
+                <a:latin typeface="Calibri" pitchFamily="34" charset="0"/>
+                <a:ea typeface="Calibri" pitchFamily="34" charset="-122"/>
+                <a:cs typeface="Calibri" pitchFamily="34" charset="-120"/>
+              </a:rPr>
+              <a:t>Period 4 | Task-Specific Training 1 — Patrol Methods</a:t>
             </a:r>
             <a:endParaRPr lang="en-US" sz="900" dirty="0"/>
           </a:p>
-          <a:p>
-            <a:pPr indent="0" marL="0">
-              <a:lnSpc>
-                <a:spcPct val="88000"/>
-              </a:lnSpc>
-              <a:buNone/>
-            </a:pPr>
-            <a:r>
-              <a:rPr lang="en-US" sz="750" i="1" dirty="0">
-                <a:solidFill>
-                  <a:srgbClr val="5F7183"/>
-                </a:solidFill>
-                <a:latin typeface="Calibri" pitchFamily="34" charset="0"/>
-                <a:ea typeface="Calibri" pitchFamily="34" charset="-122"/>
-                <a:cs typeface="Calibri" pitchFamily="34" charset="-120"/>
-              </a:rPr>
-              <a:t>Format, frequency, retention and medium differ greatly by site. Always follow the Site SOP and post orders.</a:t>
-            </a:r>
-            <a:endParaRPr lang="en-US" sz="900" dirty="0"/>
-          </a:p>
-        </p:txBody>
-      </p:sp>
-      <p:sp>
-        <p:nvSpPr>
-          <p:cNvPr id="29" name="Text 26"/>
-          <p:cNvSpPr/>
-          <p:nvPr/>
-        </p:nvSpPr>
-        <p:spPr>
-          <a:xfrm>
-            <a:off x="640080" y="6272784"/>
-            <a:ext cx="9905695" cy="237744"/>
-          </a:xfrm>
-          <a:prstGeom prst="rect">
-            <a:avLst/>
-          </a:prstGeom>
-          <a:noFill/>
-          <a:ln/>
-        </p:spPr>
-        <p:txBody>
-          <a:bodyPr wrap="square" lIns="0" tIns="0" rIns="0" bIns="0" rtlCol="0" anchor="t"/>
-          <a:lstStyle/>
-          <a:p>
-            <a:pPr indent="0" marL="0">
-              <a:buNone/>
-            </a:pPr>
-            <a:r>
-              <a:rPr lang="en-US" sz="750" b="1" dirty="0">
-                <a:solidFill>
-                  <a:srgbClr val="D6E0E9"/>
-                </a:solidFill>
-                <a:latin typeface="Yu Gothic" pitchFamily="34" charset="0"/>
-                <a:ea typeface="Yu Gothic" pitchFamily="34" charset="-122"/>
-                <a:cs typeface="Yu Gothic" pitchFamily="34" charset="-120"/>
-              </a:rPr>
-              <a:t>ソース　</a:t>
-            </a:r>
-            <a:pPr indent="0" marL="0">
-              <a:buNone/>
-            </a:pPr>
-            <a:r>
-              <a:rPr lang="en-US" sz="750" dirty="0">
-                <a:solidFill>
-                  <a:srgbClr val="5F7183"/>
-                </a:solidFill>
-                <a:latin typeface="Yu Gothic" pitchFamily="34" charset="0"/>
-                <a:ea typeface="Yu Gothic" pitchFamily="34" charset="-122"/>
-                <a:cs typeface="Yu Gothic" pitchFamily="34" charset="-120"/>
-              </a:rPr>
-              <a:t>警備業法、警察庁「警備員教育」、消防法</a:t>
-            </a:r>
-            <a:endParaRPr lang="en-US" sz="750" dirty="0"/>
-          </a:p>
-        </p:txBody>
-      </p:sp>
-      <p:sp>
-        <p:nvSpPr>
-          <p:cNvPr id="30" name="Text 27"/>
-          <p:cNvSpPr/>
-          <p:nvPr/>
-        </p:nvSpPr>
-        <p:spPr>
-          <a:xfrm>
-            <a:off x="640080" y="6382512"/>
-            <a:ext cx="8778240" cy="292608"/>
-          </a:xfrm>
-          <a:prstGeom prst="rect">
-            <a:avLst/>
-          </a:prstGeom>
-          <a:noFill/>
-          <a:ln/>
-        </p:spPr>
-        <p:txBody>
-          <a:bodyPr wrap="square" lIns="0" tIns="0" rIns="0" bIns="0" rtlCol="0" anchor="ctr"/>
-          <a:lstStyle/>
-          <a:p>
-            <a:pPr indent="0" marL="0">
-              <a:buNone/>
-            </a:pPr>
-            <a:r>
-              <a:rPr lang="en-US" sz="900" dirty="0">
-                <a:solidFill>
-                  <a:srgbClr val="5F7183"/>
-                </a:solidFill>
-                <a:latin typeface="Yu Gothic" pitchFamily="34" charset="0"/>
-                <a:ea typeface="Yu Gothic" pitchFamily="34" charset="-122"/>
-                <a:cs typeface="Yu Gothic" pitchFamily="34" charset="-120"/>
-              </a:rPr>
-              <a:t>第4時限｜業務別教育1 巡回の方法に関すること  </a:t>
-            </a:r>
-            <a:pPr indent="0" marL="0">
-              <a:buNone/>
-            </a:pPr>
-            <a:r>
-              <a:rPr lang="en-US" sz="850" i="1" dirty="0">
-                <a:solidFill>
-                  <a:srgbClr val="D6E0E9"/>
-                </a:solidFill>
-                <a:latin typeface="Calibri" pitchFamily="34" charset="0"/>
-                <a:ea typeface="Calibri" pitchFamily="34" charset="-122"/>
-                <a:cs typeface="Calibri" pitchFamily="34" charset="-120"/>
-              </a:rPr>
-              <a:t>Period 4 | Task-Specific Training 1 — Patrol Methods</a:t>
-            </a:r>
-            <a:endParaRPr lang="en-US" sz="900" dirty="0"/>
-          </a:p>
         </p:txBody>
       </p:sp>
       <p:sp>
@@ -10863,7 +10863,7 @@
         </p:nvSpPr>
         <p:spPr>
           <a:xfrm>
-            <a:off x="10637215" y="6382512"/>
+            <a:off x="10637215" y="6492240"/>
             <a:ext cx="914400" cy="292608"/>
           </a:xfrm>
           <a:prstGeom prst="rect">
@@ -10998,7 +10998,7 @@
               <a:buNone/>
             </a:pPr>
             <a:r>
-              <a:rPr lang="en-US" sz="1250" i="1" dirty="0">
+              <a:rPr lang="en-US" sz="1350" dirty="0">
                 <a:solidFill>
                   <a:srgbClr val="12B198"/>
                 </a:solidFill>
@@ -11060,9 +11060,9 @@
               <a:buNone/>
             </a:pPr>
             <a:r>
-              <a:rPr lang="en-US" sz="1000" i="1" dirty="0">
-                <a:solidFill>
-                  <a:srgbClr val="5F7183"/>
+              <a:rPr lang="en-US" sz="1000" dirty="0">
+                <a:solidFill>
+                  <a:srgbClr val="1B2733"/>
                 </a:solidFill>
                 <a:latin typeface="Calibri" pitchFamily="34" charset="0"/>
                 <a:ea typeface="Calibri" pitchFamily="34" charset="-122"/>
@@ -11203,9 +11203,9 @@
               <a:buNone/>
             </a:pPr>
             <a:r>
-              <a:rPr lang="en-US" sz="900" i="1" dirty="0">
-                <a:solidFill>
-                  <a:srgbClr val="5F7183"/>
+              <a:rPr lang="en-US" sz="1050" dirty="0">
+                <a:solidFill>
+                  <a:srgbClr val="1B2733"/>
                 </a:solidFill>
                 <a:latin typeface="Calibri" pitchFamily="34" charset="0"/>
                 <a:ea typeface="Calibri" pitchFamily="34" charset="-122"/>
@@ -11346,9 +11346,9 @@
               <a:buNone/>
             </a:pPr>
             <a:r>
-              <a:rPr lang="en-US" sz="900" i="1" dirty="0">
-                <a:solidFill>
-                  <a:srgbClr val="5F7183"/>
+              <a:rPr lang="en-US" sz="1050" dirty="0">
+                <a:solidFill>
+                  <a:srgbClr val="1B2733"/>
                 </a:solidFill>
                 <a:latin typeface="Calibri" pitchFamily="34" charset="0"/>
                 <a:ea typeface="Calibri" pitchFamily="34" charset="-122"/>
@@ -11489,9 +11489,9 @@
               <a:buNone/>
             </a:pPr>
             <a:r>
-              <a:rPr lang="en-US" sz="900" i="1" dirty="0">
-                <a:solidFill>
-                  <a:srgbClr val="5F7183"/>
+              <a:rPr lang="en-US" sz="1050" dirty="0">
+                <a:solidFill>
+                  <a:srgbClr val="1B2733"/>
                 </a:solidFill>
                 <a:latin typeface="Calibri" pitchFamily="34" charset="0"/>
                 <a:ea typeface="Calibri" pitchFamily="34" charset="-122"/>
@@ -11632,9 +11632,9 @@
               <a:buNone/>
             </a:pPr>
             <a:r>
-              <a:rPr lang="en-US" sz="900" i="1" dirty="0">
-                <a:solidFill>
-                  <a:srgbClr val="5F7183"/>
+              <a:rPr lang="en-US" sz="1050" dirty="0">
+                <a:solidFill>
+                  <a:srgbClr val="1B2733"/>
                 </a:solidFill>
                 <a:latin typeface="Calibri" pitchFamily="34" charset="0"/>
                 <a:ea typeface="Calibri" pitchFamily="34" charset="-122"/>
@@ -11775,9 +11775,9 @@
               <a:buNone/>
             </a:pPr>
             <a:r>
-              <a:rPr lang="en-US" sz="900" i="1" dirty="0">
-                <a:solidFill>
-                  <a:srgbClr val="5F7183"/>
+              <a:rPr lang="en-US" sz="1050" dirty="0">
+                <a:solidFill>
+                  <a:srgbClr val="1B2733"/>
                 </a:solidFill>
                 <a:latin typeface="Calibri" pitchFamily="34" charset="0"/>
                 <a:ea typeface="Calibri" pitchFamily="34" charset="-122"/>
@@ -11918,49 +11918,49 @@
               <a:buNone/>
             </a:pPr>
             <a:r>
-              <a:rPr lang="en-US" sz="900" i="1" dirty="0">
+              <a:rPr lang="en-US" sz="1050" dirty="0">
+                <a:solidFill>
+                  <a:srgbClr val="1B2733"/>
+                </a:solidFill>
+                <a:latin typeface="Calibri" pitchFamily="34" charset="0"/>
+                <a:ea typeface="Calibri" pitchFamily="34" charset="-122"/>
+                <a:cs typeface="Calibri" pitchFamily="34" charset="-120"/>
+              </a:rPr>
+              <a:t>The perimeter fence is damaged. You cannot recall if it was there last round.</a:t>
+            </a:r>
+            <a:endParaRPr lang="en-US" sz="1150" dirty="0"/>
+          </a:p>
+        </p:txBody>
+      </p:sp>
+      <p:sp>
+        <p:nvSpPr>
+          <p:cNvPr id="29" name="Text 26"/>
+          <p:cNvSpPr/>
+          <p:nvPr/>
+        </p:nvSpPr>
+        <p:spPr>
+          <a:xfrm>
+            <a:off x="640080" y="6492240"/>
+            <a:ext cx="8778240" cy="292608"/>
+          </a:xfrm>
+          <a:prstGeom prst="rect">
+            <a:avLst/>
+          </a:prstGeom>
+          <a:noFill/>
+          <a:ln/>
+        </p:spPr>
+        <p:txBody>
+          <a:bodyPr wrap="square" lIns="0" tIns="0" rIns="0" bIns="0" rtlCol="0" anchor="ctr"/>
+          <a:lstStyle/>
+          <a:p>
+            <a:pPr indent="0" marL="0">
+              <a:buNone/>
+            </a:pPr>
+            <a:r>
+              <a:rPr lang="en-US" sz="900" dirty="0">
                 <a:solidFill>
                   <a:srgbClr val="5F7183"/>
                 </a:solidFill>
-                <a:latin typeface="Calibri" pitchFamily="34" charset="0"/>
-                <a:ea typeface="Calibri" pitchFamily="34" charset="-122"/>
-                <a:cs typeface="Calibri" pitchFamily="34" charset="-120"/>
-              </a:rPr>
-              <a:t>The perimeter fence is damaged. You cannot recall if it was there last round.</a:t>
-            </a:r>
-            <a:endParaRPr lang="en-US" sz="1150" dirty="0"/>
-          </a:p>
-        </p:txBody>
-      </p:sp>
-      <p:sp>
-        <p:nvSpPr>
-          <p:cNvPr id="29" name="Text 26"/>
-          <p:cNvSpPr/>
-          <p:nvPr/>
-        </p:nvSpPr>
-        <p:spPr>
-          <a:xfrm>
-            <a:off x="640080" y="6382512"/>
-            <a:ext cx="8778240" cy="292608"/>
-          </a:xfrm>
-          <a:prstGeom prst="rect">
-            <a:avLst/>
-          </a:prstGeom>
-          <a:noFill/>
-          <a:ln/>
-        </p:spPr>
-        <p:txBody>
-          <a:bodyPr wrap="square" lIns="0" tIns="0" rIns="0" bIns="0" rtlCol="0" anchor="ctr"/>
-          <a:lstStyle/>
-          <a:p>
-            <a:pPr indent="0" marL="0">
-              <a:buNone/>
-            </a:pPr>
-            <a:r>
-              <a:rPr lang="en-US" sz="900" dirty="0">
-                <a:solidFill>
-                  <a:srgbClr val="5F7183"/>
-                </a:solidFill>
                 <a:latin typeface="Yu Gothic" pitchFamily="34" charset="0"/>
                 <a:ea typeface="Yu Gothic" pitchFamily="34" charset="-122"/>
                 <a:cs typeface="Yu Gothic" pitchFamily="34" charset="-120"/>
@@ -11993,7 +11993,7 @@
         </p:nvSpPr>
         <p:spPr>
           <a:xfrm>
-            <a:off x="10637215" y="6382512"/>
+            <a:off x="10637215" y="6492240"/>
             <a:ext cx="914400" cy="292608"/>
           </a:xfrm>
           <a:prstGeom prst="rect">
@@ -12128,7 +12128,7 @@
               <a:buNone/>
             </a:pPr>
             <a:r>
-              <a:rPr lang="en-US" sz="1250" i="1" dirty="0">
+              <a:rPr lang="en-US" sz="1350" dirty="0">
                 <a:solidFill>
                   <a:srgbClr val="12B198"/>
                 </a:solidFill>
@@ -12190,9 +12190,9 @@
               <a:buNone/>
             </a:pPr>
             <a:r>
-              <a:rPr lang="en-US" sz="1000" i="1" dirty="0">
-                <a:solidFill>
-                  <a:srgbClr val="5F7183"/>
+              <a:rPr lang="en-US" sz="1000" dirty="0">
+                <a:solidFill>
+                  <a:srgbClr val="1B2733"/>
                 </a:solidFill>
                 <a:latin typeface="Calibri" pitchFamily="34" charset="0"/>
                 <a:ea typeface="Calibri" pitchFamily="34" charset="-122"/>
@@ -12333,9 +12333,9 @@
               <a:buNone/>
             </a:pPr>
             <a:r>
-              <a:rPr lang="en-US" sz="1050" i="1" dirty="0">
-                <a:solidFill>
-                  <a:srgbClr val="5F7183"/>
+              <a:rPr lang="en-US" sz="1250" dirty="0">
+                <a:solidFill>
+                  <a:srgbClr val="1B2733"/>
                 </a:solidFill>
                 <a:latin typeface="Calibri" pitchFamily="34" charset="0"/>
                 <a:ea typeface="Calibri" pitchFamily="34" charset="-122"/>
@@ -12476,9 +12476,9 @@
               <a:buNone/>
             </a:pPr>
             <a:r>
-              <a:rPr lang="en-US" sz="1050" i="1" dirty="0">
-                <a:solidFill>
-                  <a:srgbClr val="5F7183"/>
+              <a:rPr lang="en-US" sz="1250" dirty="0">
+                <a:solidFill>
+                  <a:srgbClr val="1B2733"/>
                 </a:solidFill>
                 <a:latin typeface="Calibri" pitchFamily="34" charset="0"/>
                 <a:ea typeface="Calibri" pitchFamily="34" charset="-122"/>
@@ -12619,9 +12619,9 @@
               <a:buNone/>
             </a:pPr>
             <a:r>
-              <a:rPr lang="en-US" sz="1050" i="1" dirty="0">
-                <a:solidFill>
-                  <a:srgbClr val="5F7183"/>
+              <a:rPr lang="en-US" sz="1250" dirty="0">
+                <a:solidFill>
+                  <a:srgbClr val="1B2733"/>
                 </a:solidFill>
                 <a:latin typeface="Calibri" pitchFamily="34" charset="0"/>
                 <a:ea typeface="Calibri" pitchFamily="34" charset="-122"/>
@@ -12762,49 +12762,49 @@
               <a:buNone/>
             </a:pPr>
             <a:r>
-              <a:rPr lang="en-US" sz="1050" i="1" dirty="0">
+              <a:rPr lang="en-US" sz="1250" dirty="0">
+                <a:solidFill>
+                  <a:srgbClr val="1B2733"/>
+                </a:solidFill>
+                <a:latin typeface="Calibri" pitchFamily="34" charset="0"/>
+                <a:ea typeface="Calibri" pitchFamily="34" charset="-122"/>
+                <a:cs typeface="Calibri" pitchFamily="34" charset="-120"/>
+              </a:rPr>
+              <a:t>How do you report? Whether, to whom, and what. Keep fact and assessment separate.</a:t>
+            </a:r>
+            <a:endParaRPr lang="en-US" sz="1450" dirty="0"/>
+          </a:p>
+        </p:txBody>
+      </p:sp>
+      <p:sp>
+        <p:nvSpPr>
+          <p:cNvPr id="21" name="Text 18"/>
+          <p:cNvSpPr/>
+          <p:nvPr/>
+        </p:nvSpPr>
+        <p:spPr>
+          <a:xfrm>
+            <a:off x="640080" y="6492240"/>
+            <a:ext cx="8778240" cy="292608"/>
+          </a:xfrm>
+          <a:prstGeom prst="rect">
+            <a:avLst/>
+          </a:prstGeom>
+          <a:noFill/>
+          <a:ln/>
+        </p:spPr>
+        <p:txBody>
+          <a:bodyPr wrap="square" lIns="0" tIns="0" rIns="0" bIns="0" rtlCol="0" anchor="ctr"/>
+          <a:lstStyle/>
+          <a:p>
+            <a:pPr indent="0" marL="0">
+              <a:buNone/>
+            </a:pPr>
+            <a:r>
+              <a:rPr lang="en-US" sz="900" dirty="0">
                 <a:solidFill>
                   <a:srgbClr val="5F7183"/>
                 </a:solidFill>
-                <a:latin typeface="Calibri" pitchFamily="34" charset="0"/>
-                <a:ea typeface="Calibri" pitchFamily="34" charset="-122"/>
-                <a:cs typeface="Calibri" pitchFamily="34" charset="-120"/>
-              </a:rPr>
-              <a:t>How do you report? Whether, to whom, and what. Keep fact and assessment separate.</a:t>
-            </a:r>
-            <a:endParaRPr lang="en-US" sz="1450" dirty="0"/>
-          </a:p>
-        </p:txBody>
-      </p:sp>
-      <p:sp>
-        <p:nvSpPr>
-          <p:cNvPr id="21" name="Text 18"/>
-          <p:cNvSpPr/>
-          <p:nvPr/>
-        </p:nvSpPr>
-        <p:spPr>
-          <a:xfrm>
-            <a:off x="640080" y="6382512"/>
-            <a:ext cx="8778240" cy="292608"/>
-          </a:xfrm>
-          <a:prstGeom prst="rect">
-            <a:avLst/>
-          </a:prstGeom>
-          <a:noFill/>
-          <a:ln/>
-        </p:spPr>
-        <p:txBody>
-          <a:bodyPr wrap="square" lIns="0" tIns="0" rIns="0" bIns="0" rtlCol="0" anchor="ctr"/>
-          <a:lstStyle/>
-          <a:p>
-            <a:pPr indent="0" marL="0">
-              <a:buNone/>
-            </a:pPr>
-            <a:r>
-              <a:rPr lang="en-US" sz="900" dirty="0">
-                <a:solidFill>
-                  <a:srgbClr val="5F7183"/>
-                </a:solidFill>
                 <a:latin typeface="Yu Gothic" pitchFamily="34" charset="0"/>
                 <a:ea typeface="Yu Gothic" pitchFamily="34" charset="-122"/>
                 <a:cs typeface="Yu Gothic" pitchFamily="34" charset="-120"/>
@@ -12837,7 +12837,7 @@
         </p:nvSpPr>
         <p:spPr>
           <a:xfrm>
-            <a:off x="10637215" y="6382512"/>
+            <a:off x="10637215" y="6492240"/>
             <a:ext cx="914400" cy="292608"/>
           </a:xfrm>
           <a:prstGeom prst="rect">
@@ -12932,8 +12932,8 @@
         </p:nvSpPr>
         <p:spPr>
           <a:xfrm>
-            <a:off x="640080" y="384048"/>
-            <a:ext cx="8982151" cy="768096"/>
+            <a:off x="640080" y="365760"/>
+            <a:ext cx="8982151" cy="749808"/>
           </a:xfrm>
           <a:prstGeom prst="rect">
             <a:avLst/>
@@ -12972,7 +12972,7 @@
               <a:buNone/>
             </a:pPr>
             <a:r>
-              <a:rPr lang="en-US" sz="1100" i="1" dirty="0">
+              <a:rPr lang="en-US" sz="1100" dirty="0">
                 <a:solidFill>
                   <a:srgbClr val="12B198"/>
                 </a:solidFill>
@@ -12994,7 +12994,7 @@
         </p:nvSpPr>
         <p:spPr>
           <a:xfrm>
-            <a:off x="9686239" y="438912"/>
+            <a:off x="9686239" y="420624"/>
             <a:ext cx="932688" cy="310896"/>
           </a:xfrm>
           <a:prstGeom prst="roundRect">
@@ -13016,7 +13016,7 @@
         </p:nvSpPr>
         <p:spPr>
           <a:xfrm>
-            <a:off x="9686239" y="438912"/>
+            <a:off x="9686239" y="420624"/>
             <a:ext cx="932688" cy="310896"/>
           </a:xfrm>
           <a:prstGeom prst="rect">
@@ -13055,12 +13055,12 @@
         </p:nvSpPr>
         <p:spPr>
           <a:xfrm>
-            <a:off x="640080" y="1188720"/>
-            <a:ext cx="10911535" cy="939546"/>
+            <a:off x="640080" y="1115568"/>
+            <a:ext cx="10911535" cy="971550"/>
           </a:xfrm>
           <a:prstGeom prst="roundRect">
             <a:avLst>
-              <a:gd name="adj" fmla="val 3893"/>
+              <a:gd name="adj" fmla="val 3765"/>
             </a:avLst>
           </a:prstGeom>
           <a:solidFill>
@@ -13077,7 +13077,7 @@
         </p:nvSpPr>
         <p:spPr>
           <a:xfrm>
-            <a:off x="841248" y="1484757"/>
+            <a:off x="841248" y="1427607"/>
             <a:ext cx="347472" cy="347472"/>
           </a:xfrm>
           <a:prstGeom prst="ellipse">
@@ -13097,7 +13097,7 @@
         </p:nvSpPr>
         <p:spPr>
           <a:xfrm>
-            <a:off x="841248" y="1484757"/>
+            <a:off x="841248" y="1427607"/>
             <a:ext cx="347472" cy="347472"/>
           </a:xfrm>
           <a:prstGeom prst="rect">
@@ -13136,8 +13136,8 @@
         </p:nvSpPr>
         <p:spPr>
           <a:xfrm>
-            <a:off x="1280160" y="1252728"/>
-            <a:ext cx="10033711" cy="811530"/>
+            <a:off x="1280160" y="1179576"/>
+            <a:ext cx="10033711" cy="843534"/>
           </a:xfrm>
           <a:prstGeom prst="rect">
             <a:avLst/>
@@ -13156,7 +13156,7 @@
               <a:buNone/>
             </a:pPr>
             <a:r>
-              <a:rPr lang="en-US" sz="900" dirty="0">
+              <a:rPr lang="en-US" sz="950" dirty="0">
                 <a:solidFill>
                   <a:srgbClr val="5F7183"/>
                 </a:solidFill>
@@ -13166,7 +13166,7 @@
               </a:rPr>
               <a:t>問1　何に注意するか</a:t>
             </a:r>
-            <a:endParaRPr lang="en-US" sz="900" dirty="0"/>
+            <a:endParaRPr lang="en-US" sz="950" dirty="0"/>
           </a:p>
           <a:p>
             <a:pPr indent="0" marL="0">
@@ -13186,7 +13186,7 @@
               </a:rPr>
               <a:t>A・B・D は Asset（情報）、C・E は People、F は Asset（物的）。分類してから動く。</a:t>
             </a:r>
-            <a:endParaRPr lang="en-US" sz="900" dirty="0"/>
+            <a:endParaRPr lang="en-US" sz="950" dirty="0"/>
           </a:p>
           <a:p>
             <a:pPr indent="0" marL="0">
@@ -13196,9 +13196,9 @@
               <a:buNone/>
             </a:pPr>
             <a:r>
-              <a:rPr lang="en-US" sz="800" i="1" dirty="0">
-                <a:solidFill>
-                  <a:srgbClr val="5F7183"/>
+              <a:rPr lang="en-US" sz="1100" dirty="0">
+                <a:solidFill>
+                  <a:srgbClr val="1B2733"/>
                 </a:solidFill>
                 <a:latin typeface="Calibri" pitchFamily="34" charset="0"/>
                 <a:ea typeface="Calibri" pitchFamily="34" charset="-122"/>
@@ -13206,7 +13206,7 @@
               </a:rPr>
               <a:t>A, B and D are Asset (information); C and E are People; F is Asset (physical). Classify before acting.</a:t>
             </a:r>
-            <a:endParaRPr lang="en-US" sz="900" dirty="0"/>
+            <a:endParaRPr lang="en-US" sz="950" dirty="0"/>
           </a:p>
         </p:txBody>
       </p:sp>
@@ -13218,12 +13218,12 @@
         </p:nvSpPr>
         <p:spPr>
           <a:xfrm>
-            <a:off x="640080" y="2228850"/>
-            <a:ext cx="10911535" cy="939546"/>
+            <a:off x="640080" y="2187702"/>
+            <a:ext cx="10911535" cy="971550"/>
           </a:xfrm>
           <a:prstGeom prst="roundRect">
             <a:avLst>
-              <a:gd name="adj" fmla="val 3893"/>
+              <a:gd name="adj" fmla="val 3765"/>
             </a:avLst>
           </a:prstGeom>
           <a:solidFill>
@@ -13240,7 +13240,7 @@
         </p:nvSpPr>
         <p:spPr>
           <a:xfrm>
-            <a:off x="841248" y="2524887"/>
+            <a:off x="841248" y="2499741"/>
             <a:ext cx="347472" cy="347472"/>
           </a:xfrm>
           <a:prstGeom prst="ellipse">
@@ -13260,7 +13260,7 @@
         </p:nvSpPr>
         <p:spPr>
           <a:xfrm>
-            <a:off x="841248" y="2524887"/>
+            <a:off x="841248" y="2499741"/>
             <a:ext cx="347472" cy="347472"/>
           </a:xfrm>
           <a:prstGeom prst="rect">
@@ -13299,8 +13299,8 @@
         </p:nvSpPr>
         <p:spPr>
           <a:xfrm>
-            <a:off x="1280160" y="2292858"/>
-            <a:ext cx="10033711" cy="811530"/>
+            <a:off x="1280160" y="2251710"/>
+            <a:ext cx="10033711" cy="843534"/>
           </a:xfrm>
           <a:prstGeom prst="rect">
             <a:avLst/>
@@ -13319,7 +13319,7 @@
               <a:buNone/>
             </a:pPr>
             <a:r>
-              <a:rPr lang="en-US" sz="900" dirty="0">
+              <a:rPr lang="en-US" sz="950" dirty="0">
                 <a:solidFill>
                   <a:srgbClr val="5F7183"/>
                 </a:solidFill>
@@ -13329,7 +13329,7 @@
               </a:rPr>
               <a:t>問2　どこを見るか</a:t>
             </a:r>
-            <a:endParaRPr lang="en-US" sz="900" dirty="0"/>
+            <a:endParaRPr lang="en-US" sz="950" dirty="0"/>
           </a:p>
           <a:p>
             <a:pPr indent="0" marL="0">
@@ -13349,7 +13349,7 @@
               </a:rPr>
               <a:t>周囲と時系列。誰の席か、会議は終わったか、作業は継続中か、前回はどうだったか。</a:t>
             </a:r>
-            <a:endParaRPr lang="en-US" sz="900" dirty="0"/>
+            <a:endParaRPr lang="en-US" sz="950" dirty="0"/>
           </a:p>
           <a:p>
             <a:pPr indent="0" marL="0">
@@ -13359,9 +13359,9 @@
               <a:buNone/>
             </a:pPr>
             <a:r>
-              <a:rPr lang="en-US" sz="800" i="1" dirty="0">
-                <a:solidFill>
-                  <a:srgbClr val="5F7183"/>
+              <a:rPr lang="en-US" sz="1100" dirty="0">
+                <a:solidFill>
+                  <a:srgbClr val="1B2733"/>
                 </a:solidFill>
                 <a:latin typeface="Calibri" pitchFamily="34" charset="0"/>
                 <a:ea typeface="Calibri" pitchFamily="34" charset="-122"/>
@@ -13369,7 +13369,7 @@
               </a:rPr>
               <a:t>The surroundings and the timeline: whose desk, is the meeting over, is work ongoing, how was it last round.</a:t>
             </a:r>
-            <a:endParaRPr lang="en-US" sz="900" dirty="0"/>
+            <a:endParaRPr lang="en-US" sz="950" dirty="0"/>
           </a:p>
         </p:txBody>
       </p:sp>
@@ -13381,12 +13381,12 @@
         </p:nvSpPr>
         <p:spPr>
           <a:xfrm>
-            <a:off x="640080" y="3268980"/>
-            <a:ext cx="10911535" cy="939546"/>
+            <a:off x="640080" y="3259836"/>
+            <a:ext cx="10911535" cy="971550"/>
           </a:xfrm>
           <a:prstGeom prst="roundRect">
             <a:avLst>
-              <a:gd name="adj" fmla="val 3893"/>
+              <a:gd name="adj" fmla="val 3765"/>
             </a:avLst>
           </a:prstGeom>
           <a:solidFill>
@@ -13403,7 +13403,7 @@
         </p:nvSpPr>
         <p:spPr>
           <a:xfrm>
-            <a:off x="841248" y="3565017"/>
+            <a:off x="841248" y="3571875"/>
             <a:ext cx="347472" cy="347472"/>
           </a:xfrm>
           <a:prstGeom prst="ellipse">
@@ -13423,7 +13423,7 @@
         </p:nvSpPr>
         <p:spPr>
           <a:xfrm>
-            <a:off x="841248" y="3565017"/>
+            <a:off x="841248" y="3571875"/>
             <a:ext cx="347472" cy="347472"/>
           </a:xfrm>
           <a:prstGeom prst="rect">
@@ -13462,8 +13462,8 @@
         </p:nvSpPr>
         <p:spPr>
           <a:xfrm>
-            <a:off x="1280160" y="3332988"/>
-            <a:ext cx="10033711" cy="811530"/>
+            <a:off x="1280160" y="3323844"/>
+            <a:ext cx="10033711" cy="843534"/>
           </a:xfrm>
           <a:prstGeom prst="rect">
             <a:avLst/>
@@ -13482,7 +13482,7 @@
               <a:buNone/>
             </a:pPr>
             <a:r>
-              <a:rPr lang="en-US" sz="900" dirty="0">
+              <a:rPr lang="en-US" sz="950" dirty="0">
                 <a:solidFill>
                   <a:srgbClr val="5F7183"/>
                 </a:solidFill>
@@ -13492,7 +13492,7 @@
               </a:rPr>
               <a:t>問3　どう巡回するか</a:t>
             </a:r>
-            <a:endParaRPr lang="en-US" sz="900" dirty="0"/>
+            <a:endParaRPr lang="en-US" sz="950" dirty="0"/>
           </a:p>
           <a:p>
             <a:pPr indent="0" marL="0">
@@ -13512,7 +13512,7 @@
               </a:rPr>
               <a:t>次の巡回で立寄点を増やす、時刻をずらす、経路を逆順にする。設計を変えるところまで踏み込む。</a:t>
             </a:r>
-            <a:endParaRPr lang="en-US" sz="900" dirty="0"/>
+            <a:endParaRPr lang="en-US" sz="950" dirty="0"/>
           </a:p>
           <a:p>
             <a:pPr indent="0" marL="0">
@@ -13522,9 +13522,9 @@
               <a:buNone/>
             </a:pPr>
             <a:r>
-              <a:rPr lang="en-US" sz="800" i="1" dirty="0">
-                <a:solidFill>
-                  <a:srgbClr val="5F7183"/>
+              <a:rPr lang="en-US" sz="1100" dirty="0">
+                <a:solidFill>
+                  <a:srgbClr val="1B2733"/>
                 </a:solidFill>
                 <a:latin typeface="Calibri" pitchFamily="34" charset="0"/>
                 <a:ea typeface="Calibri" pitchFamily="34" charset="-122"/>
@@ -13532,7 +13532,7 @@
               </a:rPr>
               <a:t>Add a checkpoint, shift the timing, reverse the route. Go as far as changing the design.</a:t>
             </a:r>
-            <a:endParaRPr lang="en-US" sz="900" dirty="0"/>
+            <a:endParaRPr lang="en-US" sz="950" dirty="0"/>
           </a:p>
         </p:txBody>
       </p:sp>
@@ -13544,12 +13544,12 @@
         </p:nvSpPr>
         <p:spPr>
           <a:xfrm>
-            <a:off x="640080" y="4309110"/>
-            <a:ext cx="10911535" cy="939546"/>
+            <a:off x="640080" y="4331970"/>
+            <a:ext cx="10911535" cy="971550"/>
           </a:xfrm>
           <a:prstGeom prst="roundRect">
             <a:avLst>
-              <a:gd name="adj" fmla="val 3893"/>
+              <a:gd name="adj" fmla="val 3765"/>
             </a:avLst>
           </a:prstGeom>
           <a:solidFill>
@@ -13566,7 +13566,7 @@
         </p:nvSpPr>
         <p:spPr>
           <a:xfrm>
-            <a:off x="841248" y="4605147"/>
+            <a:off x="841248" y="4644009"/>
             <a:ext cx="347472" cy="347472"/>
           </a:xfrm>
           <a:prstGeom prst="ellipse">
@@ -13586,7 +13586,7 @@
         </p:nvSpPr>
         <p:spPr>
           <a:xfrm>
-            <a:off x="841248" y="4605147"/>
+            <a:off x="841248" y="4644009"/>
             <a:ext cx="347472" cy="347472"/>
           </a:xfrm>
           <a:prstGeom prst="rect">
@@ -13625,8 +13625,8 @@
         </p:nvSpPr>
         <p:spPr>
           <a:xfrm>
-            <a:off x="1280160" y="4373118"/>
-            <a:ext cx="10033711" cy="811530"/>
+            <a:off x="1280160" y="4395978"/>
+            <a:ext cx="10033711" cy="843534"/>
           </a:xfrm>
           <a:prstGeom prst="rect">
             <a:avLst/>
@@ -13645,7 +13645,7 @@
               <a:buNone/>
             </a:pPr>
             <a:r>
-              <a:rPr lang="en-US" sz="900" dirty="0">
+              <a:rPr lang="en-US" sz="950" dirty="0">
                 <a:solidFill>
                   <a:srgbClr val="5F7183"/>
                 </a:solidFill>
@@ -13655,7 +13655,7 @@
               </a:rPr>
               <a:t>問4　どう報告するか</a:t>
             </a:r>
-            <a:endParaRPr lang="en-US" sz="900" dirty="0"/>
+            <a:endParaRPr lang="en-US" sz="950" dirty="0"/>
           </a:p>
           <a:p>
             <a:pPr indent="0" marL="0">
@@ -13675,7 +13675,7 @@
               </a:rPr>
               <a:t>事実を先に、評価を後に。分からないことは「不明」と書く。C は避難障害として即時報告。</a:t>
             </a:r>
-            <a:endParaRPr lang="en-US" sz="900" dirty="0"/>
+            <a:endParaRPr lang="en-US" sz="950" dirty="0"/>
           </a:p>
           <a:p>
             <a:pPr indent="0" marL="0">
@@ -13685,9 +13685,9 @@
               <a:buNone/>
             </a:pPr>
             <a:r>
-              <a:rPr lang="en-US" sz="800" i="1" dirty="0">
-                <a:solidFill>
-                  <a:srgbClr val="5F7183"/>
+              <a:rPr lang="en-US" sz="1100" dirty="0">
+                <a:solidFill>
+                  <a:srgbClr val="1B2733"/>
                 </a:solidFill>
                 <a:latin typeface="Calibri" pitchFamily="34" charset="0"/>
                 <a:ea typeface="Calibri" pitchFamily="34" charset="-122"/>
@@ -13695,7 +13695,7 @@
               </a:rPr>
               <a:t>Fact first, assessment second. Write "unknown" where you did not know. Report C immediately as an escape obstruction.</a:t>
             </a:r>
-            <a:endParaRPr lang="en-US" sz="900" dirty="0"/>
+            <a:endParaRPr lang="en-US" sz="950" dirty="0"/>
           </a:p>
         </p:txBody>
       </p:sp>
@@ -13707,7 +13707,7 @@
         </p:nvSpPr>
         <p:spPr>
           <a:xfrm>
-            <a:off x="640080" y="5358384"/>
+            <a:off x="640080" y="5413248"/>
             <a:ext cx="10911535" cy="457200"/>
           </a:xfrm>
           <a:prstGeom prst="roundRect">
@@ -13729,7 +13729,7 @@
         </p:nvSpPr>
         <p:spPr>
           <a:xfrm>
-            <a:off x="859536" y="5385816"/>
+            <a:off x="859536" y="5440680"/>
             <a:ext cx="10472623" cy="402336"/>
           </a:xfrm>
           <a:prstGeom prst="rect">
@@ -13786,9 +13786,9 @@
               <a:buNone/>
             </a:pPr>
             <a:r>
-              <a:rPr lang="en-US" sz="750" i="1" dirty="0">
-                <a:solidFill>
-                  <a:srgbClr val="9FD8CD"/>
+              <a:rPr lang="en-US" sz="950" dirty="0">
+                <a:solidFill>
+                  <a:srgbClr val="DCEFEB"/>
                 </a:solidFill>
                 <a:latin typeface="Calibri" pitchFamily="34" charset="0"/>
                 <a:ea typeface="Calibri" pitchFamily="34" charset="-122"/>
@@ -13808,8 +13808,8 @@
         </p:nvSpPr>
         <p:spPr>
           <a:xfrm>
-            <a:off x="640080" y="5907024"/>
-            <a:ext cx="10911535" cy="310896"/>
+            <a:off x="640080" y="5961888"/>
+            <a:ext cx="10911535" cy="292608"/>
           </a:xfrm>
           <a:prstGeom prst="rect">
             <a:avLst/>
@@ -13865,7 +13865,7 @@
               <a:buNone/>
             </a:pPr>
             <a:r>
-              <a:rPr lang="en-US" sz="750" i="1" dirty="0">
+              <a:rPr lang="en-US" sz="800" i="1" dirty="0">
                 <a:solidFill>
                   <a:srgbClr val="5F7183"/>
                 </a:solidFill>
@@ -13888,7 +13888,7 @@
         <p:spPr>
           <a:xfrm>
             <a:off x="640080" y="6272784"/>
-            <a:ext cx="9905695" cy="237744"/>
+            <a:ext cx="9905695" cy="219456"/>
           </a:xfrm>
           <a:prstGeom prst="rect">
             <a:avLst/>
@@ -13940,7 +13940,7 @@
         </p:nvSpPr>
         <p:spPr>
           <a:xfrm>
-            <a:off x="640080" y="6382512"/>
+            <a:off x="640080" y="6492240"/>
             <a:ext cx="8778240" cy="292608"/>
           </a:xfrm>
           <a:prstGeom prst="rect">
@@ -13993,7 +13993,7 @@
         </p:nvSpPr>
         <p:spPr>
           <a:xfrm>
-            <a:off x="10637215" y="6382512"/>
+            <a:off x="10637215" y="6492240"/>
             <a:ext cx="914400" cy="292608"/>
           </a:xfrm>
           <a:prstGeom prst="rect">
@@ -14088,8 +14088,8 @@
         </p:nvSpPr>
         <p:spPr>
           <a:xfrm>
-            <a:off x="640080" y="384048"/>
-            <a:ext cx="8982151" cy="768096"/>
+            <a:off x="640080" y="365760"/>
+            <a:ext cx="8982151" cy="749808"/>
           </a:xfrm>
           <a:prstGeom prst="rect">
             <a:avLst/>
@@ -14128,7 +14128,7 @@
               <a:buNone/>
             </a:pPr>
             <a:r>
-              <a:rPr lang="en-US" sz="1100" i="1" dirty="0">
+              <a:rPr lang="en-US" sz="1100" dirty="0">
                 <a:solidFill>
                   <a:srgbClr val="12B198"/>
                 </a:solidFill>
@@ -14150,7 +14150,7 @@
         </p:nvSpPr>
         <p:spPr>
           <a:xfrm>
-            <a:off x="9686239" y="438912"/>
+            <a:off x="9686239" y="420624"/>
             <a:ext cx="932688" cy="310896"/>
           </a:xfrm>
           <a:prstGeom prst="roundRect">
@@ -14172,7 +14172,7 @@
         </p:nvSpPr>
         <p:spPr>
           <a:xfrm>
-            <a:off x="9686239" y="438912"/>
+            <a:off x="9686239" y="420624"/>
             <a:ext cx="932688" cy="310896"/>
           </a:xfrm>
           <a:prstGeom prst="rect">
@@ -14211,7 +14211,7 @@
         </p:nvSpPr>
         <p:spPr>
           <a:xfrm>
-            <a:off x="640080" y="1188720"/>
+            <a:off x="640080" y="1115568"/>
             <a:ext cx="10911535" cy="1124712"/>
           </a:xfrm>
           <a:prstGeom prst="roundRect">
@@ -14233,7 +14233,7 @@
         </p:nvSpPr>
         <p:spPr>
           <a:xfrm>
-            <a:off x="950976" y="1316736"/>
+            <a:off x="950976" y="1243584"/>
             <a:ext cx="10289743" cy="868680"/>
           </a:xfrm>
           <a:prstGeom prst="rect">
@@ -14310,9 +14310,9 @@
               <a:buNone/>
             </a:pPr>
             <a:r>
-              <a:rPr lang="en-US" sz="800" i="1" dirty="0">
-                <a:solidFill>
-                  <a:srgbClr val="9FD8CD"/>
+              <a:rPr lang="en-US" sz="1000" dirty="0">
+                <a:solidFill>
+                  <a:srgbClr val="DCEFEB"/>
                 </a:solidFill>
                 <a:latin typeface="Calibri" pitchFamily="34" charset="0"/>
                 <a:ea typeface="Calibri" pitchFamily="34" charset="-122"/>
@@ -14332,7 +14332,7 @@
         </p:nvSpPr>
         <p:spPr>
           <a:xfrm>
-            <a:off x="640080" y="2459736"/>
+            <a:off x="640080" y="2386584"/>
             <a:ext cx="10911535" cy="566928"/>
           </a:xfrm>
           <a:prstGeom prst="rect">
@@ -14389,9 +14389,9 @@
               <a:buNone/>
             </a:pPr>
             <a:r>
-              <a:rPr lang="en-US" sz="850" i="1" dirty="0">
-                <a:solidFill>
-                  <a:srgbClr val="5F7183"/>
+              <a:rPr lang="en-US" sz="1050" dirty="0">
+                <a:solidFill>
+                  <a:srgbClr val="1B2733"/>
                 </a:solidFill>
                 <a:latin typeface="Calibri" pitchFamily="34" charset="0"/>
                 <a:ea typeface="Calibri" pitchFamily="34" charset="-122"/>
@@ -14411,12 +14411,12 @@
         </p:nvSpPr>
         <p:spPr>
           <a:xfrm>
-            <a:off x="640080" y="3081528"/>
-            <a:ext cx="5327752" cy="836676"/>
+            <a:off x="640080" y="3008376"/>
+            <a:ext cx="5327752" cy="900684"/>
           </a:xfrm>
           <a:prstGeom prst="roundRect">
             <a:avLst>
-              <a:gd name="adj" fmla="val 4372"/>
+              <a:gd name="adj" fmla="val 4061"/>
             </a:avLst>
           </a:prstGeom>
           <a:solidFill>
@@ -14433,7 +14433,7 @@
         </p:nvSpPr>
         <p:spPr>
           <a:xfrm>
-            <a:off x="804672" y="3353562"/>
+            <a:off x="804672" y="3312414"/>
             <a:ext cx="292608" cy="292608"/>
           </a:xfrm>
           <a:prstGeom prst="ellipse">
@@ -14453,7 +14453,7 @@
         </p:nvSpPr>
         <p:spPr>
           <a:xfrm>
-            <a:off x="804672" y="3353562"/>
+            <a:off x="804672" y="3312414"/>
             <a:ext cx="292608" cy="292608"/>
           </a:xfrm>
           <a:prstGeom prst="rect">
@@ -14492,8 +14492,8 @@
         </p:nvSpPr>
         <p:spPr>
           <a:xfrm>
-            <a:off x="1188720" y="3136392"/>
-            <a:ext cx="4596232" cy="726948"/>
+            <a:off x="1188720" y="3063240"/>
+            <a:ext cx="4596232" cy="790956"/>
           </a:xfrm>
           <a:prstGeom prst="rect">
             <a:avLst/>
@@ -14532,9 +14532,9 @@
               <a:buNone/>
             </a:pPr>
             <a:r>
-              <a:rPr lang="en-US" sz="800" i="1" dirty="0">
-                <a:solidFill>
-                  <a:srgbClr val="5F7183"/>
+              <a:rPr lang="en-US" sz="1050" dirty="0">
+                <a:solidFill>
+                  <a:srgbClr val="1B2733"/>
                 </a:solidFill>
                 <a:latin typeface="Calibri" pitchFamily="34" charset="0"/>
                 <a:ea typeface="Calibri" pitchFamily="34" charset="-122"/>
@@ -14554,12 +14554,12 @@
         </p:nvSpPr>
         <p:spPr>
           <a:xfrm>
-            <a:off x="6223864" y="3081528"/>
-            <a:ext cx="5327752" cy="836676"/>
+            <a:off x="6223864" y="3008376"/>
+            <a:ext cx="5327752" cy="900684"/>
           </a:xfrm>
           <a:prstGeom prst="roundRect">
             <a:avLst>
-              <a:gd name="adj" fmla="val 4372"/>
+              <a:gd name="adj" fmla="val 4061"/>
             </a:avLst>
           </a:prstGeom>
           <a:solidFill>
@@ -14576,7 +14576,7 @@
         </p:nvSpPr>
         <p:spPr>
           <a:xfrm>
-            <a:off x="6388456" y="3353562"/>
+            <a:off x="6388456" y="3312414"/>
             <a:ext cx="292608" cy="292608"/>
           </a:xfrm>
           <a:prstGeom prst="ellipse">
@@ -14596,7 +14596,7 @@
         </p:nvSpPr>
         <p:spPr>
           <a:xfrm>
-            <a:off x="6388456" y="3353562"/>
+            <a:off x="6388456" y="3312414"/>
             <a:ext cx="292608" cy="292608"/>
           </a:xfrm>
           <a:prstGeom prst="rect">
@@ -14635,8 +14635,8 @@
         </p:nvSpPr>
         <p:spPr>
           <a:xfrm>
-            <a:off x="6772504" y="3136392"/>
-            <a:ext cx="4596232" cy="726948"/>
+            <a:off x="6772504" y="3063240"/>
+            <a:ext cx="4596232" cy="790956"/>
           </a:xfrm>
           <a:prstGeom prst="rect">
             <a:avLst/>
@@ -14675,9 +14675,9 @@
               <a:buNone/>
             </a:pPr>
             <a:r>
-              <a:rPr lang="en-US" sz="800" i="1" dirty="0">
-                <a:solidFill>
-                  <a:srgbClr val="5F7183"/>
+              <a:rPr lang="en-US" sz="1050" dirty="0">
+                <a:solidFill>
+                  <a:srgbClr val="1B2733"/>
                 </a:solidFill>
                 <a:latin typeface="Calibri" pitchFamily="34" charset="0"/>
                 <a:ea typeface="Calibri" pitchFamily="34" charset="-122"/>
@@ -14697,12 +14697,12 @@
         </p:nvSpPr>
         <p:spPr>
           <a:xfrm>
-            <a:off x="640080" y="4027932"/>
-            <a:ext cx="5327752" cy="836676"/>
+            <a:off x="640080" y="4018788"/>
+            <a:ext cx="5327752" cy="900684"/>
           </a:xfrm>
           <a:prstGeom prst="roundRect">
             <a:avLst>
-              <a:gd name="adj" fmla="val 4372"/>
+              <a:gd name="adj" fmla="val 4061"/>
             </a:avLst>
           </a:prstGeom>
           <a:solidFill>
@@ -14719,7 +14719,7 @@
         </p:nvSpPr>
         <p:spPr>
           <a:xfrm>
-            <a:off x="804672" y="4299966"/>
+            <a:off x="804672" y="4322826"/>
             <a:ext cx="292608" cy="292608"/>
           </a:xfrm>
           <a:prstGeom prst="ellipse">
@@ -14739,7 +14739,7 @@
         </p:nvSpPr>
         <p:spPr>
           <a:xfrm>
-            <a:off x="804672" y="4299966"/>
+            <a:off x="804672" y="4322826"/>
             <a:ext cx="292608" cy="292608"/>
           </a:xfrm>
           <a:prstGeom prst="rect">
@@ -14778,8 +14778,8 @@
         </p:nvSpPr>
         <p:spPr>
           <a:xfrm>
-            <a:off x="1188720" y="4082796"/>
-            <a:ext cx="4596232" cy="726948"/>
+            <a:off x="1188720" y="4073652"/>
+            <a:ext cx="4596232" cy="790956"/>
           </a:xfrm>
           <a:prstGeom prst="rect">
             <a:avLst/>
@@ -14818,9 +14818,9 @@
               <a:buNone/>
             </a:pPr>
             <a:r>
-              <a:rPr lang="en-US" sz="800" i="1" dirty="0">
-                <a:solidFill>
-                  <a:srgbClr val="5F7183"/>
+              <a:rPr lang="en-US" sz="1050" dirty="0">
+                <a:solidFill>
+                  <a:srgbClr val="1B2733"/>
                 </a:solidFill>
                 <a:latin typeface="Calibri" pitchFamily="34" charset="0"/>
                 <a:ea typeface="Calibri" pitchFamily="34" charset="-122"/>
@@ -14840,12 +14840,12 @@
         </p:nvSpPr>
         <p:spPr>
           <a:xfrm>
-            <a:off x="6223864" y="4027932"/>
-            <a:ext cx="5327752" cy="836676"/>
+            <a:off x="6223864" y="4018788"/>
+            <a:ext cx="5327752" cy="900684"/>
           </a:xfrm>
           <a:prstGeom prst="roundRect">
             <a:avLst>
-              <a:gd name="adj" fmla="val 4372"/>
+              <a:gd name="adj" fmla="val 4061"/>
             </a:avLst>
           </a:prstGeom>
           <a:solidFill>
@@ -14862,7 +14862,7 @@
         </p:nvSpPr>
         <p:spPr>
           <a:xfrm>
-            <a:off x="6388456" y="4299966"/>
+            <a:off x="6388456" y="4322826"/>
             <a:ext cx="292608" cy="292608"/>
           </a:xfrm>
           <a:prstGeom prst="ellipse">
@@ -14882,7 +14882,7 @@
         </p:nvSpPr>
         <p:spPr>
           <a:xfrm>
-            <a:off x="6388456" y="4299966"/>
+            <a:off x="6388456" y="4322826"/>
             <a:ext cx="292608" cy="292608"/>
           </a:xfrm>
           <a:prstGeom prst="rect">
@@ -14921,8 +14921,8 @@
         </p:nvSpPr>
         <p:spPr>
           <a:xfrm>
-            <a:off x="6772504" y="4082796"/>
-            <a:ext cx="4596232" cy="726948"/>
+            <a:off x="6772504" y="4073652"/>
+            <a:ext cx="4596232" cy="790956"/>
           </a:xfrm>
           <a:prstGeom prst="rect">
             <a:avLst/>
@@ -14961,9 +14961,9 @@
               <a:buNone/>
             </a:pPr>
             <a:r>
-              <a:rPr lang="en-US" sz="800" i="1" dirty="0">
-                <a:solidFill>
-                  <a:srgbClr val="5F7183"/>
+              <a:rPr lang="en-US" sz="1050" dirty="0">
+                <a:solidFill>
+                  <a:srgbClr val="1B2733"/>
                 </a:solidFill>
                 <a:latin typeface="Calibri" pitchFamily="34" charset="0"/>
                 <a:ea typeface="Calibri" pitchFamily="34" charset="-122"/>
@@ -14983,7 +14983,7 @@
         </p:nvSpPr>
         <p:spPr>
           <a:xfrm>
-            <a:off x="640080" y="4919472"/>
+            <a:off x="640080" y="4974336"/>
             <a:ext cx="10911535" cy="420624"/>
           </a:xfrm>
           <a:prstGeom prst="roundRect">
@@ -15005,7 +15005,7 @@
         </p:nvSpPr>
         <p:spPr>
           <a:xfrm>
-            <a:off x="877824" y="4946904"/>
+            <a:off x="877824" y="5001768"/>
             <a:ext cx="10436047" cy="365760"/>
           </a:xfrm>
           <a:prstGeom prst="rect">
@@ -15062,9 +15062,9 @@
               <a:buNone/>
             </a:pPr>
             <a:r>
-              <a:rPr lang="en-US" sz="750" i="1" dirty="0">
-                <a:solidFill>
-                  <a:srgbClr val="5F7183"/>
+              <a:rPr lang="en-US" sz="950" dirty="0">
+                <a:solidFill>
+                  <a:srgbClr val="1B2733"/>
                 </a:solidFill>
                 <a:latin typeface="Calibri" pitchFamily="34" charset="0"/>
                 <a:ea typeface="Calibri" pitchFamily="34" charset="-122"/>
@@ -15084,7 +15084,7 @@
         </p:nvSpPr>
         <p:spPr>
           <a:xfrm>
-            <a:off x="640080" y="5394960"/>
+            <a:off x="640080" y="5449824"/>
             <a:ext cx="10911535" cy="420624"/>
           </a:xfrm>
           <a:prstGeom prst="roundRect">
@@ -15106,7 +15106,7 @@
         </p:nvSpPr>
         <p:spPr>
           <a:xfrm>
-            <a:off x="877824" y="5422392"/>
+            <a:off x="877824" y="5477256"/>
             <a:ext cx="10436047" cy="365760"/>
           </a:xfrm>
           <a:prstGeom prst="rect">
@@ -15163,7 +15163,86 @@
               <a:buNone/>
             </a:pPr>
             <a:r>
-              <a:rPr lang="en-US" sz="750" i="1" dirty="0">
+              <a:rPr lang="en-US" sz="950" dirty="0">
+                <a:solidFill>
+                  <a:srgbClr val="1B2733"/>
+                </a:solidFill>
+                <a:latin typeface="Calibri" pitchFamily="34" charset="0"/>
+                <a:ea typeface="Calibri" pitchFamily="34" charset="-122"/>
+                <a:cs typeface="Calibri" pitchFamily="34" charset="-120"/>
+              </a:rPr>
+              <a:t>You are in the basement and the radio does not reach.</a:t>
+            </a:r>
+            <a:endParaRPr lang="en-US" sz="850" dirty="0"/>
+          </a:p>
+        </p:txBody>
+      </p:sp>
+      <p:sp>
+        <p:nvSpPr>
+          <p:cNvPr id="29" name="Text 26"/>
+          <p:cNvSpPr/>
+          <p:nvPr/>
+        </p:nvSpPr>
+        <p:spPr>
+          <a:xfrm>
+            <a:off x="640080" y="5961888"/>
+            <a:ext cx="10911535" cy="292608"/>
+          </a:xfrm>
+          <a:prstGeom prst="rect">
+            <a:avLst/>
+          </a:prstGeom>
+          <a:noFill/>
+          <a:ln/>
+        </p:spPr>
+        <p:txBody>
+          <a:bodyPr wrap="square" lIns="0" tIns="0" rIns="0" bIns="0" rtlCol="0" anchor="t"/>
+          <a:lstStyle/>
+          <a:p>
+            <a:pPr indent="0" marL="0">
+              <a:lnSpc>
+                <a:spcPct val="88000"/>
+              </a:lnSpc>
+              <a:buNone/>
+            </a:pPr>
+            <a:r>
+              <a:rPr lang="en-US" sz="900" b="1" dirty="0">
+                <a:solidFill>
+                  <a:srgbClr val="0D8A76"/>
+                </a:solidFill>
+                <a:latin typeface="Yu Gothic" pitchFamily="34" charset="0"/>
+                <a:ea typeface="Yu Gothic" pitchFamily="34" charset="-122"/>
+                <a:cs typeface="Yu Gothic" pitchFamily="34" charset="-120"/>
+              </a:rPr>
+              <a:t>Site SOP優先　</a:t>
+            </a:r>
+            <a:pPr indent="0" marL="0">
+              <a:lnSpc>
+                <a:spcPct val="88000"/>
+              </a:lnSpc>
+              <a:buNone/>
+            </a:pPr>
+            <a:r>
+              <a:rPr lang="en-US" sz="900" dirty="0">
+                <a:solidFill>
+                  <a:srgbClr val="1B2733"/>
+                </a:solidFill>
+                <a:latin typeface="Yu Gothic" pitchFamily="34" charset="0"/>
+                <a:ea typeface="Yu Gothic" pitchFamily="34" charset="-122"/>
+                <a:cs typeface="Yu Gothic" pitchFamily="34" charset="-120"/>
+              </a:rPr>
+              <a:t>非常口の開放時の対応、単独行動の可否、応援要請の基準は現場ごとに異なる。Site SOPによる。</a:t>
+            </a:r>
+            <a:endParaRPr lang="en-US" sz="900" dirty="0"/>
+          </a:p>
+          <a:p>
+            <a:pPr indent="0" marL="0">
+              <a:lnSpc>
+                <a:spcPct val="88000"/>
+              </a:lnSpc>
+              <a:buNone/>
+            </a:pPr>
+            <a:r>
+              <a:rPr lang="en-US" sz="800" i="1" dirty="0">
                 <a:solidFill>
                   <a:srgbClr val="5F7183"/>
                 </a:solidFill>
@@ -15171,22 +15250,22 @@
                 <a:ea typeface="Calibri" pitchFamily="34" charset="-122"/>
                 <a:cs typeface="Calibri" pitchFamily="34" charset="-120"/>
               </a:rPr>
-              <a:t>You are in the basement and the radio does not reach.</a:t>
-            </a:r>
-            <a:endParaRPr lang="en-US" sz="850" dirty="0"/>
-          </a:p>
-        </p:txBody>
-      </p:sp>
-      <p:sp>
-        <p:nvSpPr>
-          <p:cNvPr id="29" name="Text 26"/>
-          <p:cNvSpPr/>
-          <p:nvPr/>
-        </p:nvSpPr>
-        <p:spPr>
-          <a:xfrm>
-            <a:off x="640080" y="5907024"/>
-            <a:ext cx="10911535" cy="310896"/>
+              <a:t>Response to an open emergency door, whether to act alone, and when to call backup differ by site.</a:t>
+            </a:r>
+            <a:endParaRPr lang="en-US" sz="900" dirty="0"/>
+          </a:p>
+        </p:txBody>
+      </p:sp>
+      <p:sp>
+        <p:nvSpPr>
+          <p:cNvPr id="30" name="Text 27"/>
+          <p:cNvSpPr/>
+          <p:nvPr/>
+        </p:nvSpPr>
+        <p:spPr>
+          <a:xfrm>
+            <a:off x="640080" y="6272784"/>
+            <a:ext cx="9905695" cy="219456"/>
           </a:xfrm>
           <a:prstGeom prst="rect">
             <a:avLst/>
@@ -15199,167 +15278,88 @@
           <a:lstStyle/>
           <a:p>
             <a:pPr indent="0" marL="0">
-              <a:lnSpc>
-                <a:spcPct val="88000"/>
-              </a:lnSpc>
-              <a:buNone/>
-            </a:pPr>
-            <a:r>
-              <a:rPr lang="en-US" sz="900" b="1" dirty="0">
-                <a:solidFill>
-                  <a:srgbClr val="0D8A76"/>
-                </a:solidFill>
-                <a:latin typeface="Yu Gothic" pitchFamily="34" charset="0"/>
-                <a:ea typeface="Yu Gothic" pitchFamily="34" charset="-122"/>
-                <a:cs typeface="Yu Gothic" pitchFamily="34" charset="-120"/>
-              </a:rPr>
-              <a:t>Site SOP優先　</a:t>
-            </a:r>
-            <a:pPr indent="0" marL="0">
-              <a:lnSpc>
-                <a:spcPct val="88000"/>
-              </a:lnSpc>
+              <a:buNone/>
+            </a:pPr>
+            <a:r>
+              <a:rPr lang="en-US" sz="750" b="1" dirty="0">
+                <a:solidFill>
+                  <a:srgbClr val="D6E0E9"/>
+                </a:solidFill>
+                <a:latin typeface="Yu Gothic" pitchFamily="34" charset="0"/>
+                <a:ea typeface="Yu Gothic" pitchFamily="34" charset="-122"/>
+                <a:cs typeface="Yu Gothic" pitchFamily="34" charset="-120"/>
+              </a:rPr>
+              <a:t>ソース　</a:t>
+            </a:r>
+            <a:pPr indent="0" marL="0">
+              <a:buNone/>
+            </a:pPr>
+            <a:r>
+              <a:rPr lang="en-US" sz="750" dirty="0">
+                <a:solidFill>
+                  <a:srgbClr val="5F7183"/>
+                </a:solidFill>
+                <a:latin typeface="Yu Gothic" pitchFamily="34" charset="0"/>
+                <a:ea typeface="Yu Gothic" pitchFamily="34" charset="-122"/>
+                <a:cs typeface="Yu Gothic" pitchFamily="34" charset="-120"/>
+              </a:rPr>
+              <a:t>警備業法、警察庁「警備員教育」、消防法</a:t>
+            </a:r>
+            <a:endParaRPr lang="en-US" sz="750" dirty="0"/>
+          </a:p>
+        </p:txBody>
+      </p:sp>
+      <p:sp>
+        <p:nvSpPr>
+          <p:cNvPr id="31" name="Text 28"/>
+          <p:cNvSpPr/>
+          <p:nvPr/>
+        </p:nvSpPr>
+        <p:spPr>
+          <a:xfrm>
+            <a:off x="640080" y="6492240"/>
+            <a:ext cx="8778240" cy="292608"/>
+          </a:xfrm>
+          <a:prstGeom prst="rect">
+            <a:avLst/>
+          </a:prstGeom>
+          <a:noFill/>
+          <a:ln/>
+        </p:spPr>
+        <p:txBody>
+          <a:bodyPr wrap="square" lIns="0" tIns="0" rIns="0" bIns="0" rtlCol="0" anchor="ctr"/>
+          <a:lstStyle/>
+          <a:p>
+            <a:pPr indent="0" marL="0">
               <a:buNone/>
             </a:pPr>
             <a:r>
               <a:rPr lang="en-US" sz="900" dirty="0">
                 <a:solidFill>
-                  <a:srgbClr val="1B2733"/>
-                </a:solidFill>
-                <a:latin typeface="Yu Gothic" pitchFamily="34" charset="0"/>
-                <a:ea typeface="Yu Gothic" pitchFamily="34" charset="-122"/>
-                <a:cs typeface="Yu Gothic" pitchFamily="34" charset="-120"/>
-              </a:rPr>
-              <a:t>非常口の開放時の対応、単独行動の可否、応援要請の基準は現場ごとに異なる。Site SOPによる。</a:t>
+                  <a:srgbClr val="5F7183"/>
+                </a:solidFill>
+                <a:latin typeface="Yu Gothic" pitchFamily="34" charset="0"/>
+                <a:ea typeface="Yu Gothic" pitchFamily="34" charset="-122"/>
+                <a:cs typeface="Yu Gothic" pitchFamily="34" charset="-120"/>
+              </a:rPr>
+              <a:t>第4時限｜業務別教育1 巡回の方法に関すること  </a:t>
+            </a:r>
+            <a:pPr indent="0" marL="0">
+              <a:buNone/>
+            </a:pPr>
+            <a:r>
+              <a:rPr lang="en-US" sz="850" i="1" dirty="0">
+                <a:solidFill>
+                  <a:srgbClr val="D6E0E9"/>
+                </a:solidFill>
+                <a:latin typeface="Calibri" pitchFamily="34" charset="0"/>
+                <a:ea typeface="Calibri" pitchFamily="34" charset="-122"/>
+                <a:cs typeface="Calibri" pitchFamily="34" charset="-120"/>
+              </a:rPr>
+              <a:t>Period 4 | Task-Specific Training 1 — Patrol Methods</a:t>
             </a:r>
             <a:endParaRPr lang="en-US" sz="900" dirty="0"/>
           </a:p>
-          <a:p>
-            <a:pPr indent="0" marL="0">
-              <a:lnSpc>
-                <a:spcPct val="88000"/>
-              </a:lnSpc>
-              <a:buNone/>
-            </a:pPr>
-            <a:r>
-              <a:rPr lang="en-US" sz="750" i="1" dirty="0">
-                <a:solidFill>
-                  <a:srgbClr val="5F7183"/>
-                </a:solidFill>
-                <a:latin typeface="Calibri" pitchFamily="34" charset="0"/>
-                <a:ea typeface="Calibri" pitchFamily="34" charset="-122"/>
-                <a:cs typeface="Calibri" pitchFamily="34" charset="-120"/>
-              </a:rPr>
-              <a:t>Response to an open emergency door, whether to act alone, and when to call backup differ by site.</a:t>
-            </a:r>
-            <a:endParaRPr lang="en-US" sz="900" dirty="0"/>
-          </a:p>
-        </p:txBody>
-      </p:sp>
-      <p:sp>
-        <p:nvSpPr>
-          <p:cNvPr id="30" name="Text 27"/>
-          <p:cNvSpPr/>
-          <p:nvPr/>
-        </p:nvSpPr>
-        <p:spPr>
-          <a:xfrm>
-            <a:off x="640080" y="6272784"/>
-            <a:ext cx="9905695" cy="237744"/>
-          </a:xfrm>
-          <a:prstGeom prst="rect">
-            <a:avLst/>
-          </a:prstGeom>
-          <a:noFill/>
-          <a:ln/>
-        </p:spPr>
-        <p:txBody>
-          <a:bodyPr wrap="square" lIns="0" tIns="0" rIns="0" bIns="0" rtlCol="0" anchor="t"/>
-          <a:lstStyle/>
-          <a:p>
-            <a:pPr indent="0" marL="0">
-              <a:buNone/>
-            </a:pPr>
-            <a:r>
-              <a:rPr lang="en-US" sz="750" b="1" dirty="0">
-                <a:solidFill>
-                  <a:srgbClr val="D6E0E9"/>
-                </a:solidFill>
-                <a:latin typeface="Yu Gothic" pitchFamily="34" charset="0"/>
-                <a:ea typeface="Yu Gothic" pitchFamily="34" charset="-122"/>
-                <a:cs typeface="Yu Gothic" pitchFamily="34" charset="-120"/>
-              </a:rPr>
-              <a:t>ソース　</a:t>
-            </a:r>
-            <a:pPr indent="0" marL="0">
-              <a:buNone/>
-            </a:pPr>
-            <a:r>
-              <a:rPr lang="en-US" sz="750" dirty="0">
-                <a:solidFill>
-                  <a:srgbClr val="5F7183"/>
-                </a:solidFill>
-                <a:latin typeface="Yu Gothic" pitchFamily="34" charset="0"/>
-                <a:ea typeface="Yu Gothic" pitchFamily="34" charset="-122"/>
-                <a:cs typeface="Yu Gothic" pitchFamily="34" charset="-120"/>
-              </a:rPr>
-              <a:t>警備業法、警察庁「警備員教育」、消防法</a:t>
-            </a:r>
-            <a:endParaRPr lang="en-US" sz="750" dirty="0"/>
-          </a:p>
-        </p:txBody>
-      </p:sp>
-      <p:sp>
-        <p:nvSpPr>
-          <p:cNvPr id="31" name="Text 28"/>
-          <p:cNvSpPr/>
-          <p:nvPr/>
-        </p:nvSpPr>
-        <p:spPr>
-          <a:xfrm>
-            <a:off x="640080" y="6382512"/>
-            <a:ext cx="8778240" cy="292608"/>
-          </a:xfrm>
-          <a:prstGeom prst="rect">
-            <a:avLst/>
-          </a:prstGeom>
-          <a:noFill/>
-          <a:ln/>
-        </p:spPr>
-        <p:txBody>
-          <a:bodyPr wrap="square" lIns="0" tIns="0" rIns="0" bIns="0" rtlCol="0" anchor="ctr"/>
-          <a:lstStyle/>
-          <a:p>
-            <a:pPr indent="0" marL="0">
-              <a:buNone/>
-            </a:pPr>
-            <a:r>
-              <a:rPr lang="en-US" sz="900" dirty="0">
-                <a:solidFill>
-                  <a:srgbClr val="5F7183"/>
-                </a:solidFill>
-                <a:latin typeface="Yu Gothic" pitchFamily="34" charset="0"/>
-                <a:ea typeface="Yu Gothic" pitchFamily="34" charset="-122"/>
-                <a:cs typeface="Yu Gothic" pitchFamily="34" charset="-120"/>
-              </a:rPr>
-              <a:t>第4時限｜業務別教育1 巡回の方法に関すること  </a:t>
-            </a:r>
-            <a:pPr indent="0" marL="0">
-              <a:buNone/>
-            </a:pPr>
-            <a:r>
-              <a:rPr lang="en-US" sz="850" i="1" dirty="0">
-                <a:solidFill>
-                  <a:srgbClr val="D6E0E9"/>
-                </a:solidFill>
-                <a:latin typeface="Calibri" pitchFamily="34" charset="0"/>
-                <a:ea typeface="Calibri" pitchFamily="34" charset="-122"/>
-                <a:cs typeface="Calibri" pitchFamily="34" charset="-120"/>
-              </a:rPr>
-              <a:t>Period 4 | Task-Specific Training 1 — Patrol Methods</a:t>
-            </a:r>
-            <a:endParaRPr lang="en-US" sz="900" dirty="0"/>
-          </a:p>
         </p:txBody>
       </p:sp>
       <p:sp>
@@ -15370,7 +15370,7 @@
         </p:nvSpPr>
         <p:spPr>
           <a:xfrm>
-            <a:off x="10637215" y="6382512"/>
+            <a:off x="10637215" y="6492240"/>
             <a:ext cx="914400" cy="292608"/>
           </a:xfrm>
           <a:prstGeom prst="rect">

--- a/decks/03_4限_巡回.pptx
+++ b/decks/03_4限_巡回.pptx
@@ -2689,7 +2689,7 @@
               <a:buNone/>
             </a:pPr>
             <a:r>
-              <a:rPr lang="en-US" sz="1400" dirty="0">
+              <a:rPr lang="en-US" sz="1500" dirty="0">
                 <a:solidFill>
                   <a:srgbClr val="1B2733"/>
                 </a:solidFill>
@@ -2832,7 +2832,7 @@
               <a:buNone/>
             </a:pPr>
             <a:r>
-              <a:rPr lang="en-US" sz="1400" dirty="0">
+              <a:rPr lang="en-US" sz="1500" dirty="0">
                 <a:solidFill>
                   <a:srgbClr val="1B2733"/>
                 </a:solidFill>
@@ -2975,7 +2975,7 @@
               <a:buNone/>
             </a:pPr>
             <a:r>
-              <a:rPr lang="en-US" sz="1400" dirty="0">
+              <a:rPr lang="en-US" sz="1500" dirty="0">
                 <a:solidFill>
                   <a:srgbClr val="1B2733"/>
                 </a:solidFill>
@@ -3328,7 +3328,7 @@
               <a:buNone/>
             </a:pPr>
             <a:r>
-              <a:rPr lang="en-US" sz="1400" dirty="0">
+              <a:rPr lang="en-US" sz="1500" dirty="0">
                 <a:solidFill>
                   <a:srgbClr val="1B2733"/>
                 </a:solidFill>
@@ -3471,7 +3471,7 @@
               <a:buNone/>
             </a:pPr>
             <a:r>
-              <a:rPr lang="en-US" sz="1400" dirty="0">
+              <a:rPr lang="en-US" sz="1500" dirty="0">
                 <a:solidFill>
                   <a:srgbClr val="1B2733"/>
                 </a:solidFill>
@@ -3614,7 +3614,7 @@
               <a:buNone/>
             </a:pPr>
             <a:r>
-              <a:rPr lang="en-US" sz="1400" dirty="0">
+              <a:rPr lang="en-US" sz="1500" dirty="0">
                 <a:solidFill>
                   <a:srgbClr val="1B2733"/>
                 </a:solidFill>
@@ -4029,7 +4029,7 @@
               <a:buNone/>
             </a:pPr>
             <a:r>
-              <a:rPr lang="en-US" sz="1500" dirty="0">
+              <a:rPr lang="en-US" sz="1600" dirty="0">
                 <a:solidFill>
                   <a:srgbClr val="1B2733"/>
                 </a:solidFill>
@@ -4172,7 +4172,7 @@
               <a:buNone/>
             </a:pPr>
             <a:r>
-              <a:rPr lang="en-US" sz="1500" dirty="0">
+              <a:rPr lang="en-US" sz="1600" dirty="0">
                 <a:solidFill>
                   <a:srgbClr val="1B2733"/>
                 </a:solidFill>
@@ -4315,7 +4315,7 @@
               <a:buNone/>
             </a:pPr>
             <a:r>
-              <a:rPr lang="en-US" sz="1500" dirty="0">
+              <a:rPr lang="en-US" sz="1600" dirty="0">
                 <a:solidFill>
                   <a:srgbClr val="1B2733"/>
                 </a:solidFill>
@@ -4458,7 +4458,7 @@
               <a:buNone/>
             </a:pPr>
             <a:r>
-              <a:rPr lang="en-US" sz="1500" dirty="0">
+              <a:rPr lang="en-US" sz="1600" dirty="0">
                 <a:solidFill>
                   <a:srgbClr val="1B2733"/>
                 </a:solidFill>
@@ -4752,11 +4752,11 @@
         <p:spPr>
           <a:xfrm>
             <a:off x="640080" y="1115568"/>
-            <a:ext cx="10911535" cy="971550"/>
+            <a:ext cx="10911535" cy="1089880"/>
           </a:xfrm>
           <a:prstGeom prst="roundRect">
             <a:avLst>
-              <a:gd name="adj" fmla="val 3765"/>
+              <a:gd name="adj" fmla="val 3356"/>
             </a:avLst>
           </a:prstGeom>
           <a:solidFill>
@@ -4773,7 +4773,7 @@
         </p:nvSpPr>
         <p:spPr>
           <a:xfrm>
-            <a:off x="841248" y="1427607"/>
+            <a:off x="841248" y="1486772"/>
             <a:ext cx="347472" cy="347472"/>
           </a:xfrm>
           <a:prstGeom prst="ellipse">
@@ -4793,7 +4793,7 @@
         </p:nvSpPr>
         <p:spPr>
           <a:xfrm>
-            <a:off x="841248" y="1427607"/>
+            <a:off x="841248" y="1486772"/>
             <a:ext cx="347472" cy="347472"/>
           </a:xfrm>
           <a:prstGeom prst="rect">
@@ -4833,7 +4833,7 @@
         <p:spPr>
           <a:xfrm>
             <a:off x="1280160" y="1179576"/>
-            <a:ext cx="10033711" cy="843534"/>
+            <a:ext cx="10033711" cy="961864"/>
           </a:xfrm>
           <a:prstGeom prst="rect">
             <a:avLst/>
@@ -4892,7 +4892,7 @@
               <a:buNone/>
             </a:pPr>
             <a:r>
-              <a:rPr lang="en-US" sz="1400" dirty="0">
+              <a:rPr lang="en-US" sz="1500" dirty="0">
                 <a:solidFill>
                   <a:srgbClr val="1B2733"/>
                 </a:solidFill>
@@ -4914,12 +4914,12 @@
         </p:nvSpPr>
         <p:spPr>
           <a:xfrm>
-            <a:off x="640080" y="2187702"/>
-            <a:ext cx="10911535" cy="971550"/>
+            <a:off x="640080" y="2306032"/>
+            <a:ext cx="10911535" cy="853220"/>
           </a:xfrm>
           <a:prstGeom prst="roundRect">
             <a:avLst>
-              <a:gd name="adj" fmla="val 3765"/>
+              <a:gd name="adj" fmla="val 4287"/>
             </a:avLst>
           </a:prstGeom>
           <a:solidFill>
@@ -4936,7 +4936,7 @@
         </p:nvSpPr>
         <p:spPr>
           <a:xfrm>
-            <a:off x="841248" y="2499741"/>
+            <a:off x="841248" y="2558906"/>
             <a:ext cx="347472" cy="347472"/>
           </a:xfrm>
           <a:prstGeom prst="ellipse">
@@ -4956,7 +4956,7 @@
         </p:nvSpPr>
         <p:spPr>
           <a:xfrm>
-            <a:off x="841248" y="2499741"/>
+            <a:off x="841248" y="2558906"/>
             <a:ext cx="347472" cy="347472"/>
           </a:xfrm>
           <a:prstGeom prst="rect">
@@ -4995,8 +4995,8 @@
         </p:nvSpPr>
         <p:spPr>
           <a:xfrm>
-            <a:off x="1280160" y="2251710"/>
-            <a:ext cx="10033711" cy="843534"/>
+            <a:off x="1280160" y="2370040"/>
+            <a:ext cx="10033711" cy="725204"/>
           </a:xfrm>
           <a:prstGeom prst="rect">
             <a:avLst/>
@@ -5055,7 +5055,7 @@
               <a:buNone/>
             </a:pPr>
             <a:r>
-              <a:rPr lang="en-US" sz="1400" dirty="0">
+              <a:rPr lang="en-US" sz="1500" dirty="0">
                 <a:solidFill>
                   <a:srgbClr val="1B2733"/>
                 </a:solidFill>
@@ -5078,11 +5078,11 @@
         <p:spPr>
           <a:xfrm>
             <a:off x="640080" y="3259836"/>
-            <a:ext cx="10911535" cy="971550"/>
+            <a:ext cx="10911535" cy="853220"/>
           </a:xfrm>
           <a:prstGeom prst="roundRect">
             <a:avLst>
-              <a:gd name="adj" fmla="val 3765"/>
+              <a:gd name="adj" fmla="val 4287"/>
             </a:avLst>
           </a:prstGeom>
           <a:solidFill>
@@ -5099,7 +5099,7 @@
         </p:nvSpPr>
         <p:spPr>
           <a:xfrm>
-            <a:off x="841248" y="3571875"/>
+            <a:off x="841248" y="3512710"/>
             <a:ext cx="347472" cy="347472"/>
           </a:xfrm>
           <a:prstGeom prst="ellipse">
@@ -5119,7 +5119,7 @@
         </p:nvSpPr>
         <p:spPr>
           <a:xfrm>
-            <a:off x="841248" y="3571875"/>
+            <a:off x="841248" y="3512710"/>
             <a:ext cx="347472" cy="347472"/>
           </a:xfrm>
           <a:prstGeom prst="rect">
@@ -5159,7 +5159,7 @@
         <p:spPr>
           <a:xfrm>
             <a:off x="1280160" y="3323844"/>
-            <a:ext cx="10033711" cy="843534"/>
+            <a:ext cx="10033711" cy="725204"/>
           </a:xfrm>
           <a:prstGeom prst="rect">
             <a:avLst/>
@@ -5218,7 +5218,7 @@
               <a:buNone/>
             </a:pPr>
             <a:r>
-              <a:rPr lang="en-US" sz="1400" dirty="0">
+              <a:rPr lang="en-US" sz="1500" dirty="0">
                 <a:solidFill>
                   <a:srgbClr val="1B2733"/>
                 </a:solidFill>
@@ -5240,12 +5240,12 @@
         </p:nvSpPr>
         <p:spPr>
           <a:xfrm>
-            <a:off x="640080" y="4331970"/>
-            <a:ext cx="10911535" cy="971550"/>
+            <a:off x="640080" y="4213640"/>
+            <a:ext cx="10911535" cy="1089880"/>
           </a:xfrm>
           <a:prstGeom prst="roundRect">
             <a:avLst>
-              <a:gd name="adj" fmla="val 3765"/>
+              <a:gd name="adj" fmla="val 3356"/>
             </a:avLst>
           </a:prstGeom>
           <a:solidFill>
@@ -5262,7 +5262,7 @@
         </p:nvSpPr>
         <p:spPr>
           <a:xfrm>
-            <a:off x="841248" y="4644009"/>
+            <a:off x="841248" y="4584844"/>
             <a:ext cx="347472" cy="347472"/>
           </a:xfrm>
           <a:prstGeom prst="ellipse">
@@ -5282,7 +5282,7 @@
         </p:nvSpPr>
         <p:spPr>
           <a:xfrm>
-            <a:off x="841248" y="4644009"/>
+            <a:off x="841248" y="4584844"/>
             <a:ext cx="347472" cy="347472"/>
           </a:xfrm>
           <a:prstGeom prst="rect">
@@ -5321,8 +5321,8 @@
         </p:nvSpPr>
         <p:spPr>
           <a:xfrm>
-            <a:off x="1280160" y="4395978"/>
-            <a:ext cx="10033711" cy="843534"/>
+            <a:off x="1280160" y="4277648"/>
+            <a:ext cx="10033711" cy="961864"/>
           </a:xfrm>
           <a:prstGeom prst="rect">
             <a:avLst/>
@@ -5381,7 +5381,7 @@
               <a:buNone/>
             </a:pPr>
             <a:r>
-              <a:rPr lang="en-US" sz="1400" dirty="0">
+              <a:rPr lang="en-US" sz="1500" dirty="0">
                 <a:solidFill>
                   <a:srgbClr val="1B2733"/>
                 </a:solidFill>
@@ -5482,7 +5482,7 @@
               <a:buNone/>
             </a:pPr>
             <a:r>
-              <a:rPr lang="en-US" sz="1200" dirty="0">
+              <a:rPr lang="en-US" sz="1300" dirty="0">
                 <a:solidFill>
                   <a:srgbClr val="DCEFEB"/>
                 </a:solidFill>
@@ -6006,7 +6006,7 @@
               <a:buNone/>
             </a:pPr>
             <a:r>
-              <a:rPr lang="en-US" sz="1350" dirty="0">
+              <a:rPr lang="en-US" sz="1450" dirty="0">
                 <a:solidFill>
                   <a:srgbClr val="DCEFEB"/>
                 </a:solidFill>
@@ -6085,7 +6085,7 @@
               <a:buNone/>
             </a:pPr>
             <a:r>
-              <a:rPr lang="en-US" sz="1350" dirty="0">
+              <a:rPr lang="en-US" sz="1500" dirty="0">
                 <a:solidFill>
                   <a:srgbClr val="1B2733"/>
                 </a:solidFill>
@@ -6228,7 +6228,7 @@
               <a:buNone/>
             </a:pPr>
             <a:r>
-              <a:rPr lang="en-US" sz="1350" dirty="0">
+              <a:rPr lang="en-US" sz="1400" dirty="0">
                 <a:solidFill>
                   <a:srgbClr val="1B2733"/>
                 </a:solidFill>
@@ -6371,7 +6371,7 @@
               <a:buNone/>
             </a:pPr>
             <a:r>
-              <a:rPr lang="en-US" sz="1350" dirty="0">
+              <a:rPr lang="en-US" sz="1400" dirty="0">
                 <a:solidFill>
                   <a:srgbClr val="1B2733"/>
                 </a:solidFill>
@@ -6514,7 +6514,7 @@
               <a:buNone/>
             </a:pPr>
             <a:r>
-              <a:rPr lang="en-US" sz="1350" dirty="0">
+              <a:rPr lang="en-US" sz="1400" dirty="0">
                 <a:solidFill>
                   <a:srgbClr val="1B2733"/>
                 </a:solidFill>
@@ -6657,7 +6657,7 @@
               <a:buNone/>
             </a:pPr>
             <a:r>
-              <a:rPr lang="en-US" sz="1350" dirty="0">
+              <a:rPr lang="en-US" sz="1400" dirty="0">
                 <a:solidFill>
                   <a:srgbClr val="1B2733"/>
                 </a:solidFill>
@@ -6758,7 +6758,7 @@
               <a:buNone/>
             </a:pPr>
             <a:r>
-              <a:rPr lang="en-US" sz="1250" dirty="0">
+              <a:rPr lang="en-US" sz="1350" dirty="0">
                 <a:solidFill>
                   <a:srgbClr val="1B2733"/>
                 </a:solidFill>
@@ -6859,7 +6859,7 @@
               <a:buNone/>
             </a:pPr>
             <a:r>
-              <a:rPr lang="en-US" sz="1250" dirty="0">
+              <a:rPr lang="en-US" sz="1350" dirty="0">
                 <a:solidFill>
                   <a:srgbClr val="1B2733"/>
                 </a:solidFill>
@@ -7425,7 +7425,7 @@
               <a:buNone/>
             </a:pPr>
             <a:r>
-              <a:rPr lang="en-US" sz="1400" dirty="0">
+              <a:rPr lang="en-US" sz="1500" dirty="0">
                 <a:solidFill>
                   <a:srgbClr val="1B2733"/>
                 </a:solidFill>
@@ -7588,7 +7588,7 @@
               <a:buNone/>
             </a:pPr>
             <a:r>
-              <a:rPr lang="en-US" sz="1400" dirty="0">
+              <a:rPr lang="en-US" sz="1500" dirty="0">
                 <a:solidFill>
                   <a:srgbClr val="1B2733"/>
                 </a:solidFill>
@@ -7751,7 +7751,7 @@
               <a:buNone/>
             </a:pPr>
             <a:r>
-              <a:rPr lang="en-US" sz="1400" dirty="0">
+              <a:rPr lang="en-US" sz="1500" dirty="0">
                 <a:solidFill>
                   <a:srgbClr val="1B2733"/>
                 </a:solidFill>
@@ -7914,7 +7914,7 @@
               <a:buNone/>
             </a:pPr>
             <a:r>
-              <a:rPr lang="en-US" sz="1400" dirty="0">
+              <a:rPr lang="en-US" sz="1500" dirty="0">
                 <a:solidFill>
                   <a:srgbClr val="1B2733"/>
                 </a:solidFill>
@@ -8032,7 +8032,7 @@
               <a:buNone/>
             </a:pPr>
             <a:r>
-              <a:rPr lang="en-US" sz="1250" dirty="0">
+              <a:rPr lang="en-US" sz="1350" dirty="0">
                 <a:solidFill>
                   <a:srgbClr val="1B2733"/>
                 </a:solidFill>
@@ -8150,7 +8150,7 @@
               <a:buNone/>
             </a:pPr>
             <a:r>
-              <a:rPr lang="en-US" sz="1250" dirty="0">
+              <a:rPr lang="en-US" sz="1350" dirty="0">
                 <a:solidFill>
                   <a:srgbClr val="1B2733"/>
                 </a:solidFill>
@@ -8642,7 +8642,7 @@
                 <a:ea typeface="Calibri" pitchFamily="34" charset="-122"/>
                 <a:cs typeface="Calibri" pitchFamily="34" charset="-120"/>
               </a:rPr>
-              <a:t>What You'll Learn　</a:t>
+              <a:t>What You'll Learn  </a:t>
             </a:r>
             <a:pPr indent="0" marL="0">
               <a:lnSpc>
@@ -8671,7 +8671,7 @@
               <a:buNone/>
             </a:pPr>
             <a:r>
-              <a:rPr lang="en-US" sz="1250" dirty="0">
+              <a:rPr lang="en-US" sz="1300" dirty="0">
                 <a:solidFill>
                   <a:srgbClr val="1B2733"/>
                 </a:solidFill>
@@ -8814,7 +8814,7 @@
               <a:buNone/>
             </a:pPr>
             <a:r>
-              <a:rPr lang="en-US" sz="1400" dirty="0">
+              <a:rPr lang="en-US" sz="1500" dirty="0">
                 <a:solidFill>
                   <a:srgbClr val="12B198"/>
                 </a:solidFill>
@@ -8882,7 +8882,7 @@
               <a:buNone/>
             </a:pPr>
             <a:r>
-              <a:rPr lang="en-US" sz="1350" dirty="0">
+              <a:rPr lang="en-US" sz="1400" dirty="0">
                 <a:solidFill>
                   <a:srgbClr val="1B2733"/>
                 </a:solidFill>
@@ -8928,7 +8928,7 @@
               <a:buNone/>
             </a:pPr>
             <a:r>
-              <a:rPr lang="en-US" sz="1350" dirty="0">
+              <a:rPr lang="en-US" sz="1400" dirty="0">
                 <a:solidFill>
                   <a:srgbClr val="1B2733"/>
                 </a:solidFill>
@@ -8974,7 +8974,7 @@
               <a:buNone/>
             </a:pPr>
             <a:r>
-              <a:rPr lang="en-US" sz="1350" dirty="0">
+              <a:rPr lang="en-US" sz="1400" dirty="0">
                 <a:solidFill>
                   <a:srgbClr val="1B2733"/>
                 </a:solidFill>
@@ -9020,7 +9020,7 @@
               <a:buNone/>
             </a:pPr>
             <a:r>
-              <a:rPr lang="en-US" sz="1350" dirty="0">
+              <a:rPr lang="en-US" sz="1400" dirty="0">
                 <a:solidFill>
                   <a:srgbClr val="1B2733"/>
                 </a:solidFill>
@@ -9163,7 +9163,7 @@
               <a:buNone/>
             </a:pPr>
             <a:r>
-              <a:rPr lang="en-US" sz="1400" dirty="0">
+              <a:rPr lang="en-US" sz="1500" dirty="0">
                 <a:solidFill>
                   <a:srgbClr val="12B198"/>
                 </a:solidFill>
@@ -9231,7 +9231,7 @@
               <a:buNone/>
             </a:pPr>
             <a:r>
-              <a:rPr lang="en-US" sz="1350" dirty="0">
+              <a:rPr lang="en-US" sz="1400" dirty="0">
                 <a:solidFill>
                   <a:srgbClr val="1B2733"/>
                 </a:solidFill>
@@ -9277,7 +9277,7 @@
               <a:buNone/>
             </a:pPr>
             <a:r>
-              <a:rPr lang="en-US" sz="1350" dirty="0">
+              <a:rPr lang="en-US" sz="1400" dirty="0">
                 <a:solidFill>
                   <a:srgbClr val="1B2733"/>
                 </a:solidFill>
@@ -9323,7 +9323,7 @@
               <a:buNone/>
             </a:pPr>
             <a:r>
-              <a:rPr lang="en-US" sz="1350" dirty="0">
+              <a:rPr lang="en-US" sz="1400" dirty="0">
                 <a:solidFill>
                   <a:srgbClr val="1B2733"/>
                 </a:solidFill>
@@ -9369,7 +9369,7 @@
               <a:buNone/>
             </a:pPr>
             <a:r>
-              <a:rPr lang="en-US" sz="1350" dirty="0">
+              <a:rPr lang="en-US" sz="1400" dirty="0">
                 <a:solidFill>
                   <a:srgbClr val="1B2733"/>
                 </a:solidFill>
@@ -9915,7 +9915,7 @@
               <a:buNone/>
             </a:pPr>
             <a:r>
-              <a:rPr lang="en-US" sz="1400" dirty="0">
+              <a:rPr lang="en-US" sz="1500" dirty="0">
                 <a:solidFill>
                   <a:srgbClr val="12B198"/>
                 </a:solidFill>
@@ -9983,7 +9983,7 @@
               <a:buNone/>
             </a:pPr>
             <a:r>
-              <a:rPr lang="en-US" sz="1350" dirty="0">
+              <a:rPr lang="en-US" sz="1400" dirty="0">
                 <a:solidFill>
                   <a:srgbClr val="1B2733"/>
                 </a:solidFill>
@@ -10029,7 +10029,7 @@
               <a:buNone/>
             </a:pPr>
             <a:r>
-              <a:rPr lang="en-US" sz="1350" dirty="0">
+              <a:rPr lang="en-US" sz="1400" dirty="0">
                 <a:solidFill>
                   <a:srgbClr val="1B2733"/>
                 </a:solidFill>
@@ -10075,7 +10075,7 @@
               <a:buNone/>
             </a:pPr>
             <a:r>
-              <a:rPr lang="en-US" sz="1350" dirty="0">
+              <a:rPr lang="en-US" sz="1400" dirty="0">
                 <a:solidFill>
                   <a:srgbClr val="1B2733"/>
                 </a:solidFill>
@@ -10121,7 +10121,7 @@
               <a:buNone/>
             </a:pPr>
             <a:r>
-              <a:rPr lang="en-US" sz="1350" dirty="0">
+              <a:rPr lang="en-US" sz="1400" dirty="0">
                 <a:solidFill>
                   <a:srgbClr val="1B2733"/>
                 </a:solidFill>
@@ -10264,7 +10264,7 @@
               <a:buNone/>
             </a:pPr>
             <a:r>
-              <a:rPr lang="en-US" sz="1400" dirty="0">
+              <a:rPr lang="en-US" sz="1500" dirty="0">
                 <a:solidFill>
                   <a:srgbClr val="12B198"/>
                 </a:solidFill>
@@ -10332,7 +10332,7 @@
               <a:buNone/>
             </a:pPr>
             <a:r>
-              <a:rPr lang="en-US" sz="1350" dirty="0">
+              <a:rPr lang="en-US" sz="1400" dirty="0">
                 <a:solidFill>
                   <a:srgbClr val="1B2733"/>
                 </a:solidFill>
@@ -10378,7 +10378,7 @@
               <a:buNone/>
             </a:pPr>
             <a:r>
-              <a:rPr lang="en-US" sz="1350" dirty="0">
+              <a:rPr lang="en-US" sz="1400" dirty="0">
                 <a:solidFill>
                   <a:srgbClr val="1B2733"/>
                 </a:solidFill>
@@ -10424,7 +10424,7 @@
               <a:buNone/>
             </a:pPr>
             <a:r>
-              <a:rPr lang="en-US" sz="1350" dirty="0">
+              <a:rPr lang="en-US" sz="1400" dirty="0">
                 <a:solidFill>
                   <a:srgbClr val="1B2733"/>
                 </a:solidFill>
@@ -10470,7 +10470,7 @@
               <a:buNone/>
             </a:pPr>
             <a:r>
-              <a:rPr lang="en-US" sz="1350" dirty="0">
+              <a:rPr lang="en-US" sz="1400" dirty="0">
                 <a:solidFill>
                   <a:srgbClr val="1B2733"/>
                 </a:solidFill>
@@ -10962,7 +10962,7 @@
                 <a:ea typeface="Calibri" pitchFamily="34" charset="-122"/>
                 <a:cs typeface="Calibri" pitchFamily="34" charset="-120"/>
               </a:rPr>
-              <a:t>What You'll Learn　</a:t>
+              <a:t>What You'll Learn  </a:t>
             </a:r>
             <a:pPr indent="0" marL="0">
               <a:lnSpc>
@@ -10991,7 +10991,7 @@
               <a:buNone/>
             </a:pPr>
             <a:r>
-              <a:rPr lang="en-US" sz="1250" dirty="0">
+              <a:rPr lang="en-US" sz="1300" dirty="0">
                 <a:solidFill>
                   <a:srgbClr val="1B2733"/>
                 </a:solidFill>
@@ -11134,7 +11134,7 @@
               <a:buNone/>
             </a:pPr>
             <a:r>
-              <a:rPr lang="en-US" sz="1400" dirty="0">
+              <a:rPr lang="en-US" sz="1500" dirty="0">
                 <a:solidFill>
                   <a:srgbClr val="12B198"/>
                 </a:solidFill>
@@ -11202,7 +11202,7 @@
               <a:buNone/>
             </a:pPr>
             <a:r>
-              <a:rPr lang="en-US" sz="1350" dirty="0">
+              <a:rPr lang="en-US" sz="1400" dirty="0">
                 <a:solidFill>
                   <a:srgbClr val="1B2733"/>
                 </a:solidFill>
@@ -11248,7 +11248,7 @@
               <a:buNone/>
             </a:pPr>
             <a:r>
-              <a:rPr lang="en-US" sz="1350" dirty="0">
+              <a:rPr lang="en-US" sz="1400" dirty="0">
                 <a:solidFill>
                   <a:srgbClr val="1B2733"/>
                 </a:solidFill>
@@ -11294,7 +11294,7 @@
               <a:buNone/>
             </a:pPr>
             <a:r>
-              <a:rPr lang="en-US" sz="1350" dirty="0">
+              <a:rPr lang="en-US" sz="1400" dirty="0">
                 <a:solidFill>
                   <a:srgbClr val="1B2733"/>
                 </a:solidFill>
@@ -11340,7 +11340,7 @@
               <a:buNone/>
             </a:pPr>
             <a:r>
-              <a:rPr lang="en-US" sz="1350" dirty="0">
+              <a:rPr lang="en-US" sz="1400" dirty="0">
                 <a:solidFill>
                   <a:srgbClr val="1B2733"/>
                 </a:solidFill>
@@ -11483,7 +11483,7 @@
               <a:buNone/>
             </a:pPr>
             <a:r>
-              <a:rPr lang="en-US" sz="1400" dirty="0">
+              <a:rPr lang="en-US" sz="1500" dirty="0">
                 <a:solidFill>
                   <a:srgbClr val="12B198"/>
                 </a:solidFill>
@@ -11551,7 +11551,7 @@
               <a:buNone/>
             </a:pPr>
             <a:r>
-              <a:rPr lang="en-US" sz="1350" dirty="0">
+              <a:rPr lang="en-US" sz="1400" dirty="0">
                 <a:solidFill>
                   <a:srgbClr val="1B2733"/>
                 </a:solidFill>
@@ -11597,7 +11597,7 @@
               <a:buNone/>
             </a:pPr>
             <a:r>
-              <a:rPr lang="en-US" sz="1350" dirty="0">
+              <a:rPr lang="en-US" sz="1400" dirty="0">
                 <a:solidFill>
                   <a:srgbClr val="1B2733"/>
                 </a:solidFill>
@@ -11643,7 +11643,7 @@
               <a:buNone/>
             </a:pPr>
             <a:r>
-              <a:rPr lang="en-US" sz="1350" dirty="0">
+              <a:rPr lang="en-US" sz="1400" dirty="0">
                 <a:solidFill>
                   <a:srgbClr val="1B2733"/>
                 </a:solidFill>
@@ -11689,7 +11689,7 @@
               <a:buNone/>
             </a:pPr>
             <a:r>
-              <a:rPr lang="en-US" sz="1350" dirty="0">
+              <a:rPr lang="en-US" sz="1400" dirty="0">
                 <a:solidFill>
                   <a:srgbClr val="1B2733"/>
                 </a:solidFill>
@@ -12235,7 +12235,7 @@
               <a:buNone/>
             </a:pPr>
             <a:r>
-              <a:rPr lang="en-US" sz="1400" dirty="0">
+              <a:rPr lang="en-US" sz="1500" dirty="0">
                 <a:solidFill>
                   <a:srgbClr val="12B198"/>
                 </a:solidFill>
@@ -12303,7 +12303,7 @@
               <a:buNone/>
             </a:pPr>
             <a:r>
-              <a:rPr lang="en-US" sz="1350" dirty="0">
+              <a:rPr lang="en-US" sz="1400" dirty="0">
                 <a:solidFill>
                   <a:srgbClr val="1B2733"/>
                 </a:solidFill>
@@ -12349,7 +12349,7 @@
               <a:buNone/>
             </a:pPr>
             <a:r>
-              <a:rPr lang="en-US" sz="1350" dirty="0">
+              <a:rPr lang="en-US" sz="1400" dirty="0">
                 <a:solidFill>
                   <a:srgbClr val="1B2733"/>
                 </a:solidFill>
@@ -12395,7 +12395,7 @@
               <a:buNone/>
             </a:pPr>
             <a:r>
-              <a:rPr lang="en-US" sz="1350" dirty="0">
+              <a:rPr lang="en-US" sz="1400" dirty="0">
                 <a:solidFill>
                   <a:srgbClr val="1B2733"/>
                 </a:solidFill>
@@ -12441,7 +12441,7 @@
               <a:buNone/>
             </a:pPr>
             <a:r>
-              <a:rPr lang="en-US" sz="1350" dirty="0">
+              <a:rPr lang="en-US" sz="1400" dirty="0">
                 <a:solidFill>
                   <a:srgbClr val="1B2733"/>
                 </a:solidFill>
@@ -12584,7 +12584,7 @@
               <a:buNone/>
             </a:pPr>
             <a:r>
-              <a:rPr lang="en-US" sz="1400" dirty="0">
+              <a:rPr lang="en-US" sz="1500" dirty="0">
                 <a:solidFill>
                   <a:srgbClr val="12B198"/>
                 </a:solidFill>
@@ -12652,7 +12652,7 @@
               <a:buNone/>
             </a:pPr>
             <a:r>
-              <a:rPr lang="en-US" sz="1350" dirty="0">
+              <a:rPr lang="en-US" sz="1400" dirty="0">
                 <a:solidFill>
                   <a:srgbClr val="1B2733"/>
                 </a:solidFill>
@@ -12698,7 +12698,7 @@
               <a:buNone/>
             </a:pPr>
             <a:r>
-              <a:rPr lang="en-US" sz="1350" dirty="0">
+              <a:rPr lang="en-US" sz="1400" dirty="0">
                 <a:solidFill>
                   <a:srgbClr val="1B2733"/>
                 </a:solidFill>
@@ -12744,7 +12744,7 @@
               <a:buNone/>
             </a:pPr>
             <a:r>
-              <a:rPr lang="en-US" sz="1350" dirty="0">
+              <a:rPr lang="en-US" sz="1400" dirty="0">
                 <a:solidFill>
                   <a:srgbClr val="1B2733"/>
                 </a:solidFill>
@@ -12790,7 +12790,7 @@
               <a:buNone/>
             </a:pPr>
             <a:r>
-              <a:rPr lang="en-US" sz="1350" dirty="0">
+              <a:rPr lang="en-US" sz="1400" dirty="0">
                 <a:solidFill>
                   <a:srgbClr val="1B2733"/>
                 </a:solidFill>
@@ -13282,7 +13282,7 @@
                 <a:ea typeface="Calibri" pitchFamily="34" charset="-122"/>
                 <a:cs typeface="Calibri" pitchFamily="34" charset="-120"/>
               </a:rPr>
-              <a:t>What You'll Learn　</a:t>
+              <a:t>What You'll Learn  </a:t>
             </a:r>
             <a:pPr indent="0" marL="0">
               <a:lnSpc>
@@ -13311,7 +13311,7 @@
               <a:buNone/>
             </a:pPr>
             <a:r>
-              <a:rPr lang="en-US" sz="1250" dirty="0">
+              <a:rPr lang="en-US" sz="1300" dirty="0">
                 <a:solidFill>
                   <a:srgbClr val="1B2733"/>
                 </a:solidFill>
@@ -13454,7 +13454,7 @@
               <a:buNone/>
             </a:pPr>
             <a:r>
-              <a:rPr lang="en-US" sz="1400" dirty="0">
+              <a:rPr lang="en-US" sz="1500" dirty="0">
                 <a:solidFill>
                   <a:srgbClr val="12B198"/>
                 </a:solidFill>
@@ -13522,7 +13522,7 @@
               <a:buNone/>
             </a:pPr>
             <a:r>
-              <a:rPr lang="en-US" sz="1350" dirty="0">
+              <a:rPr lang="en-US" sz="1400" dirty="0">
                 <a:solidFill>
                   <a:srgbClr val="1B2733"/>
                 </a:solidFill>
@@ -13568,7 +13568,7 @@
               <a:buNone/>
             </a:pPr>
             <a:r>
-              <a:rPr lang="en-US" sz="1350" dirty="0">
+              <a:rPr lang="en-US" sz="1400" dirty="0">
                 <a:solidFill>
                   <a:srgbClr val="1B2733"/>
                 </a:solidFill>
@@ -13614,7 +13614,7 @@
               <a:buNone/>
             </a:pPr>
             <a:r>
-              <a:rPr lang="en-US" sz="1350" dirty="0">
+              <a:rPr lang="en-US" sz="1400" dirty="0">
                 <a:solidFill>
                   <a:srgbClr val="1B2733"/>
                 </a:solidFill>
@@ -13660,7 +13660,7 @@
               <a:buNone/>
             </a:pPr>
             <a:r>
-              <a:rPr lang="en-US" sz="1350" dirty="0">
+              <a:rPr lang="en-US" sz="1400" dirty="0">
                 <a:solidFill>
                   <a:srgbClr val="1B2733"/>
                 </a:solidFill>
@@ -13803,7 +13803,7 @@
               <a:buNone/>
             </a:pPr>
             <a:r>
-              <a:rPr lang="en-US" sz="1400" dirty="0">
+              <a:rPr lang="en-US" sz="1500" dirty="0">
                 <a:solidFill>
                   <a:srgbClr val="12B198"/>
                 </a:solidFill>
@@ -13871,7 +13871,7 @@
               <a:buNone/>
             </a:pPr>
             <a:r>
-              <a:rPr lang="en-US" sz="1350" dirty="0">
+              <a:rPr lang="en-US" sz="1400" dirty="0">
                 <a:solidFill>
                   <a:srgbClr val="1B2733"/>
                 </a:solidFill>
@@ -13917,7 +13917,7 @@
               <a:buNone/>
             </a:pPr>
             <a:r>
-              <a:rPr lang="en-US" sz="1350" dirty="0">
+              <a:rPr lang="en-US" sz="1400" dirty="0">
                 <a:solidFill>
                   <a:srgbClr val="1B2733"/>
                 </a:solidFill>
@@ -13963,7 +13963,7 @@
               <a:buNone/>
             </a:pPr>
             <a:r>
-              <a:rPr lang="en-US" sz="1350" dirty="0">
+              <a:rPr lang="en-US" sz="1400" dirty="0">
                 <a:solidFill>
                   <a:srgbClr val="1B2733"/>
                 </a:solidFill>
@@ -14009,7 +14009,7 @@
               <a:buNone/>
             </a:pPr>
             <a:r>
-              <a:rPr lang="en-US" sz="1350" dirty="0">
+              <a:rPr lang="en-US" sz="1400" dirty="0">
                 <a:solidFill>
                   <a:srgbClr val="1B2733"/>
                 </a:solidFill>
@@ -14555,7 +14555,7 @@
               <a:buNone/>
             </a:pPr>
             <a:r>
-              <a:rPr lang="en-US" sz="1400" dirty="0">
+              <a:rPr lang="en-US" sz="1500" dirty="0">
                 <a:solidFill>
                   <a:srgbClr val="12B198"/>
                 </a:solidFill>
@@ -14623,7 +14623,7 @@
               <a:buNone/>
             </a:pPr>
             <a:r>
-              <a:rPr lang="en-US" sz="1350" dirty="0">
+              <a:rPr lang="en-US" sz="1400" dirty="0">
                 <a:solidFill>
                   <a:srgbClr val="1B2733"/>
                 </a:solidFill>
@@ -14669,7 +14669,7 @@
               <a:buNone/>
             </a:pPr>
             <a:r>
-              <a:rPr lang="en-US" sz="1350" dirty="0">
+              <a:rPr lang="en-US" sz="1400" dirty="0">
                 <a:solidFill>
                   <a:srgbClr val="1B2733"/>
                 </a:solidFill>
@@ -14715,7 +14715,7 @@
               <a:buNone/>
             </a:pPr>
             <a:r>
-              <a:rPr lang="en-US" sz="1350" dirty="0">
+              <a:rPr lang="en-US" sz="1400" dirty="0">
                 <a:solidFill>
                   <a:srgbClr val="1B2733"/>
                 </a:solidFill>
@@ -14761,7 +14761,7 @@
               <a:buNone/>
             </a:pPr>
             <a:r>
-              <a:rPr lang="en-US" sz="1350" dirty="0">
+              <a:rPr lang="en-US" sz="1400" dirty="0">
                 <a:solidFill>
                   <a:srgbClr val="1B2733"/>
                 </a:solidFill>
@@ -14904,7 +14904,7 @@
               <a:buNone/>
             </a:pPr>
             <a:r>
-              <a:rPr lang="en-US" sz="1400" dirty="0">
+              <a:rPr lang="en-US" sz="1500" dirty="0">
                 <a:solidFill>
                   <a:srgbClr val="12B198"/>
                 </a:solidFill>
@@ -14972,7 +14972,7 @@
               <a:buNone/>
             </a:pPr>
             <a:r>
-              <a:rPr lang="en-US" sz="1350" dirty="0">
+              <a:rPr lang="en-US" sz="1400" dirty="0">
                 <a:solidFill>
                   <a:srgbClr val="1B2733"/>
                 </a:solidFill>
@@ -15018,7 +15018,7 @@
               <a:buNone/>
             </a:pPr>
             <a:r>
-              <a:rPr lang="en-US" sz="1350" dirty="0">
+              <a:rPr lang="en-US" sz="1400" dirty="0">
                 <a:solidFill>
                   <a:srgbClr val="1B2733"/>
                 </a:solidFill>
@@ -15064,7 +15064,7 @@
               <a:buNone/>
             </a:pPr>
             <a:r>
-              <a:rPr lang="en-US" sz="1350" dirty="0">
+              <a:rPr lang="en-US" sz="1400" dirty="0">
                 <a:solidFill>
                   <a:srgbClr val="1B2733"/>
                 </a:solidFill>
@@ -15110,7 +15110,7 @@
               <a:buNone/>
             </a:pPr>
             <a:r>
-              <a:rPr lang="en-US" sz="1350" dirty="0">
+              <a:rPr lang="en-US" sz="1400" dirty="0">
                 <a:solidFill>
                   <a:srgbClr val="1B2733"/>
                 </a:solidFill>
@@ -15602,7 +15602,7 @@
                 <a:ea typeface="Calibri" pitchFamily="34" charset="-122"/>
                 <a:cs typeface="Calibri" pitchFamily="34" charset="-120"/>
               </a:rPr>
-              <a:t>What You'll Learn　</a:t>
+              <a:t>What You'll Learn  </a:t>
             </a:r>
             <a:pPr indent="0" marL="0">
               <a:lnSpc>
@@ -15631,7 +15631,7 @@
               <a:buNone/>
             </a:pPr>
             <a:r>
-              <a:rPr lang="en-US" sz="1250" dirty="0">
+              <a:rPr lang="en-US" sz="1300" dirty="0">
                 <a:solidFill>
                   <a:srgbClr val="1B2733"/>
                 </a:solidFill>
@@ -15774,7 +15774,7 @@
               <a:buNone/>
             </a:pPr>
             <a:r>
-              <a:rPr lang="en-US" sz="1400" dirty="0">
+              <a:rPr lang="en-US" sz="1500" dirty="0">
                 <a:solidFill>
                   <a:srgbClr val="12B198"/>
                 </a:solidFill>
@@ -15842,7 +15842,7 @@
               <a:buNone/>
             </a:pPr>
             <a:r>
-              <a:rPr lang="en-US" sz="1350" dirty="0">
+              <a:rPr lang="en-US" sz="1400" dirty="0">
                 <a:solidFill>
                   <a:srgbClr val="1B2733"/>
                 </a:solidFill>
@@ -15888,7 +15888,7 @@
               <a:buNone/>
             </a:pPr>
             <a:r>
-              <a:rPr lang="en-US" sz="1350" dirty="0">
+              <a:rPr lang="en-US" sz="1400" dirty="0">
                 <a:solidFill>
                   <a:srgbClr val="1B2733"/>
                 </a:solidFill>
@@ -15934,7 +15934,7 @@
               <a:buNone/>
             </a:pPr>
             <a:r>
-              <a:rPr lang="en-US" sz="1350" dirty="0">
+              <a:rPr lang="en-US" sz="1400" dirty="0">
                 <a:solidFill>
                   <a:srgbClr val="1B2733"/>
                 </a:solidFill>
@@ -15980,7 +15980,7 @@
               <a:buNone/>
             </a:pPr>
             <a:r>
-              <a:rPr lang="en-US" sz="1350" dirty="0">
+              <a:rPr lang="en-US" sz="1400" dirty="0">
                 <a:solidFill>
                   <a:srgbClr val="1B2733"/>
                 </a:solidFill>
@@ -16123,7 +16123,7 @@
               <a:buNone/>
             </a:pPr>
             <a:r>
-              <a:rPr lang="en-US" sz="1400" dirty="0">
+              <a:rPr lang="en-US" sz="1500" dirty="0">
                 <a:solidFill>
                   <a:srgbClr val="12B198"/>
                 </a:solidFill>
@@ -16191,7 +16191,7 @@
               <a:buNone/>
             </a:pPr>
             <a:r>
-              <a:rPr lang="en-US" sz="1350" dirty="0">
+              <a:rPr lang="en-US" sz="1400" dirty="0">
                 <a:solidFill>
                   <a:srgbClr val="1B2733"/>
                 </a:solidFill>
@@ -16237,7 +16237,7 @@
               <a:buNone/>
             </a:pPr>
             <a:r>
-              <a:rPr lang="en-US" sz="1350" dirty="0">
+              <a:rPr lang="en-US" sz="1400" dirty="0">
                 <a:solidFill>
                   <a:srgbClr val="1B2733"/>
                 </a:solidFill>
@@ -16283,7 +16283,7 @@
               <a:buNone/>
             </a:pPr>
             <a:r>
-              <a:rPr lang="en-US" sz="1350" dirty="0">
+              <a:rPr lang="en-US" sz="1400" dirty="0">
                 <a:solidFill>
                   <a:srgbClr val="1B2733"/>
                 </a:solidFill>
@@ -16329,7 +16329,7 @@
               <a:buNone/>
             </a:pPr>
             <a:r>
-              <a:rPr lang="en-US" sz="1350" dirty="0">
+              <a:rPr lang="en-US" sz="1400" dirty="0">
                 <a:solidFill>
                   <a:srgbClr val="1B2733"/>
                 </a:solidFill>
@@ -16875,7 +16875,7 @@
               <a:buNone/>
             </a:pPr>
             <a:r>
-              <a:rPr lang="en-US" sz="1400" dirty="0">
+              <a:rPr lang="en-US" sz="1500" dirty="0">
                 <a:solidFill>
                   <a:srgbClr val="12B198"/>
                 </a:solidFill>
@@ -16943,7 +16943,7 @@
               <a:buNone/>
             </a:pPr>
             <a:r>
-              <a:rPr lang="en-US" sz="1350" dirty="0">
+              <a:rPr lang="en-US" sz="1400" dirty="0">
                 <a:solidFill>
                   <a:srgbClr val="1B2733"/>
                 </a:solidFill>
@@ -16989,7 +16989,7 @@
               <a:buNone/>
             </a:pPr>
             <a:r>
-              <a:rPr lang="en-US" sz="1350" dirty="0">
+              <a:rPr lang="en-US" sz="1400" dirty="0">
                 <a:solidFill>
                   <a:srgbClr val="1B2733"/>
                 </a:solidFill>
@@ -17035,7 +17035,7 @@
               <a:buNone/>
             </a:pPr>
             <a:r>
-              <a:rPr lang="en-US" sz="1350" dirty="0">
+              <a:rPr lang="en-US" sz="1400" dirty="0">
                 <a:solidFill>
                   <a:srgbClr val="1B2733"/>
                 </a:solidFill>
@@ -17081,7 +17081,7 @@
               <a:buNone/>
             </a:pPr>
             <a:r>
-              <a:rPr lang="en-US" sz="1350" dirty="0">
+              <a:rPr lang="en-US" sz="1400" dirty="0">
                 <a:solidFill>
                   <a:srgbClr val="1B2733"/>
                 </a:solidFill>
@@ -17224,7 +17224,7 @@
               <a:buNone/>
             </a:pPr>
             <a:r>
-              <a:rPr lang="en-US" sz="1400" dirty="0">
+              <a:rPr lang="en-US" sz="1500" dirty="0">
                 <a:solidFill>
                   <a:srgbClr val="12B198"/>
                 </a:solidFill>
@@ -17292,7 +17292,7 @@
               <a:buNone/>
             </a:pPr>
             <a:r>
-              <a:rPr lang="en-US" sz="1350" dirty="0">
+              <a:rPr lang="en-US" sz="1400" dirty="0">
                 <a:solidFill>
                   <a:srgbClr val="1B2733"/>
                 </a:solidFill>
@@ -17338,7 +17338,7 @@
               <a:buNone/>
             </a:pPr>
             <a:r>
-              <a:rPr lang="en-US" sz="1350" dirty="0">
+              <a:rPr lang="en-US" sz="1400" dirty="0">
                 <a:solidFill>
                   <a:srgbClr val="1B2733"/>
                 </a:solidFill>
@@ -17384,7 +17384,7 @@
               <a:buNone/>
             </a:pPr>
             <a:r>
-              <a:rPr lang="en-US" sz="1350" dirty="0">
+              <a:rPr lang="en-US" sz="1400" dirty="0">
                 <a:solidFill>
                   <a:srgbClr val="1B2733"/>
                 </a:solidFill>
@@ -17430,7 +17430,7 @@
               <a:buNone/>
             </a:pPr>
             <a:r>
-              <a:rPr lang="en-US" sz="1350" dirty="0">
+              <a:rPr lang="en-US" sz="1400" dirty="0">
                 <a:solidFill>
                   <a:srgbClr val="1B2733"/>
                 </a:solidFill>
